--- a/康復療癒酒店整體設計規劃.pptx
+++ b/康復療癒酒店整體設計規劃.pptx
@@ -118,42 +118,42 @@
   <p:extLst>
     <p:ext uri="{521415D9-36F7-43E2-AB2F-B90AF26B5E84}">
       <p14:sectionLst xmlns:p14="http://schemas.microsoft.com/office/powerpoint/2010/main">
-        <p14:section name="開場" id="{0ba1133d-91eb-56f3-3d33-2a40bc0ced2c}">
+        <p14:section name="開場" id="{2bb96d02-aa96-068f-1d8c-b27736dc79f0}">
           <p14:sldIdLst>
             <p14:sldId id="256"/>
           </p14:sldIdLst>
         </p14:section>
-        <p14:section name="定位" id="{63f7e2eb-385f-2d54-6446-e2e9e8baf684}">
+        <p14:section name="定位" id="{5c098936-2424-72e9-2a33-a48402f77dfa}">
           <p14:sldIdLst>
             <p14:sldId id="257"/>
             <p14:sldId id="258"/>
             <p14:sldId id="259"/>
           </p14:sldIdLst>
         </p14:section>
-        <p14:section name="空間與服務" id="{d6c34bc1-a631-58f5-fb32-1ed5c7ad8537}">
+        <p14:section name="空間與服務" id="{2c98fff0-f1b1-0ca4-4a36-724e9e2d3863}">
           <p14:sldIdLst>
             <p14:sldId id="260"/>
             <p14:sldId id="261"/>
           </p14:sldIdLst>
         </p14:section>
-        <p14:section name="產品" id="{64917ddb-5a83-b56e-d2e7-2deb8fc63aa8}">
+        <p14:section name="產品" id="{2b8dc080-ab50-e477-851b-56488acdedf9}">
           <p14:sldIdLst>
             <p14:sldId id="262"/>
           </p14:sldIdLst>
         </p14:section>
-        <p14:section name="財務" id="{665bac64-5d34-c83d-ab11-cd6c904afcd7}">
+        <p14:section name="財務" id="{02104101-9fc1-efd8-4dd8-6552e3fa3653}">
           <p14:sldIdLst>
             <p14:sldId id="263"/>
             <p14:sldId id="264"/>
           </p14:sldIdLst>
         </p14:section>
-        <p14:section name="合規與執行" id="{8846c3eb-df37-224c-c5f1-730cef20aab0}">
+        <p14:section name="合規與執行" id="{f9f9d23e-9a0c-2eef-885c-d7602f2c3d0d}">
           <p14:sldIdLst>
             <p14:sldId id="265"/>
             <p14:sldId id="266"/>
           </p14:sldIdLst>
         </p14:section>
-        <p14:section name="下一步" id="{af6167ed-0942-e42c-4d1b-4fcf353fc353}">
+        <p14:section name="下一步" id="{603ff01d-9deb-1a33-66a5-4bd01f04ab76}">
           <p14:sldIdLst>
             <p14:sldId id="267"/>
           </p14:sldIdLst>
@@ -1985,6 +1985,9 @@
           <a:bodyPr wrap="square" rtlCol="0"/>
           <a:lstStyle>
             <a:lvl1pPr algn="l" indent="0" marL="0">
+              <a:lnSpc>
+                <a:spcPts val="4800"/>
+              </a:lnSpc>
               <a:buNone/>
               <a:defRPr lang="en-US" sz="4000" b="1" dirty="0">
                 <a:solidFill>
@@ -1995,6 +1998,9 @@
           </a:lstStyle>
           <a:p>
             <a:pPr algn="l" indent="0" marL="0">
+              <a:lnSpc>
+                <a:spcPts val="4800"/>
+              </a:lnSpc>
               <a:buNone/>
             </a:pPr>
             <a:endParaRPr lang="en-US" sz="4000" dirty="0"/>
@@ -2024,6 +2030,9 @@
           <a:bodyPr wrap="square" rtlCol="0"/>
           <a:lstStyle>
             <a:lvl1pPr indent="0" marL="0">
+              <a:lnSpc>
+                <a:spcPts val="2200"/>
+              </a:lnSpc>
               <a:buNone/>
               <a:defRPr lang="en-US" sz="1600" dirty="0">
                 <a:solidFill>
@@ -2034,6 +2043,9 @@
           </a:lstStyle>
           <a:p>
             <a:pPr indent="0" marL="0">
+              <a:lnSpc>
+                <a:spcPts val="2200"/>
+              </a:lnSpc>
               <a:buNone/>
             </a:pPr>
             <a:endParaRPr lang="en-US" sz="1600" dirty="0"/>
@@ -2095,6 +2107,9 @@
           <a:bodyPr wrap="square" rtlCol="0"/>
           <a:lstStyle>
             <a:lvl1pPr indent="0" marL="0">
+              <a:lnSpc>
+                <a:spcPts val="3400"/>
+              </a:lnSpc>
               <a:buNone/>
               <a:defRPr lang="en-US" sz="2800" b="1" dirty="0">
                 <a:solidFill>
@@ -2105,6 +2120,9 @@
           </a:lstStyle>
           <a:p>
             <a:pPr indent="0" marL="0">
+              <a:lnSpc>
+                <a:spcPts val="3400"/>
+              </a:lnSpc>
               <a:buNone/>
             </a:pPr>
             <a:endParaRPr lang="en-US" sz="2800" dirty="0"/>
@@ -2565,6 +2583,9 @@
           <a:lstStyle/>
           <a:p>
             <a:pPr algn="l" indent="0" marL="0">
+              <a:lnSpc>
+                <a:spcPts val="4800"/>
+              </a:lnSpc>
               <a:buNone/>
             </a:pPr>
             <a:r>
@@ -2603,6 +2624,9 @@
           <a:lstStyle/>
           <a:p>
             <a:pPr indent="0" marL="0">
+              <a:lnSpc>
+                <a:spcPts val="2200"/>
+              </a:lnSpc>
               <a:buNone/>
             </a:pPr>
             <a:r>
@@ -2617,6 +2641,9 @@
           </a:p>
           <a:p>
             <a:pPr indent="0" marL="0">
+              <a:lnSpc>
+                <a:spcPts val="2200"/>
+              </a:lnSpc>
               <a:buNone/>
             </a:pPr>
             <a:r>
@@ -2729,6 +2756,9 @@
           <a:lstStyle/>
           <a:p>
             <a:pPr indent="0" marL="0">
+              <a:lnSpc>
+                <a:spcPts val="3400"/>
+              </a:lnSpc>
               <a:buNone/>
             </a:pPr>
             <a:r>
@@ -2814,6 +2844,9 @@
           <a:lstStyle/>
           <a:p>
             <a:pPr indent="0" marL="0">
+              <a:lnSpc>
+                <a:spcPts val="2000"/>
+              </a:lnSpc>
               <a:buNone/>
             </a:pPr>
             <a:r>
@@ -2850,6 +2883,9 @@
           <a:lstStyle/>
           <a:p>
             <a:pPr indent="0" marL="0">
+              <a:lnSpc>
+                <a:spcPts val="1600"/>
+              </a:lnSpc>
               <a:buNone/>
             </a:pPr>
             <a:r>
@@ -2935,6 +2971,9 @@
           <a:lstStyle/>
           <a:p>
             <a:pPr indent="0" marL="0">
+              <a:lnSpc>
+                <a:spcPts val="2000"/>
+              </a:lnSpc>
               <a:buNone/>
             </a:pPr>
             <a:r>
@@ -2971,6 +3010,9 @@
           <a:lstStyle/>
           <a:p>
             <a:pPr indent="0" marL="0">
+              <a:lnSpc>
+                <a:spcPts val="1600"/>
+              </a:lnSpc>
               <a:buNone/>
             </a:pPr>
             <a:r>
@@ -3056,6 +3098,9 @@
           <a:lstStyle/>
           <a:p>
             <a:pPr indent="0" marL="0">
+              <a:lnSpc>
+                <a:spcPts val="2000"/>
+              </a:lnSpc>
               <a:buNone/>
             </a:pPr>
             <a:r>
@@ -3092,6 +3137,9 @@
           <a:lstStyle/>
           <a:p>
             <a:pPr indent="0" marL="0">
+              <a:lnSpc>
+                <a:spcPts val="1600"/>
+              </a:lnSpc>
               <a:buNone/>
             </a:pPr>
             <a:r>
@@ -3177,6 +3225,9 @@
           <a:lstStyle/>
           <a:p>
             <a:pPr indent="0" marL="0">
+              <a:lnSpc>
+                <a:spcPts val="2000"/>
+              </a:lnSpc>
               <a:buNone/>
             </a:pPr>
             <a:r>
@@ -3213,6 +3264,9 @@
           <a:lstStyle/>
           <a:p>
             <a:pPr indent="0" marL="0">
+              <a:lnSpc>
+                <a:spcPts val="1600"/>
+              </a:lnSpc>
               <a:buNone/>
             </a:pPr>
             <a:r>
@@ -3298,6 +3352,9 @@
           <a:lstStyle/>
           <a:p>
             <a:pPr indent="0" marL="0">
+              <a:lnSpc>
+                <a:spcPts val="2000"/>
+              </a:lnSpc>
               <a:buNone/>
             </a:pPr>
             <a:r>
@@ -3334,6 +3391,9 @@
           <a:lstStyle/>
           <a:p>
             <a:pPr indent="0" marL="0">
+              <a:lnSpc>
+                <a:spcPts val="1600"/>
+              </a:lnSpc>
               <a:buNone/>
             </a:pPr>
             <a:r>
@@ -3397,6 +3457,9 @@
           <a:lstStyle/>
           <a:p>
             <a:pPr indent="0" marL="0">
+              <a:lnSpc>
+                <a:spcPts val="1800"/>
+              </a:lnSpc>
               <a:buNone/>
             </a:pPr>
             <a:r>
@@ -3505,6 +3568,9 @@
           <a:lstStyle/>
           <a:p>
             <a:pPr indent="0" marL="0">
+              <a:lnSpc>
+                <a:spcPts val="3400"/>
+              </a:lnSpc>
               <a:buNone/>
             </a:pPr>
             <a:r>
@@ -3589,6 +3655,9 @@
           <a:lstStyle/>
           <a:p>
             <a:pPr algn="ctr" indent="0" marL="0">
+              <a:lnSpc>
+                <a:spcPts val="2300"/>
+              </a:lnSpc>
               <a:buNone/>
             </a:pPr>
             <a:r>
@@ -3625,6 +3694,9 @@
           <a:lstStyle/>
           <a:p>
             <a:pPr algn="ctr" indent="0" marL="0">
+              <a:lnSpc>
+                <a:spcPts val="1900"/>
+              </a:lnSpc>
               <a:buNone/>
             </a:pPr>
             <a:r>
@@ -3661,6 +3733,9 @@
           <a:lstStyle/>
           <a:p>
             <a:pPr indent="0" marL="0">
+              <a:lnSpc>
+                <a:spcPts val="1500"/>
+              </a:lnSpc>
               <a:buNone/>
             </a:pPr>
             <a:r>
@@ -3722,6 +3797,9 @@
           <a:lstStyle/>
           <a:p>
             <a:pPr algn="ctr" indent="0" marL="0">
+              <a:lnSpc>
+                <a:spcPts val="2300"/>
+              </a:lnSpc>
               <a:buNone/>
             </a:pPr>
             <a:r>
@@ -3758,6 +3836,9 @@
           <a:lstStyle/>
           <a:p>
             <a:pPr algn="ctr" indent="0" marL="0">
+              <a:lnSpc>
+                <a:spcPts val="1900"/>
+              </a:lnSpc>
               <a:buNone/>
             </a:pPr>
             <a:r>
@@ -3794,6 +3875,9 @@
           <a:lstStyle/>
           <a:p>
             <a:pPr indent="0" marL="0">
+              <a:lnSpc>
+                <a:spcPts val="1500"/>
+              </a:lnSpc>
               <a:buNone/>
             </a:pPr>
             <a:r>
@@ -3855,6 +3939,9 @@
           <a:lstStyle/>
           <a:p>
             <a:pPr algn="ctr" indent="0" marL="0">
+              <a:lnSpc>
+                <a:spcPts val="2300"/>
+              </a:lnSpc>
               <a:buNone/>
             </a:pPr>
             <a:r>
@@ -3891,6 +3978,9 @@
           <a:lstStyle/>
           <a:p>
             <a:pPr algn="ctr" indent="0" marL="0">
+              <a:lnSpc>
+                <a:spcPts val="1900"/>
+              </a:lnSpc>
               <a:buNone/>
             </a:pPr>
             <a:r>
@@ -3927,6 +4017,9 @@
           <a:lstStyle/>
           <a:p>
             <a:pPr indent="0" marL="0">
+              <a:lnSpc>
+                <a:spcPts val="1500"/>
+              </a:lnSpc>
               <a:buNone/>
             </a:pPr>
             <a:r>
@@ -3988,6 +4081,9 @@
           <a:lstStyle/>
           <a:p>
             <a:pPr algn="ctr" indent="0" marL="0">
+              <a:lnSpc>
+                <a:spcPts val="2300"/>
+              </a:lnSpc>
               <a:buNone/>
             </a:pPr>
             <a:r>
@@ -4024,6 +4120,9 @@
           <a:lstStyle/>
           <a:p>
             <a:pPr algn="ctr" indent="0" marL="0">
+              <a:lnSpc>
+                <a:spcPts val="1900"/>
+              </a:lnSpc>
               <a:buNone/>
             </a:pPr>
             <a:r>
@@ -4060,6 +4159,9 @@
           <a:lstStyle/>
           <a:p>
             <a:pPr indent="0" marL="0">
+              <a:lnSpc>
+                <a:spcPts val="1500"/>
+              </a:lnSpc>
               <a:buNone/>
             </a:pPr>
             <a:r>
@@ -4121,6 +4223,9 @@
           <a:lstStyle/>
           <a:p>
             <a:pPr algn="ctr" indent="0" marL="0">
+              <a:lnSpc>
+                <a:spcPts val="2300"/>
+              </a:lnSpc>
               <a:buNone/>
             </a:pPr>
             <a:r>
@@ -4157,6 +4262,9 @@
           <a:lstStyle/>
           <a:p>
             <a:pPr algn="ctr" indent="0" marL="0">
+              <a:lnSpc>
+                <a:spcPts val="1900"/>
+              </a:lnSpc>
               <a:buNone/>
             </a:pPr>
             <a:r>
@@ -4193,6 +4301,9 @@
           <a:lstStyle/>
           <a:p>
             <a:pPr indent="0" marL="0">
+              <a:lnSpc>
+                <a:spcPts val="1500"/>
+              </a:lnSpc>
               <a:buNone/>
             </a:pPr>
             <a:r>
@@ -4229,6 +4340,9 @@
           <a:lstStyle/>
           <a:p>
             <a:pPr indent="0" marL="0">
+              <a:lnSpc>
+                <a:spcPts val="1600"/>
+              </a:lnSpc>
               <a:buNone/>
             </a:pPr>
             <a:r>
@@ -4337,6 +4451,9 @@
           <a:lstStyle/>
           <a:p>
             <a:pPr algn="l" indent="0" marL="0">
+              <a:lnSpc>
+                <a:spcPts val="4800"/>
+              </a:lnSpc>
               <a:buNone/>
             </a:pPr>
             <a:r>
@@ -4375,6 +4492,9 @@
           <a:lstStyle/>
           <a:p>
             <a:pPr indent="0" marL="0">
+              <a:lnSpc>
+                <a:spcPts val="2200"/>
+              </a:lnSpc>
               <a:buNone/>
             </a:pPr>
             <a:r>
@@ -4438,6 +4558,9 @@
           <a:lstStyle/>
           <a:p>
             <a:pPr indent="0" marL="0">
+              <a:lnSpc>
+                <a:spcPts val="1500"/>
+              </a:lnSpc>
               <a:buNone/>
             </a:pPr>
             <a:r>
@@ -4501,6 +4624,9 @@
           <a:lstStyle/>
           <a:p>
             <a:pPr indent="0" marL="0">
+              <a:lnSpc>
+                <a:spcPts val="1500"/>
+              </a:lnSpc>
               <a:buNone/>
             </a:pPr>
             <a:r>
@@ -4564,6 +4690,9 @@
           <a:lstStyle/>
           <a:p>
             <a:pPr indent="0" marL="0">
+              <a:lnSpc>
+                <a:spcPts val="1500"/>
+              </a:lnSpc>
               <a:buNone/>
             </a:pPr>
             <a:r>
@@ -4627,6 +4756,9 @@
           <a:lstStyle/>
           <a:p>
             <a:pPr indent="0" marL="0">
+              <a:lnSpc>
+                <a:spcPts val="1500"/>
+              </a:lnSpc>
               <a:buNone/>
             </a:pPr>
             <a:r>
@@ -4635,7 +4767,7 @@
                   <a:schemeClr val="bg1"/>
                 </a:solidFill>
               </a:rPr>
-              <a:t>4 投資預算（人民幣）</a:t>
+              <a:t>4 投資預算</a:t>
             </a:r>
             <a:endParaRPr lang="en-US" sz="1200" dirty="0"/>
           </a:p>
@@ -4690,6 +4822,9 @@
           <a:lstStyle/>
           <a:p>
             <a:pPr indent="0" marL="0">
+              <a:lnSpc>
+                <a:spcPts val="3400"/>
+              </a:lnSpc>
               <a:buNone/>
             </a:pPr>
             <a:r>
@@ -4753,6 +4888,9 @@
           <a:lstStyle/>
           <a:p>
             <a:pPr indent="0" marL="0">
+              <a:lnSpc>
+                <a:spcPts val="2800"/>
+              </a:lnSpc>
               <a:buNone/>
             </a:pPr>
             <a:r>
@@ -4789,6 +4927,9 @@
           <a:lstStyle/>
           <a:p>
             <a:pPr indent="0" marL="0">
+              <a:lnSpc>
+                <a:spcPts val="1900"/>
+              </a:lnSpc>
               <a:buNone/>
             </a:pPr>
             <a:r>
@@ -4825,6 +4966,9 @@
           <a:lstStyle/>
           <a:p>
             <a:pPr indent="0" marL="0">
+              <a:lnSpc>
+                <a:spcPts val="2000"/>
+              </a:lnSpc>
               <a:buNone/>
             </a:pPr>
             <a:r>
@@ -4886,6 +5030,9 @@
           <a:lstStyle/>
           <a:p>
             <a:pPr algn="ctr" indent="0" marL="0">
+              <a:lnSpc>
+                <a:spcPts val="2300"/>
+              </a:lnSpc>
               <a:buNone/>
             </a:pPr>
             <a:r>
@@ -4922,6 +5069,9 @@
           <a:lstStyle/>
           <a:p>
             <a:pPr indent="0" marL="0">
+              <a:lnSpc>
+                <a:spcPts val="2000"/>
+              </a:lnSpc>
               <a:buNone/>
             </a:pPr>
             <a:r>
@@ -4958,6 +5108,9 @@
           <a:lstStyle/>
           <a:p>
             <a:pPr indent="0" marL="0">
+              <a:lnSpc>
+                <a:spcPts val="1600"/>
+              </a:lnSpc>
               <a:buNone/>
             </a:pPr>
             <a:r>
@@ -5019,6 +5172,9 @@
           <a:lstStyle/>
           <a:p>
             <a:pPr algn="ctr" indent="0" marL="0">
+              <a:lnSpc>
+                <a:spcPts val="2300"/>
+              </a:lnSpc>
               <a:buNone/>
             </a:pPr>
             <a:r>
@@ -5055,6 +5211,9 @@
           <a:lstStyle/>
           <a:p>
             <a:pPr indent="0" marL="0">
+              <a:lnSpc>
+                <a:spcPts val="2000"/>
+              </a:lnSpc>
               <a:buNone/>
             </a:pPr>
             <a:r>
@@ -5091,6 +5250,9 @@
           <a:lstStyle/>
           <a:p>
             <a:pPr indent="0" marL="0">
+              <a:lnSpc>
+                <a:spcPts val="1600"/>
+              </a:lnSpc>
               <a:buNone/>
             </a:pPr>
             <a:r>
@@ -5152,6 +5314,9 @@
           <a:lstStyle/>
           <a:p>
             <a:pPr algn="ctr" indent="0" marL="0">
+              <a:lnSpc>
+                <a:spcPts val="2300"/>
+              </a:lnSpc>
               <a:buNone/>
             </a:pPr>
             <a:r>
@@ -5188,6 +5353,9 @@
           <a:lstStyle/>
           <a:p>
             <a:pPr indent="0" marL="0">
+              <a:lnSpc>
+                <a:spcPts val="2000"/>
+              </a:lnSpc>
               <a:buNone/>
             </a:pPr>
             <a:r>
@@ -5224,6 +5392,9 @@
           <a:lstStyle/>
           <a:p>
             <a:pPr indent="0" marL="0">
+              <a:lnSpc>
+                <a:spcPts val="1600"/>
+              </a:lnSpc>
               <a:buNone/>
             </a:pPr>
             <a:r>
@@ -5332,6 +5503,9 @@
           <a:lstStyle/>
           <a:p>
             <a:pPr indent="0" marL="0">
+              <a:lnSpc>
+                <a:spcPts val="3400"/>
+              </a:lnSpc>
               <a:buNone/>
             </a:pPr>
             <a:r>
@@ -5368,6 +5542,9 @@
           <a:lstStyle/>
           <a:p>
             <a:pPr indent="0" marL="0">
+              <a:lnSpc>
+                <a:spcPts val="1600"/>
+              </a:lnSpc>
               <a:buNone/>
             </a:pPr>
             <a:r>
@@ -5376,7 +5553,7 @@
                   <a:schemeClr val="accent5"/>
                 </a:solidFill>
               </a:rPr>
-              <a:t>以睡眠品質、壓力舒緩、自然環境、節氣飲食及溫和身體活動為核心（暫定方向，可依地點與規模調整）</a:t>
+              <a:t>以睡眠、減壓、自然環境、節氣飲食與溫和活動為核心（暫定方向）</a:t>
             </a:r>
             <a:endParaRPr lang="en-US" sz="1300" dirty="0"/>
           </a:p>
@@ -5480,6 +5657,9 @@
           <a:lstStyle/>
           <a:p>
             <a:pPr indent="0" marL="0">
+              <a:lnSpc>
+                <a:spcPts val="2100"/>
+              </a:lnSpc>
               <a:buNone/>
             </a:pPr>
             <a:r>
@@ -5516,6 +5696,9 @@
           <a:lstStyle/>
           <a:p>
             <a:pPr indent="0" marL="0">
+              <a:lnSpc>
+                <a:spcPts val="1600"/>
+              </a:lnSpc>
               <a:buNone/>
             </a:pPr>
             <a:r>
@@ -5628,6 +5811,9 @@
           <a:lstStyle/>
           <a:p>
             <a:pPr indent="0" marL="0">
+              <a:lnSpc>
+                <a:spcPts val="2100"/>
+              </a:lnSpc>
               <a:buNone/>
             </a:pPr>
             <a:r>
@@ -5664,6 +5850,9 @@
           <a:lstStyle/>
           <a:p>
             <a:pPr indent="0" marL="0">
+              <a:lnSpc>
+                <a:spcPts val="1600"/>
+              </a:lnSpc>
               <a:buNone/>
             </a:pPr>
             <a:r>
@@ -5776,6 +5965,9 @@
           <a:lstStyle/>
           <a:p>
             <a:pPr indent="0" marL="0">
+              <a:lnSpc>
+                <a:spcPts val="2100"/>
+              </a:lnSpc>
               <a:buNone/>
             </a:pPr>
             <a:r>
@@ -5812,6 +6004,9 @@
           <a:lstStyle/>
           <a:p>
             <a:pPr indent="0" marL="0">
+              <a:lnSpc>
+                <a:spcPts val="1600"/>
+              </a:lnSpc>
               <a:buNone/>
             </a:pPr>
             <a:r>
@@ -5924,6 +6119,9 @@
           <a:lstStyle/>
           <a:p>
             <a:pPr indent="0" marL="0">
+              <a:lnSpc>
+                <a:spcPts val="2100"/>
+              </a:lnSpc>
               <a:buNone/>
             </a:pPr>
             <a:r>
@@ -5960,6 +6158,9 @@
           <a:lstStyle/>
           <a:p>
             <a:pPr indent="0" marL="0">
+              <a:lnSpc>
+                <a:spcPts val="1600"/>
+              </a:lnSpc>
               <a:buNone/>
             </a:pPr>
             <a:r>
@@ -6068,6 +6269,9 @@
           <a:lstStyle/>
           <a:p>
             <a:pPr indent="0" marL="0">
+              <a:lnSpc>
+                <a:spcPts val="3400"/>
+              </a:lnSpc>
               <a:buNone/>
             </a:pPr>
             <a:r>
@@ -6180,6 +6384,9 @@
           <a:lstStyle/>
           <a:p>
             <a:pPr indent="0" marL="0">
+              <a:lnSpc>
+                <a:spcPts val="2100"/>
+              </a:lnSpc>
               <a:buNone/>
             </a:pPr>
             <a:r>
@@ -6216,6 +6423,9 @@
           <a:lstStyle/>
           <a:p>
             <a:pPr marL="342900" indent="-342900">
+              <a:lnSpc>
+                <a:spcPts val="1800"/>
+              </a:lnSpc>
               <a:spcAft>
                 <a:spcPts val="600"/>
               </a:spcAft>
@@ -6234,6 +6444,9 @@
           </a:p>
           <a:p>
             <a:pPr marL="342900" indent="-342900">
+              <a:lnSpc>
+                <a:spcPts val="1800"/>
+              </a:lnSpc>
               <a:spcAft>
                 <a:spcPts val="600"/>
               </a:spcAft>
@@ -6252,6 +6465,9 @@
           </a:p>
           <a:p>
             <a:pPr marL="342900" indent="-342900">
+              <a:lnSpc>
+                <a:spcPts val="1800"/>
+              </a:lnSpc>
               <a:spcAft>
                 <a:spcPts val="600"/>
               </a:spcAft>
@@ -6270,6 +6486,9 @@
           </a:p>
           <a:p>
             <a:pPr marL="342900" indent="-342900">
+              <a:lnSpc>
+                <a:spcPts val="1800"/>
+              </a:lnSpc>
               <a:spcAft>
                 <a:spcPts val="600"/>
               </a:spcAft>
@@ -6386,6 +6605,9 @@
           <a:lstStyle/>
           <a:p>
             <a:pPr indent="0" marL="0">
+              <a:lnSpc>
+                <a:spcPts val="2100"/>
+              </a:lnSpc>
               <a:buNone/>
             </a:pPr>
             <a:r>
@@ -6422,6 +6644,9 @@
           <a:lstStyle/>
           <a:p>
             <a:pPr marL="342900" indent="-342900">
+              <a:lnSpc>
+                <a:spcPts val="1800"/>
+              </a:lnSpc>
               <a:spcAft>
                 <a:spcPts val="600"/>
               </a:spcAft>
@@ -6440,6 +6665,9 @@
           </a:p>
           <a:p>
             <a:pPr marL="342900" indent="-342900">
+              <a:lnSpc>
+                <a:spcPts val="1800"/>
+              </a:lnSpc>
               <a:spcAft>
                 <a:spcPts val="600"/>
               </a:spcAft>
@@ -6458,6 +6686,9 @@
           </a:p>
           <a:p>
             <a:pPr marL="342900" indent="-342900">
+              <a:lnSpc>
+                <a:spcPts val="1800"/>
+              </a:lnSpc>
               <a:spcAft>
                 <a:spcPts val="600"/>
               </a:spcAft>
@@ -6476,6 +6707,9 @@
           </a:p>
           <a:p>
             <a:pPr marL="342900" indent="-342900">
+              <a:lnSpc>
+                <a:spcPts val="1800"/>
+              </a:lnSpc>
               <a:spcAft>
                 <a:spcPts val="600"/>
               </a:spcAft>
@@ -6516,6 +6750,9 @@
           <a:lstStyle/>
           <a:p>
             <a:pPr indent="0" marL="0">
+              <a:lnSpc>
+                <a:spcPts val="1600"/>
+              </a:lnSpc>
               <a:buNone/>
             </a:pPr>
             <a:r>
@@ -6624,6 +6861,9 @@
           <a:lstStyle/>
           <a:p>
             <a:pPr indent="0" marL="0">
+              <a:lnSpc>
+                <a:spcPts val="3400"/>
+              </a:lnSpc>
               <a:buNone/>
             </a:pPr>
             <a:r>
@@ -6687,6 +6927,9 @@
           <a:lstStyle/>
           <a:p>
             <a:pPr algn="ctr" indent="0" marL="0">
+              <a:lnSpc>
+                <a:spcPts val="9000"/>
+              </a:lnSpc>
               <a:buNone/>
             </a:pPr>
             <a:r>
@@ -6723,6 +6966,9 @@
           <a:lstStyle/>
           <a:p>
             <a:pPr algn="ctr" indent="0" marL="0">
+              <a:lnSpc>
+                <a:spcPts val="2000"/>
+              </a:lnSpc>
               <a:buNone/>
             </a:pPr>
             <a:r>
@@ -6759,6 +7005,9 @@
           <a:lstStyle/>
           <a:p>
             <a:pPr indent="0" marL="0">
+              <a:lnSpc>
+                <a:spcPts val="1500"/>
+              </a:lnSpc>
               <a:buNone/>
             </a:pPr>
             <a:r>
@@ -6844,6 +7093,9 @@
           <a:lstStyle/>
           <a:p>
             <a:pPr indent="0" marL="0">
+              <a:lnSpc>
+                <a:spcPts val="2000"/>
+              </a:lnSpc>
               <a:buNone/>
             </a:pPr>
             <a:r>
@@ -6880,6 +7132,9 @@
           <a:lstStyle/>
           <a:p>
             <a:pPr indent="0" marL="0">
+              <a:lnSpc>
+                <a:spcPts val="1600"/>
+              </a:lnSpc>
               <a:buNone/>
             </a:pPr>
             <a:r>
@@ -6965,6 +7220,9 @@
           <a:lstStyle/>
           <a:p>
             <a:pPr indent="0" marL="0">
+              <a:lnSpc>
+                <a:spcPts val="2000"/>
+              </a:lnSpc>
               <a:buNone/>
             </a:pPr>
             <a:r>
@@ -7001,6 +7259,9 @@
           <a:lstStyle/>
           <a:p>
             <a:pPr indent="0" marL="0">
+              <a:lnSpc>
+                <a:spcPts val="1600"/>
+              </a:lnSpc>
               <a:buNone/>
             </a:pPr>
             <a:r>
@@ -7086,6 +7347,9 @@
           <a:lstStyle/>
           <a:p>
             <a:pPr indent="0" marL="0">
+              <a:lnSpc>
+                <a:spcPts val="2000"/>
+              </a:lnSpc>
               <a:buNone/>
             </a:pPr>
             <a:r>
@@ -7122,6 +7386,9 @@
           <a:lstStyle/>
           <a:p>
             <a:pPr indent="0" marL="0">
+              <a:lnSpc>
+                <a:spcPts val="1600"/>
+              </a:lnSpc>
               <a:buNone/>
             </a:pPr>
             <a:r>
@@ -7230,6 +7497,9 @@
           <a:lstStyle/>
           <a:p>
             <a:pPr indent="0" marL="0">
+              <a:lnSpc>
+                <a:spcPts val="3400"/>
+              </a:lnSpc>
               <a:buNone/>
             </a:pPr>
             <a:r>
@@ -7293,6 +7563,9 @@
           <a:lstStyle/>
           <a:p>
             <a:pPr indent="0" marL="0">
+              <a:lnSpc>
+                <a:spcPts val="4500"/>
+              </a:lnSpc>
               <a:buNone/>
             </a:pPr>
             <a:r>
@@ -7329,6 +7602,9 @@
           <a:lstStyle/>
           <a:p>
             <a:pPr indent="0" marL="0">
+              <a:lnSpc>
+                <a:spcPts val="1900"/>
+              </a:lnSpc>
               <a:buNone/>
             </a:pPr>
             <a:r>
@@ -7365,6 +7641,9 @@
           <a:lstStyle/>
           <a:p>
             <a:pPr indent="0" marL="0">
+              <a:lnSpc>
+                <a:spcPts val="1500"/>
+              </a:lnSpc>
               <a:buNone/>
             </a:pPr>
             <a:r>
@@ -7428,6 +7707,9 @@
           <a:lstStyle/>
           <a:p>
             <a:pPr indent="0" marL="0">
+              <a:lnSpc>
+                <a:spcPts val="4500"/>
+              </a:lnSpc>
               <a:buNone/>
             </a:pPr>
             <a:r>
@@ -7464,6 +7746,9 @@
           <a:lstStyle/>
           <a:p>
             <a:pPr indent="0" marL="0">
+              <a:lnSpc>
+                <a:spcPts val="1900"/>
+              </a:lnSpc>
               <a:buNone/>
             </a:pPr>
             <a:r>
@@ -7500,6 +7785,9 @@
           <a:lstStyle/>
           <a:p>
             <a:pPr indent="0" marL="0">
+              <a:lnSpc>
+                <a:spcPts val="1500"/>
+              </a:lnSpc>
               <a:buNone/>
             </a:pPr>
             <a:r>
@@ -7563,6 +7851,9 @@
           <a:lstStyle/>
           <a:p>
             <a:pPr indent="0" marL="0">
+              <a:lnSpc>
+                <a:spcPts val="4500"/>
+              </a:lnSpc>
               <a:buNone/>
             </a:pPr>
             <a:r>
@@ -7599,6 +7890,9 @@
           <a:lstStyle/>
           <a:p>
             <a:pPr indent="0" marL="0">
+              <a:lnSpc>
+                <a:spcPts val="1900"/>
+              </a:lnSpc>
               <a:buNone/>
             </a:pPr>
             <a:r>
@@ -7635,6 +7929,9 @@
           <a:lstStyle/>
           <a:p>
             <a:pPr indent="0" marL="0">
+              <a:lnSpc>
+                <a:spcPts val="1500"/>
+              </a:lnSpc>
               <a:buNone/>
             </a:pPr>
             <a:r>
@@ -7698,6 +7995,9 @@
           <a:lstStyle/>
           <a:p>
             <a:pPr indent="0" marL="0">
+              <a:lnSpc>
+                <a:spcPts val="4500"/>
+              </a:lnSpc>
               <a:buNone/>
             </a:pPr>
             <a:r>
@@ -7734,6 +8034,9 @@
           <a:lstStyle/>
           <a:p>
             <a:pPr indent="0" marL="0">
+              <a:lnSpc>
+                <a:spcPts val="1900"/>
+              </a:lnSpc>
               <a:buNone/>
             </a:pPr>
             <a:r>
@@ -7770,6 +8073,9 @@
           <a:lstStyle/>
           <a:p>
             <a:pPr indent="0" marL="0">
+              <a:lnSpc>
+                <a:spcPts val="1500"/>
+              </a:lnSpc>
               <a:buNone/>
             </a:pPr>
             <a:r>
@@ -7806,6 +8112,9 @@
           <a:lstStyle/>
           <a:p>
             <a:pPr indent="0" marL="0">
+              <a:lnSpc>
+                <a:spcPts val="1500"/>
+              </a:lnSpc>
               <a:buNone/>
             </a:pPr>
             <a:r>
@@ -7914,6 +8223,9 @@
           <a:lstStyle/>
           <a:p>
             <a:pPr indent="0" marL="0">
+              <a:lnSpc>
+                <a:spcPts val="3400"/>
+              </a:lnSpc>
               <a:buNone/>
             </a:pPr>
             <a:r>
@@ -7950,6 +8262,9 @@
           <a:lstStyle/>
           <a:p>
             <a:pPr indent="0" marL="0">
+              <a:lnSpc>
+                <a:spcPts val="1600"/>
+              </a:lnSpc>
               <a:buNone/>
             </a:pPr>
             <a:r>
@@ -8013,6 +8328,9 @@
           <a:lstStyle/>
           <a:p>
             <a:pPr indent="0" marL="0">
+              <a:lnSpc>
+                <a:spcPts val="1500"/>
+              </a:lnSpc>
               <a:buNone/>
             </a:pPr>
             <a:r>
@@ -8049,6 +8367,9 @@
           <a:lstStyle/>
           <a:p>
             <a:pPr indent="0" marL="0">
+              <a:lnSpc>
+                <a:spcPts val="2300"/>
+              </a:lnSpc>
               <a:buNone/>
             </a:pPr>
             <a:r>
@@ -8085,6 +8406,9 @@
           <a:lstStyle/>
           <a:p>
             <a:pPr marL="342900" indent="-342900">
+              <a:lnSpc>
+                <a:spcPts val="1600"/>
+              </a:lnSpc>
               <a:spcAft>
                 <a:spcPts val="300"/>
               </a:spcAft>
@@ -8103,6 +8427,9 @@
           </a:p>
           <a:p>
             <a:pPr marL="342900" indent="-342900">
+              <a:lnSpc>
+                <a:spcPts val="1600"/>
+              </a:lnSpc>
               <a:spcAft>
                 <a:spcPts val="300"/>
               </a:spcAft>
@@ -8121,6 +8448,9 @@
           </a:p>
           <a:p>
             <a:pPr marL="342900" indent="-342900">
+              <a:lnSpc>
+                <a:spcPts val="1600"/>
+              </a:lnSpc>
               <a:spcAft>
                 <a:spcPts val="300"/>
               </a:spcAft>
@@ -8139,6 +8469,9 @@
           </a:p>
           <a:p>
             <a:pPr marL="342900" indent="-342900">
+              <a:lnSpc>
+                <a:spcPts val="1600"/>
+              </a:lnSpc>
               <a:spcAft>
                 <a:spcPts val="300"/>
               </a:spcAft>
@@ -8179,6 +8512,9 @@
           <a:lstStyle/>
           <a:p>
             <a:pPr indent="0" marL="0">
+              <a:lnSpc>
+                <a:spcPts val="1500"/>
+              </a:lnSpc>
               <a:buNone/>
             </a:pPr>
             <a:r>
@@ -8242,6 +8578,9 @@
           <a:lstStyle/>
           <a:p>
             <a:pPr indent="0" marL="0">
+              <a:lnSpc>
+                <a:spcPts val="1500"/>
+              </a:lnSpc>
               <a:buNone/>
             </a:pPr>
             <a:r>
@@ -8278,6 +8617,9 @@
           <a:lstStyle/>
           <a:p>
             <a:pPr indent="0" marL="0">
+              <a:lnSpc>
+                <a:spcPts val="2300"/>
+              </a:lnSpc>
               <a:buNone/>
             </a:pPr>
             <a:r>
@@ -8314,6 +8656,9 @@
           <a:lstStyle/>
           <a:p>
             <a:pPr marL="342900" indent="-342900">
+              <a:lnSpc>
+                <a:spcPts val="1600"/>
+              </a:lnSpc>
               <a:spcAft>
                 <a:spcPts val="300"/>
               </a:spcAft>
@@ -8332,6 +8677,9 @@
           </a:p>
           <a:p>
             <a:pPr marL="342900" indent="-342900">
+              <a:lnSpc>
+                <a:spcPts val="1600"/>
+              </a:lnSpc>
               <a:spcAft>
                 <a:spcPts val="300"/>
               </a:spcAft>
@@ -8350,6 +8698,9 @@
           </a:p>
           <a:p>
             <a:pPr marL="342900" indent="-342900">
+              <a:lnSpc>
+                <a:spcPts val="1600"/>
+              </a:lnSpc>
               <a:spcAft>
                 <a:spcPts val="300"/>
               </a:spcAft>
@@ -8368,6 +8719,9 @@
           </a:p>
           <a:p>
             <a:pPr marL="342900" indent="-342900">
+              <a:lnSpc>
+                <a:spcPts val="1600"/>
+              </a:lnSpc>
               <a:spcAft>
                 <a:spcPts val="300"/>
               </a:spcAft>
@@ -8408,6 +8762,9 @@
           <a:lstStyle/>
           <a:p>
             <a:pPr indent="0" marL="0">
+              <a:lnSpc>
+                <a:spcPts val="1500"/>
+              </a:lnSpc>
               <a:buNone/>
             </a:pPr>
             <a:r>
@@ -8471,6 +8828,9 @@
           <a:lstStyle/>
           <a:p>
             <a:pPr indent="0" marL="0">
+              <a:lnSpc>
+                <a:spcPts val="1500"/>
+              </a:lnSpc>
               <a:buNone/>
             </a:pPr>
             <a:r>
@@ -8507,6 +8867,9 @@
           <a:lstStyle/>
           <a:p>
             <a:pPr indent="0" marL="0">
+              <a:lnSpc>
+                <a:spcPts val="2300"/>
+              </a:lnSpc>
               <a:buNone/>
             </a:pPr>
             <a:r>
@@ -8543,6 +8906,9 @@
           <a:lstStyle/>
           <a:p>
             <a:pPr marL="342900" indent="-342900">
+              <a:lnSpc>
+                <a:spcPts val="1600"/>
+              </a:lnSpc>
               <a:spcAft>
                 <a:spcPts val="300"/>
               </a:spcAft>
@@ -8561,6 +8927,9 @@
           </a:p>
           <a:p>
             <a:pPr marL="342900" indent="-342900">
+              <a:lnSpc>
+                <a:spcPts val="1600"/>
+              </a:lnSpc>
               <a:spcAft>
                 <a:spcPts val="300"/>
               </a:spcAft>
@@ -8579,6 +8948,9 @@
           </a:p>
           <a:p>
             <a:pPr marL="342900" indent="-342900">
+              <a:lnSpc>
+                <a:spcPts val="1600"/>
+              </a:lnSpc>
               <a:spcAft>
                 <a:spcPts val="300"/>
               </a:spcAft>
@@ -8597,6 +8969,9 @@
           </a:p>
           <a:p>
             <a:pPr marL="342900" indent="-342900">
+              <a:lnSpc>
+                <a:spcPts val="1600"/>
+              </a:lnSpc>
               <a:spcAft>
                 <a:spcPts val="300"/>
               </a:spcAft>
@@ -8637,6 +9012,9 @@
           <a:lstStyle/>
           <a:p>
             <a:pPr indent="0" marL="0">
+              <a:lnSpc>
+                <a:spcPts val="1500"/>
+              </a:lnSpc>
               <a:buNone/>
             </a:pPr>
             <a:r>
@@ -8745,6 +9123,9 @@
           <a:lstStyle/>
           <a:p>
             <a:pPr indent="0" marL="0">
+              <a:lnSpc>
+                <a:spcPts val="3400"/>
+              </a:lnSpc>
               <a:buNone/>
             </a:pPr>
             <a:r>
@@ -8808,6 +9189,9 @@
           <a:lstStyle/>
           <a:p>
             <a:pPr indent="0" marL="0">
+              <a:lnSpc>
+                <a:spcPts val="1500"/>
+              </a:lnSpc>
               <a:buNone/>
             </a:pPr>
             <a:r>
@@ -8844,6 +9228,9 @@
           <a:lstStyle/>
           <a:p>
             <a:pPr indent="0" marL="0">
+              <a:lnSpc>
+                <a:spcPts val="2000"/>
+              </a:lnSpc>
               <a:buNone/>
             </a:pPr>
             <a:r>
@@ -8880,6 +9267,9 @@
           <a:lstStyle/>
           <a:p>
             <a:pPr indent="0" marL="0">
+              <a:lnSpc>
+                <a:spcPts val="1600"/>
+              </a:lnSpc>
               <a:buNone/>
             </a:pPr>
             <a:r>
@@ -8943,6 +9333,9 @@
           <a:lstStyle/>
           <a:p>
             <a:pPr algn="ctr" indent="0" marL="0">
+              <a:lnSpc>
+                <a:spcPts val="1500"/>
+              </a:lnSpc>
               <a:buNone/>
             </a:pPr>
             <a:r>
@@ -9006,6 +9399,9 @@
           <a:lstStyle/>
           <a:p>
             <a:pPr indent="0" marL="0">
+              <a:lnSpc>
+                <a:spcPts val="1500"/>
+              </a:lnSpc>
               <a:buNone/>
             </a:pPr>
             <a:r>
@@ -9042,6 +9438,9 @@
           <a:lstStyle/>
           <a:p>
             <a:pPr indent="0" marL="0">
+              <a:lnSpc>
+                <a:spcPts val="2000"/>
+              </a:lnSpc>
               <a:buNone/>
             </a:pPr>
             <a:r>
@@ -9078,6 +9477,9 @@
           <a:lstStyle/>
           <a:p>
             <a:pPr indent="0" marL="0">
+              <a:lnSpc>
+                <a:spcPts val="1600"/>
+              </a:lnSpc>
               <a:buNone/>
             </a:pPr>
             <a:r>
@@ -9141,6 +9543,9 @@
           <a:lstStyle/>
           <a:p>
             <a:pPr indent="0" marL="0">
+              <a:lnSpc>
+                <a:spcPts val="1500"/>
+              </a:lnSpc>
               <a:buNone/>
             </a:pPr>
             <a:r>
@@ -9177,6 +9582,9 @@
           <a:lstStyle/>
           <a:p>
             <a:pPr indent="0" marL="0">
+              <a:lnSpc>
+                <a:spcPts val="2000"/>
+              </a:lnSpc>
               <a:buNone/>
             </a:pPr>
             <a:r>
@@ -9213,6 +9621,9 @@
           <a:lstStyle/>
           <a:p>
             <a:pPr indent="0" marL="0">
+              <a:lnSpc>
+                <a:spcPts val="1600"/>
+              </a:lnSpc>
               <a:buNone/>
             </a:pPr>
             <a:r>
@@ -9249,6 +9660,9 @@
           <a:lstStyle/>
           <a:p>
             <a:pPr indent="0" marL="0">
+              <a:lnSpc>
+                <a:spcPts val="1500"/>
+              </a:lnSpc>
               <a:buNone/>
             </a:pPr>
             <a:r>
@@ -9357,6 +9771,9 @@
           <a:lstStyle/>
           <a:p>
             <a:pPr indent="0" marL="0">
+              <a:lnSpc>
+                <a:spcPts val="3400"/>
+              </a:lnSpc>
               <a:buNone/>
             </a:pPr>
             <a:r>
@@ -9393,6 +9810,9 @@
           <a:lstStyle/>
           <a:p>
             <a:pPr indent="0" marL="0">
+              <a:lnSpc>
+                <a:spcPts val="3800"/>
+              </a:lnSpc>
               <a:buNone/>
             </a:pPr>
             <a:r>
@@ -9429,6 +9849,9 @@
           <a:lstStyle/>
           <a:p>
             <a:pPr indent="0" marL="0">
+              <a:lnSpc>
+                <a:spcPts val="1500"/>
+              </a:lnSpc>
               <a:buNone/>
             </a:pPr>
             <a:r>
@@ -9465,6 +9888,9 @@
           <a:lstStyle/>
           <a:p>
             <a:pPr indent="0" marL="0">
+              <a:lnSpc>
+                <a:spcPts val="3800"/>
+              </a:lnSpc>
               <a:buNone/>
             </a:pPr>
             <a:r>
@@ -9501,6 +9927,9 @@
           <a:lstStyle/>
           <a:p>
             <a:pPr indent="0" marL="0">
+              <a:lnSpc>
+                <a:spcPts val="1500"/>
+              </a:lnSpc>
               <a:buNone/>
             </a:pPr>
             <a:r>
@@ -9537,6 +9966,9 @@
           <a:lstStyle/>
           <a:p>
             <a:pPr indent="0" marL="0">
+              <a:lnSpc>
+                <a:spcPts val="3800"/>
+              </a:lnSpc>
               <a:buNone/>
             </a:pPr>
             <a:r>
@@ -9573,6 +10005,9 @@
           <a:lstStyle/>
           <a:p>
             <a:pPr indent="0" marL="0">
+              <a:lnSpc>
+                <a:spcPts val="1500"/>
+              </a:lnSpc>
               <a:buNone/>
             </a:pPr>
             <a:r>
@@ -9595,8 +10030,8 @@
         </p:nvSpPr>
         <p:spPr>
           <a:xfrm>
-            <a:off x="457200" y="3749040"/>
-            <a:ext cx="3017520" cy="822960"/>
+            <a:off x="457200" y="3703320"/>
+            <a:ext cx="3017520" cy="914400"/>
           </a:xfrm>
           <a:prstGeom prst="rect">
             <a:avLst/>
@@ -9609,6 +10044,9 @@
           <a:lstStyle/>
           <a:p>
             <a:pPr indent="0" marL="0">
+              <a:lnSpc>
+                <a:spcPts val="1400"/>
+              </a:lnSpc>
               <a:buNone/>
             </a:pPr>
             <a:r>
@@ -9617,7 +10055,7 @@
                   <a:schemeClr val="accent5"/>
                 </a:solidFill>
               </a:rPr>
-              <a:t>假設：8 間 × ¥680 × 45% × 30 天；其他收入 ¥12,000；營運成本 ¥65,000。尚未含折舊、利息、稅與業主薪酬。</a:t>
+              <a:t>假設：8 間 × ¥680 × 45% × 30 天；其他收入 ¥12,000；營運成本 ¥65,000。尚未含折舊、利息、稅與業主薪酬。損益平衡＝(65,000−12,000)÷163,200。</a:t>
             </a:r>
             <a:endParaRPr lang="en-US" sz="1100" dirty="0"/>
           </a:p>
@@ -9661,6 +10099,9 @@
           <a:lstStyle/>
           <a:p>
             <a:pPr indent="0" marL="0">
+              <a:lnSpc>
+                <a:spcPts val="1600"/>
+              </a:lnSpc>
               <a:buNone/>
             </a:pPr>
             <a:r>
@@ -9669,7 +10110,7 @@
                   <a:schemeClr val="accent3"/>
                 </a:solidFill>
               </a:rPr>
-              <a:t>損益平衡入住率約 32.5%（(65,000 − 12,000) ÷ 163,200）</a:t>
+              <a:t>損益平衡入住率約 32.5%</a:t>
             </a:r>
             <a:endParaRPr lang="en-US" sz="1300" dirty="0"/>
           </a:p>

--- a/康復療癒酒店整體設計規劃.pptx
+++ b/康復療癒酒店整體設計規劃.pptx
@@ -118,42 +118,38 @@
   <p:extLst>
     <p:ext uri="{521415D9-36F7-43E2-AB2F-B90AF26B5E84}">
       <p14:sectionLst xmlns:p14="http://schemas.microsoft.com/office/powerpoint/2010/main">
-        <p14:section name="開場" id="{2bb96d02-aa96-068f-1d8c-b27736dc79f0}">
+        <p14:section name="開場" id="{eeb361df-8729-6cf6-1289-02bc3550e254}">
           <p14:sldIdLst>
             <p14:sldId id="256"/>
           </p14:sldIdLst>
         </p14:section>
-        <p14:section name="定位" id="{5c098936-2424-72e9-2a33-a48402f77dfa}">
+        <p14:section name="定位" id="{77af16d0-a66a-66ee-919a-7416422463c5}">
           <p14:sldIdLst>
             <p14:sldId id="257"/>
             <p14:sldId id="258"/>
             <p14:sldId id="259"/>
           </p14:sldIdLst>
         </p14:section>
-        <p14:section name="空間與服務" id="{2c98fff0-f1b1-0ca4-4a36-724e9e2d3863}">
+        <p14:section name="空間與服務" id="{0cd7e448-0afc-3d1f-c91c-38510a793257}">
           <p14:sldIdLst>
             <p14:sldId id="260"/>
             <p14:sldId id="261"/>
           </p14:sldIdLst>
         </p14:section>
-        <p14:section name="產品" id="{2b8dc080-ab50-e477-851b-56488acdedf9}">
+        <p14:section name="品牌與客群" id="{f0b65bdb-b3f3-99fe-cf4b-edf90bd24e48}">
           <p14:sldIdLst>
             <p14:sldId id="262"/>
+            <p14:sldId id="263"/>
           </p14:sldIdLst>
         </p14:section>
-        <p14:section name="財務" id="{02104101-9fc1-efd8-4dd8-6552e3fa3653}">
+        <p14:section name="療程設計" id="{f8925866-a920-8fab-e3c7-ac5d5a186ee3}">
           <p14:sldIdLst>
-            <p14:sldId id="263"/>
             <p14:sldId id="264"/>
-          </p14:sldIdLst>
-        </p14:section>
-        <p14:section name="合規與執行" id="{f9f9d23e-9a0c-2eef-885c-d7602f2c3d0d}">
-          <p14:sldIdLst>
             <p14:sldId id="265"/>
             <p14:sldId id="266"/>
           </p14:sldIdLst>
         </p14:section>
-        <p14:section name="下一步" id="{603ff01d-9deb-1a33-66a5-4bd01f04ab76}">
+        <p14:section name="合作價值" id="{b5770f3a-f332-6b32-e1ff-5c1c0407c50f}">
           <p14:sldIdLst>
             <p14:sldId id="267"/>
           </p14:sldIdLst>
@@ -165,342 +161,6 @@
     </p:ext>
   </p:extLst>
 </p:presentation>
-</file>
-
-<file path=ppt/charts/chart1.xml><?xml version="1.0" encoding="utf-8"?>
-<c:chartSpace xmlns:c="http://schemas.openxmlformats.org/drawingml/2006/chart" xmlns:a="http://schemas.openxmlformats.org/drawingml/2006/main" xmlns:r="http://schemas.openxmlformats.org/officeDocument/2006/relationships">
-  <c:date1904 val="0"/>
-  <c:roundedCorners val="1"/>
-  <c:chart>
-    <c:title>
-      <c:tx>
-        <c:rich>
-          <a:bodyPr/>
-          <a:lstStyle/>
-          <a:p>
-            <a:pPr>
-              <a:defRPr sz="1200" b="0" i="0" u="none" strike="noStrike">
-                <a:solidFill>
-                  <a:srgbClr val="2F4A3A"/>
-                </a:solidFill>
-                <a:latin typeface="+mn-lt"/>
-              </a:defRPr>
-            </a:pPr>
-            <a:r>
-              <a:rPr sz="1200" b="0" i="0" u="none" strike="noStrike">
-                <a:solidFill>
-                  <a:srgbClr val="2F4A3A"/>
-                </a:solidFill>
-                <a:latin typeface="+mn-lt"/>
-              </a:rPr>
-              <a:t>入住率 vs 每月營運結餘（人民幣）</a:t>
-            </a:r>
-          </a:p>
-        </c:rich>
-      </c:tx>
-      <c:layout/>
-      <c:overlay val="0"/>
-    </c:title>
-    <c:autoTitleDeleted val="0"/>
-    <c:plotArea>
-      <c:layout/>
-      <c:barChart>
-        <c:barDir val="col"/>
-        <c:grouping val="clustered"/>
-        <c:varyColors val="0"/>
-        <c:ser>
-          <c:idx val="0"/>
-          <c:order val="0"/>
-          <c:tx>
-            <c:strRef>
-              <c:f>Sheet1!$B$1</c:f>
-              <c:strCache>
-                <c:ptCount val="1"/>
-                <c:pt idx="0">
-                  <c:v>每月營運結餘</c:v>
-                </c:pt>
-              </c:strCache>
-            </c:strRef>
-          </c:tx>
-          <c:spPr>
-            <a:solidFill>
-              <a:srgbClr val="7FA37A"/>
-            </a:solidFill>
-            <a:effectLst/>
-          </c:spPr>
-          <c:invertIfNegative val="0"/>
-          <c:dLbls>
-            <c:numFmt formatCode="#,##0" sourceLinked="0"/>
-            <c:txPr>
-              <a:bodyPr/>
-              <a:lstStyle/>
-              <a:p>
-                <a:pPr>
-                  <a:defRPr b="0" i="0" strike="noStrike" sz="1000" u="none">
-                    <a:solidFill>
-                      <a:srgbClr val="1F2A24"/>
-                    </a:solidFill>
-                    <a:latin typeface="+mn-lt"/>
-                  </a:defRPr>
-                </a:pPr>
-              </a:p>
-            </c:txPr>
-            <c:showLegendKey val="0"/>
-            <c:showVal val="1"/>
-            <c:showCatName val="0"/>
-            <c:showSerName val="0"/>
-            <c:showPercent val="0"/>
-            <c:showBubbleSize val="0"/>
-            <c:showLeaderLines val="0"/>
-          </c:dLbls>
-          <c:dPt>
-            <c:idx val="0"/>
-            <c:invertIfNegative val="0"/>
-            <c:bubble3D val="0"/>
-            <c:spPr>
-              <a:solidFill>
-                <a:srgbClr val="C07A4F"/>
-              </a:solidFill>
-              <a:effectLst/>
-            </c:spPr>
-          </c:dPt>
-          <c:dPt>
-            <c:idx val="1"/>
-            <c:invertIfNegative val="0"/>
-            <c:bubble3D val="0"/>
-            <c:spPr>
-              <a:solidFill>
-                <a:srgbClr val="7FA37A"/>
-              </a:solidFill>
-              <a:effectLst/>
-            </c:spPr>
-          </c:dPt>
-          <c:dPt>
-            <c:idx val="2"/>
-            <c:invertIfNegative val="0"/>
-            <c:bubble3D val="0"/>
-            <c:spPr>
-              <a:solidFill>
-                <a:srgbClr val="7FA37A"/>
-              </a:solidFill>
-              <a:effectLst/>
-            </c:spPr>
-          </c:dPt>
-          <c:dPt>
-            <c:idx val="3"/>
-            <c:invertIfNegative val="0"/>
-            <c:bubble3D val="0"/>
-            <c:spPr>
-              <a:solidFill>
-                <a:srgbClr val="7FA37A"/>
-              </a:solidFill>
-              <a:effectLst/>
-            </c:spPr>
-          </c:dPt>
-          <c:dPt>
-            <c:idx val="4"/>
-            <c:invertIfNegative val="0"/>
-            <c:bubble3D val="0"/>
-            <c:spPr>
-              <a:solidFill>
-                <a:srgbClr val="7FA37A"/>
-              </a:solidFill>
-              <a:effectLst/>
-            </c:spPr>
-          </c:dPt>
-          <c:cat>
-            <c:multiLvlStrRef>
-              <c:f>Sheet1!$A$2:$A$6</c:f>
-              <c:multiLvlStrCache>
-                <c:ptCount val="5"/>
-                <c:lvl>
-                  <c:pt idx="0">
-                    <c:v>30%</c:v>
-                  </c:pt>
-                  <c:pt idx="1">
-                    <c:v>40%</c:v>
-                  </c:pt>
-                  <c:pt idx="2">
-                    <c:v>45%</c:v>
-                  </c:pt>
-                  <c:pt idx="3">
-                    <c:v>55%</c:v>
-                  </c:pt>
-                  <c:pt idx="4">
-                    <c:v>65%</c:v>
-                  </c:pt>
-                </c:lvl>
-              </c:multiLvlStrCache>
-            </c:multiLvlStrRef>
-          </c:cat>
-          <c:val>
-            <c:numRef>
-              <c:f>Sheet1!$B$2:$B$6</c:f>
-              <c:numCache>
-                <c:formatCode>General</c:formatCode>
-                <c:ptCount val="5"/>
-                <c:pt idx="0">
-                  <c:v>-4040</c:v>
-                </c:pt>
-                <c:pt idx="1">
-                  <c:v>12280</c:v>
-                </c:pt>
-                <c:pt idx="2">
-                  <c:v>20440</c:v>
-                </c:pt>
-                <c:pt idx="3">
-                  <c:v>36760</c:v>
-                </c:pt>
-                <c:pt idx="4">
-                  <c:v>53080</c:v>
-                </c:pt>
-              </c:numCache>
-            </c:numRef>
-          </c:val>
-        </c:ser>
-        <c:dLbls>
-          <c:numFmt formatCode="#,##0" sourceLinked="0"/>
-          <c:txPr>
-            <a:bodyPr/>
-            <a:lstStyle/>
-            <a:p>
-              <a:pPr>
-                <a:defRPr b="0" i="0" strike="noStrike" sz="1000" u="none">
-                  <a:solidFill>
-                    <a:srgbClr val="1F2A24"/>
-                  </a:solidFill>
-                  <a:latin typeface="+mn-lt"/>
-                </a:defRPr>
-              </a:pPr>
-            </a:p>
-          </c:txPr>
-          <c:showLegendKey val="0"/>
-          <c:showVal val="1"/>
-          <c:showCatName val="0"/>
-          <c:showSerName val="0"/>
-          <c:showPercent val="0"/>
-          <c:showBubbleSize val="0"/>
-          <c:showLeaderLines val="0"/>
-        </c:dLbls>
-        <c:gapWidth val="150"/>
-        <c:overlap val="0"/>
-        <c:axId val="2094734554"/>
-        <c:axId val="2094734552"/>
-        <c:axId val="2094734556"/>
-      </c:barChart>
-      <c:catAx>
-        <c:axId val="2094734554"/>
-        <c:scaling>
-          <c:orientation val="minMax"/>
-        </c:scaling>
-        <c:delete val="0"/>
-        <c:axPos val="b"/>
-        <c:numFmt formatCode="General" sourceLinked="1"/>
-        <c:majorTickMark val="out"/>
-        <c:minorTickMark val="none"/>
-        <c:tickLblPos val="low"/>
-        <c:spPr>
-          <a:ln w="12700" cap="flat">
-            <a:solidFill>
-              <a:srgbClr val="888888"/>
-            </a:solidFill>
-            <a:prstDash val="solid"/>
-            <a:round/>
-          </a:ln>
-        </c:spPr>
-        <c:txPr>
-          <a:bodyPr/>
-          <a:lstStyle/>
-          <a:p>
-            <a:pPr>
-              <a:defRPr sz="1000" b="0" i="0" u="none" strike="noStrike">
-                <a:solidFill>
-                  <a:srgbClr val="5E6B63"/>
-                </a:solidFill>
-                <a:latin typeface="+mn-lt"/>
-              </a:defRPr>
-            </a:pPr>
-            <a:endParaRPr lang="en-US"/>
-          </a:p>
-        </c:txPr>
-        <c:crossAx val="2094734552"/>
-        <c:crosses val="autoZero"/>
-        <c:auto val="1"/>
-        <c:lblAlgn val="ctr"/>
-        <c:noMultiLvlLbl val="1"/>
-      </c:catAx>
-      <c:valAx>
-        <c:axId val="2094734552"/>
-        <c:scaling>
-          <c:orientation val="minMax"/>
-        </c:scaling>
-        <c:delete val="0"/>
-        <c:axPos val="l"/>
-        <c:majorGridlines>
-          <c:spPr>
-            <a:ln w="6350" cap="flat">
-              <a:solidFill>
-                <a:srgbClr val="E3E8E1"/>
-              </a:solidFill>
-              <a:prstDash val="solid"/>
-              <a:round/>
-            </a:ln>
-          </c:spPr>
-        </c:majorGridlines>
-        <c:numFmt formatCode="#,##0" sourceLinked="0"/>
-        <c:majorTickMark val="out"/>
-        <c:minorTickMark val="none"/>
-        <c:tickLblPos val="nextTo"/>
-        <c:spPr>
-          <a:ln w="12700" cap="flat">
-            <a:solidFill>
-              <a:srgbClr val="888888"/>
-            </a:solidFill>
-            <a:prstDash val="solid"/>
-            <a:round/>
-          </a:ln>
-        </c:spPr>
-        <c:txPr>
-          <a:bodyPr/>
-          <a:lstStyle/>
-          <a:p>
-            <a:pPr>
-              <a:defRPr sz="1000" b="0" i="0" u="none" strike="noStrike">
-                <a:solidFill>
-                  <a:srgbClr val="5E6B63"/>
-                </a:solidFill>
-                <a:latin typeface="+mn-lt"/>
-              </a:defRPr>
-            </a:pPr>
-            <a:endParaRPr lang="en-US"/>
-          </a:p>
-        </c:txPr>
-        <c:crossAx val="2094734554"/>
-        <c:crosses val="autoZero"/>
-        <c:crossBetween val="between"/>
-      </c:valAx>
-      <c:spPr>
-        <a:noFill/>
-        <a:ln>
-          <a:noFill/>
-        </a:ln>
-        <a:effectLst/>
-      </c:spPr>
-    </c:plotArea>
-    <c:plotVisOnly val="1"/>
-    <c:dispBlanksAs val="span"/>
-  </c:chart>
-  <c:spPr>
-    <a:noFill/>
-    <a:ln>
-      <a:noFill/>
-    </a:ln>
-    <a:effectLst/>
-  </c:spPr>
-  <c:externalData r:id="rId1">
-    <c:autoUpdate val="0"/>
-  </c:externalData>
-</c:chartSpace>
 </file>
 
 <file path=ppt/notesMasters/notesMaster1.xml><?xml version="1.0" encoding="utf-8"?>
@@ -1866,7 +1526,7 @@
           <a:p>
             <a:r>
               <a:rPr lang="en-US" dirty="0"/>
-              <a:t>此模型用途是找出損益平衡入住率，而非追求高房價。投資前應再加入淡旺季、平台佣金、食材成本、員工配置、租金及設備折舊。</a:t>
+              <a:t/>
             </a:r>
             <a:endParaRPr lang="en-US" dirty="0"/>
           </a:p>
@@ -2138,7 +1798,7 @@
         <p:spPr>
           <a:xfrm>
             <a:off x="457200" y="4754880"/>
-            <a:ext cx="5486400" cy="274320"/>
+            <a:ext cx="6400800" cy="274320"/>
           </a:xfrm>
           <a:prstGeom prst="rect">
             <a:avLst/>
@@ -2159,7 +1819,7 @@
                   <a:schemeClr val="accent5"/>
                 </a:solidFill>
               </a:rPr>
-              <a:t>康復療癒酒店整體設計規劃</a:t>
+              <a:t>康復療癒酒店整體設計規劃｜規劃設計：陳博士康養團隊</a:t>
             </a:r>
             <a:endParaRPr lang="en-US" sz="1000" dirty="0"/>
           </a:p>
@@ -2652,7 +2312,7 @@
                   <a:schemeClr val="accent4"/>
                 </a:solidFill>
               </a:rPr>
-              <a:t>中國大陸 8 間客房示範項目</a:t>
+              <a:t>飯店合作提案｜規劃設計：陳博士康養團隊</a:t>
             </a:r>
             <a:endParaRPr lang="en-US" sz="1600" dirty="0"/>
           </a:p>
@@ -2767,7 +2427,7 @@
                   <a:schemeClr val="tx2"/>
                 </a:solidFill>
               </a:rPr>
-              <a:t>簽約或裝修前，先向主管部門確認合規</a:t>
+              <a:t>個人化方式：前測 → 後測 → 五日健康報告</a:t>
             </a:r>
             <a:endParaRPr lang="en-US" sz="2800" dirty="0"/>
           </a:p>
@@ -2775,14 +2435,14 @@
       </p:sp>
       <p:sp>
         <p:nvSpPr>
-          <p:cNvPr id="3" name="物業與登記 circle"/>
+          <p:cNvPr id="3" name="入住前測 circle"/>
           <p:cNvSpPr/>
           <p:nvPr/>
         </p:nvSpPr>
         <p:spPr>
           <a:xfrm>
-            <a:off x="457200" y="1234440"/>
-            <a:ext cx="502920" cy="502920"/>
+            <a:off x="1005840" y="1234440"/>
+            <a:ext cx="777240" cy="777240"/>
           </a:xfrm>
           <a:prstGeom prst="ellipse">
             <a:avLst/>
@@ -2800,7 +2460,7 @@
       </p:sp>
       <p:pic>
         <p:nvPicPr>
-          <p:cNvPr id="4" name="物業與登記 icon" descr="物業與登記">    </p:cNvPr>
+          <p:cNvPr id="4" name="入住前測 icon" descr="入住前測">    </p:cNvPr>
           <p:cNvPicPr>
             <a:picLocks noChangeAspect="1"/>
           </p:cNvPicPr>
@@ -2814,24 +2474,48 @@
         </p:blipFill>
         <p:spPr>
           <a:xfrm>
-            <a:off x="582930" y="1360170"/>
-            <a:ext cx="251460" cy="251460"/>
+            <a:off x="1200150" y="1428750"/>
+            <a:ext cx="388620" cy="388620"/>
           </a:xfrm>
           <a:prstGeom prst="rect">
             <a:avLst/>
           </a:prstGeom>
         </p:spPr>
       </p:pic>
-      <p:sp>
-        <p:nvSpPr>
-          <p:cNvPr id="5" name="Text 2"/>
+      <p:pic>
+        <p:nvPicPr>
+          <p:cNvPr id="5" name="Arrow 1" descr="next">    </p:cNvPr>
+          <p:cNvPicPr>
+            <a:picLocks noChangeAspect="1"/>
+          </p:cNvPicPr>
+          <p:nvPr/>
+        </p:nvPicPr>
+        <p:blipFill>
+          <a:blip r:embed="rId2"/>
+          <a:stretch>
+            <a:fillRect/>
+          </a:stretch>
+        </p:blipFill>
+        <p:spPr>
+          <a:xfrm>
+            <a:off x="2148840" y="1463040"/>
+            <a:ext cx="320040" cy="320040"/>
+          </a:xfrm>
+          <a:prstGeom prst="rect">
+            <a:avLst/>
+          </a:prstGeom>
+        </p:spPr>
+      </p:pic>
+      <p:sp>
+        <p:nvSpPr>
+          <p:cNvPr id="6" name="Text 2"/>
           <p:cNvSpPr txBox="1"/>
           <p:nvPr/>
         </p:nvSpPr>
         <p:spPr>
           <a:xfrm>
-            <a:off x="1143000" y="1188720"/>
-            <a:ext cx="3291840" cy="320040"/>
+            <a:off x="457200" y="2148840"/>
+            <a:ext cx="1874520" cy="365760"/>
           </a:xfrm>
           <a:prstGeom prst="rect">
             <a:avLst/>
@@ -2843,73 +2527,73 @@
           <a:bodyPr wrap="square" lIns="0" tIns="0" rIns="0" bIns="0" rtlCol="0" anchor="t"/>
           <a:lstStyle/>
           <a:p>
+            <a:pPr algn="ctr" indent="0" marL="0">
+              <a:lnSpc>
+                <a:spcPts val="2000"/>
+              </a:lnSpc>
+              <a:buNone/>
+            </a:pPr>
+            <a:r>
+              <a:rPr lang="en-US" sz="1600" b="1" dirty="0">
+                <a:solidFill>
+                  <a:schemeClr val="tx2"/>
+                </a:solidFill>
+              </a:rPr>
+              <a:t>入住前測</a:t>
+            </a:r>
+            <a:endParaRPr lang="en-US" sz="1600" dirty="0"/>
+          </a:p>
+        </p:txBody>
+      </p:sp>
+      <p:sp>
+        <p:nvSpPr>
+          <p:cNvPr id="7" name="Text 3"/>
+          <p:cNvSpPr txBox="1"/>
+          <p:nvPr/>
+        </p:nvSpPr>
+        <p:spPr>
+          <a:xfrm>
+            <a:off x="548640" y="2560320"/>
+            <a:ext cx="1691640" cy="777240"/>
+          </a:xfrm>
+          <a:prstGeom prst="rect">
+            <a:avLst/>
+          </a:prstGeom>
+          <a:noFill/>
+          <a:ln/>
+        </p:spPr>
+        <p:txBody>
+          <a:bodyPr wrap="square" lIns="0" tIns="0" rIns="0" bIns="0" rtlCol="0" anchor="t"/>
+          <a:lstStyle/>
+          <a:p>
             <a:pPr indent="0" marL="0">
               <a:lnSpc>
-                <a:spcPts val="2000"/>
-              </a:lnSpc>
-              <a:buNone/>
-            </a:pPr>
-            <a:r>
-              <a:rPr lang="en-US" sz="1600" b="1" dirty="0">
-                <a:solidFill>
-                  <a:schemeClr val="tx2"/>
-                </a:solidFill>
-              </a:rPr>
-              <a:t>物業與登記</a:t>
-            </a:r>
-            <a:endParaRPr lang="en-US" sz="1600" dirty="0"/>
-          </a:p>
-        </p:txBody>
-      </p:sp>
-      <p:sp>
-        <p:nvSpPr>
-          <p:cNvPr id="6" name="Text 3"/>
-          <p:cNvSpPr txBox="1"/>
-          <p:nvPr/>
-        </p:nvSpPr>
-        <p:spPr>
-          <a:xfrm>
-            <a:off x="1143000" y="1536192"/>
-            <a:ext cx="3291840" cy="594360"/>
-          </a:xfrm>
-          <a:prstGeom prst="rect">
-            <a:avLst/>
-          </a:prstGeom>
-          <a:noFill/>
-          <a:ln/>
-        </p:spPr>
-        <p:txBody>
-          <a:bodyPr wrap="square" lIns="0" tIns="0" rIns="0" bIns="0" rtlCol="0" anchor="t"/>
-          <a:lstStyle/>
-          <a:p>
-            <a:pPr indent="0" marL="0">
-              <a:lnSpc>
-                <a:spcPts val="1600"/>
-              </a:lnSpc>
-              <a:buNone/>
-            </a:pPr>
-            <a:r>
-              <a:rPr lang="en-US" sz="1300" dirty="0">
+                <a:spcPts val="1500"/>
+              </a:lnSpc>
+              <a:buNone/>
+            </a:pPr>
+            <a:r>
+              <a:rPr lang="en-US" sz="1200" dirty="0">
                 <a:solidFill>
                   <a:schemeClr val="tx1"/>
                 </a:solidFill>
               </a:rPr>
-              <a:t>物業用途、旅宿經營登記或許可要求</a:t>
-            </a:r>
-            <a:endParaRPr lang="en-US" sz="1300" dirty="0"/>
-          </a:p>
-        </p:txBody>
-      </p:sp>
-      <p:sp>
-        <p:nvSpPr>
-          <p:cNvPr id="7" name="消防與建築 circle"/>
+              <a:t>血壓、血糖、體組成、睡眠問卷、九大體質判定</a:t>
+            </a:r>
+            <a:endParaRPr lang="en-US" sz="1200" dirty="0"/>
+          </a:p>
+        </p:txBody>
+      </p:sp>
+      <p:sp>
+        <p:nvSpPr>
+          <p:cNvPr id="8" name="配對組合 circle"/>
           <p:cNvSpPr/>
           <p:nvPr/>
         </p:nvSpPr>
         <p:spPr>
           <a:xfrm>
-            <a:off x="457200" y="2286000"/>
-            <a:ext cx="502920" cy="502920"/>
+            <a:off x="3108960" y="1234440"/>
+            <a:ext cx="777240" cy="777240"/>
           </a:xfrm>
           <a:prstGeom prst="ellipse">
             <a:avLst/>
@@ -2927,38 +2611,62 @@
       </p:sp>
       <p:pic>
         <p:nvPicPr>
-          <p:cNvPr id="8" name="消防與建築 icon" descr="消防與建築">    </p:cNvPr>
+          <p:cNvPr id="9" name="配對組合 icon" descr="配對組合">    </p:cNvPr>
           <p:cNvPicPr>
             <a:picLocks noChangeAspect="1"/>
           </p:cNvPicPr>
           <p:nvPr/>
         </p:nvPicPr>
         <p:blipFill>
-          <a:blip r:embed="rId2"/>
+          <a:blip r:embed="rId3"/>
           <a:stretch>
             <a:fillRect/>
           </a:stretch>
         </p:blipFill>
         <p:spPr>
           <a:xfrm>
-            <a:off x="582930" y="2411730"/>
-            <a:ext cx="251460" cy="251460"/>
+            <a:off x="3303270" y="1428750"/>
+            <a:ext cx="388620" cy="388620"/>
           </a:xfrm>
           <a:prstGeom prst="rect">
             <a:avLst/>
           </a:prstGeom>
         </p:spPr>
       </p:pic>
-      <p:sp>
-        <p:nvSpPr>
-          <p:cNvPr id="9" name="Text 5"/>
+      <p:pic>
+        <p:nvPicPr>
+          <p:cNvPr id="10" name="Arrow 2" descr="next">    </p:cNvPr>
+          <p:cNvPicPr>
+            <a:picLocks noChangeAspect="1"/>
+          </p:cNvPicPr>
+          <p:nvPr/>
+        </p:nvPicPr>
+        <p:blipFill>
+          <a:blip r:embed="rId4"/>
+          <a:stretch>
+            <a:fillRect/>
+          </a:stretch>
+        </p:blipFill>
+        <p:spPr>
+          <a:xfrm>
+            <a:off x="4251960" y="1463040"/>
+            <a:ext cx="320040" cy="320040"/>
+          </a:xfrm>
+          <a:prstGeom prst="rect">
+            <a:avLst/>
+          </a:prstGeom>
+        </p:spPr>
+      </p:pic>
+      <p:sp>
+        <p:nvSpPr>
+          <p:cNvPr id="11" name="Text 5"/>
           <p:cNvSpPr txBox="1"/>
           <p:nvPr/>
         </p:nvSpPr>
         <p:spPr>
           <a:xfrm>
-            <a:off x="1143000" y="2240280"/>
-            <a:ext cx="3291840" cy="320040"/>
+            <a:off x="2560320" y="2148840"/>
+            <a:ext cx="1874520" cy="365760"/>
           </a:xfrm>
           <a:prstGeom prst="rect">
             <a:avLst/>
@@ -2970,73 +2678,73 @@
           <a:bodyPr wrap="square" lIns="0" tIns="0" rIns="0" bIns="0" rtlCol="0" anchor="t"/>
           <a:lstStyle/>
           <a:p>
+            <a:pPr algn="ctr" indent="0" marL="0">
+              <a:lnSpc>
+                <a:spcPts val="2000"/>
+              </a:lnSpc>
+              <a:buNone/>
+            </a:pPr>
+            <a:r>
+              <a:rPr lang="en-US" sz="1600" b="1" dirty="0">
+                <a:solidFill>
+                  <a:schemeClr val="tx2"/>
+                </a:solidFill>
+              </a:rPr>
+              <a:t>配對組合</a:t>
+            </a:r>
+            <a:endParaRPr lang="en-US" sz="1600" dirty="0"/>
+          </a:p>
+        </p:txBody>
+      </p:sp>
+      <p:sp>
+        <p:nvSpPr>
+          <p:cNvPr id="12" name="Text 6"/>
+          <p:cNvSpPr txBox="1"/>
+          <p:nvPr/>
+        </p:nvSpPr>
+        <p:spPr>
+          <a:xfrm>
+            <a:off x="2651760" y="2560320"/>
+            <a:ext cx="1691640" cy="777240"/>
+          </a:xfrm>
+          <a:prstGeom prst="rect">
+            <a:avLst/>
+          </a:prstGeom>
+          <a:noFill/>
+          <a:ln/>
+        </p:spPr>
+        <p:txBody>
+          <a:bodyPr wrap="square" lIns="0" tIns="0" rIns="0" bIns="0" rtlCol="0" anchor="t"/>
+          <a:lstStyle/>
+          <a:p>
             <a:pPr indent="0" marL="0">
               <a:lnSpc>
-                <a:spcPts val="2000"/>
-              </a:lnSpc>
-              <a:buNone/>
-            </a:pPr>
-            <a:r>
-              <a:rPr lang="en-US" sz="1600" b="1" dirty="0">
-                <a:solidFill>
-                  <a:schemeClr val="tx2"/>
-                </a:solidFill>
-              </a:rPr>
-              <a:t>消防與建築</a:t>
-            </a:r>
-            <a:endParaRPr lang="en-US" sz="1600" dirty="0"/>
-          </a:p>
-        </p:txBody>
-      </p:sp>
-      <p:sp>
-        <p:nvSpPr>
-          <p:cNvPr id="10" name="Text 6"/>
-          <p:cNvSpPr txBox="1"/>
-          <p:nvPr/>
-        </p:nvSpPr>
-        <p:spPr>
-          <a:xfrm>
-            <a:off x="1143000" y="2587752"/>
-            <a:ext cx="3291840" cy="594360"/>
-          </a:xfrm>
-          <a:prstGeom prst="rect">
-            <a:avLst/>
-          </a:prstGeom>
-          <a:noFill/>
-          <a:ln/>
-        </p:spPr>
-        <p:txBody>
-          <a:bodyPr wrap="square" lIns="0" tIns="0" rIns="0" bIns="0" rtlCol="0" anchor="t"/>
-          <a:lstStyle/>
-          <a:p>
-            <a:pPr indent="0" marL="0">
-              <a:lnSpc>
-                <a:spcPts val="1600"/>
-              </a:lnSpc>
-              <a:buNone/>
-            </a:pPr>
-            <a:r>
-              <a:rPr lang="en-US" sz="1300" dirty="0">
+                <a:spcPts val="1500"/>
+              </a:lnSpc>
+              <a:buNone/>
+            </a:pPr>
+            <a:r>
+              <a:rPr lang="en-US" sz="1200" dirty="0">
                 <a:solidFill>
                   <a:schemeClr val="tx1"/>
                 </a:solidFill>
               </a:rPr>
-              <a:t>消防、疏散、建築安全及無障礙要求</a:t>
-            </a:r>
-            <a:endParaRPr lang="en-US" sz="1300" dirty="0"/>
-          </a:p>
-        </p:txBody>
-      </p:sp>
-      <p:sp>
-        <p:nvSpPr>
-          <p:cNvPr id="11" name="餐飲許可 circle"/>
+              <a:t>依評估結果，從十大模組配對個人化療程</a:t>
+            </a:r>
+            <a:endParaRPr lang="en-US" sz="1200" dirty="0"/>
+          </a:p>
+        </p:txBody>
+      </p:sp>
+      <p:sp>
+        <p:nvSpPr>
+          <p:cNvPr id="13" name="五日療程 circle"/>
           <p:cNvSpPr/>
           <p:nvPr/>
         </p:nvSpPr>
         <p:spPr>
           <a:xfrm>
-            <a:off x="457200" y="3337560"/>
-            <a:ext cx="502920" cy="502920"/>
+            <a:off x="5212080" y="1234440"/>
+            <a:ext cx="777240" cy="777240"/>
           </a:xfrm>
           <a:prstGeom prst="ellipse">
             <a:avLst/>
@@ -3054,38 +2762,62 @@
       </p:sp>
       <p:pic>
         <p:nvPicPr>
-          <p:cNvPr id="12" name="餐飲許可 icon" descr="餐飲許可">    </p:cNvPr>
+          <p:cNvPr id="14" name="五日療程 icon" descr="五日療程">    </p:cNvPr>
           <p:cNvPicPr>
             <a:picLocks noChangeAspect="1"/>
           </p:cNvPicPr>
           <p:nvPr/>
         </p:nvPicPr>
         <p:blipFill>
-          <a:blip r:embed="rId3"/>
+          <a:blip r:embed="rId5"/>
           <a:stretch>
             <a:fillRect/>
           </a:stretch>
         </p:blipFill>
         <p:spPr>
           <a:xfrm>
-            <a:off x="582930" y="3463290"/>
-            <a:ext cx="251460" cy="251460"/>
+            <a:off x="5406390" y="1428750"/>
+            <a:ext cx="388620" cy="388620"/>
           </a:xfrm>
           <a:prstGeom prst="rect">
             <a:avLst/>
           </a:prstGeom>
         </p:spPr>
       </p:pic>
-      <p:sp>
-        <p:nvSpPr>
-          <p:cNvPr id="13" name="Text 8"/>
+      <p:pic>
+        <p:nvPicPr>
+          <p:cNvPr id="15" name="Arrow 3" descr="next">    </p:cNvPr>
+          <p:cNvPicPr>
+            <a:picLocks noChangeAspect="1"/>
+          </p:cNvPicPr>
+          <p:nvPr/>
+        </p:nvPicPr>
+        <p:blipFill>
+          <a:blip r:embed="rId6"/>
+          <a:stretch>
+            <a:fillRect/>
+          </a:stretch>
+        </p:blipFill>
+        <p:spPr>
+          <a:xfrm>
+            <a:off x="6355080" y="1463040"/>
+            <a:ext cx="320040" cy="320040"/>
+          </a:xfrm>
+          <a:prstGeom prst="rect">
+            <a:avLst/>
+          </a:prstGeom>
+        </p:spPr>
+      </p:pic>
+      <p:sp>
+        <p:nvSpPr>
+          <p:cNvPr id="16" name="Text 8"/>
           <p:cNvSpPr txBox="1"/>
           <p:nvPr/>
         </p:nvSpPr>
         <p:spPr>
           <a:xfrm>
-            <a:off x="1143000" y="3291840"/>
-            <a:ext cx="3291840" cy="320040"/>
+            <a:off x="4663440" y="2148840"/>
+            <a:ext cx="1874520" cy="365760"/>
           </a:xfrm>
           <a:prstGeom prst="rect">
             <a:avLst/>
@@ -3097,73 +2829,73 @@
           <a:bodyPr wrap="square" lIns="0" tIns="0" rIns="0" bIns="0" rtlCol="0" anchor="t"/>
           <a:lstStyle/>
           <a:p>
+            <a:pPr algn="ctr" indent="0" marL="0">
+              <a:lnSpc>
+                <a:spcPts val="2000"/>
+              </a:lnSpc>
+              <a:buNone/>
+            </a:pPr>
+            <a:r>
+              <a:rPr lang="en-US" sz="1600" b="1" dirty="0">
+                <a:solidFill>
+                  <a:schemeClr val="tx2"/>
+                </a:solidFill>
+              </a:rPr>
+              <a:t>五日療程</a:t>
+            </a:r>
+            <a:endParaRPr lang="en-US" sz="1600" dirty="0"/>
+          </a:p>
+        </p:txBody>
+      </p:sp>
+      <p:sp>
+        <p:nvSpPr>
+          <p:cNvPr id="17" name="Text 9"/>
+          <p:cNvSpPr txBox="1"/>
+          <p:nvPr/>
+        </p:nvSpPr>
+        <p:spPr>
+          <a:xfrm>
+            <a:off x="4754880" y="2560320"/>
+            <a:ext cx="1691640" cy="777240"/>
+          </a:xfrm>
+          <a:prstGeom prst="rect">
+            <a:avLst/>
+          </a:prstGeom>
+          <a:noFill/>
+          <a:ln/>
+        </p:spPr>
+        <p:txBody>
+          <a:bodyPr wrap="square" lIns="0" tIns="0" rIns="0" bIns="0" rtlCol="0" anchor="t"/>
+          <a:lstStyle/>
+          <a:p>
             <a:pPr indent="0" marL="0">
               <a:lnSpc>
-                <a:spcPts val="2000"/>
-              </a:lnSpc>
-              <a:buNone/>
-            </a:pPr>
-            <a:r>
-              <a:rPr lang="en-US" sz="1600" b="1" dirty="0">
-                <a:solidFill>
-                  <a:schemeClr val="tx2"/>
-                </a:solidFill>
-              </a:rPr>
-              <a:t>餐飲許可</a:t>
-            </a:r>
-            <a:endParaRPr lang="en-US" sz="1600" dirty="0"/>
-          </a:p>
-        </p:txBody>
-      </p:sp>
-      <p:sp>
-        <p:nvSpPr>
-          <p:cNvPr id="14" name="Text 9"/>
-          <p:cNvSpPr txBox="1"/>
-          <p:nvPr/>
-        </p:nvSpPr>
-        <p:spPr>
-          <a:xfrm>
-            <a:off x="1143000" y="3639312"/>
-            <a:ext cx="3291840" cy="594360"/>
-          </a:xfrm>
-          <a:prstGeom prst="rect">
-            <a:avLst/>
-          </a:prstGeom>
-          <a:noFill/>
-          <a:ln/>
-        </p:spPr>
-        <p:txBody>
-          <a:bodyPr wrap="square" lIns="0" tIns="0" rIns="0" bIns="0" rtlCol="0" anchor="t"/>
-          <a:lstStyle/>
-          <a:p>
-            <a:pPr indent="0" marL="0">
-              <a:lnSpc>
-                <a:spcPts val="1600"/>
-              </a:lnSpc>
-              <a:buNone/>
-            </a:pPr>
-            <a:r>
-              <a:rPr lang="en-US" sz="1300" dirty="0">
+                <a:spcPts val="1500"/>
+              </a:lnSpc>
+              <a:buNone/>
+            </a:pPr>
+            <a:r>
+              <a:rPr lang="en-US" sz="1200" dirty="0">
                 <a:solidFill>
                   <a:schemeClr val="tx1"/>
                 </a:solidFill>
               </a:rPr>
-              <a:t>食品經營許可及從業人員管理</a:t>
-            </a:r>
-            <a:endParaRPr lang="en-US" sz="1300" dirty="0"/>
-          </a:p>
-        </p:txBody>
-      </p:sp>
-      <p:sp>
-        <p:nvSpPr>
-          <p:cNvPr id="15" name="專項資質 circle"/>
+              <a:t>評估 → 放鬆 → 調理 → 整合 → 返家</a:t>
+            </a:r>
+            <a:endParaRPr lang="en-US" sz="1200" dirty="0"/>
+          </a:p>
+        </p:txBody>
+      </p:sp>
+      <p:sp>
+        <p:nvSpPr>
+          <p:cNvPr id="18" name="退房後測 circle"/>
           <p:cNvSpPr/>
           <p:nvPr/>
         </p:nvSpPr>
         <p:spPr>
           <a:xfrm>
-            <a:off x="4663440" y="1234440"/>
-            <a:ext cx="502920" cy="502920"/>
+            <a:off x="7315200" y="1234440"/>
+            <a:ext cx="777240" cy="777240"/>
           </a:xfrm>
           <a:prstGeom prst="ellipse">
             <a:avLst/>
@@ -3181,22 +2913,22 @@
       </p:sp>
       <p:pic>
         <p:nvPicPr>
-          <p:cNvPr id="16" name="專項資質 icon" descr="專項資質">    </p:cNvPr>
+          <p:cNvPr id="19" name="退房後測 icon" descr="退房後測">    </p:cNvPr>
           <p:cNvPicPr>
             <a:picLocks noChangeAspect="1"/>
           </p:cNvPicPr>
           <p:nvPr/>
         </p:nvPicPr>
         <p:blipFill>
-          <a:blip r:embed="rId4"/>
+          <a:blip r:embed="rId7"/>
           <a:stretch>
             <a:fillRect/>
           </a:stretch>
         </p:blipFill>
         <p:spPr>
           <a:xfrm>
-            <a:off x="4789170" y="1360170"/>
-            <a:ext cx="251460" cy="251460"/>
+            <a:off x="7509510" y="1428750"/>
+            <a:ext cx="388620" cy="388620"/>
           </a:xfrm>
           <a:prstGeom prst="rect">
             <a:avLst/>
@@ -3205,14 +2937,14 @@
       </p:pic>
       <p:sp>
         <p:nvSpPr>
-          <p:cNvPr id="17" name="Text 11"/>
+          <p:cNvPr id="20" name="Text 11"/>
           <p:cNvSpPr txBox="1"/>
           <p:nvPr/>
         </p:nvSpPr>
         <p:spPr>
           <a:xfrm>
-            <a:off x="5349240" y="1188720"/>
-            <a:ext cx="3291840" cy="320040"/>
+            <a:off x="6766560" y="2148840"/>
+            <a:ext cx="1874520" cy="365760"/>
           </a:xfrm>
           <a:prstGeom prst="rect">
             <a:avLst/>
@@ -3224,251 +2956,163 @@
           <a:bodyPr wrap="square" lIns="0" tIns="0" rIns="0" bIns="0" rtlCol="0" anchor="t"/>
           <a:lstStyle/>
           <a:p>
+            <a:pPr algn="ctr" indent="0" marL="0">
+              <a:lnSpc>
+                <a:spcPts val="2000"/>
+              </a:lnSpc>
+              <a:buNone/>
+            </a:pPr>
+            <a:r>
+              <a:rPr lang="en-US" sz="1600" b="1" dirty="0">
+                <a:solidFill>
+                  <a:schemeClr val="tx2"/>
+                </a:solidFill>
+              </a:rPr>
+              <a:t>退房後測</a:t>
+            </a:r>
+            <a:endParaRPr lang="en-US" sz="1600" dirty="0"/>
+          </a:p>
+        </p:txBody>
+      </p:sp>
+      <p:sp>
+        <p:nvSpPr>
+          <p:cNvPr id="21" name="Text 12"/>
+          <p:cNvSpPr txBox="1"/>
+          <p:nvPr/>
+        </p:nvSpPr>
+        <p:spPr>
+          <a:xfrm>
+            <a:off x="6858000" y="2560320"/>
+            <a:ext cx="1691640" cy="777240"/>
+          </a:xfrm>
+          <a:prstGeom prst="rect">
+            <a:avLst/>
+          </a:prstGeom>
+          <a:noFill/>
+          <a:ln/>
+        </p:spPr>
+        <p:txBody>
+          <a:bodyPr wrap="square" lIns="0" tIns="0" rIns="0" bIns="0" rtlCol="0" anchor="t"/>
+          <a:lstStyle/>
+          <a:p>
             <a:pPr indent="0" marL="0">
               <a:lnSpc>
-                <a:spcPts val="2000"/>
-              </a:lnSpc>
-              <a:buNone/>
-            </a:pPr>
-            <a:r>
-              <a:rPr lang="en-US" sz="1600" b="1" dirty="0">
-                <a:solidFill>
-                  <a:schemeClr val="tx2"/>
-                </a:solidFill>
-              </a:rPr>
-              <a:t>專項資質</a:t>
-            </a:r>
-            <a:endParaRPr lang="en-US" sz="1600" dirty="0"/>
-          </a:p>
-        </p:txBody>
-      </p:sp>
-      <p:sp>
-        <p:nvSpPr>
-          <p:cNvPr id="18" name="Text 12"/>
-          <p:cNvSpPr txBox="1"/>
-          <p:nvPr/>
-        </p:nvSpPr>
-        <p:spPr>
-          <a:xfrm>
-            <a:off x="5349240" y="1536192"/>
-            <a:ext cx="3291840" cy="594360"/>
-          </a:xfrm>
-          <a:prstGeom prst="rect">
-            <a:avLst/>
-          </a:prstGeom>
-          <a:noFill/>
-          <a:ln/>
-        </p:spPr>
-        <p:txBody>
-          <a:bodyPr wrap="square" lIns="0" tIns="0" rIns="0" bIns="0" rtlCol="0" anchor="t"/>
-          <a:lstStyle/>
-          <a:p>
-            <a:pPr indent="0" marL="0">
-              <a:lnSpc>
-                <a:spcPts val="1600"/>
-              </a:lnSpc>
-              <a:buNone/>
-            </a:pPr>
-            <a:r>
-              <a:rPr lang="en-US" sz="1300" dirty="0">
+                <a:spcPts val="1500"/>
+              </a:lnSpc>
+              <a:buNone/>
+            </a:pPr>
+            <a:r>
+              <a:rPr lang="en-US" sz="1200" dirty="0">
                 <a:solidFill>
                   <a:schemeClr val="tx1"/>
                 </a:solidFill>
               </a:rPr>
-              <a:t>按摩、理療、康復訓練或診療是否需專項資質與醫療機構許可</a:t>
-            </a:r>
-            <a:endParaRPr lang="en-US" sz="1300" dirty="0"/>
-          </a:p>
-        </p:txBody>
-      </p:sp>
-      <p:sp>
-        <p:nvSpPr>
-          <p:cNvPr id="19" name="宣傳用語 circle"/>
+              <a:t>退房前再測一次，與前測對照</a:t>
+            </a:r>
+            <a:endParaRPr lang="en-US" sz="1200" dirty="0"/>
+          </a:p>
+        </p:txBody>
+      </p:sp>
+      <p:sp>
+        <p:nvSpPr>
+          <p:cNvPr id="22" name="Report callout"/>
           <p:cNvSpPr/>
           <p:nvPr/>
         </p:nvSpPr>
         <p:spPr>
           <a:xfrm>
-            <a:off x="4663440" y="2286000"/>
-            <a:ext cx="502920" cy="502920"/>
-          </a:xfrm>
-          <a:prstGeom prst="ellipse">
-            <a:avLst/>
+            <a:off x="457200" y="3520440"/>
+            <a:ext cx="8229600" cy="914400"/>
+          </a:xfrm>
+          <a:prstGeom prst="roundRect">
+            <a:avLst>
+              <a:gd name="adj" fmla="val 8000"/>
+            </a:avLst>
           </a:prstGeom>
           <a:solidFill>
-            <a:srgbClr val="C07A4F"/>
+            <a:srgbClr val="2F4A3A"/>
           </a:solidFill>
           <a:ln w="12700">
             <a:solidFill>
-              <a:srgbClr val="C07A4F"/>
+              <a:srgbClr val="2F4A3A"/>
             </a:solidFill>
             <a:prstDash val="solid"/>
           </a:ln>
         </p:spPr>
       </p:sp>
-      <p:pic>
-        <p:nvPicPr>
-          <p:cNvPr id="20" name="宣傳用語 icon" descr="宣傳用語">    </p:cNvPr>
-          <p:cNvPicPr>
-            <a:picLocks noChangeAspect="1"/>
-          </p:cNvPicPr>
-          <p:nvPr/>
-        </p:nvPicPr>
-        <p:blipFill>
-          <a:blip r:embed="rId5"/>
-          <a:stretch>
-            <a:fillRect/>
-          </a:stretch>
-        </p:blipFill>
-        <p:spPr>
-          <a:xfrm>
-            <a:off x="4789170" y="2411730"/>
-            <a:ext cx="251460" cy="251460"/>
-          </a:xfrm>
-          <a:prstGeom prst="rect">
-            <a:avLst/>
-          </a:prstGeom>
-        </p:spPr>
-      </p:pic>
-      <p:sp>
-        <p:nvSpPr>
-          <p:cNvPr id="21" name="Text 14"/>
+      <p:sp>
+        <p:nvSpPr>
+          <p:cNvPr id="23" name="Text 14"/>
           <p:cNvSpPr txBox="1"/>
           <p:nvPr/>
         </p:nvSpPr>
         <p:spPr>
           <a:xfrm>
-            <a:off x="5349240" y="2240280"/>
-            <a:ext cx="3291840" cy="320040"/>
-          </a:xfrm>
-          <a:prstGeom prst="rect">
-            <a:avLst/>
-          </a:prstGeom>
-          <a:noFill/>
-          <a:ln/>
-        </p:spPr>
-        <p:txBody>
-          <a:bodyPr wrap="square" lIns="0" tIns="0" rIns="0" bIns="0" rtlCol="0" anchor="t"/>
+            <a:off x="731520" y="3520440"/>
+            <a:ext cx="2377440" cy="914400"/>
+          </a:xfrm>
+          <a:prstGeom prst="rect">
+            <a:avLst/>
+          </a:prstGeom>
+          <a:noFill/>
+          <a:ln/>
+        </p:spPr>
+        <p:txBody>
+          <a:bodyPr wrap="square" lIns="0" tIns="0" rIns="0" bIns="0" rtlCol="0" anchor="ctr"/>
           <a:lstStyle/>
           <a:p>
             <a:pPr indent="0" marL="0">
               <a:lnSpc>
-                <a:spcPts val="2000"/>
-              </a:lnSpc>
-              <a:buNone/>
-            </a:pPr>
-            <a:r>
-              <a:rPr lang="en-US" sz="1600" b="1" dirty="0">
-                <a:solidFill>
-                  <a:schemeClr val="tx2"/>
-                </a:solidFill>
-              </a:rPr>
-              <a:t>宣傳用語</a:t>
-            </a:r>
-            <a:endParaRPr lang="en-US" sz="1600" dirty="0"/>
-          </a:p>
-        </p:txBody>
-      </p:sp>
-      <p:sp>
-        <p:nvSpPr>
-          <p:cNvPr id="22" name="Text 15"/>
+                <a:spcPts val="2500"/>
+              </a:lnSpc>
+              <a:buNone/>
+            </a:pPr>
+            <a:r>
+              <a:rPr lang="en-US" sz="2000" b="1" dirty="0">
+                <a:solidFill>
+                  <a:schemeClr val="bg1"/>
+                </a:solidFill>
+              </a:rPr>
+              <a:t>「五日健康報告」</a:t>
+            </a:r>
+            <a:endParaRPr lang="en-US" sz="2000" dirty="0"/>
+          </a:p>
+        </p:txBody>
+      </p:sp>
+      <p:sp>
+        <p:nvSpPr>
+          <p:cNvPr id="24" name="Text 15"/>
           <p:cNvSpPr txBox="1"/>
           <p:nvPr/>
         </p:nvSpPr>
         <p:spPr>
           <a:xfrm>
-            <a:off x="5349240" y="2587752"/>
-            <a:ext cx="3291840" cy="594360"/>
-          </a:xfrm>
-          <a:prstGeom prst="rect">
-            <a:avLst/>
-          </a:prstGeom>
-          <a:noFill/>
-          <a:ln/>
-        </p:spPr>
-        <p:txBody>
-          <a:bodyPr wrap="square" lIns="0" tIns="0" rIns="0" bIns="0" rtlCol="0" anchor="t"/>
+            <a:off x="3200400" y="3520440"/>
+            <a:ext cx="5303520" cy="914400"/>
+          </a:xfrm>
+          <a:prstGeom prst="rect">
+            <a:avLst/>
+          </a:prstGeom>
+          <a:noFill/>
+          <a:ln/>
+        </p:spPr>
+        <p:txBody>
+          <a:bodyPr wrap="square" lIns="0" tIns="0" rIns="0" bIns="0" rtlCol="0" anchor="ctr"/>
           <a:lstStyle/>
           <a:p>
             <a:pPr indent="0" marL="0">
               <a:lnSpc>
-                <a:spcPts val="1600"/>
-              </a:lnSpc>
-              <a:buNone/>
-            </a:pPr>
-            <a:r>
-              <a:rPr lang="en-US" sz="1300" dirty="0">
-                <a:solidFill>
-                  <a:schemeClr val="tx1"/>
-                </a:solidFill>
-              </a:rPr>
-              <a:t>宣稱治療失眠、抑鬱、疼痛等是否符合法規</a:t>
-            </a:r>
-            <a:endParaRPr lang="en-US" sz="1300" dirty="0"/>
-          </a:p>
-        </p:txBody>
-      </p:sp>
-      <p:sp>
-        <p:nvSpPr>
-          <p:cNvPr id="23" name="Key reminder"/>
-          <p:cNvSpPr/>
-          <p:nvPr/>
-        </p:nvSpPr>
-        <p:spPr>
-          <a:xfrm>
-            <a:off x="4663440" y="3291840"/>
-            <a:ext cx="4023360" cy="1143000"/>
-          </a:xfrm>
-          <a:prstGeom prst="roundRect">
-            <a:avLst>
-              <a:gd name="adj" fmla="val 6400"/>
-            </a:avLst>
-          </a:prstGeom>
-          <a:solidFill>
-            <a:srgbClr val="EEF3EC"/>
-          </a:solidFill>
-          <a:ln w="12700">
-            <a:solidFill>
-              <a:srgbClr val="EEF3EC"/>
-            </a:solidFill>
-            <a:prstDash val="solid"/>
-          </a:ln>
-        </p:spPr>
-      </p:sp>
-      <p:sp>
-        <p:nvSpPr>
-          <p:cNvPr id="24" name="Text 17"/>
-          <p:cNvSpPr txBox="1"/>
-          <p:nvPr/>
-        </p:nvSpPr>
-        <p:spPr>
-          <a:xfrm>
-            <a:off x="4892040" y="3429000"/>
-            <a:ext cx="3611880" cy="868680"/>
-          </a:xfrm>
-          <a:prstGeom prst="rect">
-            <a:avLst/>
-          </a:prstGeom>
-          <a:noFill/>
-          <a:ln/>
-        </p:spPr>
-        <p:txBody>
-          <a:bodyPr wrap="square" lIns="0" tIns="0" rIns="0" bIns="0" rtlCol="0" anchor="ctr"/>
-          <a:lstStyle/>
-          <a:p>
-            <a:pPr indent="0" marL="0">
-              <a:lnSpc>
                 <a:spcPts val="1800"/>
               </a:lnSpc>
               <a:buNone/>
             </a:pPr>
             <a:r>
-              <a:rPr lang="en-US" sz="1400" b="1" dirty="0">
-                <a:solidFill>
-                  <a:schemeClr val="tx2"/>
-                </a:solidFill>
-              </a:rPr>
-              <a:t>未具備相應資質，不應自行提供診療，也不以治療疾病作為行銷承諾。</a:t>
+              <a:rPr lang="en-US" sz="1400" dirty="0">
+                <a:solidFill>
+                  <a:schemeClr val="accent4"/>
+                </a:solidFill>
+              </a:rPr>
+              <a:t>前後測對照，讓學員看見五天的變化——是口碑與回購的關鍵。</a:t>
             </a:r>
             <a:endParaRPr lang="en-US" sz="1400" dirty="0"/>
           </a:p>
@@ -3579,30 +3223,1542 @@
                   <a:schemeClr val="tx2"/>
                 </a:solidFill>
               </a:rPr>
-              <a:t>建議的開業順序</a:t>
+              <a:t>5 天 4 夜行程</a:t>
             </a:r>
             <a:endParaRPr lang="en-US" sz="2800" dirty="0"/>
           </a:p>
         </p:txBody>
       </p:sp>
-      <p:sp>
-        <p:nvSpPr>
-          <p:cNvPr id="3" name="Timeline"/>
+      <p:graphicFrame>
+        <p:nvGraphicFramePr>
+          <p:cNvPr id="12" name="Table 0"/>
+          <p:cNvGraphicFramePr>
+            <a:graphicFrameLocks noGrp="1"/>
+          </p:cNvGraphicFramePr>
+          <p:nvPr>
+            <p:extLst>
+              <p:ext uri="{D42A27DB-BD31-4B8C-83A1-F6EECF244321}">
+                <p14:modId xmlns:p14="http://schemas.microsoft.com/office/powerpoint/2010/main" val="1579011935"/>
+              </p:ext>
+            </p:extLst>
+          </p:nvPr>
+        </p:nvGraphicFramePr>
+        <p:xfrm>
+          <a:off x="457200" y="1188720"/>
+          <a:ext cx="5394960" cy="914400"/>
+        </p:xfrm>
+        <a:graphic>
+          <a:graphicData uri="http://schemas.openxmlformats.org/drawingml/2006/table">
+            <a:tbl>
+              <a:tblPr/>
+              <a:tblGrid>
+                <a:gridCol w="1143000"/>
+                <a:gridCol w="1188720"/>
+                <a:gridCol w="1051560"/>
+                <a:gridCol w="2011680"/>
+              </a:tblGrid>
+              <a:tr h="530352">
+                <a:tc>
+                  <a:txBody>
+                    <a:bodyPr/>
+                    <a:lstStyle/>
+                    <a:p>
+                      <a:pPr indent="0" marL="0">
+                        <a:buNone/>
+                      </a:pPr>
+                      <a:r>
+                        <a:rPr lang="en-US" sz="1300" b="1" dirty="0">
+                          <a:solidFill>
+                            <a:schemeClr val="bg1"/>
+                          </a:solidFill>
+                        </a:rPr>
+                        <a:t>天</a:t>
+                      </a:r>
+                      <a:endParaRPr lang="en-US" sz="1300" dirty="0"/>
+                    </a:p>
+                  </a:txBody>
+                  <a:tcPr marL="73152" marR="73152" marT="27432" marB="27432" anchor="ctr">
+                    <a:lnL w="9525" cap="flat" cmpd="sng" algn="ctr">
+                      <a:solidFill>
+                        <a:srgbClr val="D5DED2"/>
+                      </a:solidFill>
+                      <a:prstDash val="solid"/>
+                      <a:round/>
+                      <a:headEnd type="none" w="med" len="med"/>
+                      <a:tailEnd type="none" w="med" len="med"/>
+                    </a:lnL>
+                    <a:lnR w="9525" cap="flat" cmpd="sng" algn="ctr">
+                      <a:solidFill>
+                        <a:srgbClr val="D5DED2"/>
+                      </a:solidFill>
+                      <a:prstDash val="solid"/>
+                      <a:round/>
+                      <a:headEnd type="none" w="med" len="med"/>
+                      <a:tailEnd type="none" w="med" len="med"/>
+                    </a:lnR>
+                    <a:lnT w="9525" cap="flat" cmpd="sng" algn="ctr">
+                      <a:solidFill>
+                        <a:srgbClr val="D5DED2"/>
+                      </a:solidFill>
+                      <a:prstDash val="solid"/>
+                      <a:round/>
+                      <a:headEnd type="none" w="med" len="med"/>
+                      <a:tailEnd type="none" w="med" len="med"/>
+                    </a:lnT>
+                    <a:lnB w="9525" cap="flat" cmpd="sng" algn="ctr">
+                      <a:solidFill>
+                        <a:srgbClr val="D5DED2"/>
+                      </a:solidFill>
+                      <a:prstDash val="solid"/>
+                      <a:round/>
+                      <a:headEnd type="none" w="med" len="med"/>
+                      <a:tailEnd type="none" w="med" len="med"/>
+                    </a:lnB>
+                    <a:solidFill>
+                      <a:srgbClr val="2F4A3A"/>
+                    </a:solidFill>
+                  </a:tcPr>
+                </a:tc>
+                <a:tc>
+                  <a:txBody>
+                    <a:bodyPr/>
+                    <a:lstStyle/>
+                    <a:p>
+                      <a:pPr indent="0" marL="0">
+                        <a:buNone/>
+                      </a:pPr>
+                      <a:r>
+                        <a:rPr lang="en-US" sz="1300" b="1" dirty="0">
+                          <a:solidFill>
+                            <a:schemeClr val="bg1"/>
+                          </a:solidFill>
+                        </a:rPr>
+                        <a:t>主題</a:t>
+                      </a:r>
+                      <a:endParaRPr lang="en-US" sz="1300" dirty="0"/>
+                    </a:p>
+                  </a:txBody>
+                  <a:tcPr marL="73152" marR="73152" marT="27432" marB="27432" anchor="ctr">
+                    <a:lnL w="9525" cap="flat" cmpd="sng" algn="ctr">
+                      <a:solidFill>
+                        <a:srgbClr val="D5DED2"/>
+                      </a:solidFill>
+                      <a:prstDash val="solid"/>
+                      <a:round/>
+                      <a:headEnd type="none" w="med" len="med"/>
+                      <a:tailEnd type="none" w="med" len="med"/>
+                    </a:lnL>
+                    <a:lnR w="9525" cap="flat" cmpd="sng" algn="ctr">
+                      <a:solidFill>
+                        <a:srgbClr val="D5DED2"/>
+                      </a:solidFill>
+                      <a:prstDash val="solid"/>
+                      <a:round/>
+                      <a:headEnd type="none" w="med" len="med"/>
+                      <a:tailEnd type="none" w="med" len="med"/>
+                    </a:lnR>
+                    <a:lnT w="9525" cap="flat" cmpd="sng" algn="ctr">
+                      <a:solidFill>
+                        <a:srgbClr val="D5DED2"/>
+                      </a:solidFill>
+                      <a:prstDash val="solid"/>
+                      <a:round/>
+                      <a:headEnd type="none" w="med" len="med"/>
+                      <a:tailEnd type="none" w="med" len="med"/>
+                    </a:lnT>
+                    <a:lnB w="9525" cap="flat" cmpd="sng" algn="ctr">
+                      <a:solidFill>
+                        <a:srgbClr val="D5DED2"/>
+                      </a:solidFill>
+                      <a:prstDash val="solid"/>
+                      <a:round/>
+                      <a:headEnd type="none" w="med" len="med"/>
+                      <a:tailEnd type="none" w="med" len="med"/>
+                    </a:lnB>
+                    <a:solidFill>
+                      <a:srgbClr val="2F4A3A"/>
+                    </a:solidFill>
+                  </a:tcPr>
+                </a:tc>
+                <a:tc>
+                  <a:txBody>
+                    <a:bodyPr/>
+                    <a:lstStyle/>
+                    <a:p>
+                      <a:pPr indent="0" marL="0">
+                        <a:buNone/>
+                      </a:pPr>
+                      <a:r>
+                        <a:rPr lang="en-US" sz="1300" b="1" dirty="0">
+                          <a:solidFill>
+                            <a:schemeClr val="bg1"/>
+                          </a:solidFill>
+                        </a:rPr>
+                        <a:t>清晨 6:30</a:t>
+                      </a:r>
+                      <a:endParaRPr lang="en-US" sz="1300" dirty="0"/>
+                    </a:p>
+                  </a:txBody>
+                  <a:tcPr marL="73152" marR="73152" marT="27432" marB="27432" anchor="ctr">
+                    <a:lnL w="9525" cap="flat" cmpd="sng" algn="ctr">
+                      <a:solidFill>
+                        <a:srgbClr val="D5DED2"/>
+                      </a:solidFill>
+                      <a:prstDash val="solid"/>
+                      <a:round/>
+                      <a:headEnd type="none" w="med" len="med"/>
+                      <a:tailEnd type="none" w="med" len="med"/>
+                    </a:lnL>
+                    <a:lnR w="9525" cap="flat" cmpd="sng" algn="ctr">
+                      <a:solidFill>
+                        <a:srgbClr val="D5DED2"/>
+                      </a:solidFill>
+                      <a:prstDash val="solid"/>
+                      <a:round/>
+                      <a:headEnd type="none" w="med" len="med"/>
+                      <a:tailEnd type="none" w="med" len="med"/>
+                    </a:lnR>
+                    <a:lnT w="9525" cap="flat" cmpd="sng" algn="ctr">
+                      <a:solidFill>
+                        <a:srgbClr val="D5DED2"/>
+                      </a:solidFill>
+                      <a:prstDash val="solid"/>
+                      <a:round/>
+                      <a:headEnd type="none" w="med" len="med"/>
+                      <a:tailEnd type="none" w="med" len="med"/>
+                    </a:lnT>
+                    <a:lnB w="9525" cap="flat" cmpd="sng" algn="ctr">
+                      <a:solidFill>
+                        <a:srgbClr val="D5DED2"/>
+                      </a:solidFill>
+                      <a:prstDash val="solid"/>
+                      <a:round/>
+                      <a:headEnd type="none" w="med" len="med"/>
+                      <a:tailEnd type="none" w="med" len="med"/>
+                    </a:lnB>
+                    <a:solidFill>
+                      <a:srgbClr val="2F4A3A"/>
+                    </a:solidFill>
+                  </a:tcPr>
+                </a:tc>
+                <a:tc>
+                  <a:txBody>
+                    <a:bodyPr/>
+                    <a:lstStyle/>
+                    <a:p>
+                      <a:pPr indent="0" marL="0">
+                        <a:buNone/>
+                      </a:pPr>
+                      <a:r>
+                        <a:rPr lang="en-US" sz="1300" b="1" dirty="0">
+                          <a:solidFill>
+                            <a:schemeClr val="bg1"/>
+                          </a:solidFill>
+                        </a:rPr>
+                        <a:t>上午</a:t>
+                      </a:r>
+                      <a:endParaRPr lang="en-US" sz="1300" dirty="0"/>
+                    </a:p>
+                  </a:txBody>
+                  <a:tcPr marL="73152" marR="73152" marT="27432" marB="27432" anchor="ctr">
+                    <a:lnL w="9525" cap="flat" cmpd="sng" algn="ctr">
+                      <a:solidFill>
+                        <a:srgbClr val="D5DED2"/>
+                      </a:solidFill>
+                      <a:prstDash val="solid"/>
+                      <a:round/>
+                      <a:headEnd type="none" w="med" len="med"/>
+                      <a:tailEnd type="none" w="med" len="med"/>
+                    </a:lnL>
+                    <a:lnR w="9525" cap="flat" cmpd="sng" algn="ctr">
+                      <a:solidFill>
+                        <a:srgbClr val="D5DED2"/>
+                      </a:solidFill>
+                      <a:prstDash val="solid"/>
+                      <a:round/>
+                      <a:headEnd type="none" w="med" len="med"/>
+                      <a:tailEnd type="none" w="med" len="med"/>
+                    </a:lnR>
+                    <a:lnT w="9525" cap="flat" cmpd="sng" algn="ctr">
+                      <a:solidFill>
+                        <a:srgbClr val="D5DED2"/>
+                      </a:solidFill>
+                      <a:prstDash val="solid"/>
+                      <a:round/>
+                      <a:headEnd type="none" w="med" len="med"/>
+                      <a:tailEnd type="none" w="med" len="med"/>
+                    </a:lnT>
+                    <a:lnB w="9525" cap="flat" cmpd="sng" algn="ctr">
+                      <a:solidFill>
+                        <a:srgbClr val="D5DED2"/>
+                      </a:solidFill>
+                      <a:prstDash val="solid"/>
+                      <a:round/>
+                      <a:headEnd type="none" w="med" len="med"/>
+                      <a:tailEnd type="none" w="med" len="med"/>
+                    </a:lnB>
+                    <a:solidFill>
+                      <a:srgbClr val="2F4A3A"/>
+                    </a:solidFill>
+                  </a:tcPr>
+                </a:tc>
+              </a:tr>
+              <a:tr h="530352">
+                <a:tc>
+                  <a:txBody>
+                    <a:bodyPr/>
+                    <a:lstStyle/>
+                    <a:p>
+                      <a:pPr indent="0" marL="0">
+                        <a:buNone/>
+                      </a:pPr>
+                      <a:r>
+                        <a:rPr lang="en-US" sz="1300" dirty="0">
+                          <a:solidFill>
+                            <a:schemeClr val="tx1"/>
+                          </a:solidFill>
+                        </a:rPr>
+                        <a:t>D1（週一）</a:t>
+                      </a:r>
+                      <a:endParaRPr lang="en-US" sz="1300" dirty="0"/>
+                    </a:p>
+                  </a:txBody>
+                  <a:tcPr marL="73152" marR="73152" marT="27432" marB="27432" anchor="ctr">
+                    <a:lnL w="9525" cap="flat" cmpd="sng" algn="ctr">
+                      <a:solidFill>
+                        <a:srgbClr val="D5DED2"/>
+                      </a:solidFill>
+                      <a:prstDash val="solid"/>
+                      <a:round/>
+                      <a:headEnd type="none" w="med" len="med"/>
+                      <a:tailEnd type="none" w="med" len="med"/>
+                    </a:lnL>
+                    <a:lnR w="9525" cap="flat" cmpd="sng" algn="ctr">
+                      <a:solidFill>
+                        <a:srgbClr val="D5DED2"/>
+                      </a:solidFill>
+                      <a:prstDash val="solid"/>
+                      <a:round/>
+                      <a:headEnd type="none" w="med" len="med"/>
+                      <a:tailEnd type="none" w="med" len="med"/>
+                    </a:lnR>
+                    <a:lnT w="9525" cap="flat" cmpd="sng" algn="ctr">
+                      <a:solidFill>
+                        <a:srgbClr val="D5DED2"/>
+                      </a:solidFill>
+                      <a:prstDash val="solid"/>
+                      <a:round/>
+                      <a:headEnd type="none" w="med" len="med"/>
+                      <a:tailEnd type="none" w="med" len="med"/>
+                    </a:lnT>
+                    <a:lnB w="9525" cap="flat" cmpd="sng" algn="ctr">
+                      <a:solidFill>
+                        <a:srgbClr val="D5DED2"/>
+                      </a:solidFill>
+                      <a:prstDash val="solid"/>
+                      <a:round/>
+                      <a:headEnd type="none" w="med" len="med"/>
+                      <a:tailEnd type="none" w="med" len="med"/>
+                    </a:lnB>
+                    <a:solidFill>
+                      <a:srgbClr val="FFFFFF"/>
+                    </a:solidFill>
+                  </a:tcPr>
+                </a:tc>
+                <a:tc>
+                  <a:txBody>
+                    <a:bodyPr/>
+                    <a:lstStyle/>
+                    <a:p>
+                      <a:pPr indent="0" marL="0">
+                        <a:buNone/>
+                      </a:pPr>
+                      <a:r>
+                        <a:rPr lang="en-US" sz="1300" dirty="0">
+                          <a:solidFill>
+                            <a:schemeClr val="tx1"/>
+                          </a:solidFill>
+                        </a:rPr>
+                        <a:t>入住與評估</a:t>
+                      </a:r>
+                      <a:endParaRPr lang="en-US" sz="1300" dirty="0"/>
+                    </a:p>
+                  </a:txBody>
+                  <a:tcPr marL="73152" marR="73152" marT="27432" marB="27432" anchor="ctr">
+                    <a:lnL w="9525" cap="flat" cmpd="sng" algn="ctr">
+                      <a:solidFill>
+                        <a:srgbClr val="D5DED2"/>
+                      </a:solidFill>
+                      <a:prstDash val="solid"/>
+                      <a:round/>
+                      <a:headEnd type="none" w="med" len="med"/>
+                      <a:tailEnd type="none" w="med" len="med"/>
+                    </a:lnL>
+                    <a:lnR w="9525" cap="flat" cmpd="sng" algn="ctr">
+                      <a:solidFill>
+                        <a:srgbClr val="D5DED2"/>
+                      </a:solidFill>
+                      <a:prstDash val="solid"/>
+                      <a:round/>
+                      <a:headEnd type="none" w="med" len="med"/>
+                      <a:tailEnd type="none" w="med" len="med"/>
+                    </a:lnR>
+                    <a:lnT w="9525" cap="flat" cmpd="sng" algn="ctr">
+                      <a:solidFill>
+                        <a:srgbClr val="D5DED2"/>
+                      </a:solidFill>
+                      <a:prstDash val="solid"/>
+                      <a:round/>
+                      <a:headEnd type="none" w="med" len="med"/>
+                      <a:tailEnd type="none" w="med" len="med"/>
+                    </a:lnT>
+                    <a:lnB w="9525" cap="flat" cmpd="sng" algn="ctr">
+                      <a:solidFill>
+                        <a:srgbClr val="D5DED2"/>
+                      </a:solidFill>
+                      <a:prstDash val="solid"/>
+                      <a:round/>
+                      <a:headEnd type="none" w="med" len="med"/>
+                      <a:tailEnd type="none" w="med" len="med"/>
+                    </a:lnB>
+                    <a:solidFill>
+                      <a:srgbClr val="FFFFFF"/>
+                    </a:solidFill>
+                  </a:tcPr>
+                </a:tc>
+                <a:tc>
+                  <a:txBody>
+                    <a:bodyPr/>
+                    <a:lstStyle/>
+                    <a:p>
+                      <a:pPr indent="0" marL="0">
+                        <a:buNone/>
+                      </a:pPr>
+                      <a:r>
+                        <a:rPr lang="en-US" sz="1300" dirty="0">
+                          <a:solidFill>
+                            <a:schemeClr val="tx1"/>
+                          </a:solidFill>
+                        </a:rPr>
+                        <a:t>—</a:t>
+                      </a:r>
+                      <a:endParaRPr lang="en-US" sz="1300" dirty="0"/>
+                    </a:p>
+                  </a:txBody>
+                  <a:tcPr marL="73152" marR="73152" marT="27432" marB="27432" anchor="ctr">
+                    <a:lnL w="9525" cap="flat" cmpd="sng" algn="ctr">
+                      <a:solidFill>
+                        <a:srgbClr val="D5DED2"/>
+                      </a:solidFill>
+                      <a:prstDash val="solid"/>
+                      <a:round/>
+                      <a:headEnd type="none" w="med" len="med"/>
+                      <a:tailEnd type="none" w="med" len="med"/>
+                    </a:lnL>
+                    <a:lnR w="9525" cap="flat" cmpd="sng" algn="ctr">
+                      <a:solidFill>
+                        <a:srgbClr val="D5DED2"/>
+                      </a:solidFill>
+                      <a:prstDash val="solid"/>
+                      <a:round/>
+                      <a:headEnd type="none" w="med" len="med"/>
+                      <a:tailEnd type="none" w="med" len="med"/>
+                    </a:lnR>
+                    <a:lnT w="9525" cap="flat" cmpd="sng" algn="ctr">
+                      <a:solidFill>
+                        <a:srgbClr val="D5DED2"/>
+                      </a:solidFill>
+                      <a:prstDash val="solid"/>
+                      <a:round/>
+                      <a:headEnd type="none" w="med" len="med"/>
+                      <a:tailEnd type="none" w="med" len="med"/>
+                    </a:lnT>
+                    <a:lnB w="9525" cap="flat" cmpd="sng" algn="ctr">
+                      <a:solidFill>
+                        <a:srgbClr val="D5DED2"/>
+                      </a:solidFill>
+                      <a:prstDash val="solid"/>
+                      <a:round/>
+                      <a:headEnd type="none" w="med" len="med"/>
+                      <a:tailEnd type="none" w="med" len="med"/>
+                    </a:lnB>
+                    <a:solidFill>
+                      <a:srgbClr val="FFFFFF"/>
+                    </a:solidFill>
+                  </a:tcPr>
+                </a:tc>
+                <a:tc>
+                  <a:txBody>
+                    <a:bodyPr/>
+                    <a:lstStyle/>
+                    <a:p>
+                      <a:pPr indent="0" marL="0">
+                        <a:buNone/>
+                      </a:pPr>
+                      <a:r>
+                        <a:rPr lang="en-US" sz="1300" dirty="0">
+                          <a:solidFill>
+                            <a:schemeClr val="tx1"/>
+                          </a:solidFill>
+                        </a:rPr>
+                        <a:t>11:00 報到、入住前測</a:t>
+                      </a:r>
+                      <a:endParaRPr lang="en-US" sz="1300" dirty="0"/>
+                    </a:p>
+                  </a:txBody>
+                  <a:tcPr marL="73152" marR="73152" marT="27432" marB="27432" anchor="ctr">
+                    <a:lnL w="9525" cap="flat" cmpd="sng" algn="ctr">
+                      <a:solidFill>
+                        <a:srgbClr val="D5DED2"/>
+                      </a:solidFill>
+                      <a:prstDash val="solid"/>
+                      <a:round/>
+                      <a:headEnd type="none" w="med" len="med"/>
+                      <a:tailEnd type="none" w="med" len="med"/>
+                    </a:lnL>
+                    <a:lnR w="9525" cap="flat" cmpd="sng" algn="ctr">
+                      <a:solidFill>
+                        <a:srgbClr val="D5DED2"/>
+                      </a:solidFill>
+                      <a:prstDash val="solid"/>
+                      <a:round/>
+                      <a:headEnd type="none" w="med" len="med"/>
+                      <a:tailEnd type="none" w="med" len="med"/>
+                    </a:lnR>
+                    <a:lnT w="9525" cap="flat" cmpd="sng" algn="ctr">
+                      <a:solidFill>
+                        <a:srgbClr val="D5DED2"/>
+                      </a:solidFill>
+                      <a:prstDash val="solid"/>
+                      <a:round/>
+                      <a:headEnd type="none" w="med" len="med"/>
+                      <a:tailEnd type="none" w="med" len="med"/>
+                    </a:lnT>
+                    <a:lnB w="9525" cap="flat" cmpd="sng" algn="ctr">
+                      <a:solidFill>
+                        <a:srgbClr val="D5DED2"/>
+                      </a:solidFill>
+                      <a:prstDash val="solid"/>
+                      <a:round/>
+                      <a:headEnd type="none" w="med" len="med"/>
+                      <a:tailEnd type="none" w="med" len="med"/>
+                    </a:lnB>
+                    <a:solidFill>
+                      <a:srgbClr val="FFFFFF"/>
+                    </a:solidFill>
+                  </a:tcPr>
+                </a:tc>
+              </a:tr>
+              <a:tr h="530352">
+                <a:tc>
+                  <a:txBody>
+                    <a:bodyPr/>
+                    <a:lstStyle/>
+                    <a:p>
+                      <a:pPr indent="0" marL="0">
+                        <a:buNone/>
+                      </a:pPr>
+                      <a:r>
+                        <a:rPr lang="en-US" sz="1300" dirty="0">
+                          <a:solidFill>
+                            <a:schemeClr val="tx1"/>
+                          </a:solidFill>
+                        </a:rPr>
+                        <a:t>D2（週二）</a:t>
+                      </a:r>
+                      <a:endParaRPr lang="en-US" sz="1300" dirty="0"/>
+                    </a:p>
+                  </a:txBody>
+                  <a:tcPr marL="73152" marR="73152" marT="27432" marB="27432" anchor="ctr">
+                    <a:lnL w="9525" cap="flat" cmpd="sng" algn="ctr">
+                      <a:solidFill>
+                        <a:srgbClr val="D5DED2"/>
+                      </a:solidFill>
+                      <a:prstDash val="solid"/>
+                      <a:round/>
+                      <a:headEnd type="none" w="med" len="med"/>
+                      <a:tailEnd type="none" w="med" len="med"/>
+                    </a:lnL>
+                    <a:lnR w="9525" cap="flat" cmpd="sng" algn="ctr">
+                      <a:solidFill>
+                        <a:srgbClr val="D5DED2"/>
+                      </a:solidFill>
+                      <a:prstDash val="solid"/>
+                      <a:round/>
+                      <a:headEnd type="none" w="med" len="med"/>
+                      <a:tailEnd type="none" w="med" len="med"/>
+                    </a:lnR>
+                    <a:lnT w="9525" cap="flat" cmpd="sng" algn="ctr">
+                      <a:solidFill>
+                        <a:srgbClr val="D5DED2"/>
+                      </a:solidFill>
+                      <a:prstDash val="solid"/>
+                      <a:round/>
+                      <a:headEnd type="none" w="med" len="med"/>
+                      <a:tailEnd type="none" w="med" len="med"/>
+                    </a:lnT>
+                    <a:lnB w="9525" cap="flat" cmpd="sng" algn="ctr">
+                      <a:solidFill>
+                        <a:srgbClr val="D5DED2"/>
+                      </a:solidFill>
+                      <a:prstDash val="solid"/>
+                      <a:round/>
+                      <a:headEnd type="none" w="med" len="med"/>
+                      <a:tailEnd type="none" w="med" len="med"/>
+                    </a:lnB>
+                    <a:solidFill>
+                      <a:srgbClr val="EEF3EC"/>
+                    </a:solidFill>
+                  </a:tcPr>
+                </a:tc>
+                <a:tc>
+                  <a:txBody>
+                    <a:bodyPr/>
+                    <a:lstStyle/>
+                    <a:p>
+                      <a:pPr indent="0" marL="0">
+                        <a:buNone/>
+                      </a:pPr>
+                      <a:r>
+                        <a:rPr lang="en-US" sz="1300" dirty="0">
+                          <a:solidFill>
+                            <a:schemeClr val="tx1"/>
+                          </a:solidFill>
+                        </a:rPr>
+                        <a:t>放下</a:t>
+                      </a:r>
+                      <a:endParaRPr lang="en-US" sz="1300" dirty="0"/>
+                    </a:p>
+                  </a:txBody>
+                  <a:tcPr marL="73152" marR="73152" marT="27432" marB="27432" anchor="ctr">
+                    <a:lnL w="9525" cap="flat" cmpd="sng" algn="ctr">
+                      <a:solidFill>
+                        <a:srgbClr val="D5DED2"/>
+                      </a:solidFill>
+                      <a:prstDash val="solid"/>
+                      <a:round/>
+                      <a:headEnd type="none" w="med" len="med"/>
+                      <a:tailEnd type="none" w="med" len="med"/>
+                    </a:lnL>
+                    <a:lnR w="9525" cap="flat" cmpd="sng" algn="ctr">
+                      <a:solidFill>
+                        <a:srgbClr val="D5DED2"/>
+                      </a:solidFill>
+                      <a:prstDash val="solid"/>
+                      <a:round/>
+                      <a:headEnd type="none" w="med" len="med"/>
+                      <a:tailEnd type="none" w="med" len="med"/>
+                    </a:lnR>
+                    <a:lnT w="9525" cap="flat" cmpd="sng" algn="ctr">
+                      <a:solidFill>
+                        <a:srgbClr val="D5DED2"/>
+                      </a:solidFill>
+                      <a:prstDash val="solid"/>
+                      <a:round/>
+                      <a:headEnd type="none" w="med" len="med"/>
+                      <a:tailEnd type="none" w="med" len="med"/>
+                    </a:lnT>
+                    <a:lnB w="9525" cap="flat" cmpd="sng" algn="ctr">
+                      <a:solidFill>
+                        <a:srgbClr val="D5DED2"/>
+                      </a:solidFill>
+                      <a:prstDash val="solid"/>
+                      <a:round/>
+                      <a:headEnd type="none" w="med" len="med"/>
+                      <a:tailEnd type="none" w="med" len="med"/>
+                    </a:lnB>
+                    <a:solidFill>
+                      <a:srgbClr val="EEF3EC"/>
+                    </a:solidFill>
+                  </a:tcPr>
+                </a:tc>
+                <a:tc>
+                  <a:txBody>
+                    <a:bodyPr/>
+                    <a:lstStyle/>
+                    <a:p>
+                      <a:pPr indent="0" marL="0">
+                        <a:buNone/>
+                      </a:pPr>
+                      <a:r>
+                        <a:rPr lang="en-US" sz="1300" dirty="0">
+                          <a:solidFill>
+                            <a:schemeClr val="tx1"/>
+                          </a:solidFill>
+                        </a:rPr>
+                        <a:t>太極拳</a:t>
+                      </a:r>
+                      <a:endParaRPr lang="en-US" sz="1300" dirty="0"/>
+                    </a:p>
+                  </a:txBody>
+                  <a:tcPr marL="73152" marR="73152" marT="27432" marB="27432" anchor="ctr">
+                    <a:lnL w="9525" cap="flat" cmpd="sng" algn="ctr">
+                      <a:solidFill>
+                        <a:srgbClr val="D5DED2"/>
+                      </a:solidFill>
+                      <a:prstDash val="solid"/>
+                      <a:round/>
+                      <a:headEnd type="none" w="med" len="med"/>
+                      <a:tailEnd type="none" w="med" len="med"/>
+                    </a:lnL>
+                    <a:lnR w="9525" cap="flat" cmpd="sng" algn="ctr">
+                      <a:solidFill>
+                        <a:srgbClr val="D5DED2"/>
+                      </a:solidFill>
+                      <a:prstDash val="solid"/>
+                      <a:round/>
+                      <a:headEnd type="none" w="med" len="med"/>
+                      <a:tailEnd type="none" w="med" len="med"/>
+                    </a:lnR>
+                    <a:lnT w="9525" cap="flat" cmpd="sng" algn="ctr">
+                      <a:solidFill>
+                        <a:srgbClr val="D5DED2"/>
+                      </a:solidFill>
+                      <a:prstDash val="solid"/>
+                      <a:round/>
+                      <a:headEnd type="none" w="med" len="med"/>
+                      <a:tailEnd type="none" w="med" len="med"/>
+                    </a:lnT>
+                    <a:lnB w="9525" cap="flat" cmpd="sng" algn="ctr">
+                      <a:solidFill>
+                        <a:srgbClr val="D5DED2"/>
+                      </a:solidFill>
+                      <a:prstDash val="solid"/>
+                      <a:round/>
+                      <a:headEnd type="none" w="med" len="med"/>
+                      <a:tailEnd type="none" w="med" len="med"/>
+                    </a:lnB>
+                    <a:solidFill>
+                      <a:srgbClr val="EEF3EC"/>
+                    </a:solidFill>
+                  </a:tcPr>
+                </a:tc>
+                <a:tc>
+                  <a:txBody>
+                    <a:bodyPr/>
+                    <a:lstStyle/>
+                    <a:p>
+                      <a:pPr indent="0" marL="0">
+                        <a:buNone/>
+                      </a:pPr>
+                      <a:r>
+                        <a:rPr lang="en-US" sz="1300" dirty="0">
+                          <a:solidFill>
+                            <a:schemeClr val="tx1"/>
+                          </a:solidFill>
+                        </a:rPr>
+                        <a:t>海邊／森林步道</a:t>
+                      </a:r>
+                      <a:endParaRPr lang="en-US" sz="1300" dirty="0"/>
+                    </a:p>
+                  </a:txBody>
+                  <a:tcPr marL="73152" marR="73152" marT="27432" marB="27432" anchor="ctr">
+                    <a:lnL w="9525" cap="flat" cmpd="sng" algn="ctr">
+                      <a:solidFill>
+                        <a:srgbClr val="D5DED2"/>
+                      </a:solidFill>
+                      <a:prstDash val="solid"/>
+                      <a:round/>
+                      <a:headEnd type="none" w="med" len="med"/>
+                      <a:tailEnd type="none" w="med" len="med"/>
+                    </a:lnL>
+                    <a:lnR w="9525" cap="flat" cmpd="sng" algn="ctr">
+                      <a:solidFill>
+                        <a:srgbClr val="D5DED2"/>
+                      </a:solidFill>
+                      <a:prstDash val="solid"/>
+                      <a:round/>
+                      <a:headEnd type="none" w="med" len="med"/>
+                      <a:tailEnd type="none" w="med" len="med"/>
+                    </a:lnR>
+                    <a:lnT w="9525" cap="flat" cmpd="sng" algn="ctr">
+                      <a:solidFill>
+                        <a:srgbClr val="D5DED2"/>
+                      </a:solidFill>
+                      <a:prstDash val="solid"/>
+                      <a:round/>
+                      <a:headEnd type="none" w="med" len="med"/>
+                      <a:tailEnd type="none" w="med" len="med"/>
+                    </a:lnT>
+                    <a:lnB w="9525" cap="flat" cmpd="sng" algn="ctr">
+                      <a:solidFill>
+                        <a:srgbClr val="D5DED2"/>
+                      </a:solidFill>
+                      <a:prstDash val="solid"/>
+                      <a:round/>
+                      <a:headEnd type="none" w="med" len="med"/>
+                      <a:tailEnd type="none" w="med" len="med"/>
+                    </a:lnB>
+                    <a:solidFill>
+                      <a:srgbClr val="EEF3EC"/>
+                    </a:solidFill>
+                  </a:tcPr>
+                </a:tc>
+              </a:tr>
+              <a:tr h="530352">
+                <a:tc>
+                  <a:txBody>
+                    <a:bodyPr/>
+                    <a:lstStyle/>
+                    <a:p>
+                      <a:pPr indent="0" marL="0">
+                        <a:buNone/>
+                      </a:pPr>
+                      <a:r>
+                        <a:rPr lang="en-US" sz="1300" dirty="0">
+                          <a:solidFill>
+                            <a:schemeClr val="tx1"/>
+                          </a:solidFill>
+                        </a:rPr>
+                        <a:t>D3（週三）</a:t>
+                      </a:r>
+                      <a:endParaRPr lang="en-US" sz="1300" dirty="0"/>
+                    </a:p>
+                  </a:txBody>
+                  <a:tcPr marL="73152" marR="73152" marT="27432" marB="27432" anchor="ctr">
+                    <a:lnL w="9525" cap="flat" cmpd="sng" algn="ctr">
+                      <a:solidFill>
+                        <a:srgbClr val="D5DED2"/>
+                      </a:solidFill>
+                      <a:prstDash val="solid"/>
+                      <a:round/>
+                      <a:headEnd type="none" w="med" len="med"/>
+                      <a:tailEnd type="none" w="med" len="med"/>
+                    </a:lnL>
+                    <a:lnR w="9525" cap="flat" cmpd="sng" algn="ctr">
+                      <a:solidFill>
+                        <a:srgbClr val="D5DED2"/>
+                      </a:solidFill>
+                      <a:prstDash val="solid"/>
+                      <a:round/>
+                      <a:headEnd type="none" w="med" len="med"/>
+                      <a:tailEnd type="none" w="med" len="med"/>
+                    </a:lnR>
+                    <a:lnT w="9525" cap="flat" cmpd="sng" algn="ctr">
+                      <a:solidFill>
+                        <a:srgbClr val="D5DED2"/>
+                      </a:solidFill>
+                      <a:prstDash val="solid"/>
+                      <a:round/>
+                      <a:headEnd type="none" w="med" len="med"/>
+                      <a:tailEnd type="none" w="med" len="med"/>
+                    </a:lnT>
+                    <a:lnB w="9525" cap="flat" cmpd="sng" algn="ctr">
+                      <a:solidFill>
+                        <a:srgbClr val="D5DED2"/>
+                      </a:solidFill>
+                      <a:prstDash val="solid"/>
+                      <a:round/>
+                      <a:headEnd type="none" w="med" len="med"/>
+                      <a:tailEnd type="none" w="med" len="med"/>
+                    </a:lnB>
+                    <a:solidFill>
+                      <a:srgbClr val="FFFFFF"/>
+                    </a:solidFill>
+                  </a:tcPr>
+                </a:tc>
+                <a:tc>
+                  <a:txBody>
+                    <a:bodyPr/>
+                    <a:lstStyle/>
+                    <a:p>
+                      <a:pPr indent="0" marL="0">
+                        <a:buNone/>
+                      </a:pPr>
+                      <a:r>
+                        <a:rPr lang="en-US" sz="1300" dirty="0">
+                          <a:solidFill>
+                            <a:schemeClr val="tx1"/>
+                          </a:solidFill>
+                        </a:rPr>
+                        <a:t>身體調理</a:t>
+                      </a:r>
+                      <a:endParaRPr lang="en-US" sz="1300" dirty="0"/>
+                    </a:p>
+                  </a:txBody>
+                  <a:tcPr marL="73152" marR="73152" marT="27432" marB="27432" anchor="ctr">
+                    <a:lnL w="9525" cap="flat" cmpd="sng" algn="ctr">
+                      <a:solidFill>
+                        <a:srgbClr val="D5DED2"/>
+                      </a:solidFill>
+                      <a:prstDash val="solid"/>
+                      <a:round/>
+                      <a:headEnd type="none" w="med" len="med"/>
+                      <a:tailEnd type="none" w="med" len="med"/>
+                    </a:lnL>
+                    <a:lnR w="9525" cap="flat" cmpd="sng" algn="ctr">
+                      <a:solidFill>
+                        <a:srgbClr val="D5DED2"/>
+                      </a:solidFill>
+                      <a:prstDash val="solid"/>
+                      <a:round/>
+                      <a:headEnd type="none" w="med" len="med"/>
+                      <a:tailEnd type="none" w="med" len="med"/>
+                    </a:lnR>
+                    <a:lnT w="9525" cap="flat" cmpd="sng" algn="ctr">
+                      <a:solidFill>
+                        <a:srgbClr val="D5DED2"/>
+                      </a:solidFill>
+                      <a:prstDash val="solid"/>
+                      <a:round/>
+                      <a:headEnd type="none" w="med" len="med"/>
+                      <a:tailEnd type="none" w="med" len="med"/>
+                    </a:lnT>
+                    <a:lnB w="9525" cap="flat" cmpd="sng" algn="ctr">
+                      <a:solidFill>
+                        <a:srgbClr val="D5DED2"/>
+                      </a:solidFill>
+                      <a:prstDash val="solid"/>
+                      <a:round/>
+                      <a:headEnd type="none" w="med" len="med"/>
+                      <a:tailEnd type="none" w="med" len="med"/>
+                    </a:lnB>
+                    <a:solidFill>
+                      <a:srgbClr val="FFFFFF"/>
+                    </a:solidFill>
+                  </a:tcPr>
+                </a:tc>
+                <a:tc>
+                  <a:txBody>
+                    <a:bodyPr/>
+                    <a:lstStyle/>
+                    <a:p>
+                      <a:pPr indent="0" marL="0">
+                        <a:buNone/>
+                      </a:pPr>
+                      <a:r>
+                        <a:rPr lang="en-US" sz="1300" dirty="0">
+                          <a:solidFill>
+                            <a:schemeClr val="tx1"/>
+                          </a:solidFill>
+                        </a:rPr>
+                        <a:t>八段錦</a:t>
+                      </a:r>
+                      <a:endParaRPr lang="en-US" sz="1300" dirty="0"/>
+                    </a:p>
+                  </a:txBody>
+                  <a:tcPr marL="73152" marR="73152" marT="27432" marB="27432" anchor="ctr">
+                    <a:lnL w="9525" cap="flat" cmpd="sng" algn="ctr">
+                      <a:solidFill>
+                        <a:srgbClr val="D5DED2"/>
+                      </a:solidFill>
+                      <a:prstDash val="solid"/>
+                      <a:round/>
+                      <a:headEnd type="none" w="med" len="med"/>
+                      <a:tailEnd type="none" w="med" len="med"/>
+                    </a:lnL>
+                    <a:lnR w="9525" cap="flat" cmpd="sng" algn="ctr">
+                      <a:solidFill>
+                        <a:srgbClr val="D5DED2"/>
+                      </a:solidFill>
+                      <a:prstDash val="solid"/>
+                      <a:round/>
+                      <a:headEnd type="none" w="med" len="med"/>
+                      <a:tailEnd type="none" w="med" len="med"/>
+                    </a:lnR>
+                    <a:lnT w="9525" cap="flat" cmpd="sng" algn="ctr">
+                      <a:solidFill>
+                        <a:srgbClr val="D5DED2"/>
+                      </a:solidFill>
+                      <a:prstDash val="solid"/>
+                      <a:round/>
+                      <a:headEnd type="none" w="med" len="med"/>
+                      <a:tailEnd type="none" w="med" len="med"/>
+                    </a:lnT>
+                    <a:lnB w="9525" cap="flat" cmpd="sng" algn="ctr">
+                      <a:solidFill>
+                        <a:srgbClr val="D5DED2"/>
+                      </a:solidFill>
+                      <a:prstDash val="solid"/>
+                      <a:round/>
+                      <a:headEnd type="none" w="med" len="med"/>
+                      <a:tailEnd type="none" w="med" len="med"/>
+                    </a:lnB>
+                    <a:solidFill>
+                      <a:srgbClr val="FFFFFF"/>
+                    </a:solidFill>
+                  </a:tcPr>
+                </a:tc>
+                <a:tc>
+                  <a:txBody>
+                    <a:bodyPr/>
+                    <a:lstStyle/>
+                    <a:p>
+                      <a:pPr indent="0" marL="0">
+                        <a:buNone/>
+                      </a:pPr>
+                      <a:r>
+                        <a:rPr lang="en-US" sz="1300" dirty="0">
+                          <a:solidFill>
+                            <a:schemeClr val="tx1"/>
+                          </a:solidFill>
+                        </a:rPr>
+                        <a:t>藥膳講座、康復評估</a:t>
+                      </a:r>
+                      <a:endParaRPr lang="en-US" sz="1300" dirty="0"/>
+                    </a:p>
+                  </a:txBody>
+                  <a:tcPr marL="73152" marR="73152" marT="27432" marB="27432" anchor="ctr">
+                    <a:lnL w="9525" cap="flat" cmpd="sng" algn="ctr">
+                      <a:solidFill>
+                        <a:srgbClr val="D5DED2"/>
+                      </a:solidFill>
+                      <a:prstDash val="solid"/>
+                      <a:round/>
+                      <a:headEnd type="none" w="med" len="med"/>
+                      <a:tailEnd type="none" w="med" len="med"/>
+                    </a:lnL>
+                    <a:lnR w="9525" cap="flat" cmpd="sng" algn="ctr">
+                      <a:solidFill>
+                        <a:srgbClr val="D5DED2"/>
+                      </a:solidFill>
+                      <a:prstDash val="solid"/>
+                      <a:round/>
+                      <a:headEnd type="none" w="med" len="med"/>
+                      <a:tailEnd type="none" w="med" len="med"/>
+                    </a:lnR>
+                    <a:lnT w="9525" cap="flat" cmpd="sng" algn="ctr">
+                      <a:solidFill>
+                        <a:srgbClr val="D5DED2"/>
+                      </a:solidFill>
+                      <a:prstDash val="solid"/>
+                      <a:round/>
+                      <a:headEnd type="none" w="med" len="med"/>
+                      <a:tailEnd type="none" w="med" len="med"/>
+                    </a:lnT>
+                    <a:lnB w="9525" cap="flat" cmpd="sng" algn="ctr">
+                      <a:solidFill>
+                        <a:srgbClr val="D5DED2"/>
+                      </a:solidFill>
+                      <a:prstDash val="solid"/>
+                      <a:round/>
+                      <a:headEnd type="none" w="med" len="med"/>
+                      <a:tailEnd type="none" w="med" len="med"/>
+                    </a:lnB>
+                    <a:solidFill>
+                      <a:srgbClr val="FFFFFF"/>
+                    </a:solidFill>
+                  </a:tcPr>
+                </a:tc>
+              </a:tr>
+              <a:tr h="530352">
+                <a:tc>
+                  <a:txBody>
+                    <a:bodyPr/>
+                    <a:lstStyle/>
+                    <a:p>
+                      <a:pPr indent="0" marL="0">
+                        <a:buNone/>
+                      </a:pPr>
+                      <a:r>
+                        <a:rPr lang="en-US" sz="1300" dirty="0">
+                          <a:solidFill>
+                            <a:schemeClr val="tx1"/>
+                          </a:solidFill>
+                        </a:rPr>
+                        <a:t>D4（週四）</a:t>
+                      </a:r>
+                      <a:endParaRPr lang="en-US" sz="1300" dirty="0"/>
+                    </a:p>
+                  </a:txBody>
+                  <a:tcPr marL="73152" marR="73152" marT="27432" marB="27432" anchor="ctr">
+                    <a:lnL w="9525" cap="flat" cmpd="sng" algn="ctr">
+                      <a:solidFill>
+                        <a:srgbClr val="D5DED2"/>
+                      </a:solidFill>
+                      <a:prstDash val="solid"/>
+                      <a:round/>
+                      <a:headEnd type="none" w="med" len="med"/>
+                      <a:tailEnd type="none" w="med" len="med"/>
+                    </a:lnL>
+                    <a:lnR w="9525" cap="flat" cmpd="sng" algn="ctr">
+                      <a:solidFill>
+                        <a:srgbClr val="D5DED2"/>
+                      </a:solidFill>
+                      <a:prstDash val="solid"/>
+                      <a:round/>
+                      <a:headEnd type="none" w="med" len="med"/>
+                      <a:tailEnd type="none" w="med" len="med"/>
+                    </a:lnR>
+                    <a:lnT w="9525" cap="flat" cmpd="sng" algn="ctr">
+                      <a:solidFill>
+                        <a:srgbClr val="D5DED2"/>
+                      </a:solidFill>
+                      <a:prstDash val="solid"/>
+                      <a:round/>
+                      <a:headEnd type="none" w="med" len="med"/>
+                      <a:tailEnd type="none" w="med" len="med"/>
+                    </a:lnT>
+                    <a:lnB w="9525" cap="flat" cmpd="sng" algn="ctr">
+                      <a:solidFill>
+                        <a:srgbClr val="D5DED2"/>
+                      </a:solidFill>
+                      <a:prstDash val="solid"/>
+                      <a:round/>
+                      <a:headEnd type="none" w="med" len="med"/>
+                      <a:tailEnd type="none" w="med" len="med"/>
+                    </a:lnB>
+                    <a:solidFill>
+                      <a:srgbClr val="EEF3EC"/>
+                    </a:solidFill>
+                  </a:tcPr>
+                </a:tc>
+                <a:tc>
+                  <a:txBody>
+                    <a:bodyPr/>
+                    <a:lstStyle/>
+                    <a:p>
+                      <a:pPr indent="0" marL="0">
+                        <a:buNone/>
+                      </a:pPr>
+                      <a:r>
+                        <a:rPr lang="en-US" sz="1300" dirty="0">
+                          <a:solidFill>
+                            <a:schemeClr val="tx1"/>
+                          </a:solidFill>
+                        </a:rPr>
+                        <a:t>心靈與整合</a:t>
+                      </a:r>
+                      <a:endParaRPr lang="en-US" sz="1300" dirty="0"/>
+                    </a:p>
+                  </a:txBody>
+                  <a:tcPr marL="73152" marR="73152" marT="27432" marB="27432" anchor="ctr">
+                    <a:lnL w="9525" cap="flat" cmpd="sng" algn="ctr">
+                      <a:solidFill>
+                        <a:srgbClr val="D5DED2"/>
+                      </a:solidFill>
+                      <a:prstDash val="solid"/>
+                      <a:round/>
+                      <a:headEnd type="none" w="med" len="med"/>
+                      <a:tailEnd type="none" w="med" len="med"/>
+                    </a:lnL>
+                    <a:lnR w="9525" cap="flat" cmpd="sng" algn="ctr">
+                      <a:solidFill>
+                        <a:srgbClr val="D5DED2"/>
+                      </a:solidFill>
+                      <a:prstDash val="solid"/>
+                      <a:round/>
+                      <a:headEnd type="none" w="med" len="med"/>
+                      <a:tailEnd type="none" w="med" len="med"/>
+                    </a:lnR>
+                    <a:lnT w="9525" cap="flat" cmpd="sng" algn="ctr">
+                      <a:solidFill>
+                        <a:srgbClr val="D5DED2"/>
+                      </a:solidFill>
+                      <a:prstDash val="solid"/>
+                      <a:round/>
+                      <a:headEnd type="none" w="med" len="med"/>
+                      <a:tailEnd type="none" w="med" len="med"/>
+                    </a:lnT>
+                    <a:lnB w="9525" cap="flat" cmpd="sng" algn="ctr">
+                      <a:solidFill>
+                        <a:srgbClr val="D5DED2"/>
+                      </a:solidFill>
+                      <a:prstDash val="solid"/>
+                      <a:round/>
+                      <a:headEnd type="none" w="med" len="med"/>
+                      <a:tailEnd type="none" w="med" len="med"/>
+                    </a:lnB>
+                    <a:solidFill>
+                      <a:srgbClr val="EEF3EC"/>
+                    </a:solidFill>
+                  </a:tcPr>
+                </a:tc>
+                <a:tc>
+                  <a:txBody>
+                    <a:bodyPr/>
+                    <a:lstStyle/>
+                    <a:p>
+                      <a:pPr indent="0" marL="0">
+                        <a:buNone/>
+                      </a:pPr>
+                      <a:r>
+                        <a:rPr lang="en-US" sz="1300" dirty="0">
+                          <a:solidFill>
+                            <a:schemeClr val="tx1"/>
+                          </a:solidFill>
+                        </a:rPr>
+                        <a:t>正念冥想</a:t>
+                      </a:r>
+                      <a:endParaRPr lang="en-US" sz="1300" dirty="0"/>
+                    </a:p>
+                  </a:txBody>
+                  <a:tcPr marL="73152" marR="73152" marT="27432" marB="27432" anchor="ctr">
+                    <a:lnL w="9525" cap="flat" cmpd="sng" algn="ctr">
+                      <a:solidFill>
+                        <a:srgbClr val="D5DED2"/>
+                      </a:solidFill>
+                      <a:prstDash val="solid"/>
+                      <a:round/>
+                      <a:headEnd type="none" w="med" len="med"/>
+                      <a:tailEnd type="none" w="med" len="med"/>
+                    </a:lnL>
+                    <a:lnR w="9525" cap="flat" cmpd="sng" algn="ctr">
+                      <a:solidFill>
+                        <a:srgbClr val="D5DED2"/>
+                      </a:solidFill>
+                      <a:prstDash val="solid"/>
+                      <a:round/>
+                      <a:headEnd type="none" w="med" len="med"/>
+                      <a:tailEnd type="none" w="med" len="med"/>
+                    </a:lnR>
+                    <a:lnT w="9525" cap="flat" cmpd="sng" algn="ctr">
+                      <a:solidFill>
+                        <a:srgbClr val="D5DED2"/>
+                      </a:solidFill>
+                      <a:prstDash val="solid"/>
+                      <a:round/>
+                      <a:headEnd type="none" w="med" len="med"/>
+                      <a:tailEnd type="none" w="med" len="med"/>
+                    </a:lnT>
+                    <a:lnB w="9525" cap="flat" cmpd="sng" algn="ctr">
+                      <a:solidFill>
+                        <a:srgbClr val="D5DED2"/>
+                      </a:solidFill>
+                      <a:prstDash val="solid"/>
+                      <a:round/>
+                      <a:headEnd type="none" w="med" len="med"/>
+                      <a:tailEnd type="none" w="med" len="med"/>
+                    </a:lnB>
+                    <a:solidFill>
+                      <a:srgbClr val="EEF3EC"/>
+                    </a:solidFill>
+                  </a:tcPr>
+                </a:tc>
+                <a:tc>
+                  <a:txBody>
+                    <a:bodyPr/>
+                    <a:lstStyle/>
+                    <a:p>
+                      <a:pPr indent="0" marL="0">
+                        <a:buNone/>
+                      </a:pPr>
+                      <a:r>
+                        <a:rPr lang="en-US" sz="1300" dirty="0">
+                          <a:solidFill>
+                            <a:schemeClr val="tx1"/>
+                          </a:solidFill>
+                        </a:rPr>
+                        <a:t>自然療癒長程</a:t>
+                      </a:r>
+                      <a:endParaRPr lang="en-US" sz="1300" dirty="0"/>
+                    </a:p>
+                  </a:txBody>
+                  <a:tcPr marL="73152" marR="73152" marT="27432" marB="27432" anchor="ctr">
+                    <a:lnL w="9525" cap="flat" cmpd="sng" algn="ctr">
+                      <a:solidFill>
+                        <a:srgbClr val="D5DED2"/>
+                      </a:solidFill>
+                      <a:prstDash val="solid"/>
+                      <a:round/>
+                      <a:headEnd type="none" w="med" len="med"/>
+                      <a:tailEnd type="none" w="med" len="med"/>
+                    </a:lnL>
+                    <a:lnR w="9525" cap="flat" cmpd="sng" algn="ctr">
+                      <a:solidFill>
+                        <a:srgbClr val="D5DED2"/>
+                      </a:solidFill>
+                      <a:prstDash val="solid"/>
+                      <a:round/>
+                      <a:headEnd type="none" w="med" len="med"/>
+                      <a:tailEnd type="none" w="med" len="med"/>
+                    </a:lnR>
+                    <a:lnT w="9525" cap="flat" cmpd="sng" algn="ctr">
+                      <a:solidFill>
+                        <a:srgbClr val="D5DED2"/>
+                      </a:solidFill>
+                      <a:prstDash val="solid"/>
+                      <a:round/>
+                      <a:headEnd type="none" w="med" len="med"/>
+                      <a:tailEnd type="none" w="med" len="med"/>
+                    </a:lnT>
+                    <a:lnB w="9525" cap="flat" cmpd="sng" algn="ctr">
+                      <a:solidFill>
+                        <a:srgbClr val="D5DED2"/>
+                      </a:solidFill>
+                      <a:prstDash val="solid"/>
+                      <a:round/>
+                      <a:headEnd type="none" w="med" len="med"/>
+                      <a:tailEnd type="none" w="med" len="med"/>
+                    </a:lnB>
+                    <a:solidFill>
+                      <a:srgbClr val="EEF3EC"/>
+                    </a:solidFill>
+                  </a:tcPr>
+                </a:tc>
+              </a:tr>
+              <a:tr h="530352">
+                <a:tc>
+                  <a:txBody>
+                    <a:bodyPr/>
+                    <a:lstStyle/>
+                    <a:p>
+                      <a:pPr indent="0" marL="0">
+                        <a:buNone/>
+                      </a:pPr>
+                      <a:r>
+                        <a:rPr lang="en-US" sz="1300" dirty="0">
+                          <a:solidFill>
+                            <a:schemeClr val="tx1"/>
+                          </a:solidFill>
+                        </a:rPr>
+                        <a:t>D5（週五）</a:t>
+                      </a:r>
+                      <a:endParaRPr lang="en-US" sz="1300" dirty="0"/>
+                    </a:p>
+                  </a:txBody>
+                  <a:tcPr marL="73152" marR="73152" marT="27432" marB="27432" anchor="ctr">
+                    <a:lnL w="9525" cap="flat" cmpd="sng" algn="ctr">
+                      <a:solidFill>
+                        <a:srgbClr val="D5DED2"/>
+                      </a:solidFill>
+                      <a:prstDash val="solid"/>
+                      <a:round/>
+                      <a:headEnd type="none" w="med" len="med"/>
+                      <a:tailEnd type="none" w="med" len="med"/>
+                    </a:lnL>
+                    <a:lnR w="9525" cap="flat" cmpd="sng" algn="ctr">
+                      <a:solidFill>
+                        <a:srgbClr val="D5DED2"/>
+                      </a:solidFill>
+                      <a:prstDash val="solid"/>
+                      <a:round/>
+                      <a:headEnd type="none" w="med" len="med"/>
+                      <a:tailEnd type="none" w="med" len="med"/>
+                    </a:lnR>
+                    <a:lnT w="9525" cap="flat" cmpd="sng" algn="ctr">
+                      <a:solidFill>
+                        <a:srgbClr val="D5DED2"/>
+                      </a:solidFill>
+                      <a:prstDash val="solid"/>
+                      <a:round/>
+                      <a:headEnd type="none" w="med" len="med"/>
+                      <a:tailEnd type="none" w="med" len="med"/>
+                    </a:lnT>
+                    <a:lnB w="9525" cap="flat" cmpd="sng" algn="ctr">
+                      <a:solidFill>
+                        <a:srgbClr val="D5DED2"/>
+                      </a:solidFill>
+                      <a:prstDash val="solid"/>
+                      <a:round/>
+                      <a:headEnd type="none" w="med" len="med"/>
+                      <a:tailEnd type="none" w="med" len="med"/>
+                    </a:lnB>
+                    <a:solidFill>
+                      <a:srgbClr val="FFFFFF"/>
+                    </a:solidFill>
+                  </a:tcPr>
+                </a:tc>
+                <a:tc>
+                  <a:txBody>
+                    <a:bodyPr/>
+                    <a:lstStyle/>
+                    <a:p>
+                      <a:pPr indent="0" marL="0">
+                        <a:buNone/>
+                      </a:pPr>
+                      <a:r>
+                        <a:rPr lang="en-US" sz="1300" dirty="0">
+                          <a:solidFill>
+                            <a:schemeClr val="tx1"/>
+                          </a:solidFill>
+                        </a:rPr>
+                        <a:t>返家</a:t>
+                      </a:r>
+                      <a:endParaRPr lang="en-US" sz="1300" dirty="0"/>
+                    </a:p>
+                  </a:txBody>
+                  <a:tcPr marL="73152" marR="73152" marT="27432" marB="27432" anchor="ctr">
+                    <a:lnL w="9525" cap="flat" cmpd="sng" algn="ctr">
+                      <a:solidFill>
+                        <a:srgbClr val="D5DED2"/>
+                      </a:solidFill>
+                      <a:prstDash val="solid"/>
+                      <a:round/>
+                      <a:headEnd type="none" w="med" len="med"/>
+                      <a:tailEnd type="none" w="med" len="med"/>
+                    </a:lnL>
+                    <a:lnR w="9525" cap="flat" cmpd="sng" algn="ctr">
+                      <a:solidFill>
+                        <a:srgbClr val="D5DED2"/>
+                      </a:solidFill>
+                      <a:prstDash val="solid"/>
+                      <a:round/>
+                      <a:headEnd type="none" w="med" len="med"/>
+                      <a:tailEnd type="none" w="med" len="med"/>
+                    </a:lnR>
+                    <a:lnT w="9525" cap="flat" cmpd="sng" algn="ctr">
+                      <a:solidFill>
+                        <a:srgbClr val="D5DED2"/>
+                      </a:solidFill>
+                      <a:prstDash val="solid"/>
+                      <a:round/>
+                      <a:headEnd type="none" w="med" len="med"/>
+                      <a:tailEnd type="none" w="med" len="med"/>
+                    </a:lnT>
+                    <a:lnB w="9525" cap="flat" cmpd="sng" algn="ctr">
+                      <a:solidFill>
+                        <a:srgbClr val="D5DED2"/>
+                      </a:solidFill>
+                      <a:prstDash val="solid"/>
+                      <a:round/>
+                      <a:headEnd type="none" w="med" len="med"/>
+                      <a:tailEnd type="none" w="med" len="med"/>
+                    </a:lnB>
+                    <a:solidFill>
+                      <a:srgbClr val="FFFFFF"/>
+                    </a:solidFill>
+                  </a:tcPr>
+                </a:tc>
+                <a:tc>
+                  <a:txBody>
+                    <a:bodyPr/>
+                    <a:lstStyle/>
+                    <a:p>
+                      <a:pPr indent="0" marL="0">
+                        <a:buNone/>
+                      </a:pPr>
+                      <a:r>
+                        <a:rPr lang="en-US" sz="1300" dirty="0">
+                          <a:solidFill>
+                            <a:schemeClr val="tx1"/>
+                          </a:solidFill>
+                        </a:rPr>
+                        <a:t>太極拳</a:t>
+                      </a:r>
+                      <a:endParaRPr lang="en-US" sz="1300" dirty="0"/>
+                    </a:p>
+                  </a:txBody>
+                  <a:tcPr marL="73152" marR="73152" marT="27432" marB="27432" anchor="ctr">
+                    <a:lnL w="9525" cap="flat" cmpd="sng" algn="ctr">
+                      <a:solidFill>
+                        <a:srgbClr val="D5DED2"/>
+                      </a:solidFill>
+                      <a:prstDash val="solid"/>
+                      <a:round/>
+                      <a:headEnd type="none" w="med" len="med"/>
+                      <a:tailEnd type="none" w="med" len="med"/>
+                    </a:lnL>
+                    <a:lnR w="9525" cap="flat" cmpd="sng" algn="ctr">
+                      <a:solidFill>
+                        <a:srgbClr val="D5DED2"/>
+                      </a:solidFill>
+                      <a:prstDash val="solid"/>
+                      <a:round/>
+                      <a:headEnd type="none" w="med" len="med"/>
+                      <a:tailEnd type="none" w="med" len="med"/>
+                    </a:lnR>
+                    <a:lnT w="9525" cap="flat" cmpd="sng" algn="ctr">
+                      <a:solidFill>
+                        <a:srgbClr val="D5DED2"/>
+                      </a:solidFill>
+                      <a:prstDash val="solid"/>
+                      <a:round/>
+                      <a:headEnd type="none" w="med" len="med"/>
+                      <a:tailEnd type="none" w="med" len="med"/>
+                    </a:lnT>
+                    <a:lnB w="9525" cap="flat" cmpd="sng" algn="ctr">
+                      <a:solidFill>
+                        <a:srgbClr val="D5DED2"/>
+                      </a:solidFill>
+                      <a:prstDash val="solid"/>
+                      <a:round/>
+                      <a:headEnd type="none" w="med" len="med"/>
+                      <a:tailEnd type="none" w="med" len="med"/>
+                    </a:lnB>
+                    <a:solidFill>
+                      <a:srgbClr val="FFFFFF"/>
+                    </a:solidFill>
+                  </a:tcPr>
+                </a:tc>
+                <a:tc>
+                  <a:txBody>
+                    <a:bodyPr/>
+                    <a:lstStyle/>
+                    <a:p>
+                      <a:pPr indent="0" marL="0">
+                        <a:buNone/>
+                      </a:pPr>
+                      <a:r>
+                        <a:rPr lang="en-US" sz="1300" dirty="0">
+                          <a:solidFill>
+                            <a:schemeClr val="tx1"/>
+                          </a:solidFill>
+                        </a:rPr>
+                        <a:t>健康後測、五日報告</a:t>
+                      </a:r>
+                      <a:endParaRPr lang="en-US" sz="1300" dirty="0"/>
+                    </a:p>
+                  </a:txBody>
+                  <a:tcPr marL="73152" marR="73152" marT="27432" marB="27432" anchor="ctr">
+                    <a:lnL w="9525" cap="flat" cmpd="sng" algn="ctr">
+                      <a:solidFill>
+                        <a:srgbClr val="D5DED2"/>
+                      </a:solidFill>
+                      <a:prstDash val="solid"/>
+                      <a:round/>
+                      <a:headEnd type="none" w="med" len="med"/>
+                      <a:tailEnd type="none" w="med" len="med"/>
+                    </a:lnL>
+                    <a:lnR w="9525" cap="flat" cmpd="sng" algn="ctr">
+                      <a:solidFill>
+                        <a:srgbClr val="D5DED2"/>
+                      </a:solidFill>
+                      <a:prstDash val="solid"/>
+                      <a:round/>
+                      <a:headEnd type="none" w="med" len="med"/>
+                      <a:tailEnd type="none" w="med" len="med"/>
+                    </a:lnR>
+                    <a:lnT w="9525" cap="flat" cmpd="sng" algn="ctr">
+                      <a:solidFill>
+                        <a:srgbClr val="D5DED2"/>
+                      </a:solidFill>
+                      <a:prstDash val="solid"/>
+                      <a:round/>
+                      <a:headEnd type="none" w="med" len="med"/>
+                      <a:tailEnd type="none" w="med" len="med"/>
+                    </a:lnT>
+                    <a:lnB w="9525" cap="flat" cmpd="sng" algn="ctr">
+                      <a:solidFill>
+                        <a:srgbClr val="D5DED2"/>
+                      </a:solidFill>
+                      <a:prstDash val="solid"/>
+                      <a:round/>
+                      <a:headEnd type="none" w="med" len="med"/>
+                      <a:tailEnd type="none" w="med" len="med"/>
+                    </a:lnB>
+                    <a:solidFill>
+                      <a:srgbClr val="FFFFFF"/>
+                    </a:solidFill>
+                  </a:tcPr>
+                </a:tc>
+              </a:tr>
+            </a:tbl>
+          </a:graphicData>
+        </a:graphic>
+      </p:graphicFrame>
+      <p:sp>
+        <p:nvSpPr>
+          <p:cNvPr id="4" name="Daily fixed"/>
           <p:cNvSpPr/>
           <p:nvPr/>
         </p:nvSpPr>
         <p:spPr>
           <a:xfrm>
-            <a:off x="1234440" y="1691640"/>
-            <a:ext cx="6675120" cy="0"/>
-          </a:xfrm>
-          <a:prstGeom prst="line">
-            <a:avLst/>
-          </a:prstGeom>
-          <a:noFill/>
-          <a:ln w="38100">
+            <a:off x="6126480" y="1188720"/>
+            <a:ext cx="2560320" cy="1508760"/>
+          </a:xfrm>
+          <a:prstGeom prst="roundRect">
+            <a:avLst>
+              <a:gd name="adj" fmla="val 4848"/>
+            </a:avLst>
+          </a:prstGeom>
+          <a:solidFill>
+            <a:srgbClr val="EEF3EC"/>
+          </a:solidFill>
+          <a:ln w="12700">
             <a:solidFill>
-              <a:srgbClr val="D9E4D5"/>
+              <a:srgbClr val="EEF3EC"/>
             </a:solidFill>
             <a:prstDash val="solid"/>
           </a:ln>
@@ -3610,24 +4766,104 @@
       </p:sp>
       <p:sp>
         <p:nvSpPr>
-          <p:cNvPr id="4" name="Phase 1"/>
+          <p:cNvPr id="5" name="Text 2"/>
+          <p:cNvSpPr txBox="1"/>
+          <p:nvPr/>
+        </p:nvSpPr>
+        <p:spPr>
+          <a:xfrm>
+            <a:off x="6355080" y="1325880"/>
+            <a:ext cx="2103120" cy="320040"/>
+          </a:xfrm>
+          <a:prstGeom prst="rect">
+            <a:avLst/>
+          </a:prstGeom>
+          <a:noFill/>
+          <a:ln/>
+        </p:spPr>
+        <p:txBody>
+          <a:bodyPr wrap="square" lIns="0" tIns="0" rIns="0" bIns="0" rtlCol="0" anchor="t"/>
+          <a:lstStyle/>
+          <a:p>
+            <a:pPr indent="0" marL="0">
+              <a:lnSpc>
+                <a:spcPts val="1900"/>
+              </a:lnSpc>
+              <a:buNone/>
+            </a:pPr>
+            <a:r>
+              <a:rPr lang="en-US" sz="1500" b="1" dirty="0">
+                <a:solidFill>
+                  <a:schemeClr val="tx2"/>
+                </a:solidFill>
+              </a:rPr>
+              <a:t>每天固定</a:t>
+            </a:r>
+            <a:endParaRPr lang="en-US" sz="1500" dirty="0"/>
+          </a:p>
+        </p:txBody>
+      </p:sp>
+      <p:sp>
+        <p:nvSpPr>
+          <p:cNvPr id="6" name="Text 3"/>
+          <p:cNvSpPr txBox="1"/>
+          <p:nvPr/>
+        </p:nvSpPr>
+        <p:spPr>
+          <a:xfrm>
+            <a:off x="6355080" y="1737360"/>
+            <a:ext cx="2103120" cy="868680"/>
+          </a:xfrm>
+          <a:prstGeom prst="rect">
+            <a:avLst/>
+          </a:prstGeom>
+          <a:noFill/>
+          <a:ln/>
+        </p:spPr>
+        <p:txBody>
+          <a:bodyPr wrap="square" lIns="0" tIns="0" rIns="0" bIns="0" rtlCol="0" anchor="t"/>
+          <a:lstStyle/>
+          <a:p>
+            <a:pPr indent="0" marL="0">
+              <a:lnSpc>
+                <a:spcPts val="1600"/>
+              </a:lnSpc>
+              <a:buNone/>
+            </a:pPr>
+            <a:r>
+              <a:rPr lang="en-US" sz="1300" dirty="0">
+                <a:solidFill>
+                  <a:schemeClr val="tx1"/>
+                </a:solidFill>
+              </a:rPr>
+              <a:t>晨操、三餐藥膳與睡前療癒；中間時段輪換模組</a:t>
+            </a:r>
+            <a:endParaRPr lang="en-US" sz="1300" dirty="0"/>
+          </a:p>
+        </p:txBody>
+      </p:sp>
+      <p:sp>
+        <p:nvSpPr>
+          <p:cNvPr id="7" name="Weekday stay"/>
           <p:cNvSpPr/>
           <p:nvPr/>
         </p:nvSpPr>
         <p:spPr>
           <a:xfrm>
-            <a:off x="914400" y="1371600"/>
-            <a:ext cx="640080" cy="640080"/>
-          </a:xfrm>
-          <a:prstGeom prst="ellipse">
-            <a:avLst/>
+            <a:off x="6126480" y="2862072"/>
+            <a:ext cx="2560320" cy="1508760"/>
+          </a:xfrm>
+          <a:prstGeom prst="roundRect">
+            <a:avLst>
+              <a:gd name="adj" fmla="val 4848"/>
+            </a:avLst>
           </a:prstGeom>
           <a:solidFill>
             <a:srgbClr val="2F4A3A"/>
           </a:solidFill>
-          <a:ln w="25400">
+          <a:ln w="12700">
             <a:solidFill>
-              <a:srgbClr val="FFFFFF"/>
+              <a:srgbClr val="2F4A3A"/>
             </a:solidFill>
             <a:prstDash val="solid"/>
           </a:ln>
@@ -3635,53 +4871,53 @@
       </p:sp>
       <p:sp>
         <p:nvSpPr>
-          <p:cNvPr id="5" name="Text 3"/>
+          <p:cNvPr id="8" name="Text 5"/>
           <p:cNvSpPr txBox="1"/>
           <p:nvPr/>
         </p:nvSpPr>
         <p:spPr>
           <a:xfrm>
-            <a:off x="914400" y="1371600"/>
-            <a:ext cx="640080" cy="640080"/>
-          </a:xfrm>
-          <a:prstGeom prst="rect">
-            <a:avLst/>
-          </a:prstGeom>
-          <a:noFill/>
-          <a:ln/>
-        </p:spPr>
-        <p:txBody>
-          <a:bodyPr wrap="square" lIns="0" tIns="0" rIns="0" bIns="0" rtlCol="0" anchor="ctr"/>
-          <a:lstStyle/>
-          <a:p>
-            <a:pPr algn="ctr" indent="0" marL="0">
-              <a:lnSpc>
-                <a:spcPts val="2300"/>
-              </a:lnSpc>
-              <a:buNone/>
-            </a:pPr>
-            <a:r>
-              <a:rPr lang="en-US" sz="1800" b="1" dirty="0">
+            <a:off x="6355080" y="2999232"/>
+            <a:ext cx="2194560" cy="320040"/>
+          </a:xfrm>
+          <a:prstGeom prst="rect">
+            <a:avLst/>
+          </a:prstGeom>
+          <a:noFill/>
+          <a:ln/>
+        </p:spPr>
+        <p:txBody>
+          <a:bodyPr wrap="square" lIns="0" tIns="0" rIns="0" bIns="0" rtlCol="0" anchor="t"/>
+          <a:lstStyle/>
+          <a:p>
+            <a:pPr indent="0" marL="0">
+              <a:lnSpc>
+                <a:spcPts val="1900"/>
+              </a:lnSpc>
+              <a:buNone/>
+            </a:pPr>
+            <a:r>
+              <a:rPr lang="en-US" sz="1500" b="1" dirty="0">
                 <a:solidFill>
                   <a:schemeClr val="bg1"/>
                 </a:solidFill>
               </a:rPr>
-              <a:t>1</a:t>
-            </a:r>
-            <a:endParaRPr lang="en-US" sz="1800" dirty="0"/>
-          </a:p>
-        </p:txBody>
-      </p:sp>
-      <p:sp>
-        <p:nvSpPr>
-          <p:cNvPr id="6" name="Text 4"/>
+              <a:t>週一入住・週五退房</a:t>
+            </a:r>
+            <a:endParaRPr lang="en-US" sz="1500" dirty="0"/>
+          </a:p>
+        </p:txBody>
+      </p:sp>
+      <p:sp>
+        <p:nvSpPr>
+          <p:cNvPr id="9" name="Text 6"/>
           <p:cNvSpPr txBox="1"/>
           <p:nvPr/>
         </p:nvSpPr>
         <p:spPr>
           <a:xfrm>
-            <a:off x="411480" y="2240280"/>
-            <a:ext cx="1645920" cy="365760"/>
+            <a:off x="6355080" y="3410712"/>
+            <a:ext cx="2103120" cy="868680"/>
           </a:xfrm>
           <a:prstGeom prst="rect">
             <a:avLst/>
@@ -3693,665 +4929,19 @@
           <a:bodyPr wrap="square" lIns="0" tIns="0" rIns="0" bIns="0" rtlCol="0" anchor="t"/>
           <a:lstStyle/>
           <a:p>
-            <a:pPr algn="ctr" indent="0" marL="0">
-              <a:lnSpc>
-                <a:spcPts val="1900"/>
-              </a:lnSpc>
-              <a:buNone/>
-            </a:pPr>
-            <a:r>
-              <a:rPr lang="en-US" sz="1500" b="1" dirty="0">
-                <a:solidFill>
-                  <a:schemeClr val="tx2"/>
-                </a:solidFill>
-              </a:rPr>
-              <a:t>市場與選址</a:t>
-            </a:r>
-            <a:endParaRPr lang="en-US" sz="1500" dirty="0"/>
-          </a:p>
-        </p:txBody>
-      </p:sp>
-      <p:sp>
-        <p:nvSpPr>
-          <p:cNvPr id="7" name="Text 5"/>
-          <p:cNvSpPr txBox="1"/>
-          <p:nvPr/>
-        </p:nvSpPr>
-        <p:spPr>
-          <a:xfrm>
-            <a:off x="457200" y="2651760"/>
-            <a:ext cx="1554480" cy="1371600"/>
-          </a:xfrm>
-          <a:prstGeom prst="rect">
-            <a:avLst/>
-          </a:prstGeom>
-          <a:noFill/>
-          <a:ln/>
-        </p:spPr>
-        <p:txBody>
-          <a:bodyPr wrap="square" lIns="0" tIns="0" rIns="0" bIns="0" rtlCol="0" anchor="t"/>
-          <a:lstStyle/>
-          <a:p>
             <a:pPr indent="0" marL="0">
               <a:lnSpc>
-                <a:spcPts val="1500"/>
-              </a:lnSpc>
-              <a:buNone/>
-            </a:pPr>
-            <a:r>
-              <a:rPr lang="en-US" sz="1200" dirty="0">
-                <a:solidFill>
-                  <a:schemeClr val="tx1"/>
-                </a:solidFill>
-              </a:rPr>
-              <a:t>目標客群、競爭旅宿、交通、季節性需求、物業合規</a:t>
-            </a:r>
-            <a:endParaRPr lang="en-US" sz="1200" dirty="0"/>
-          </a:p>
-        </p:txBody>
-      </p:sp>
-      <p:sp>
-        <p:nvSpPr>
-          <p:cNvPr id="8" name="Phase 2"/>
-          <p:cNvSpPr/>
-          <p:nvPr/>
-        </p:nvSpPr>
-        <p:spPr>
-          <a:xfrm>
-            <a:off x="2583180" y="1371600"/>
-            <a:ext cx="640080" cy="640080"/>
-          </a:xfrm>
-          <a:prstGeom prst="ellipse">
-            <a:avLst/>
-          </a:prstGeom>
-          <a:solidFill>
-            <a:srgbClr val="2F4A3A"/>
-          </a:solidFill>
-          <a:ln w="25400">
-            <a:solidFill>
-              <a:srgbClr val="FFFFFF"/>
-            </a:solidFill>
-            <a:prstDash val="solid"/>
-          </a:ln>
-        </p:spPr>
-      </p:sp>
-      <p:sp>
-        <p:nvSpPr>
-          <p:cNvPr id="9" name="Text 7"/>
-          <p:cNvSpPr txBox="1"/>
-          <p:nvPr/>
-        </p:nvSpPr>
-        <p:spPr>
-          <a:xfrm>
-            <a:off x="2583180" y="1371600"/>
-            <a:ext cx="640080" cy="640080"/>
-          </a:xfrm>
-          <a:prstGeom prst="rect">
-            <a:avLst/>
-          </a:prstGeom>
-          <a:noFill/>
-          <a:ln/>
-        </p:spPr>
-        <p:txBody>
-          <a:bodyPr wrap="square" lIns="0" tIns="0" rIns="0" bIns="0" rtlCol="0" anchor="ctr"/>
-          <a:lstStyle/>
-          <a:p>
-            <a:pPr algn="ctr" indent="0" marL="0">
-              <a:lnSpc>
-                <a:spcPts val="2300"/>
-              </a:lnSpc>
-              <a:buNone/>
-            </a:pPr>
-            <a:r>
-              <a:rPr lang="en-US" sz="1800" b="1" dirty="0">
-                <a:solidFill>
-                  <a:schemeClr val="bg1"/>
-                </a:solidFill>
-              </a:rPr>
-              <a:t>2</a:t>
-            </a:r>
-            <a:endParaRPr lang="en-US" sz="1800" dirty="0"/>
-          </a:p>
-        </p:txBody>
-      </p:sp>
-      <p:sp>
-        <p:nvSpPr>
-          <p:cNvPr id="10" name="Text 8"/>
-          <p:cNvSpPr txBox="1"/>
-          <p:nvPr/>
-        </p:nvSpPr>
-        <p:spPr>
-          <a:xfrm>
-            <a:off x="2080260" y="2240280"/>
-            <a:ext cx="1645920" cy="365760"/>
-          </a:xfrm>
-          <a:prstGeom prst="rect">
-            <a:avLst/>
-          </a:prstGeom>
-          <a:noFill/>
-          <a:ln/>
-        </p:spPr>
-        <p:txBody>
-          <a:bodyPr wrap="square" lIns="0" tIns="0" rIns="0" bIns="0" rtlCol="0" anchor="t"/>
-          <a:lstStyle/>
-          <a:p>
-            <a:pPr algn="ctr" indent="0" marL="0">
-              <a:lnSpc>
-                <a:spcPts val="1900"/>
-              </a:lnSpc>
-              <a:buNone/>
-            </a:pPr>
-            <a:r>
-              <a:rPr lang="en-US" sz="1500" b="1" dirty="0">
-                <a:solidFill>
-                  <a:schemeClr val="tx2"/>
-                </a:solidFill>
-              </a:rPr>
-              <a:t>產品與財務</a:t>
-            </a:r>
-            <a:endParaRPr lang="en-US" sz="1500" dirty="0"/>
-          </a:p>
-        </p:txBody>
-      </p:sp>
-      <p:sp>
-        <p:nvSpPr>
-          <p:cNvPr id="11" name="Text 9"/>
-          <p:cNvSpPr txBox="1"/>
-          <p:nvPr/>
-        </p:nvSpPr>
-        <p:spPr>
-          <a:xfrm>
-            <a:off x="2125980" y="2651760"/>
-            <a:ext cx="1554480" cy="1371600"/>
-          </a:xfrm>
-          <a:prstGeom prst="rect">
-            <a:avLst/>
-          </a:prstGeom>
-          <a:noFill/>
-          <a:ln/>
-        </p:spPr>
-        <p:txBody>
-          <a:bodyPr wrap="square" lIns="0" tIns="0" rIns="0" bIns="0" rtlCol="0" anchor="t"/>
-          <a:lstStyle/>
-          <a:p>
-            <a:pPr indent="0" marL="0">
-              <a:lnSpc>
-                <a:spcPts val="1500"/>
-              </a:lnSpc>
-              <a:buNone/>
-            </a:pPr>
-            <a:r>
-              <a:rPr lang="en-US" sz="1200" dirty="0">
-                <a:solidFill>
-                  <a:schemeClr val="tx1"/>
-                </a:solidFill>
-              </a:rPr>
-              <a:t>客房、餐飲、課程、套餐；預算、損益平衡與現金流</a:t>
-            </a:r>
-            <a:endParaRPr lang="en-US" sz="1200" dirty="0"/>
-          </a:p>
-        </p:txBody>
-      </p:sp>
-      <p:sp>
-        <p:nvSpPr>
-          <p:cNvPr id="12" name="Phase 3"/>
-          <p:cNvSpPr/>
-          <p:nvPr/>
-        </p:nvSpPr>
-        <p:spPr>
-          <a:xfrm>
-            <a:off x="4251960" y="1371600"/>
-            <a:ext cx="640080" cy="640080"/>
-          </a:xfrm>
-          <a:prstGeom prst="ellipse">
-            <a:avLst/>
-          </a:prstGeom>
-          <a:solidFill>
-            <a:srgbClr val="2F4A3A"/>
-          </a:solidFill>
-          <a:ln w="25400">
-            <a:solidFill>
-              <a:srgbClr val="FFFFFF"/>
-            </a:solidFill>
-            <a:prstDash val="solid"/>
-          </a:ln>
-        </p:spPr>
-      </p:sp>
-      <p:sp>
-        <p:nvSpPr>
-          <p:cNvPr id="13" name="Text 11"/>
-          <p:cNvSpPr txBox="1"/>
-          <p:nvPr/>
-        </p:nvSpPr>
-        <p:spPr>
-          <a:xfrm>
-            <a:off x="4251960" y="1371600"/>
-            <a:ext cx="640080" cy="640080"/>
-          </a:xfrm>
-          <a:prstGeom prst="rect">
-            <a:avLst/>
-          </a:prstGeom>
-          <a:noFill/>
-          <a:ln/>
-        </p:spPr>
-        <p:txBody>
-          <a:bodyPr wrap="square" lIns="0" tIns="0" rIns="0" bIns="0" rtlCol="0" anchor="ctr"/>
-          <a:lstStyle/>
-          <a:p>
-            <a:pPr algn="ctr" indent="0" marL="0">
-              <a:lnSpc>
-                <a:spcPts val="2300"/>
-              </a:lnSpc>
-              <a:buNone/>
-            </a:pPr>
-            <a:r>
-              <a:rPr lang="en-US" sz="1800" b="1" dirty="0">
-                <a:solidFill>
-                  <a:schemeClr val="bg1"/>
-                </a:solidFill>
-              </a:rPr>
-              <a:t>3</a:t>
-            </a:r>
-            <a:endParaRPr lang="en-US" sz="1800" dirty="0"/>
-          </a:p>
-        </p:txBody>
-      </p:sp>
-      <p:sp>
-        <p:nvSpPr>
-          <p:cNvPr id="14" name="Text 12"/>
-          <p:cNvSpPr txBox="1"/>
-          <p:nvPr/>
-        </p:nvSpPr>
-        <p:spPr>
-          <a:xfrm>
-            <a:off x="3749040" y="2240280"/>
-            <a:ext cx="1645920" cy="365760"/>
-          </a:xfrm>
-          <a:prstGeom prst="rect">
-            <a:avLst/>
-          </a:prstGeom>
-          <a:noFill/>
-          <a:ln/>
-        </p:spPr>
-        <p:txBody>
-          <a:bodyPr wrap="square" lIns="0" tIns="0" rIns="0" bIns="0" rtlCol="0" anchor="t"/>
-          <a:lstStyle/>
-          <a:p>
-            <a:pPr algn="ctr" indent="0" marL="0">
-              <a:lnSpc>
-                <a:spcPts val="1900"/>
-              </a:lnSpc>
-              <a:buNone/>
-            </a:pPr>
-            <a:r>
-              <a:rPr lang="en-US" sz="1500" b="1" dirty="0">
-                <a:solidFill>
-                  <a:schemeClr val="tx2"/>
-                </a:solidFill>
-              </a:rPr>
-              <a:t>空間與服務設計</a:t>
-            </a:r>
-            <a:endParaRPr lang="en-US" sz="1500" dirty="0"/>
-          </a:p>
-        </p:txBody>
-      </p:sp>
-      <p:sp>
-        <p:nvSpPr>
-          <p:cNvPr id="15" name="Text 13"/>
-          <p:cNvSpPr txBox="1"/>
-          <p:nvPr/>
-        </p:nvSpPr>
-        <p:spPr>
-          <a:xfrm>
-            <a:off x="3794760" y="2651760"/>
-            <a:ext cx="1554480" cy="1371600"/>
-          </a:xfrm>
-          <a:prstGeom prst="rect">
-            <a:avLst/>
-          </a:prstGeom>
-          <a:noFill/>
-          <a:ln/>
-        </p:spPr>
-        <p:txBody>
-          <a:bodyPr wrap="square" lIns="0" tIns="0" rIns="0" bIns="0" rtlCol="0" anchor="t"/>
-          <a:lstStyle/>
-          <a:p>
-            <a:pPr indent="0" marL="0">
-              <a:lnSpc>
-                <a:spcPts val="1500"/>
-              </a:lnSpc>
-              <a:buNone/>
-            </a:pPr>
-            <a:r>
-              <a:rPr lang="en-US" sz="1200" dirty="0">
-                <a:solidFill>
-                  <a:schemeClr val="tx1"/>
-                </a:solidFill>
-              </a:rPr>
-              <a:t>客房標準、睡眠設備、廚房、活動室、服務流程</a:t>
-            </a:r>
-            <a:endParaRPr lang="en-US" sz="1200" dirty="0"/>
-          </a:p>
-        </p:txBody>
-      </p:sp>
-      <p:sp>
-        <p:nvSpPr>
-          <p:cNvPr id="16" name="Phase 4"/>
-          <p:cNvSpPr/>
-          <p:nvPr/>
-        </p:nvSpPr>
-        <p:spPr>
-          <a:xfrm>
-            <a:off x="5920740" y="1371600"/>
-            <a:ext cx="640080" cy="640080"/>
-          </a:xfrm>
-          <a:prstGeom prst="ellipse">
-            <a:avLst/>
-          </a:prstGeom>
-          <a:solidFill>
-            <a:srgbClr val="C07A4F"/>
-          </a:solidFill>
-          <a:ln w="25400">
-            <a:solidFill>
-              <a:srgbClr val="FFFFFF"/>
-            </a:solidFill>
-            <a:prstDash val="solid"/>
-          </a:ln>
-        </p:spPr>
-      </p:sp>
-      <p:sp>
-        <p:nvSpPr>
-          <p:cNvPr id="17" name="Text 15"/>
-          <p:cNvSpPr txBox="1"/>
-          <p:nvPr/>
-        </p:nvSpPr>
-        <p:spPr>
-          <a:xfrm>
-            <a:off x="5920740" y="1371600"/>
-            <a:ext cx="640080" cy="640080"/>
-          </a:xfrm>
-          <a:prstGeom prst="rect">
-            <a:avLst/>
-          </a:prstGeom>
-          <a:noFill/>
-          <a:ln/>
-        </p:spPr>
-        <p:txBody>
-          <a:bodyPr wrap="square" lIns="0" tIns="0" rIns="0" bIns="0" rtlCol="0" anchor="ctr"/>
-          <a:lstStyle/>
-          <a:p>
-            <a:pPr algn="ctr" indent="0" marL="0">
-              <a:lnSpc>
-                <a:spcPts val="2300"/>
-              </a:lnSpc>
-              <a:buNone/>
-            </a:pPr>
-            <a:r>
-              <a:rPr lang="en-US" sz="1800" b="1" dirty="0">
-                <a:solidFill>
-                  <a:schemeClr val="bg1"/>
-                </a:solidFill>
-              </a:rPr>
-              <a:t>4</a:t>
-            </a:r>
-            <a:endParaRPr lang="en-US" sz="1800" dirty="0"/>
-          </a:p>
-        </p:txBody>
-      </p:sp>
-      <p:sp>
-        <p:nvSpPr>
-          <p:cNvPr id="18" name="Text 16"/>
-          <p:cNvSpPr txBox="1"/>
-          <p:nvPr/>
-        </p:nvSpPr>
-        <p:spPr>
-          <a:xfrm>
-            <a:off x="5417820" y="2240280"/>
-            <a:ext cx="1645920" cy="365760"/>
-          </a:xfrm>
-          <a:prstGeom prst="rect">
-            <a:avLst/>
-          </a:prstGeom>
-          <a:noFill/>
-          <a:ln/>
-        </p:spPr>
-        <p:txBody>
-          <a:bodyPr wrap="square" lIns="0" tIns="0" rIns="0" bIns="0" rtlCol="0" anchor="t"/>
-          <a:lstStyle/>
-          <a:p>
-            <a:pPr algn="ctr" indent="0" marL="0">
-              <a:lnSpc>
-                <a:spcPts val="1900"/>
-              </a:lnSpc>
-              <a:buNone/>
-            </a:pPr>
-            <a:r>
-              <a:rPr lang="en-US" sz="1500" b="1" dirty="0">
-                <a:solidFill>
-                  <a:schemeClr val="tx2"/>
-                </a:solidFill>
-              </a:rPr>
-              <a:t>小規模試營運</a:t>
-            </a:r>
-            <a:endParaRPr lang="en-US" sz="1500" dirty="0"/>
-          </a:p>
-        </p:txBody>
-      </p:sp>
-      <p:sp>
-        <p:nvSpPr>
-          <p:cNvPr id="19" name="Text 17"/>
-          <p:cNvSpPr txBox="1"/>
-          <p:nvPr/>
-        </p:nvSpPr>
-        <p:spPr>
-          <a:xfrm>
-            <a:off x="5463540" y="2651760"/>
-            <a:ext cx="1554480" cy="1371600"/>
-          </a:xfrm>
-          <a:prstGeom prst="rect">
-            <a:avLst/>
-          </a:prstGeom>
-          <a:noFill/>
-          <a:ln/>
-        </p:spPr>
-        <p:txBody>
-          <a:bodyPr wrap="square" lIns="0" tIns="0" rIns="0" bIns="0" rtlCol="0" anchor="t"/>
-          <a:lstStyle/>
-          <a:p>
-            <a:pPr indent="0" marL="0">
-              <a:lnSpc>
-                <a:spcPts val="1500"/>
-              </a:lnSpc>
-              <a:buNone/>
-            </a:pPr>
-            <a:r>
-              <a:rPr lang="en-US" sz="1200" dirty="0">
-                <a:solidFill>
-                  <a:schemeClr val="tx1"/>
-                </a:solidFill>
-              </a:rPr>
-              <a:t>測試品質、餐食成本、參與率、回饋與營收</a:t>
-            </a:r>
-            <a:endParaRPr lang="en-US" sz="1200" dirty="0"/>
-          </a:p>
-        </p:txBody>
-      </p:sp>
-      <p:sp>
-        <p:nvSpPr>
-          <p:cNvPr id="20" name="Phase 5"/>
-          <p:cNvSpPr/>
-          <p:nvPr/>
-        </p:nvSpPr>
-        <p:spPr>
-          <a:xfrm>
-            <a:off x="7589520" y="1371600"/>
-            <a:ext cx="640080" cy="640080"/>
-          </a:xfrm>
-          <a:prstGeom prst="ellipse">
-            <a:avLst/>
-          </a:prstGeom>
-          <a:solidFill>
-            <a:srgbClr val="2F4A3A"/>
-          </a:solidFill>
-          <a:ln w="25400">
-            <a:solidFill>
-              <a:srgbClr val="FFFFFF"/>
-            </a:solidFill>
-            <a:prstDash val="solid"/>
-          </a:ln>
-        </p:spPr>
-      </p:sp>
-      <p:sp>
-        <p:nvSpPr>
-          <p:cNvPr id="21" name="Text 19"/>
-          <p:cNvSpPr txBox="1"/>
-          <p:nvPr/>
-        </p:nvSpPr>
-        <p:spPr>
-          <a:xfrm>
-            <a:off x="7589520" y="1371600"/>
-            <a:ext cx="640080" cy="640080"/>
-          </a:xfrm>
-          <a:prstGeom prst="rect">
-            <a:avLst/>
-          </a:prstGeom>
-          <a:noFill/>
-          <a:ln/>
-        </p:spPr>
-        <p:txBody>
-          <a:bodyPr wrap="square" lIns="0" tIns="0" rIns="0" bIns="0" rtlCol="0" anchor="ctr"/>
-          <a:lstStyle/>
-          <a:p>
-            <a:pPr algn="ctr" indent="0" marL="0">
-              <a:lnSpc>
-                <a:spcPts val="2300"/>
-              </a:lnSpc>
-              <a:buNone/>
-            </a:pPr>
-            <a:r>
-              <a:rPr lang="en-US" sz="1800" b="1" dirty="0">
-                <a:solidFill>
-                  <a:schemeClr val="bg1"/>
-                </a:solidFill>
-              </a:rPr>
-              <a:t>5</a:t>
-            </a:r>
-            <a:endParaRPr lang="en-US" sz="1800" dirty="0"/>
-          </a:p>
-        </p:txBody>
-      </p:sp>
-      <p:sp>
-        <p:nvSpPr>
-          <p:cNvPr id="22" name="Text 20"/>
-          <p:cNvSpPr txBox="1"/>
-          <p:nvPr/>
-        </p:nvSpPr>
-        <p:spPr>
-          <a:xfrm>
-            <a:off x="7086600" y="2240280"/>
-            <a:ext cx="1645920" cy="365760"/>
-          </a:xfrm>
-          <a:prstGeom prst="rect">
-            <a:avLst/>
-          </a:prstGeom>
-          <a:noFill/>
-          <a:ln/>
-        </p:spPr>
-        <p:txBody>
-          <a:bodyPr wrap="square" lIns="0" tIns="0" rIns="0" bIns="0" rtlCol="0" anchor="t"/>
-          <a:lstStyle/>
-          <a:p>
-            <a:pPr algn="ctr" indent="0" marL="0">
-              <a:lnSpc>
-                <a:spcPts val="1900"/>
-              </a:lnSpc>
-              <a:buNone/>
-            </a:pPr>
-            <a:r>
-              <a:rPr lang="en-US" sz="1500" b="1" dirty="0">
-                <a:solidFill>
-                  <a:schemeClr val="tx2"/>
-                </a:solidFill>
-              </a:rPr>
-              <a:t>品牌與擴張</a:t>
-            </a:r>
-            <a:endParaRPr lang="en-US" sz="1500" dirty="0"/>
-          </a:p>
-        </p:txBody>
-      </p:sp>
-      <p:sp>
-        <p:nvSpPr>
-          <p:cNvPr id="23" name="Text 21"/>
-          <p:cNvSpPr txBox="1"/>
-          <p:nvPr/>
-        </p:nvSpPr>
-        <p:spPr>
-          <a:xfrm>
-            <a:off x="7132320" y="2651760"/>
-            <a:ext cx="1554480" cy="1371600"/>
-          </a:xfrm>
-          <a:prstGeom prst="rect">
-            <a:avLst/>
-          </a:prstGeom>
-          <a:noFill/>
-          <a:ln/>
-        </p:spPr>
-        <p:txBody>
-          <a:bodyPr wrap="square" lIns="0" tIns="0" rIns="0" bIns="0" rtlCol="0" anchor="t"/>
-          <a:lstStyle/>
-          <a:p>
-            <a:pPr indent="0" marL="0">
-              <a:lnSpc>
-                <a:spcPts val="1500"/>
-              </a:lnSpc>
-              <a:buNone/>
-            </a:pPr>
-            <a:r>
-              <a:rPr lang="en-US" sz="1200" dirty="0">
-                <a:solidFill>
-                  <a:schemeClr val="tx1"/>
-                </a:solidFill>
-              </a:rPr>
-              <a:t>依入住率、回訪率、客單價與現金流決定擴張</a:t>
-            </a:r>
-            <a:endParaRPr lang="en-US" sz="1200" dirty="0"/>
-          </a:p>
-        </p:txBody>
-      </p:sp>
-      <p:sp>
-        <p:nvSpPr>
-          <p:cNvPr id="24" name="Text 22"/>
-          <p:cNvSpPr txBox="1"/>
-          <p:nvPr/>
-        </p:nvSpPr>
-        <p:spPr>
-          <a:xfrm>
-            <a:off x="457200" y="4206240"/>
-            <a:ext cx="8229600" cy="365760"/>
-          </a:xfrm>
-          <a:prstGeom prst="rect">
-            <a:avLst/>
-          </a:prstGeom>
-          <a:noFill/>
-          <a:ln/>
-        </p:spPr>
-        <p:txBody>
-          <a:bodyPr wrap="square" lIns="0" tIns="0" rIns="0" bIns="0" rtlCol="0" anchor="t"/>
-          <a:lstStyle/>
-          <a:p>
-            <a:pPr indent="0" marL="0">
-              <a:lnSpc>
                 <a:spcPts val="1600"/>
               </a:lnSpc>
               <a:buNone/>
             </a:pPr>
             <a:r>
-              <a:rPr lang="en-US" sz="1300" i="1" dirty="0">
-                <a:solidFill>
-                  <a:schemeClr val="accent3"/>
-                </a:solidFill>
-              </a:rPr>
-              <a:t>第 4 階段是關鍵：先用真實營收與客人回饋驗證模式，再投入擴張。</a:t>
+              <a:rPr lang="en-US" sz="1300" dirty="0">
+                <a:solidFill>
+                  <a:schemeClr val="accent4"/>
+                </a:solidFill>
+              </a:rPr>
+              <a:t>避開酒店週末旺日，以平日填補客房</a:t>
             </a:r>
             <a:endParaRPr lang="en-US" sz="1300" dirty="0"/>
           </a:p>
@@ -4462,7 +5052,7 @@
                   <a:schemeClr val="bg1"/>
                 </a:solidFill>
               </a:rPr>
-              <a:t>下一步：確定投資方向</a:t>
+              <a:t>結業後：30 天持續陪伴</a:t>
             </a:r>
             <a:endParaRPr lang="en-US" sz="4000" dirty="0"/>
           </a:p>
@@ -4470,59 +5060,18 @@
       </p:sp>
       <p:sp>
         <p:nvSpPr>
-          <p:cNvPr id="3" name="Text 0"/>
+          <p:cNvPr id="3" name="Value 1"/>
           <p:cNvSpPr/>
-          <p:nvPr>
-            <p:ph idx="101" type="body" hasCustomPrompt="1"/>
-          </p:nvPr>
+          <p:nvPr/>
         </p:nvSpPr>
         <p:spPr>
           <a:xfrm>
             <a:off x="640080" y="2697480"/>
-            <a:ext cx="7863840" cy="1280160"/>
-          </a:xfrm>
-          <a:prstGeom prst="rect">
-            <a:avLst/>
-          </a:prstGeom>
-          <a:noFill/>
-          <a:ln/>
-        </p:spPr>
-        <p:txBody>
-          <a:bodyPr wrap="square" rtlCol="0" anchor="t"/>
-          <a:lstStyle/>
-          <a:p>
-            <a:pPr indent="0" marL="0">
-              <a:lnSpc>
-                <a:spcPts val="2200"/>
-              </a:lnSpc>
-              <a:buNone/>
-            </a:pPr>
-            <a:r>
-              <a:rPr lang="en-US" sz="1600" dirty="0">
-                <a:solidFill>
-                  <a:schemeClr val="accent4"/>
-                </a:solidFill>
-              </a:rPr>
-              <a:t>確認後可延伸為完整《康復療癒酒店創業規劃書》：品牌命名、平面配置、房型、裝修預算、設備清單、員工編制、節氣藥膳菜單與年度損益。</a:t>
-            </a:r>
-            <a:endParaRPr lang="en-US" sz="1600" dirty="0"/>
-          </a:p>
-        </p:txBody>
-      </p:sp>
-      <p:sp>
-        <p:nvSpPr>
-          <p:cNvPr id="4" name="Question 1"/>
-          <p:cNvSpPr/>
-          <p:nvPr/>
-        </p:nvSpPr>
-        <p:spPr>
-          <a:xfrm>
-            <a:off x="640080" y="3977640"/>
-            <a:ext cx="1828800" cy="640080"/>
+            <a:ext cx="2468880" cy="1508760"/>
           </a:xfrm>
           <a:prstGeom prst="roundRect">
             <a:avLst>
-              <a:gd name="adj" fmla="val 11429"/>
+              <a:gd name="adj" fmla="val 4848"/>
             </a:avLst>
           </a:prstGeom>
           <a:solidFill>
@@ -4538,38 +5087,126 @@
       </p:sp>
       <p:sp>
         <p:nvSpPr>
-          <p:cNvPr id="5" name="Text 3"/>
+          <p:cNvPr id="4" name="微信群 30 天追蹤 circle"/>
+          <p:cNvSpPr/>
+          <p:nvPr/>
+        </p:nvSpPr>
+        <p:spPr>
+          <a:xfrm>
+            <a:off x="822960" y="2834640"/>
+            <a:ext cx="457200" cy="457200"/>
+          </a:xfrm>
+          <a:prstGeom prst="ellipse">
+            <a:avLst/>
+          </a:prstGeom>
+          <a:solidFill>
+            <a:srgbClr val="7FA37A"/>
+          </a:solidFill>
+          <a:ln w="12700">
+            <a:solidFill>
+              <a:srgbClr val="7FA37A"/>
+            </a:solidFill>
+            <a:prstDash val="solid"/>
+          </a:ln>
+        </p:spPr>
+      </p:sp>
+      <p:pic>
+        <p:nvPicPr>
+          <p:cNvPr id="5" name="微信群 30 天追蹤 icon" descr="微信群 30 天追蹤">    </p:cNvPr>
+          <p:cNvPicPr>
+            <a:picLocks noChangeAspect="1"/>
+          </p:cNvPicPr>
+          <p:nvPr/>
+        </p:nvPicPr>
+        <p:blipFill>
+          <a:blip r:embed="rId1"/>
+          <a:stretch>
+            <a:fillRect/>
+          </a:stretch>
+        </p:blipFill>
+        <p:spPr>
+          <a:xfrm>
+            <a:off x="937260" y="2948940"/>
+            <a:ext cx="228600" cy="228600"/>
+          </a:xfrm>
+          <a:prstGeom prst="rect">
+            <a:avLst/>
+          </a:prstGeom>
+        </p:spPr>
+      </p:pic>
+      <p:sp>
+        <p:nvSpPr>
+          <p:cNvPr id="6" name="Text 3"/>
           <p:cNvSpPr txBox="1"/>
           <p:nvPr/>
         </p:nvSpPr>
         <p:spPr>
           <a:xfrm>
-            <a:off x="749808" y="3977640"/>
-            <a:ext cx="1691640" cy="640080"/>
-          </a:xfrm>
-          <a:prstGeom prst="rect">
-            <a:avLst/>
-          </a:prstGeom>
-          <a:noFill/>
-          <a:ln/>
-        </p:spPr>
-        <p:txBody>
-          <a:bodyPr wrap="square" lIns="0" tIns="0" rIns="0" bIns="0" rtlCol="0" anchor="ctr"/>
+            <a:off x="822960" y="3383280"/>
+            <a:ext cx="2148840" cy="320040"/>
+          </a:xfrm>
+          <a:prstGeom prst="rect">
+            <a:avLst/>
+          </a:prstGeom>
+          <a:noFill/>
+          <a:ln/>
+        </p:spPr>
+        <p:txBody>
+          <a:bodyPr wrap="square" lIns="0" tIns="0" rIns="0" bIns="0" rtlCol="0" anchor="t"/>
           <a:lstStyle/>
           <a:p>
             <a:pPr indent="0" marL="0">
               <a:lnSpc>
+                <a:spcPts val="1800"/>
+              </a:lnSpc>
+              <a:buNone/>
+            </a:pPr>
+            <a:r>
+              <a:rPr lang="en-US" sz="1400" b="1" dirty="0">
+                <a:solidFill>
+                  <a:schemeClr val="bg1"/>
+                </a:solidFill>
+              </a:rPr>
+              <a:t>微信群 30 天追蹤</a:t>
+            </a:r>
+            <a:endParaRPr lang="en-US" sz="1400" dirty="0"/>
+          </a:p>
+        </p:txBody>
+      </p:sp>
+      <p:sp>
+        <p:nvSpPr>
+          <p:cNvPr id="7" name="Text 4"/>
+          <p:cNvSpPr txBox="1"/>
+          <p:nvPr/>
+        </p:nvSpPr>
+        <p:spPr>
+          <a:xfrm>
+            <a:off x="822960" y="3730752"/>
+            <a:ext cx="2148840" cy="411480"/>
+          </a:xfrm>
+          <a:prstGeom prst="rect">
+            <a:avLst/>
+          </a:prstGeom>
+          <a:noFill/>
+          <a:ln/>
+        </p:spPr>
+        <p:txBody>
+          <a:bodyPr wrap="square" lIns="0" tIns="0" rIns="0" bIns="0" rtlCol="0" anchor="t"/>
+          <a:lstStyle/>
+          <a:p>
+            <a:pPr indent="0" marL="0">
+              <a:lnSpc>
                 <a:spcPts val="1500"/>
               </a:lnSpc>
               <a:buNone/>
             </a:pPr>
             <a:r>
-              <a:rPr lang="en-US" sz="1200" b="1" dirty="0">
-                <a:solidFill>
-                  <a:schemeClr val="bg1"/>
-                </a:solidFill>
-              </a:rPr>
-              <a:t>1 核心經營方向</a:t>
+              <a:rPr lang="en-US" sz="1200" dirty="0">
+                <a:solidFill>
+                  <a:schemeClr val="accent4"/>
+                </a:solidFill>
+              </a:rPr>
+              <a:t>結業後持續陪伴，不在退房時結束</a:t>
             </a:r>
             <a:endParaRPr lang="en-US" sz="1200" dirty="0"/>
           </a:p>
@@ -4577,18 +5214,18 @@
       </p:sp>
       <p:sp>
         <p:nvSpPr>
-          <p:cNvPr id="6" name="Question 2"/>
+          <p:cNvPr id="8" name="Value 2"/>
           <p:cNvSpPr/>
           <p:nvPr/>
         </p:nvSpPr>
         <p:spPr>
           <a:xfrm>
-            <a:off x="2651760" y="3977640"/>
-            <a:ext cx="1828800" cy="640080"/>
+            <a:off x="3337560" y="2697480"/>
+            <a:ext cx="2468880" cy="1508760"/>
           </a:xfrm>
           <a:prstGeom prst="roundRect">
             <a:avLst>
-              <a:gd name="adj" fmla="val 11429"/>
+              <a:gd name="adj" fmla="val 4848"/>
             </a:avLst>
           </a:prstGeom>
           <a:solidFill>
@@ -4604,38 +5241,126 @@
       </p:sp>
       <p:sp>
         <p:nvSpPr>
-          <p:cNvPr id="7" name="Text 5"/>
+          <p:cNvPr id="9" name="每週一次回報 circle"/>
+          <p:cNvSpPr/>
+          <p:nvPr/>
+        </p:nvSpPr>
+        <p:spPr>
+          <a:xfrm>
+            <a:off x="3520440" y="2834640"/>
+            <a:ext cx="457200" cy="457200"/>
+          </a:xfrm>
+          <a:prstGeom prst="ellipse">
+            <a:avLst/>
+          </a:prstGeom>
+          <a:solidFill>
+            <a:srgbClr val="7FA37A"/>
+          </a:solidFill>
+          <a:ln w="12700">
+            <a:solidFill>
+              <a:srgbClr val="7FA37A"/>
+            </a:solidFill>
+            <a:prstDash val="solid"/>
+          </a:ln>
+        </p:spPr>
+      </p:sp>
+      <p:pic>
+        <p:nvPicPr>
+          <p:cNvPr id="10" name="每週一次回報 icon" descr="每週一次回報">    </p:cNvPr>
+          <p:cNvPicPr>
+            <a:picLocks noChangeAspect="1"/>
+          </p:cNvPicPr>
+          <p:nvPr/>
+        </p:nvPicPr>
+        <p:blipFill>
+          <a:blip r:embed="rId2"/>
+          <a:stretch>
+            <a:fillRect/>
+          </a:stretch>
+        </p:blipFill>
+        <p:spPr>
+          <a:xfrm>
+            <a:off x="3634740" y="2948940"/>
+            <a:ext cx="228600" cy="228600"/>
+          </a:xfrm>
+          <a:prstGeom prst="rect">
+            <a:avLst/>
+          </a:prstGeom>
+        </p:spPr>
+      </p:pic>
+      <p:sp>
+        <p:nvSpPr>
+          <p:cNvPr id="11" name="Text 7"/>
           <p:cNvSpPr txBox="1"/>
           <p:nvPr/>
         </p:nvSpPr>
         <p:spPr>
           <a:xfrm>
-            <a:off x="2761488" y="3977640"/>
-            <a:ext cx="1691640" cy="640080"/>
-          </a:xfrm>
-          <a:prstGeom prst="rect">
-            <a:avLst/>
-          </a:prstGeom>
-          <a:noFill/>
-          <a:ln/>
-        </p:spPr>
-        <p:txBody>
-          <a:bodyPr wrap="square" lIns="0" tIns="0" rIns="0" bIns="0" rtlCol="0" anchor="ctr"/>
+            <a:off x="3520440" y="3383280"/>
+            <a:ext cx="2148840" cy="320040"/>
+          </a:xfrm>
+          <a:prstGeom prst="rect">
+            <a:avLst/>
+          </a:prstGeom>
+          <a:noFill/>
+          <a:ln/>
+        </p:spPr>
+        <p:txBody>
+          <a:bodyPr wrap="square" lIns="0" tIns="0" rIns="0" bIns="0" rtlCol="0" anchor="t"/>
           <a:lstStyle/>
           <a:p>
             <a:pPr indent="0" marL="0">
               <a:lnSpc>
+                <a:spcPts val="1800"/>
+              </a:lnSpc>
+              <a:buNone/>
+            </a:pPr>
+            <a:r>
+              <a:rPr lang="en-US" sz="1400" b="1" dirty="0">
+                <a:solidFill>
+                  <a:schemeClr val="bg1"/>
+                </a:solidFill>
+              </a:rPr>
+              <a:t>每週一次回報</a:t>
+            </a:r>
+            <a:endParaRPr lang="en-US" sz="1400" dirty="0"/>
+          </a:p>
+        </p:txBody>
+      </p:sp>
+      <p:sp>
+        <p:nvSpPr>
+          <p:cNvPr id="12" name="Text 8"/>
+          <p:cNvSpPr txBox="1"/>
+          <p:nvPr/>
+        </p:nvSpPr>
+        <p:spPr>
+          <a:xfrm>
+            <a:off x="3520440" y="3730752"/>
+            <a:ext cx="2148840" cy="411480"/>
+          </a:xfrm>
+          <a:prstGeom prst="rect">
+            <a:avLst/>
+          </a:prstGeom>
+          <a:noFill/>
+          <a:ln/>
+        </p:spPr>
+        <p:txBody>
+          <a:bodyPr wrap="square" lIns="0" tIns="0" rIns="0" bIns="0" rtlCol="0" anchor="t"/>
+          <a:lstStyle/>
+          <a:p>
+            <a:pPr indent="0" marL="0">
+              <a:lnSpc>
                 <a:spcPts val="1500"/>
               </a:lnSpc>
               <a:buNone/>
             </a:pPr>
             <a:r>
-              <a:rPr lang="en-US" sz="1200" b="1" dirty="0">
-                <a:solidFill>
-                  <a:schemeClr val="bg1"/>
-                </a:solidFill>
-              </a:rPr>
-              <a:t>2 預計地點</a:t>
+              <a:rPr lang="en-US" sz="1200" dirty="0">
+                <a:solidFill>
+                  <a:schemeClr val="accent4"/>
+                </a:solidFill>
+              </a:rPr>
+              <a:t>飲食與睡眠回報，延續健康習慣</a:t>
             </a:r>
             <a:endParaRPr lang="en-US" sz="1200" dirty="0"/>
           </a:p>
@@ -4643,18 +5368,18 @@
       </p:sp>
       <p:sp>
         <p:nvSpPr>
-          <p:cNvPr id="8" name="Question 3"/>
+          <p:cNvPr id="13" name="Value 3"/>
           <p:cNvSpPr/>
           <p:nvPr/>
         </p:nvSpPr>
         <p:spPr>
           <a:xfrm>
-            <a:off x="4663440" y="3977640"/>
-            <a:ext cx="1828800" cy="640080"/>
+            <a:off x="6035040" y="2697480"/>
+            <a:ext cx="2468880" cy="1508760"/>
           </a:xfrm>
           <a:prstGeom prst="roundRect">
             <a:avLst>
-              <a:gd name="adj" fmla="val 11429"/>
+              <a:gd name="adj" fmla="val 4848"/>
             </a:avLst>
           </a:prstGeom>
           <a:solidFill>
@@ -4670,106 +5395,200 @@
       </p:sp>
       <p:sp>
         <p:nvSpPr>
-          <p:cNvPr id="9" name="Text 7"/>
-          <p:cNvSpPr txBox="1"/>
-          <p:nvPr/>
-        </p:nvSpPr>
-        <p:spPr>
-          <a:xfrm>
-            <a:off x="4773168" y="3977640"/>
-            <a:ext cx="1691640" cy="640080"/>
-          </a:xfrm>
-          <a:prstGeom prst="rect">
-            <a:avLst/>
-          </a:prstGeom>
-          <a:noFill/>
-          <a:ln/>
-        </p:spPr>
-        <p:txBody>
-          <a:bodyPr wrap="square" lIns="0" tIns="0" rIns="0" bIns="0" rtlCol="0" anchor="ctr"/>
-          <a:lstStyle/>
-          <a:p>
-            <a:pPr indent="0" marL="0">
-              <a:lnSpc>
-                <a:spcPts val="1500"/>
-              </a:lnSpc>
-              <a:buNone/>
-            </a:pPr>
-            <a:r>
-              <a:rPr lang="en-US" sz="1200" b="1" dirty="0">
-                <a:solidFill>
-                  <a:schemeClr val="bg1"/>
-                </a:solidFill>
-              </a:rPr>
-              <a:t>3 預計規模</a:t>
-            </a:r>
-            <a:endParaRPr lang="en-US" sz="1200" dirty="0"/>
-          </a:p>
-        </p:txBody>
-      </p:sp>
-      <p:sp>
-        <p:nvSpPr>
-          <p:cNvPr id="10" name="Question 4"/>
+          <p:cNvPr id="14" name="回購與介紹親友 circle"/>
           <p:cNvSpPr/>
           <p:nvPr/>
         </p:nvSpPr>
         <p:spPr>
           <a:xfrm>
-            <a:off x="6675120" y="3977640"/>
-            <a:ext cx="1828800" cy="640080"/>
-          </a:xfrm>
-          <a:prstGeom prst="roundRect">
-            <a:avLst>
-              <a:gd name="adj" fmla="val 11429"/>
-            </a:avLst>
+            <a:off x="6217920" y="2834640"/>
+            <a:ext cx="457200" cy="457200"/>
+          </a:xfrm>
+          <a:prstGeom prst="ellipse">
+            <a:avLst/>
           </a:prstGeom>
           <a:solidFill>
-            <a:srgbClr val="3D5C4A"/>
+            <a:srgbClr val="7FA37A"/>
           </a:solidFill>
           <a:ln w="12700">
             <a:solidFill>
-              <a:srgbClr val="3D5C4A"/>
+              <a:srgbClr val="7FA37A"/>
             </a:solidFill>
             <a:prstDash val="solid"/>
           </a:ln>
         </p:spPr>
       </p:sp>
-      <p:sp>
-        <p:nvSpPr>
-          <p:cNvPr id="11" name="Text 9"/>
+      <p:pic>
+        <p:nvPicPr>
+          <p:cNvPr id="15" name="回購與介紹親友 icon" descr="回購與介紹親友">    </p:cNvPr>
+          <p:cNvPicPr>
+            <a:picLocks noChangeAspect="1"/>
+          </p:cNvPicPr>
+          <p:nvPr/>
+        </p:nvPicPr>
+        <p:blipFill>
+          <a:blip r:embed="rId3"/>
+          <a:stretch>
+            <a:fillRect/>
+          </a:stretch>
+        </p:blipFill>
+        <p:spPr>
+          <a:xfrm>
+            <a:off x="6332220" y="2948940"/>
+            <a:ext cx="228600" cy="228600"/>
+          </a:xfrm>
+          <a:prstGeom prst="rect">
+            <a:avLst/>
+          </a:prstGeom>
+        </p:spPr>
+      </p:pic>
+      <p:sp>
+        <p:nvSpPr>
+          <p:cNvPr id="16" name="Text 11"/>
           <p:cNvSpPr txBox="1"/>
           <p:nvPr/>
         </p:nvSpPr>
         <p:spPr>
           <a:xfrm>
-            <a:off x="6784848" y="3977640"/>
-            <a:ext cx="1691640" cy="640080"/>
-          </a:xfrm>
-          <a:prstGeom prst="rect">
-            <a:avLst/>
-          </a:prstGeom>
-          <a:noFill/>
-          <a:ln/>
-        </p:spPr>
-        <p:txBody>
-          <a:bodyPr wrap="square" lIns="0" tIns="0" rIns="0" bIns="0" rtlCol="0" anchor="ctr"/>
+            <a:off x="6217920" y="3383280"/>
+            <a:ext cx="2148840" cy="320040"/>
+          </a:xfrm>
+          <a:prstGeom prst="rect">
+            <a:avLst/>
+          </a:prstGeom>
+          <a:noFill/>
+          <a:ln/>
+        </p:spPr>
+        <p:txBody>
+          <a:bodyPr wrap="square" lIns="0" tIns="0" rIns="0" bIns="0" rtlCol="0" anchor="t"/>
           <a:lstStyle/>
           <a:p>
             <a:pPr indent="0" marL="0">
               <a:lnSpc>
+                <a:spcPts val="1800"/>
+              </a:lnSpc>
+              <a:buNone/>
+            </a:pPr>
+            <a:r>
+              <a:rPr lang="en-US" sz="1400" b="1" dirty="0">
+                <a:solidFill>
+                  <a:schemeClr val="bg1"/>
+                </a:solidFill>
+              </a:rPr>
+              <a:t>回購與介紹親友</a:t>
+            </a:r>
+            <a:endParaRPr lang="en-US" sz="1400" dirty="0"/>
+          </a:p>
+        </p:txBody>
+      </p:sp>
+      <p:sp>
+        <p:nvSpPr>
+          <p:cNvPr id="17" name="Text 12"/>
+          <p:cNvSpPr txBox="1"/>
+          <p:nvPr/>
+        </p:nvSpPr>
+        <p:spPr>
+          <a:xfrm>
+            <a:off x="6217920" y="3730752"/>
+            <a:ext cx="2148840" cy="411480"/>
+          </a:xfrm>
+          <a:prstGeom prst="rect">
+            <a:avLst/>
+          </a:prstGeom>
+          <a:noFill/>
+          <a:ln/>
+        </p:spPr>
+        <p:txBody>
+          <a:bodyPr wrap="square" lIns="0" tIns="0" rIns="0" bIns="0" rtlCol="0" anchor="t"/>
+          <a:lstStyle/>
+          <a:p>
+            <a:pPr indent="0" marL="0">
+              <a:lnSpc>
                 <a:spcPts val="1500"/>
               </a:lnSpc>
               <a:buNone/>
             </a:pPr>
             <a:r>
-              <a:rPr lang="en-US" sz="1200" b="1" dirty="0">
-                <a:solidFill>
-                  <a:schemeClr val="bg1"/>
-                </a:solidFill>
-              </a:rPr>
-              <a:t>4 投資預算</a:t>
+              <a:rPr lang="en-US" sz="1200" dirty="0">
+                <a:solidFill>
+                  <a:schemeClr val="accent4"/>
+                </a:solidFill>
+              </a:rPr>
+              <a:t>以成果與陪伴帶動下一次入住</a:t>
             </a:r>
             <a:endParaRPr lang="en-US" sz="1200" dirty="0"/>
+          </a:p>
+        </p:txBody>
+      </p:sp>
+      <p:sp>
+        <p:nvSpPr>
+          <p:cNvPr id="18" name="Text 13"/>
+          <p:cNvSpPr txBox="1"/>
+          <p:nvPr/>
+        </p:nvSpPr>
+        <p:spPr>
+          <a:xfrm>
+            <a:off x="640080" y="4434840"/>
+            <a:ext cx="7863840" cy="320040"/>
+          </a:xfrm>
+          <a:prstGeom prst="rect">
+            <a:avLst/>
+          </a:prstGeom>
+          <a:noFill/>
+          <a:ln/>
+        </p:spPr>
+        <p:txBody>
+          <a:bodyPr wrap="square" lIns="0" tIns="0" rIns="0" bIns="0" rtlCol="0" anchor="t"/>
+          <a:lstStyle/>
+          <a:p>
+            <a:pPr indent="0" marL="0">
+              <a:lnSpc>
+                <a:spcPts val="1600"/>
+              </a:lnSpc>
+              <a:buNone/>
+            </a:pPr>
+            <a:r>
+              <a:rPr lang="en-US" sz="1300" b="1" dirty="0">
+                <a:solidFill>
+                  <a:schemeClr val="accent2"/>
+                </a:solidFill>
+              </a:rPr>
+              <a:t>規劃設計｜陳博士康養團隊</a:t>
+            </a:r>
+            <a:endParaRPr lang="en-US" sz="1300" dirty="0"/>
+          </a:p>
+        </p:txBody>
+      </p:sp>
+      <p:sp>
+        <p:nvSpPr>
+          <p:cNvPr id="19" name="Text 0"/>
+          <p:cNvSpPr/>
+          <p:nvPr>
+            <p:ph idx="101" type="body" hasCustomPrompt="1"/>
+          </p:nvPr>
+        </p:nvSpPr>
+        <p:spPr>
+          <a:xfrm>
+            <a:off x="640080" y="2697480"/>
+            <a:ext cx="7863840" cy="1280160"/>
+          </a:xfrm>
+          <a:prstGeom prst="rect">
+            <a:avLst/>
+          </a:prstGeom>
+          <a:noFill/>
+          <a:ln/>
+        </p:spPr>
+        <p:txBody>
+          <a:bodyPr wrap="square" rtlCol="0" anchor="t"/>
+          <a:lstStyle/>
+          <a:p>
+            <a:pPr indent="0" marL="0">
+              <a:lnSpc>
+                <a:spcPts val="2200"/>
+              </a:lnSpc>
+              <a:buNone/>
+            </a:pPr>
+            <a:endParaRPr lang="en-US" sz="1600" dirty="0"/>
           </a:p>
         </p:txBody>
       </p:sp>
@@ -8234,7 +9053,7 @@
                   <a:schemeClr val="tx2"/>
                 </a:solidFill>
               </a:rPr>
-              <a:t>可銷售的療癒住宿方案</a:t>
+              <a:t>品牌命名與定位</a:t>
             </a:r>
             <a:endParaRPr lang="en-US" sz="2800" dirty="0"/>
           </a:p>
@@ -8242,307 +9061,18 @@
       </p:sp>
       <p:sp>
         <p:nvSpPr>
-          <p:cNvPr id="3" name="Text 1"/>
-          <p:cNvSpPr txBox="1"/>
-          <p:nvPr/>
-        </p:nvSpPr>
-        <p:spPr>
-          <a:xfrm>
-            <a:off x="457200" y="960120"/>
-            <a:ext cx="8229600" cy="320040"/>
-          </a:xfrm>
-          <a:prstGeom prst="rect">
-            <a:avLst/>
-          </a:prstGeom>
-          <a:noFill/>
-          <a:ln/>
-        </p:spPr>
-        <p:txBody>
-          <a:bodyPr wrap="square" lIns="0" tIns="0" rIns="0" bIns="0" rtlCol="0" anchor="t"/>
-          <a:lstStyle/>
-          <a:p>
-            <a:pPr indent="0" marL="0">
-              <a:lnSpc>
-                <a:spcPts val="1600"/>
-              </a:lnSpc>
-              <a:buNone/>
-            </a:pPr>
-            <a:r>
-              <a:rPr lang="en-US" sz="1300" dirty="0">
-                <a:solidFill>
-                  <a:schemeClr val="accent5"/>
-                </a:solidFill>
-              </a:rPr>
-              <a:t>不只賣「一晚住宿」，而是把住宿、餐食、活動和服務組合成完整體驗</a:t>
-            </a:r>
-            <a:endParaRPr lang="en-US" sz="1300" dirty="0"/>
-          </a:p>
-        </p:txBody>
-      </p:sp>
-      <p:sp>
-        <p:nvSpPr>
-          <p:cNvPr id="4" name="Package A"/>
+          <p:cNvPr id="3" name="Main brand card"/>
           <p:cNvSpPr/>
           <p:nvPr/>
         </p:nvSpPr>
         <p:spPr>
           <a:xfrm>
-            <a:off x="457200" y="1371600"/>
-            <a:ext cx="2615184" cy="3154680"/>
+            <a:off x="457200" y="1188720"/>
+            <a:ext cx="3474720" cy="3246120"/>
           </a:xfrm>
           <a:prstGeom prst="roundRect">
             <a:avLst>
-              <a:gd name="adj" fmla="val 2797"/>
-            </a:avLst>
-          </a:prstGeom>
-          <a:solidFill>
-            <a:srgbClr val="EEF3EC"/>
-          </a:solidFill>
-          <a:ln w="12700">
-            <a:solidFill>
-              <a:srgbClr val="EEF3EC"/>
-            </a:solidFill>
-            <a:prstDash val="solid"/>
-          </a:ln>
-        </p:spPr>
-      </p:sp>
-      <p:sp>
-        <p:nvSpPr>
-          <p:cNvPr id="5" name="Text 3"/>
-          <p:cNvSpPr txBox="1"/>
-          <p:nvPr/>
-        </p:nvSpPr>
-        <p:spPr>
-          <a:xfrm>
-            <a:off x="685800" y="1508760"/>
-            <a:ext cx="2157984" cy="274320"/>
-          </a:xfrm>
-          <a:prstGeom prst="rect">
-            <a:avLst/>
-          </a:prstGeom>
-          <a:noFill/>
-          <a:ln/>
-        </p:spPr>
-        <p:txBody>
-          <a:bodyPr wrap="square" lIns="0" tIns="0" rIns="0" bIns="0" rtlCol="0" anchor="t"/>
-          <a:lstStyle/>
-          <a:p>
-            <a:pPr indent="0" marL="0">
-              <a:lnSpc>
-                <a:spcPts val="1500"/>
-              </a:lnSpc>
-              <a:buNone/>
-            </a:pPr>
-            <a:r>
-              <a:rPr lang="en-US" sz="1200" b="1" dirty="0">
-                <a:solidFill>
-                  <a:schemeClr val="accent3"/>
-                </a:solidFill>
-              </a:rPr>
-              <a:t>方案 A｜2 晚 3 日</a:t>
-            </a:r>
-            <a:endParaRPr lang="en-US" sz="1200" dirty="0"/>
-          </a:p>
-        </p:txBody>
-      </p:sp>
-      <p:sp>
-        <p:nvSpPr>
-          <p:cNvPr id="6" name="Text 4"/>
-          <p:cNvSpPr txBox="1"/>
-          <p:nvPr/>
-        </p:nvSpPr>
-        <p:spPr>
-          <a:xfrm>
-            <a:off x="685800" y="1810512"/>
-            <a:ext cx="2157984" cy="411480"/>
-          </a:xfrm>
-          <a:prstGeom prst="rect">
-            <a:avLst/>
-          </a:prstGeom>
-          <a:noFill/>
-          <a:ln/>
-        </p:spPr>
-        <p:txBody>
-          <a:bodyPr wrap="square" lIns="0" tIns="0" rIns="0" bIns="0" rtlCol="0" anchor="t"/>
-          <a:lstStyle/>
-          <a:p>
-            <a:pPr indent="0" marL="0">
-              <a:lnSpc>
-                <a:spcPts val="2300"/>
-              </a:lnSpc>
-              <a:buNone/>
-            </a:pPr>
-            <a:r>
-              <a:rPr lang="en-US" sz="1800" b="1" dirty="0">
-                <a:solidFill>
-                  <a:schemeClr val="tx2"/>
-                </a:solidFill>
-              </a:rPr>
-              <a:t>睡眠休養之旅</a:t>
-            </a:r>
-            <a:endParaRPr lang="en-US" sz="1800" dirty="0"/>
-          </a:p>
-        </p:txBody>
-      </p:sp>
-      <p:sp>
-        <p:nvSpPr>
-          <p:cNvPr id="7" name="Text 5"/>
-          <p:cNvSpPr txBox="1"/>
-          <p:nvPr/>
-        </p:nvSpPr>
-        <p:spPr>
-          <a:xfrm>
-            <a:off x="685800" y="2331720"/>
-            <a:ext cx="2157984" cy="1371600"/>
-          </a:xfrm>
-          <a:prstGeom prst="rect">
-            <a:avLst/>
-          </a:prstGeom>
-          <a:noFill/>
-          <a:ln/>
-        </p:spPr>
-        <p:txBody>
-          <a:bodyPr wrap="square" lIns="0" tIns="0" rIns="0" bIns="0" rtlCol="0" anchor="t"/>
-          <a:lstStyle/>
-          <a:p>
-            <a:pPr marL="342900" indent="-342900">
-              <a:lnSpc>
-                <a:spcPts val="1600"/>
-              </a:lnSpc>
-              <a:spcAft>
-                <a:spcPts val="300"/>
-              </a:spcAft>
-              <a:buSzPct val="100000"/>
-              <a:buChar char="•"/>
-            </a:pPr>
-            <a:r>
-              <a:rPr lang="en-US" sz="1300" dirty="0">
-                <a:solidFill>
-                  <a:schemeClr val="tx1"/>
-                </a:solidFill>
-              </a:rPr>
-              <a:t>2 晚住宿</a:t>
-            </a:r>
-            <a:endParaRPr lang="en-US" sz="1300" dirty="0"/>
-          </a:p>
-          <a:p>
-            <a:pPr marL="342900" indent="-342900">
-              <a:lnSpc>
-                <a:spcPts val="1600"/>
-              </a:lnSpc>
-              <a:spcAft>
-                <a:spcPts val="300"/>
-              </a:spcAft>
-              <a:buSzPct val="100000"/>
-              <a:buChar char="•"/>
-            </a:pPr>
-            <a:r>
-              <a:rPr lang="en-US" sz="1300" dirty="0">
-                <a:solidFill>
-                  <a:schemeClr val="tx1"/>
-                </a:solidFill>
-              </a:rPr>
-              <a:t>每日養生早餐</a:t>
-            </a:r>
-            <a:endParaRPr lang="en-US" sz="1300" dirty="0"/>
-          </a:p>
-          <a:p>
-            <a:pPr marL="342900" indent="-342900">
-              <a:lnSpc>
-                <a:spcPts val="1600"/>
-              </a:lnSpc>
-              <a:spcAft>
-                <a:spcPts val="300"/>
-              </a:spcAft>
-              <a:buSzPct val="100000"/>
-              <a:buChar char="•"/>
-            </a:pPr>
-            <a:r>
-              <a:rPr lang="en-US" sz="1300" dirty="0">
-                <a:solidFill>
-                  <a:schemeClr val="tx1"/>
-                </a:solidFill>
-              </a:rPr>
-              <a:t>晚間放鬆活動</a:t>
-            </a:r>
-            <a:endParaRPr lang="en-US" sz="1300" dirty="0"/>
-          </a:p>
-          <a:p>
-            <a:pPr marL="342900" indent="-342900">
-              <a:lnSpc>
-                <a:spcPts val="1600"/>
-              </a:lnSpc>
-              <a:spcAft>
-                <a:spcPts val="300"/>
-              </a:spcAft>
-              <a:buSzPct val="100000"/>
-              <a:buChar char="•"/>
-            </a:pPr>
-            <a:r>
-              <a:rPr lang="en-US" sz="1300" dirty="0">
-                <a:solidFill>
-                  <a:schemeClr val="tx1"/>
-                </a:solidFill>
-              </a:rPr>
-              <a:t>草本茶飲與睡眠指引</a:t>
-            </a:r>
-            <a:endParaRPr lang="en-US" sz="1300" dirty="0"/>
-          </a:p>
-        </p:txBody>
-      </p:sp>
-      <p:sp>
-        <p:nvSpPr>
-          <p:cNvPr id="8" name="Text 6"/>
-          <p:cNvSpPr txBox="1"/>
-          <p:nvPr/>
-        </p:nvSpPr>
-        <p:spPr>
-          <a:xfrm>
-            <a:off x="685800" y="3840480"/>
-            <a:ext cx="2157984" cy="548640"/>
-          </a:xfrm>
-          <a:prstGeom prst="rect">
-            <a:avLst/>
-          </a:prstGeom>
-          <a:noFill/>
-          <a:ln/>
-        </p:spPr>
-        <p:txBody>
-          <a:bodyPr wrap="square" lIns="0" tIns="0" rIns="0" bIns="0" rtlCol="0" anchor="t"/>
-          <a:lstStyle/>
-          <a:p>
-            <a:pPr indent="0" marL="0">
-              <a:lnSpc>
-                <a:spcPts val="1500"/>
-              </a:lnSpc>
-              <a:buNone/>
-            </a:pPr>
-            <a:r>
-              <a:rPr lang="en-US" sz="1200" i="1" dirty="0">
-                <a:solidFill>
-                  <a:schemeClr val="accent5"/>
-                </a:solidFill>
-              </a:rPr>
-              <a:t>適合：初次體驗、暫離工作壓力</a:t>
-            </a:r>
-            <a:endParaRPr lang="en-US" sz="1200" dirty="0"/>
-          </a:p>
-        </p:txBody>
-      </p:sp>
-      <p:sp>
-        <p:nvSpPr>
-          <p:cNvPr id="9" name="Package B"/>
-          <p:cNvSpPr/>
-          <p:nvPr/>
-        </p:nvSpPr>
-        <p:spPr>
-          <a:xfrm>
-            <a:off x="3264408" y="1371600"/>
-            <a:ext cx="2615184" cy="3154680"/>
-          </a:xfrm>
-          <a:prstGeom prst="roundRect">
-            <a:avLst>
-              <a:gd name="adj" fmla="val 2797"/>
+              <a:gd name="adj" fmla="val 2254"/>
             </a:avLst>
           </a:prstGeom>
           <a:solidFill>
@@ -8558,14 +9088,14 @@
       </p:sp>
       <p:sp>
         <p:nvSpPr>
-          <p:cNvPr id="10" name="Text 8"/>
+          <p:cNvPr id="4" name="Text 2"/>
           <p:cNvSpPr txBox="1"/>
           <p:nvPr/>
         </p:nvSpPr>
         <p:spPr>
           <a:xfrm>
-            <a:off x="3493008" y="1508760"/>
-            <a:ext cx="2157984" cy="274320"/>
+            <a:off x="731520" y="1417320"/>
+            <a:ext cx="2926080" cy="274320"/>
           </a:xfrm>
           <a:prstGeom prst="rect">
             <a:avLst/>
@@ -8589,7 +9119,7 @@
                   <a:schemeClr val="accent2"/>
                 </a:solidFill>
               </a:rPr>
-              <a:t>方案 B｜3 晚 4 日</a:t>
+              <a:t>建議主品牌</a:t>
             </a:r>
             <a:endParaRPr lang="en-US" sz="1200" dirty="0"/>
           </a:p>
@@ -8597,14 +9127,14 @@
       </p:sp>
       <p:sp>
         <p:nvSpPr>
-          <p:cNvPr id="11" name="Text 9"/>
+          <p:cNvPr id="5" name="Text 3"/>
           <p:cNvSpPr txBox="1"/>
           <p:nvPr/>
         </p:nvSpPr>
         <p:spPr>
           <a:xfrm>
-            <a:off x="3493008" y="1810512"/>
-            <a:ext cx="2157984" cy="411480"/>
+            <a:off x="731520" y="1737360"/>
+            <a:ext cx="3017520" cy="548640"/>
           </a:xfrm>
           <a:prstGeom prst="rect">
             <a:avLst/>
@@ -8618,32 +9148,32 @@
           <a:p>
             <a:pPr indent="0" marL="0">
               <a:lnSpc>
-                <a:spcPts val="2300"/>
-              </a:lnSpc>
-              <a:buNone/>
-            </a:pPr>
-            <a:r>
-              <a:rPr lang="en-US" sz="1800" b="1" dirty="0">
+                <a:spcPts val="3500"/>
+              </a:lnSpc>
+              <a:buNone/>
+            </a:pPr>
+            <a:r>
+              <a:rPr lang="en-US" sz="2800" b="1" dirty="0">
                 <a:solidFill>
                   <a:schemeClr val="bg1"/>
                 </a:solidFill>
               </a:rPr>
-              <a:t>節氣養生之旅</a:t>
-            </a:r>
-            <a:endParaRPr lang="en-US" sz="1800" dirty="0"/>
-          </a:p>
-        </p:txBody>
-      </p:sp>
-      <p:sp>
-        <p:nvSpPr>
-          <p:cNvPr id="12" name="Text 10"/>
+              <a:t>十療・五日重生</a:t>
+            </a:r>
+            <a:endParaRPr lang="en-US" sz="2800" dirty="0"/>
+          </a:p>
+        </p:txBody>
+      </p:sp>
+      <p:sp>
+        <p:nvSpPr>
+          <p:cNvPr id="6" name="Text 4"/>
           <p:cNvSpPr txBox="1"/>
           <p:nvPr/>
         </p:nvSpPr>
         <p:spPr>
           <a:xfrm>
-            <a:off x="3493008" y="2331720"/>
-            <a:ext cx="2157984" cy="1371600"/>
+            <a:off x="731520" y="2377440"/>
+            <a:ext cx="2926080" cy="548640"/>
           </a:xfrm>
           <a:prstGeom prst="rect">
             <a:avLst/>
@@ -8655,101 +9185,34 @@
           <a:bodyPr wrap="square" lIns="0" tIns="0" rIns="0" bIns="0" rtlCol="0" anchor="t"/>
           <a:lstStyle/>
           <a:p>
-            <a:pPr marL="342900" indent="-342900">
+            <a:pPr indent="0" marL="0">
               <a:lnSpc>
                 <a:spcPts val="1600"/>
               </a:lnSpc>
-              <a:spcAft>
-                <a:spcPts val="300"/>
-              </a:spcAft>
-              <a:buSzPct val="100000"/>
-              <a:buChar char="•"/>
+              <a:buNone/>
             </a:pPr>
             <a:r>
               <a:rPr lang="en-US" sz="1300" dirty="0">
                 <a:solidFill>
-                  <a:schemeClr val="bg1"/>
-                </a:solidFill>
-              </a:rPr>
-              <a:t>住宿與節氣餐食</a:t>
+                  <a:schemeClr val="accent4"/>
+                </a:solidFill>
+              </a:rPr>
+              <a:t>一讀就懂內容（十種療法）與時長（五天）</a:t>
             </a:r>
             <a:endParaRPr lang="en-US" sz="1300" dirty="0"/>
           </a:p>
-          <a:p>
-            <a:pPr marL="342900" indent="-342900">
-              <a:lnSpc>
-                <a:spcPts val="1600"/>
-              </a:lnSpc>
-              <a:spcAft>
-                <a:spcPts val="300"/>
-              </a:spcAft>
-              <a:buSzPct val="100000"/>
-              <a:buChar char="•"/>
-            </a:pPr>
-            <a:r>
-              <a:rPr lang="en-US" sz="1300" dirty="0">
-                <a:solidFill>
-                  <a:schemeClr val="bg1"/>
-                </a:solidFill>
-              </a:rPr>
-              <a:t>五紅、五黑或茯苓點心</a:t>
-            </a:r>
-            <a:endParaRPr lang="en-US" sz="1300" dirty="0"/>
-          </a:p>
-          <a:p>
-            <a:pPr marL="342900" indent="-342900">
-              <a:lnSpc>
-                <a:spcPts val="1600"/>
-              </a:lnSpc>
-              <a:spcAft>
-                <a:spcPts val="300"/>
-              </a:spcAft>
-              <a:buSzPct val="100000"/>
-              <a:buChar char="•"/>
-            </a:pPr>
-            <a:r>
-              <a:rPr lang="en-US" sz="1300" dirty="0">
-                <a:solidFill>
-                  <a:schemeClr val="bg1"/>
-                </a:solidFill>
-              </a:rPr>
-              <a:t>自然漫步與溫和活動</a:t>
-            </a:r>
-            <a:endParaRPr lang="en-US" sz="1300" dirty="0"/>
-          </a:p>
-          <a:p>
-            <a:pPr marL="342900" indent="-342900">
-              <a:lnSpc>
-                <a:spcPts val="1600"/>
-              </a:lnSpc>
-              <a:spcAft>
-                <a:spcPts val="300"/>
-              </a:spcAft>
-              <a:buSzPct val="100000"/>
-              <a:buChar char="•"/>
-            </a:pPr>
-            <a:r>
-              <a:rPr lang="en-US" sz="1300" dirty="0">
-                <a:solidFill>
-                  <a:schemeClr val="bg1"/>
-                </a:solidFill>
-              </a:rPr>
-              <a:t>節氣飲食體驗課</a:t>
-            </a:r>
-            <a:endParaRPr lang="en-US" sz="1300" dirty="0"/>
-          </a:p>
-        </p:txBody>
-      </p:sp>
-      <p:sp>
-        <p:nvSpPr>
-          <p:cNvPr id="13" name="Text 11"/>
+        </p:txBody>
+      </p:sp>
+      <p:sp>
+        <p:nvSpPr>
+          <p:cNvPr id="7" name="Text 5"/>
           <p:cNvSpPr txBox="1"/>
           <p:nvPr/>
         </p:nvSpPr>
         <p:spPr>
           <a:xfrm>
-            <a:off x="3493008" y="3840480"/>
-            <a:ext cx="2157984" cy="548640"/>
+            <a:off x="731520" y="3246120"/>
+            <a:ext cx="2926080" cy="274320"/>
           </a:xfrm>
           <a:prstGeom prst="rect">
             <a:avLst/>
@@ -8768,12 +9231,12 @@
               <a:buNone/>
             </a:pPr>
             <a:r>
-              <a:rPr lang="en-US" sz="1200" i="1" dirty="0">
+              <a:rPr lang="en-US" sz="1200" dirty="0">
                 <a:solidFill>
                   <a:schemeClr val="accent4"/>
                 </a:solidFill>
               </a:rPr>
-              <a:t>適合：喜歡養生飲食與慢旅行</a:t>
+              <a:t>不是醫院，也不是一般度假，而是</a:t>
             </a:r>
             <a:endParaRPr lang="en-US" sz="1200" dirty="0"/>
           </a:p>
@@ -8781,41 +9244,14 @@
       </p:sp>
       <p:sp>
         <p:nvSpPr>
-          <p:cNvPr id="14" name="Package C"/>
-          <p:cNvSpPr/>
-          <p:nvPr/>
-        </p:nvSpPr>
-        <p:spPr>
-          <a:xfrm>
-            <a:off x="6071616" y="1371600"/>
-            <a:ext cx="2615184" cy="3154680"/>
-          </a:xfrm>
-          <a:prstGeom prst="roundRect">
-            <a:avLst>
-              <a:gd name="adj" fmla="val 2797"/>
-            </a:avLst>
-          </a:prstGeom>
-          <a:solidFill>
-            <a:srgbClr val="EEF3EC"/>
-          </a:solidFill>
-          <a:ln w="12700">
-            <a:solidFill>
-              <a:srgbClr val="EEF3EC"/>
-            </a:solidFill>
-            <a:prstDash val="solid"/>
-          </a:ln>
-        </p:spPr>
-      </p:sp>
-      <p:sp>
-        <p:nvSpPr>
-          <p:cNvPr id="15" name="Text 13"/>
+          <p:cNvPr id="8" name="Text 6"/>
           <p:cNvSpPr txBox="1"/>
           <p:nvPr/>
         </p:nvSpPr>
         <p:spPr>
           <a:xfrm>
-            <a:off x="6300216" y="1508760"/>
-            <a:ext cx="2157984" cy="274320"/>
+            <a:off x="731520" y="3566160"/>
+            <a:ext cx="3017520" cy="640080"/>
           </a:xfrm>
           <a:prstGeom prst="rect">
             <a:avLst/>
@@ -8829,32 +9265,32 @@
           <a:p>
             <a:pPr indent="0" marL="0">
               <a:lnSpc>
-                <a:spcPts val="1500"/>
-              </a:lnSpc>
-              <a:buNone/>
-            </a:pPr>
-            <a:r>
-              <a:rPr lang="en-US" sz="1200" b="1" dirty="0">
-                <a:solidFill>
-                  <a:schemeClr val="accent3"/>
-                </a:solidFill>
-              </a:rPr>
-              <a:t>方案 C｜5 晚 6 日</a:t>
-            </a:r>
-            <a:endParaRPr lang="en-US" sz="1200" dirty="0"/>
-          </a:p>
-        </p:txBody>
-      </p:sp>
-      <p:sp>
-        <p:nvSpPr>
-          <p:cNvPr id="16" name="Text 14"/>
+                <a:spcPts val="1900"/>
+              </a:lnSpc>
+              <a:buNone/>
+            </a:pPr>
+            <a:r>
+              <a:rPr lang="en-US" sz="1500" b="1" i="1" dirty="0">
+                <a:solidFill>
+                  <a:schemeClr val="accent2"/>
+                </a:solidFill>
+              </a:rPr>
+              <a:t>「有專業團隊陪伴的身心復原之旅」</a:t>
+            </a:r>
+            <a:endParaRPr lang="en-US" sz="1500" dirty="0"/>
+          </a:p>
+        </p:txBody>
+      </p:sp>
+      <p:sp>
+        <p:nvSpPr>
+          <p:cNvPr id="9" name="Text 7"/>
           <p:cNvSpPr txBox="1"/>
           <p:nvPr/>
         </p:nvSpPr>
         <p:spPr>
           <a:xfrm>
-            <a:off x="6300216" y="1810512"/>
-            <a:ext cx="2157984" cy="411480"/>
+            <a:off x="4251960" y="1188720"/>
+            <a:ext cx="4434840" cy="320040"/>
           </a:xfrm>
           <a:prstGeom prst="rect">
             <a:avLst/>
@@ -8868,167 +9304,978 @@
           <a:p>
             <a:pPr indent="0" marL="0">
               <a:lnSpc>
-                <a:spcPts val="2300"/>
-              </a:lnSpc>
-              <a:buNone/>
-            </a:pPr>
-            <a:r>
-              <a:rPr lang="en-US" sz="1800" b="1" dirty="0">
+                <a:spcPts val="1900"/>
+              </a:lnSpc>
+              <a:buNone/>
+            </a:pPr>
+            <a:r>
+              <a:rPr lang="en-US" sz="1500" b="1" dirty="0">
                 <a:solidFill>
                   <a:schemeClr val="tx2"/>
                 </a:solidFill>
               </a:rPr>
-              <a:t>深度身心休養</a:t>
-            </a:r>
-            <a:endParaRPr lang="en-US" sz="1800" dirty="0"/>
-          </a:p>
-        </p:txBody>
-      </p:sp>
-      <p:sp>
-        <p:nvSpPr>
-          <p:cNvPr id="17" name="Text 15"/>
-          <p:cNvSpPr txBox="1"/>
-          <p:nvPr/>
-        </p:nvSpPr>
-        <p:spPr>
-          <a:xfrm>
-            <a:off x="6300216" y="2331720"/>
-            <a:ext cx="2157984" cy="1371600"/>
-          </a:xfrm>
-          <a:prstGeom prst="rect">
-            <a:avLst/>
-          </a:prstGeom>
-          <a:noFill/>
-          <a:ln/>
-        </p:spPr>
-        <p:txBody>
-          <a:bodyPr wrap="square" lIns="0" tIns="0" rIns="0" bIns="0" rtlCol="0" anchor="t"/>
-          <a:lstStyle/>
-          <a:p>
-            <a:pPr marL="342900" indent="-342900">
-              <a:lnSpc>
-                <a:spcPts val="1600"/>
-              </a:lnSpc>
-              <a:spcAft>
-                <a:spcPts val="300"/>
-              </a:spcAft>
-              <a:buSzPct val="100000"/>
-              <a:buChar char="•"/>
-            </a:pPr>
-            <a:r>
-              <a:rPr lang="en-US" sz="1300" dirty="0">
-                <a:solidFill>
-                  <a:schemeClr val="tx1"/>
-                </a:solidFill>
-              </a:rPr>
-              <a:t>個人化休養日程</a:t>
-            </a:r>
-            <a:endParaRPr lang="en-US" sz="1300" dirty="0"/>
-          </a:p>
-          <a:p>
-            <a:pPr marL="342900" indent="-342900">
-              <a:lnSpc>
-                <a:spcPts val="1600"/>
-              </a:lnSpc>
-              <a:spcAft>
-                <a:spcPts val="300"/>
-              </a:spcAft>
-              <a:buSzPct val="100000"/>
-              <a:buChar char="•"/>
-            </a:pPr>
-            <a:r>
-              <a:rPr lang="en-US" sz="1300" dirty="0">
-                <a:solidFill>
-                  <a:schemeClr val="tx1"/>
-                </a:solidFill>
-              </a:rPr>
-              <a:t>多日營養餐食</a:t>
-            </a:r>
-            <a:endParaRPr lang="en-US" sz="1300" dirty="0"/>
-          </a:p>
-          <a:p>
-            <a:pPr marL="342900" indent="-342900">
-              <a:lnSpc>
-                <a:spcPts val="1600"/>
-              </a:lnSpc>
-              <a:spcAft>
-                <a:spcPts val="300"/>
-              </a:spcAft>
-              <a:buSzPct val="100000"/>
-              <a:buChar char="•"/>
-            </a:pPr>
-            <a:r>
-              <a:rPr lang="en-US" sz="1300" dirty="0">
-                <a:solidFill>
-                  <a:schemeClr val="tx1"/>
-                </a:solidFill>
-              </a:rPr>
-              <a:t>多次身心放鬆活動</a:t>
-            </a:r>
-            <a:endParaRPr lang="en-US" sz="1300" dirty="0"/>
-          </a:p>
-          <a:p>
-            <a:pPr marL="342900" indent="-342900">
-              <a:lnSpc>
-                <a:spcPts val="1600"/>
-              </a:lnSpc>
-              <a:spcAft>
-                <a:spcPts val="300"/>
-              </a:spcAft>
-              <a:buSzPct val="100000"/>
-              <a:buChar char="•"/>
-            </a:pPr>
-            <a:r>
-              <a:rPr lang="en-US" sz="1300" dirty="0">
-                <a:solidFill>
-                  <a:schemeClr val="tx1"/>
-                </a:solidFill>
-              </a:rPr>
-              <a:t>離店後生活計畫</a:t>
-            </a:r>
-            <a:endParaRPr lang="en-US" sz="1300" dirty="0"/>
-          </a:p>
-        </p:txBody>
-      </p:sp>
-      <p:sp>
-        <p:nvSpPr>
-          <p:cNvPr id="18" name="Text 16"/>
-          <p:cNvSpPr txBox="1"/>
-          <p:nvPr/>
-        </p:nvSpPr>
-        <p:spPr>
-          <a:xfrm>
-            <a:off x="6300216" y="3840480"/>
-            <a:ext cx="2157984" cy="548640"/>
-          </a:xfrm>
-          <a:prstGeom prst="rect">
-            <a:avLst/>
-          </a:prstGeom>
-          <a:noFill/>
-          <a:ln/>
-        </p:spPr>
-        <p:txBody>
-          <a:bodyPr wrap="square" lIns="0" tIns="0" rIns="0" bIns="0" rtlCol="0" anchor="t"/>
-          <a:lstStyle/>
-          <a:p>
-            <a:pPr indent="0" marL="0">
-              <a:lnSpc>
-                <a:spcPts val="1500"/>
-              </a:lnSpc>
-              <a:buNone/>
-            </a:pPr>
-            <a:r>
-              <a:rPr lang="en-US" sz="1200" i="1" dirty="0">
-                <a:solidFill>
-                  <a:schemeClr val="accent5"/>
-                </a:solidFill>
-              </a:rPr>
-              <a:t>適合：長假期、重視安靜與完整服務</a:t>
-            </a:r>
-            <a:endParaRPr lang="en-US" sz="1200" dirty="0"/>
-          </a:p>
-        </p:txBody>
-      </p:sp>
+              <a:t>備選名稱</a:t>
+            </a:r>
+            <a:endParaRPr lang="en-US" sz="1500" dirty="0"/>
+          </a:p>
+        </p:txBody>
+      </p:sp>
+      <p:graphicFrame>
+        <p:nvGraphicFramePr>
+          <p:cNvPr id="8" name="Table 0"/>
+          <p:cNvGraphicFramePr>
+            <a:graphicFrameLocks noGrp="1"/>
+          </p:cNvGraphicFramePr>
+          <p:nvPr>
+            <p:extLst>
+              <p:ext uri="{D42A27DB-BD31-4B8C-83A1-F6EECF244321}">
+                <p14:modId xmlns:p14="http://schemas.microsoft.com/office/powerpoint/2010/main" val="1579011935"/>
+              </p:ext>
+            </p:extLst>
+          </p:nvPr>
+        </p:nvGraphicFramePr>
+        <p:xfrm>
+          <a:off x="4251960" y="1600200"/>
+          <a:ext cx="4434840" cy="914400"/>
+        </p:xfrm>
+        <a:graphic>
+          <a:graphicData uri="http://schemas.openxmlformats.org/drawingml/2006/table">
+            <a:tbl>
+              <a:tblPr/>
+              <a:tblGrid>
+                <a:gridCol w="1691640"/>
+                <a:gridCol w="1508760"/>
+                <a:gridCol w="1234440"/>
+              </a:tblGrid>
+              <a:tr h="548640">
+                <a:tc>
+                  <a:txBody>
+                    <a:bodyPr/>
+                    <a:lstStyle/>
+                    <a:p>
+                      <a:pPr indent="0" marL="0">
+                        <a:buNone/>
+                      </a:pPr>
+                      <a:r>
+                        <a:rPr lang="en-US" sz="1200" b="1" dirty="0">
+                          <a:solidFill>
+                            <a:schemeClr val="bg1"/>
+                          </a:solidFill>
+                        </a:rPr>
+                        <a:t>名稱</a:t>
+                      </a:r>
+                      <a:endParaRPr lang="en-US" sz="1200" dirty="0"/>
+                    </a:p>
+                  </a:txBody>
+                  <a:tcPr marL="73152" marR="73152" marT="27432" marB="27432" anchor="ctr">
+                    <a:lnL w="9525" cap="flat" cmpd="sng" algn="ctr">
+                      <a:solidFill>
+                        <a:srgbClr val="D5DED2"/>
+                      </a:solidFill>
+                      <a:prstDash val="solid"/>
+                      <a:round/>
+                      <a:headEnd type="none" w="med" len="med"/>
+                      <a:tailEnd type="none" w="med" len="med"/>
+                    </a:lnL>
+                    <a:lnR w="9525" cap="flat" cmpd="sng" algn="ctr">
+                      <a:solidFill>
+                        <a:srgbClr val="D5DED2"/>
+                      </a:solidFill>
+                      <a:prstDash val="solid"/>
+                      <a:round/>
+                      <a:headEnd type="none" w="med" len="med"/>
+                      <a:tailEnd type="none" w="med" len="med"/>
+                    </a:lnR>
+                    <a:lnT w="9525" cap="flat" cmpd="sng" algn="ctr">
+                      <a:solidFill>
+                        <a:srgbClr val="D5DED2"/>
+                      </a:solidFill>
+                      <a:prstDash val="solid"/>
+                      <a:round/>
+                      <a:headEnd type="none" w="med" len="med"/>
+                      <a:tailEnd type="none" w="med" len="med"/>
+                    </a:lnT>
+                    <a:lnB w="9525" cap="flat" cmpd="sng" algn="ctr">
+                      <a:solidFill>
+                        <a:srgbClr val="D5DED2"/>
+                      </a:solidFill>
+                      <a:prstDash val="solid"/>
+                      <a:round/>
+                      <a:headEnd type="none" w="med" len="med"/>
+                      <a:tailEnd type="none" w="med" len="med"/>
+                    </a:lnB>
+                    <a:solidFill>
+                      <a:srgbClr val="2F4A3A"/>
+                    </a:solidFill>
+                  </a:tcPr>
+                </a:tc>
+                <a:tc>
+                  <a:txBody>
+                    <a:bodyPr/>
+                    <a:lstStyle/>
+                    <a:p>
+                      <a:pPr indent="0" marL="0">
+                        <a:buNone/>
+                      </a:pPr>
+                      <a:r>
+                        <a:rPr lang="en-US" sz="1200" b="1" dirty="0">
+                          <a:solidFill>
+                            <a:schemeClr val="bg1"/>
+                          </a:solidFill>
+                        </a:rPr>
+                        <a:t>訴求</a:t>
+                      </a:r>
+                      <a:endParaRPr lang="en-US" sz="1200" dirty="0"/>
+                    </a:p>
+                  </a:txBody>
+                  <a:tcPr marL="73152" marR="73152" marT="27432" marB="27432" anchor="ctr">
+                    <a:lnL w="9525" cap="flat" cmpd="sng" algn="ctr">
+                      <a:solidFill>
+                        <a:srgbClr val="D5DED2"/>
+                      </a:solidFill>
+                      <a:prstDash val="solid"/>
+                      <a:round/>
+                      <a:headEnd type="none" w="med" len="med"/>
+                      <a:tailEnd type="none" w="med" len="med"/>
+                    </a:lnL>
+                    <a:lnR w="9525" cap="flat" cmpd="sng" algn="ctr">
+                      <a:solidFill>
+                        <a:srgbClr val="D5DED2"/>
+                      </a:solidFill>
+                      <a:prstDash val="solid"/>
+                      <a:round/>
+                      <a:headEnd type="none" w="med" len="med"/>
+                      <a:tailEnd type="none" w="med" len="med"/>
+                    </a:lnR>
+                    <a:lnT w="9525" cap="flat" cmpd="sng" algn="ctr">
+                      <a:solidFill>
+                        <a:srgbClr val="D5DED2"/>
+                      </a:solidFill>
+                      <a:prstDash val="solid"/>
+                      <a:round/>
+                      <a:headEnd type="none" w="med" len="med"/>
+                      <a:tailEnd type="none" w="med" len="med"/>
+                    </a:lnT>
+                    <a:lnB w="9525" cap="flat" cmpd="sng" algn="ctr">
+                      <a:solidFill>
+                        <a:srgbClr val="D5DED2"/>
+                      </a:solidFill>
+                      <a:prstDash val="solid"/>
+                      <a:round/>
+                      <a:headEnd type="none" w="med" len="med"/>
+                      <a:tailEnd type="none" w="med" len="med"/>
+                    </a:lnB>
+                    <a:solidFill>
+                      <a:srgbClr val="2F4A3A"/>
+                    </a:solidFill>
+                  </a:tcPr>
+                </a:tc>
+                <a:tc>
+                  <a:txBody>
+                    <a:bodyPr/>
+                    <a:lstStyle/>
+                    <a:p>
+                      <a:pPr indent="0" marL="0">
+                        <a:buNone/>
+                      </a:pPr>
+                      <a:r>
+                        <a:rPr lang="en-US" sz="1200" b="1" dirty="0">
+                          <a:solidFill>
+                            <a:schemeClr val="bg1"/>
+                          </a:solidFill>
+                        </a:rPr>
+                        <a:t>適合場景</a:t>
+                      </a:r>
+                      <a:endParaRPr lang="en-US" sz="1200" dirty="0"/>
+                    </a:p>
+                  </a:txBody>
+                  <a:tcPr marL="73152" marR="73152" marT="27432" marB="27432" anchor="ctr">
+                    <a:lnL w="9525" cap="flat" cmpd="sng" algn="ctr">
+                      <a:solidFill>
+                        <a:srgbClr val="D5DED2"/>
+                      </a:solidFill>
+                      <a:prstDash val="solid"/>
+                      <a:round/>
+                      <a:headEnd type="none" w="med" len="med"/>
+                      <a:tailEnd type="none" w="med" len="med"/>
+                    </a:lnL>
+                    <a:lnR w="9525" cap="flat" cmpd="sng" algn="ctr">
+                      <a:solidFill>
+                        <a:srgbClr val="D5DED2"/>
+                      </a:solidFill>
+                      <a:prstDash val="solid"/>
+                      <a:round/>
+                      <a:headEnd type="none" w="med" len="med"/>
+                      <a:tailEnd type="none" w="med" len="med"/>
+                    </a:lnR>
+                    <a:lnT w="9525" cap="flat" cmpd="sng" algn="ctr">
+                      <a:solidFill>
+                        <a:srgbClr val="D5DED2"/>
+                      </a:solidFill>
+                      <a:prstDash val="solid"/>
+                      <a:round/>
+                      <a:headEnd type="none" w="med" len="med"/>
+                      <a:tailEnd type="none" w="med" len="med"/>
+                    </a:lnT>
+                    <a:lnB w="9525" cap="flat" cmpd="sng" algn="ctr">
+                      <a:solidFill>
+                        <a:srgbClr val="D5DED2"/>
+                      </a:solidFill>
+                      <a:prstDash val="solid"/>
+                      <a:round/>
+                      <a:headEnd type="none" w="med" len="med"/>
+                      <a:tailEnd type="none" w="med" len="med"/>
+                    </a:lnB>
+                    <a:solidFill>
+                      <a:srgbClr val="2F4A3A"/>
+                    </a:solidFill>
+                  </a:tcPr>
+                </a:tc>
+              </a:tr>
+              <a:tr h="548640">
+                <a:tc>
+                  <a:txBody>
+                    <a:bodyPr/>
+                    <a:lstStyle/>
+                    <a:p>
+                      <a:pPr indent="0" marL="0">
+                        <a:buNone/>
+                      </a:pPr>
+                      <a:r>
+                        <a:rPr lang="en-US" sz="1200" dirty="0">
+                          <a:solidFill>
+                            <a:schemeClr val="tx1"/>
+                          </a:solidFill>
+                        </a:rPr>
+                        <a:t>十療・五日重生</a:t>
+                      </a:r>
+                      <a:endParaRPr lang="en-US" sz="1200" dirty="0"/>
+                    </a:p>
+                  </a:txBody>
+                  <a:tcPr marL="73152" marR="73152" marT="27432" marB="27432" anchor="ctr">
+                    <a:lnL w="9525" cap="flat" cmpd="sng" algn="ctr">
+                      <a:solidFill>
+                        <a:srgbClr val="D5DED2"/>
+                      </a:solidFill>
+                      <a:prstDash val="solid"/>
+                      <a:round/>
+                      <a:headEnd type="none" w="med" len="med"/>
+                      <a:tailEnd type="none" w="med" len="med"/>
+                    </a:lnL>
+                    <a:lnR w="9525" cap="flat" cmpd="sng" algn="ctr">
+                      <a:solidFill>
+                        <a:srgbClr val="D5DED2"/>
+                      </a:solidFill>
+                      <a:prstDash val="solid"/>
+                      <a:round/>
+                      <a:headEnd type="none" w="med" len="med"/>
+                      <a:tailEnd type="none" w="med" len="med"/>
+                    </a:lnR>
+                    <a:lnT w="9525" cap="flat" cmpd="sng" algn="ctr">
+                      <a:solidFill>
+                        <a:srgbClr val="D5DED2"/>
+                      </a:solidFill>
+                      <a:prstDash val="solid"/>
+                      <a:round/>
+                      <a:headEnd type="none" w="med" len="med"/>
+                      <a:tailEnd type="none" w="med" len="med"/>
+                    </a:lnT>
+                    <a:lnB w="9525" cap="flat" cmpd="sng" algn="ctr">
+                      <a:solidFill>
+                        <a:srgbClr val="D5DED2"/>
+                      </a:solidFill>
+                      <a:prstDash val="solid"/>
+                      <a:round/>
+                      <a:headEnd type="none" w="med" len="med"/>
+                      <a:tailEnd type="none" w="med" len="med"/>
+                    </a:lnB>
+                    <a:solidFill>
+                      <a:srgbClr val="FFFFFF"/>
+                    </a:solidFill>
+                  </a:tcPr>
+                </a:tc>
+                <a:tc>
+                  <a:txBody>
+                    <a:bodyPr/>
+                    <a:lstStyle/>
+                    <a:p>
+                      <a:pPr indent="0" marL="0">
+                        <a:buNone/>
+                      </a:pPr>
+                      <a:r>
+                        <a:rPr lang="en-US" sz="1200" dirty="0">
+                          <a:solidFill>
+                            <a:schemeClr val="tx1"/>
+                          </a:solidFill>
+                        </a:rPr>
+                        <a:t>完整、易記</a:t>
+                      </a:r>
+                      <a:endParaRPr lang="en-US" sz="1200" dirty="0"/>
+                    </a:p>
+                  </a:txBody>
+                  <a:tcPr marL="73152" marR="73152" marT="27432" marB="27432" anchor="ctr">
+                    <a:lnL w="9525" cap="flat" cmpd="sng" algn="ctr">
+                      <a:solidFill>
+                        <a:srgbClr val="D5DED2"/>
+                      </a:solidFill>
+                      <a:prstDash val="solid"/>
+                      <a:round/>
+                      <a:headEnd type="none" w="med" len="med"/>
+                      <a:tailEnd type="none" w="med" len="med"/>
+                    </a:lnL>
+                    <a:lnR w="9525" cap="flat" cmpd="sng" algn="ctr">
+                      <a:solidFill>
+                        <a:srgbClr val="D5DED2"/>
+                      </a:solidFill>
+                      <a:prstDash val="solid"/>
+                      <a:round/>
+                      <a:headEnd type="none" w="med" len="med"/>
+                      <a:tailEnd type="none" w="med" len="med"/>
+                    </a:lnR>
+                    <a:lnT w="9525" cap="flat" cmpd="sng" algn="ctr">
+                      <a:solidFill>
+                        <a:srgbClr val="D5DED2"/>
+                      </a:solidFill>
+                      <a:prstDash val="solid"/>
+                      <a:round/>
+                      <a:headEnd type="none" w="med" len="med"/>
+                      <a:tailEnd type="none" w="med" len="med"/>
+                    </a:lnT>
+                    <a:lnB w="9525" cap="flat" cmpd="sng" algn="ctr">
+                      <a:solidFill>
+                        <a:srgbClr val="D5DED2"/>
+                      </a:solidFill>
+                      <a:prstDash val="solid"/>
+                      <a:round/>
+                      <a:headEnd type="none" w="med" len="med"/>
+                      <a:tailEnd type="none" w="med" len="med"/>
+                    </a:lnB>
+                    <a:solidFill>
+                      <a:srgbClr val="FFFFFF"/>
+                    </a:solidFill>
+                  </a:tcPr>
+                </a:tc>
+                <a:tc>
+                  <a:txBody>
+                    <a:bodyPr/>
+                    <a:lstStyle/>
+                    <a:p>
+                      <a:pPr indent="0" marL="0">
+                        <a:buNone/>
+                      </a:pPr>
+                      <a:r>
+                        <a:rPr lang="en-US" sz="1200" dirty="0">
+                          <a:solidFill>
+                            <a:schemeClr val="tx1"/>
+                          </a:solidFill>
+                        </a:rPr>
+                        <a:t>主品牌</a:t>
+                      </a:r>
+                      <a:endParaRPr lang="en-US" sz="1200" dirty="0"/>
+                    </a:p>
+                  </a:txBody>
+                  <a:tcPr marL="73152" marR="73152" marT="27432" marB="27432" anchor="ctr">
+                    <a:lnL w="9525" cap="flat" cmpd="sng" algn="ctr">
+                      <a:solidFill>
+                        <a:srgbClr val="D5DED2"/>
+                      </a:solidFill>
+                      <a:prstDash val="solid"/>
+                      <a:round/>
+                      <a:headEnd type="none" w="med" len="med"/>
+                      <a:tailEnd type="none" w="med" len="med"/>
+                    </a:lnL>
+                    <a:lnR w="9525" cap="flat" cmpd="sng" algn="ctr">
+                      <a:solidFill>
+                        <a:srgbClr val="D5DED2"/>
+                      </a:solidFill>
+                      <a:prstDash val="solid"/>
+                      <a:round/>
+                      <a:headEnd type="none" w="med" len="med"/>
+                      <a:tailEnd type="none" w="med" len="med"/>
+                    </a:lnR>
+                    <a:lnT w="9525" cap="flat" cmpd="sng" algn="ctr">
+                      <a:solidFill>
+                        <a:srgbClr val="D5DED2"/>
+                      </a:solidFill>
+                      <a:prstDash val="solid"/>
+                      <a:round/>
+                      <a:headEnd type="none" w="med" len="med"/>
+                      <a:tailEnd type="none" w="med" len="med"/>
+                    </a:lnT>
+                    <a:lnB w="9525" cap="flat" cmpd="sng" algn="ctr">
+                      <a:solidFill>
+                        <a:srgbClr val="D5DED2"/>
+                      </a:solidFill>
+                      <a:prstDash val="solid"/>
+                      <a:round/>
+                      <a:headEnd type="none" w="med" len="med"/>
+                      <a:tailEnd type="none" w="med" len="med"/>
+                    </a:lnB>
+                    <a:solidFill>
+                      <a:srgbClr val="FFFFFF"/>
+                    </a:solidFill>
+                  </a:tcPr>
+                </a:tc>
+              </a:tr>
+              <a:tr h="548640">
+                <a:tc>
+                  <a:txBody>
+                    <a:bodyPr/>
+                    <a:lstStyle/>
+                    <a:p>
+                      <a:pPr indent="0" marL="0">
+                        <a:buNone/>
+                      </a:pPr>
+                      <a:r>
+                        <a:rPr lang="en-US" sz="1200" dirty="0">
+                          <a:solidFill>
+                            <a:schemeClr val="tx1"/>
+                          </a:solidFill>
+                        </a:rPr>
+                        <a:t>陳博士山海療癒所</a:t>
+                      </a:r>
+                      <a:endParaRPr lang="en-US" sz="1200" dirty="0"/>
+                    </a:p>
+                  </a:txBody>
+                  <a:tcPr marL="73152" marR="73152" marT="27432" marB="27432" anchor="ctr">
+                    <a:lnL w="9525" cap="flat" cmpd="sng" algn="ctr">
+                      <a:solidFill>
+                        <a:srgbClr val="D5DED2"/>
+                      </a:solidFill>
+                      <a:prstDash val="solid"/>
+                      <a:round/>
+                      <a:headEnd type="none" w="med" len="med"/>
+                      <a:tailEnd type="none" w="med" len="med"/>
+                    </a:lnL>
+                    <a:lnR w="9525" cap="flat" cmpd="sng" algn="ctr">
+                      <a:solidFill>
+                        <a:srgbClr val="D5DED2"/>
+                      </a:solidFill>
+                      <a:prstDash val="solid"/>
+                      <a:round/>
+                      <a:headEnd type="none" w="med" len="med"/>
+                      <a:tailEnd type="none" w="med" len="med"/>
+                    </a:lnR>
+                    <a:lnT w="9525" cap="flat" cmpd="sng" algn="ctr">
+                      <a:solidFill>
+                        <a:srgbClr val="D5DED2"/>
+                      </a:solidFill>
+                      <a:prstDash val="solid"/>
+                      <a:round/>
+                      <a:headEnd type="none" w="med" len="med"/>
+                      <a:tailEnd type="none" w="med" len="med"/>
+                    </a:lnT>
+                    <a:lnB w="9525" cap="flat" cmpd="sng" algn="ctr">
+                      <a:solidFill>
+                        <a:srgbClr val="D5DED2"/>
+                      </a:solidFill>
+                      <a:prstDash val="solid"/>
+                      <a:round/>
+                      <a:headEnd type="none" w="med" len="med"/>
+                      <a:tailEnd type="none" w="med" len="med"/>
+                    </a:lnB>
+                    <a:solidFill>
+                      <a:srgbClr val="EEF3EC"/>
+                    </a:solidFill>
+                  </a:tcPr>
+                </a:tc>
+                <a:tc>
+                  <a:txBody>
+                    <a:bodyPr/>
+                    <a:lstStyle/>
+                    <a:p>
+                      <a:pPr indent="0" marL="0">
+                        <a:buNone/>
+                      </a:pPr>
+                      <a:r>
+                        <a:rPr lang="en-US" sz="1200" dirty="0">
+                          <a:solidFill>
+                            <a:schemeClr val="tx1"/>
+                          </a:solidFill>
+                        </a:rPr>
+                        <a:t>主理人背書、專業感</a:t>
+                      </a:r>
+                      <a:endParaRPr lang="en-US" sz="1200" dirty="0"/>
+                    </a:p>
+                  </a:txBody>
+                  <a:tcPr marL="73152" marR="73152" marT="27432" marB="27432" anchor="ctr">
+                    <a:lnL w="9525" cap="flat" cmpd="sng" algn="ctr">
+                      <a:solidFill>
+                        <a:srgbClr val="D5DED2"/>
+                      </a:solidFill>
+                      <a:prstDash val="solid"/>
+                      <a:round/>
+                      <a:headEnd type="none" w="med" len="med"/>
+                      <a:tailEnd type="none" w="med" len="med"/>
+                    </a:lnL>
+                    <a:lnR w="9525" cap="flat" cmpd="sng" algn="ctr">
+                      <a:solidFill>
+                        <a:srgbClr val="D5DED2"/>
+                      </a:solidFill>
+                      <a:prstDash val="solid"/>
+                      <a:round/>
+                      <a:headEnd type="none" w="med" len="med"/>
+                      <a:tailEnd type="none" w="med" len="med"/>
+                    </a:lnR>
+                    <a:lnT w="9525" cap="flat" cmpd="sng" algn="ctr">
+                      <a:solidFill>
+                        <a:srgbClr val="D5DED2"/>
+                      </a:solidFill>
+                      <a:prstDash val="solid"/>
+                      <a:round/>
+                      <a:headEnd type="none" w="med" len="med"/>
+                      <a:tailEnd type="none" w="med" len="med"/>
+                    </a:lnT>
+                    <a:lnB w="9525" cap="flat" cmpd="sng" algn="ctr">
+                      <a:solidFill>
+                        <a:srgbClr val="D5DED2"/>
+                      </a:solidFill>
+                      <a:prstDash val="solid"/>
+                      <a:round/>
+                      <a:headEnd type="none" w="med" len="med"/>
+                      <a:tailEnd type="none" w="med" len="med"/>
+                    </a:lnB>
+                    <a:solidFill>
+                      <a:srgbClr val="EEF3EC"/>
+                    </a:solidFill>
+                  </a:tcPr>
+                </a:tc>
+                <a:tc>
+                  <a:txBody>
+                    <a:bodyPr/>
+                    <a:lstStyle/>
+                    <a:p>
+                      <a:pPr indent="0" marL="0">
+                        <a:buNone/>
+                      </a:pPr>
+                      <a:r>
+                        <a:rPr lang="en-US" sz="1200" dirty="0">
+                          <a:solidFill>
+                            <a:schemeClr val="tx1"/>
+                          </a:solidFill>
+                        </a:rPr>
+                        <a:t>酒店樓層掛牌</a:t>
+                      </a:r>
+                      <a:endParaRPr lang="en-US" sz="1200" dirty="0"/>
+                    </a:p>
+                  </a:txBody>
+                  <a:tcPr marL="73152" marR="73152" marT="27432" marB="27432" anchor="ctr">
+                    <a:lnL w="9525" cap="flat" cmpd="sng" algn="ctr">
+                      <a:solidFill>
+                        <a:srgbClr val="D5DED2"/>
+                      </a:solidFill>
+                      <a:prstDash val="solid"/>
+                      <a:round/>
+                      <a:headEnd type="none" w="med" len="med"/>
+                      <a:tailEnd type="none" w="med" len="med"/>
+                    </a:lnL>
+                    <a:lnR w="9525" cap="flat" cmpd="sng" algn="ctr">
+                      <a:solidFill>
+                        <a:srgbClr val="D5DED2"/>
+                      </a:solidFill>
+                      <a:prstDash val="solid"/>
+                      <a:round/>
+                      <a:headEnd type="none" w="med" len="med"/>
+                      <a:tailEnd type="none" w="med" len="med"/>
+                    </a:lnR>
+                    <a:lnT w="9525" cap="flat" cmpd="sng" algn="ctr">
+                      <a:solidFill>
+                        <a:srgbClr val="D5DED2"/>
+                      </a:solidFill>
+                      <a:prstDash val="solid"/>
+                      <a:round/>
+                      <a:headEnd type="none" w="med" len="med"/>
+                      <a:tailEnd type="none" w="med" len="med"/>
+                    </a:lnT>
+                    <a:lnB w="9525" cap="flat" cmpd="sng" algn="ctr">
+                      <a:solidFill>
+                        <a:srgbClr val="D5DED2"/>
+                      </a:solidFill>
+                      <a:prstDash val="solid"/>
+                      <a:round/>
+                      <a:headEnd type="none" w="med" len="med"/>
+                      <a:tailEnd type="none" w="med" len="med"/>
+                    </a:lnB>
+                    <a:solidFill>
+                      <a:srgbClr val="EEF3EC"/>
+                    </a:solidFill>
+                  </a:tcPr>
+                </a:tc>
+              </a:tr>
+              <a:tr h="548640">
+                <a:tc>
+                  <a:txBody>
+                    <a:bodyPr/>
+                    <a:lstStyle/>
+                    <a:p>
+                      <a:pPr indent="0" marL="0">
+                        <a:buNone/>
+                      </a:pPr>
+                      <a:r>
+                        <a:rPr lang="en-US" sz="1200" dirty="0">
+                          <a:solidFill>
+                            <a:schemeClr val="tx1"/>
+                          </a:solidFill>
+                        </a:rPr>
+                        <a:t>五日養生營</a:t>
+                      </a:r>
+                      <a:endParaRPr lang="en-US" sz="1200" dirty="0"/>
+                    </a:p>
+                  </a:txBody>
+                  <a:tcPr marL="73152" marR="73152" marT="27432" marB="27432" anchor="ctr">
+                    <a:lnL w="9525" cap="flat" cmpd="sng" algn="ctr">
+                      <a:solidFill>
+                        <a:srgbClr val="D5DED2"/>
+                      </a:solidFill>
+                      <a:prstDash val="solid"/>
+                      <a:round/>
+                      <a:headEnd type="none" w="med" len="med"/>
+                      <a:tailEnd type="none" w="med" len="med"/>
+                    </a:lnL>
+                    <a:lnR w="9525" cap="flat" cmpd="sng" algn="ctr">
+                      <a:solidFill>
+                        <a:srgbClr val="D5DED2"/>
+                      </a:solidFill>
+                      <a:prstDash val="solid"/>
+                      <a:round/>
+                      <a:headEnd type="none" w="med" len="med"/>
+                      <a:tailEnd type="none" w="med" len="med"/>
+                    </a:lnR>
+                    <a:lnT w="9525" cap="flat" cmpd="sng" algn="ctr">
+                      <a:solidFill>
+                        <a:srgbClr val="D5DED2"/>
+                      </a:solidFill>
+                      <a:prstDash val="solid"/>
+                      <a:round/>
+                      <a:headEnd type="none" w="med" len="med"/>
+                      <a:tailEnd type="none" w="med" len="med"/>
+                    </a:lnT>
+                    <a:lnB w="9525" cap="flat" cmpd="sng" algn="ctr">
+                      <a:solidFill>
+                        <a:srgbClr val="D5DED2"/>
+                      </a:solidFill>
+                      <a:prstDash val="solid"/>
+                      <a:round/>
+                      <a:headEnd type="none" w="med" len="med"/>
+                      <a:tailEnd type="none" w="med" len="med"/>
+                    </a:lnB>
+                    <a:solidFill>
+                      <a:srgbClr val="FFFFFF"/>
+                    </a:solidFill>
+                  </a:tcPr>
+                </a:tc>
+                <a:tc>
+                  <a:txBody>
+                    <a:bodyPr/>
+                    <a:lstStyle/>
+                    <a:p>
+                      <a:pPr indent="0" marL="0">
+                        <a:buNone/>
+                      </a:pPr>
+                      <a:r>
+                        <a:rPr lang="en-US" sz="1200" dirty="0">
+                          <a:solidFill>
+                            <a:schemeClr val="tx1"/>
+                          </a:solidFill>
+                        </a:rPr>
+                        <a:t>親民、好推廣</a:t>
+                      </a:r>
+                      <a:endParaRPr lang="en-US" sz="1200" dirty="0"/>
+                    </a:p>
+                  </a:txBody>
+                  <a:tcPr marL="73152" marR="73152" marT="27432" marB="27432" anchor="ctr">
+                    <a:lnL w="9525" cap="flat" cmpd="sng" algn="ctr">
+                      <a:solidFill>
+                        <a:srgbClr val="D5DED2"/>
+                      </a:solidFill>
+                      <a:prstDash val="solid"/>
+                      <a:round/>
+                      <a:headEnd type="none" w="med" len="med"/>
+                      <a:tailEnd type="none" w="med" len="med"/>
+                    </a:lnL>
+                    <a:lnR w="9525" cap="flat" cmpd="sng" algn="ctr">
+                      <a:solidFill>
+                        <a:srgbClr val="D5DED2"/>
+                      </a:solidFill>
+                      <a:prstDash val="solid"/>
+                      <a:round/>
+                      <a:headEnd type="none" w="med" len="med"/>
+                      <a:tailEnd type="none" w="med" len="med"/>
+                    </a:lnR>
+                    <a:lnT w="9525" cap="flat" cmpd="sng" algn="ctr">
+                      <a:solidFill>
+                        <a:srgbClr val="D5DED2"/>
+                      </a:solidFill>
+                      <a:prstDash val="solid"/>
+                      <a:round/>
+                      <a:headEnd type="none" w="med" len="med"/>
+                      <a:tailEnd type="none" w="med" len="med"/>
+                    </a:lnT>
+                    <a:lnB w="9525" cap="flat" cmpd="sng" algn="ctr">
+                      <a:solidFill>
+                        <a:srgbClr val="D5DED2"/>
+                      </a:solidFill>
+                      <a:prstDash val="solid"/>
+                      <a:round/>
+                      <a:headEnd type="none" w="med" len="med"/>
+                      <a:tailEnd type="none" w="med" len="med"/>
+                    </a:lnB>
+                    <a:solidFill>
+                      <a:srgbClr val="FFFFFF"/>
+                    </a:solidFill>
+                  </a:tcPr>
+                </a:tc>
+                <a:tc>
+                  <a:txBody>
+                    <a:bodyPr/>
+                    <a:lstStyle/>
+                    <a:p>
+                      <a:pPr indent="0" marL="0">
+                        <a:buNone/>
+                      </a:pPr>
+                      <a:r>
+                        <a:rPr lang="en-US" sz="1200" dirty="0">
+                          <a:solidFill>
+                            <a:schemeClr val="tx1"/>
+                          </a:solidFill>
+                        </a:rPr>
+                        <a:t>投放廣告、社群</a:t>
+                      </a:r>
+                      <a:endParaRPr lang="en-US" sz="1200" dirty="0"/>
+                    </a:p>
+                  </a:txBody>
+                  <a:tcPr marL="73152" marR="73152" marT="27432" marB="27432" anchor="ctr">
+                    <a:lnL w="9525" cap="flat" cmpd="sng" algn="ctr">
+                      <a:solidFill>
+                        <a:srgbClr val="D5DED2"/>
+                      </a:solidFill>
+                      <a:prstDash val="solid"/>
+                      <a:round/>
+                      <a:headEnd type="none" w="med" len="med"/>
+                      <a:tailEnd type="none" w="med" len="med"/>
+                    </a:lnL>
+                    <a:lnR w="9525" cap="flat" cmpd="sng" algn="ctr">
+                      <a:solidFill>
+                        <a:srgbClr val="D5DED2"/>
+                      </a:solidFill>
+                      <a:prstDash val="solid"/>
+                      <a:round/>
+                      <a:headEnd type="none" w="med" len="med"/>
+                      <a:tailEnd type="none" w="med" len="med"/>
+                    </a:lnR>
+                    <a:lnT w="9525" cap="flat" cmpd="sng" algn="ctr">
+                      <a:solidFill>
+                        <a:srgbClr val="D5DED2"/>
+                      </a:solidFill>
+                      <a:prstDash val="solid"/>
+                      <a:round/>
+                      <a:headEnd type="none" w="med" len="med"/>
+                      <a:tailEnd type="none" w="med" len="med"/>
+                    </a:lnT>
+                    <a:lnB w="9525" cap="flat" cmpd="sng" algn="ctr">
+                      <a:solidFill>
+                        <a:srgbClr val="D5DED2"/>
+                      </a:solidFill>
+                      <a:prstDash val="solid"/>
+                      <a:round/>
+                      <a:headEnd type="none" w="med" len="med"/>
+                      <a:tailEnd type="none" w="med" len="med"/>
+                    </a:lnB>
+                    <a:solidFill>
+                      <a:srgbClr val="FFFFFF"/>
+                    </a:solidFill>
+                  </a:tcPr>
+                </a:tc>
+              </a:tr>
+              <a:tr h="548640">
+                <a:tc>
+                  <a:txBody>
+                    <a:bodyPr/>
+                    <a:lstStyle/>
+                    <a:p>
+                      <a:pPr indent="0" marL="0">
+                        <a:buNone/>
+                      </a:pPr>
+                      <a:r>
+                        <a:rPr lang="en-US" sz="1200" dirty="0">
+                          <a:solidFill>
+                            <a:schemeClr val="tx1"/>
+                          </a:solidFill>
+                        </a:rPr>
+                        <a:t>山居療癒／海居療癒</a:t>
+                      </a:r>
+                      <a:endParaRPr lang="en-US" sz="1200" dirty="0"/>
+                    </a:p>
+                  </a:txBody>
+                  <a:tcPr marL="73152" marR="73152" marT="27432" marB="27432" anchor="ctr">
+                    <a:lnL w="9525" cap="flat" cmpd="sng" algn="ctr">
+                      <a:solidFill>
+                        <a:srgbClr val="D5DED2"/>
+                      </a:solidFill>
+                      <a:prstDash val="solid"/>
+                      <a:round/>
+                      <a:headEnd type="none" w="med" len="med"/>
+                      <a:tailEnd type="none" w="med" len="med"/>
+                    </a:lnL>
+                    <a:lnR w="9525" cap="flat" cmpd="sng" algn="ctr">
+                      <a:solidFill>
+                        <a:srgbClr val="D5DED2"/>
+                      </a:solidFill>
+                      <a:prstDash val="solid"/>
+                      <a:round/>
+                      <a:headEnd type="none" w="med" len="med"/>
+                      <a:tailEnd type="none" w="med" len="med"/>
+                    </a:lnR>
+                    <a:lnT w="9525" cap="flat" cmpd="sng" algn="ctr">
+                      <a:solidFill>
+                        <a:srgbClr val="D5DED2"/>
+                      </a:solidFill>
+                      <a:prstDash val="solid"/>
+                      <a:round/>
+                      <a:headEnd type="none" w="med" len="med"/>
+                      <a:tailEnd type="none" w="med" len="med"/>
+                    </a:lnT>
+                    <a:lnB w="9525" cap="flat" cmpd="sng" algn="ctr">
+                      <a:solidFill>
+                        <a:srgbClr val="D5DED2"/>
+                      </a:solidFill>
+                      <a:prstDash val="solid"/>
+                      <a:round/>
+                      <a:headEnd type="none" w="med" len="med"/>
+                      <a:tailEnd type="none" w="med" len="med"/>
+                    </a:lnB>
+                    <a:solidFill>
+                      <a:srgbClr val="EEF3EC"/>
+                    </a:solidFill>
+                  </a:tcPr>
+                </a:tc>
+                <a:tc>
+                  <a:txBody>
+                    <a:bodyPr/>
+                    <a:lstStyle/>
+                    <a:p>
+                      <a:pPr indent="0" marL="0">
+                        <a:buNone/>
+                      </a:pPr>
+                      <a:r>
+                        <a:rPr lang="en-US" sz="1200" dirty="0">
+                          <a:solidFill>
+                            <a:schemeClr val="tx1"/>
+                          </a:solidFill>
+                        </a:rPr>
+                        <a:t>依酒店地景切換</a:t>
+                      </a:r>
+                      <a:endParaRPr lang="en-US" sz="1200" dirty="0"/>
+                    </a:p>
+                  </a:txBody>
+                  <a:tcPr marL="73152" marR="73152" marT="27432" marB="27432" anchor="ctr">
+                    <a:lnL w="9525" cap="flat" cmpd="sng" algn="ctr">
+                      <a:solidFill>
+                        <a:srgbClr val="D5DED2"/>
+                      </a:solidFill>
+                      <a:prstDash val="solid"/>
+                      <a:round/>
+                      <a:headEnd type="none" w="med" len="med"/>
+                      <a:tailEnd type="none" w="med" len="med"/>
+                    </a:lnL>
+                    <a:lnR w="9525" cap="flat" cmpd="sng" algn="ctr">
+                      <a:solidFill>
+                        <a:srgbClr val="D5DED2"/>
+                      </a:solidFill>
+                      <a:prstDash val="solid"/>
+                      <a:round/>
+                      <a:headEnd type="none" w="med" len="med"/>
+                      <a:tailEnd type="none" w="med" len="med"/>
+                    </a:lnR>
+                    <a:lnT w="9525" cap="flat" cmpd="sng" algn="ctr">
+                      <a:solidFill>
+                        <a:srgbClr val="D5DED2"/>
+                      </a:solidFill>
+                      <a:prstDash val="solid"/>
+                      <a:round/>
+                      <a:headEnd type="none" w="med" len="med"/>
+                      <a:tailEnd type="none" w="med" len="med"/>
+                    </a:lnT>
+                    <a:lnB w="9525" cap="flat" cmpd="sng" algn="ctr">
+                      <a:solidFill>
+                        <a:srgbClr val="D5DED2"/>
+                      </a:solidFill>
+                      <a:prstDash val="solid"/>
+                      <a:round/>
+                      <a:headEnd type="none" w="med" len="med"/>
+                      <a:tailEnd type="none" w="med" len="med"/>
+                    </a:lnB>
+                    <a:solidFill>
+                      <a:srgbClr val="EEF3EC"/>
+                    </a:solidFill>
+                  </a:tcPr>
+                </a:tc>
+                <a:tc>
+                  <a:txBody>
+                    <a:bodyPr/>
+                    <a:lstStyle/>
+                    <a:p>
+                      <a:pPr indent="0" marL="0">
+                        <a:buNone/>
+                      </a:pPr>
+                      <a:r>
+                        <a:rPr lang="en-US" sz="1200" dirty="0">
+                          <a:solidFill>
+                            <a:schemeClr val="tx1"/>
+                          </a:solidFill>
+                        </a:rPr>
+                        <a:t>多酒店複製</a:t>
+                      </a:r>
+                      <a:endParaRPr lang="en-US" sz="1200" dirty="0"/>
+                    </a:p>
+                  </a:txBody>
+                  <a:tcPr marL="73152" marR="73152" marT="27432" marB="27432" anchor="ctr">
+                    <a:lnL w="9525" cap="flat" cmpd="sng" algn="ctr">
+                      <a:solidFill>
+                        <a:srgbClr val="D5DED2"/>
+                      </a:solidFill>
+                      <a:prstDash val="solid"/>
+                      <a:round/>
+                      <a:headEnd type="none" w="med" len="med"/>
+                      <a:tailEnd type="none" w="med" len="med"/>
+                    </a:lnL>
+                    <a:lnR w="9525" cap="flat" cmpd="sng" algn="ctr">
+                      <a:solidFill>
+                        <a:srgbClr val="D5DED2"/>
+                      </a:solidFill>
+                      <a:prstDash val="solid"/>
+                      <a:round/>
+                      <a:headEnd type="none" w="med" len="med"/>
+                      <a:tailEnd type="none" w="med" len="med"/>
+                    </a:lnR>
+                    <a:lnT w="9525" cap="flat" cmpd="sng" algn="ctr">
+                      <a:solidFill>
+                        <a:srgbClr val="D5DED2"/>
+                      </a:solidFill>
+                      <a:prstDash val="solid"/>
+                      <a:round/>
+                      <a:headEnd type="none" w="med" len="med"/>
+                      <a:tailEnd type="none" w="med" len="med"/>
+                    </a:lnT>
+                    <a:lnB w="9525" cap="flat" cmpd="sng" algn="ctr">
+                      <a:solidFill>
+                        <a:srgbClr val="D5DED2"/>
+                      </a:solidFill>
+                      <a:prstDash val="solid"/>
+                      <a:round/>
+                      <a:headEnd type="none" w="med" len="med"/>
+                      <a:tailEnd type="none" w="med" len="med"/>
+                    </a:lnB>
+                    <a:solidFill>
+                      <a:srgbClr val="EEF3EC"/>
+                    </a:solidFill>
+                  </a:tcPr>
+                </a:tc>
+              </a:tr>
+            </a:tbl>
+          </a:graphicData>
+        </a:graphic>
+      </p:graphicFrame>
       <p:sp>
         <p:nvSpPr>
           <p:cNvPr id="25" name="Slide Number Placeholder 0"/>
@@ -9134,7 +10381,7 @@
                   <a:schemeClr val="tx2"/>
                 </a:solidFill>
               </a:rPr>
-              <a:t>開業成本：三種情境評估</a:t>
+              <a:t>目標客群</a:t>
             </a:r>
             <a:endParaRPr lang="en-US" sz="2800" dirty="0"/>
           </a:p>
@@ -9142,19 +10389,44 @@
       </p:sp>
       <p:sp>
         <p:nvSpPr>
-          <p:cNvPr id="3" name="情境一"/>
+          <p:cNvPr id="3" name="Audience 慢性健康困擾"/>
           <p:cNvSpPr/>
           <p:nvPr/>
         </p:nvSpPr>
         <p:spPr>
           <a:xfrm>
-            <a:off x="457200" y="1143000"/>
-            <a:ext cx="8229600" cy="896112"/>
+            <a:off x="457200" y="1188720"/>
+            <a:ext cx="2615184" cy="1554480"/>
           </a:xfrm>
           <a:prstGeom prst="roundRect">
             <a:avLst>
-              <a:gd name="adj" fmla="val 8163"/>
+              <a:gd name="adj" fmla="val 4706"/>
             </a:avLst>
+          </a:prstGeom>
+          <a:solidFill>
+            <a:srgbClr val="EEF3EC"/>
+          </a:solidFill>
+          <a:ln w="12700">
+            <a:solidFill>
+              <a:srgbClr val="EEF3EC"/>
+            </a:solidFill>
+            <a:prstDash val="solid"/>
+          </a:ln>
+        </p:spPr>
+      </p:sp>
+      <p:sp>
+        <p:nvSpPr>
+          <p:cNvPr id="4" name="慢性健康困擾 circle"/>
+          <p:cNvSpPr/>
+          <p:nvPr/>
+        </p:nvSpPr>
+        <p:spPr>
+          <a:xfrm>
+            <a:off x="685800" y="1417320"/>
+            <a:ext cx="548640" cy="548640"/>
+          </a:xfrm>
+          <a:prstGeom prst="ellipse">
+            <a:avLst/>
           </a:prstGeom>
           <a:solidFill>
             <a:srgbClr val="2F4A3A"/>
@@ -9167,16 +10439,40 @@
           </a:ln>
         </p:spPr>
       </p:sp>
-      <p:sp>
-        <p:nvSpPr>
-          <p:cNvPr id="4" name="Text 2"/>
+      <p:pic>
+        <p:nvPicPr>
+          <p:cNvPr id="5" name="慢性健康困擾 icon" descr="慢性健康困擾">    </p:cNvPr>
+          <p:cNvPicPr>
+            <a:picLocks noChangeAspect="1"/>
+          </p:cNvPicPr>
+          <p:nvPr/>
+        </p:nvPicPr>
+        <p:blipFill>
+          <a:blip r:embed="rId1"/>
+          <a:stretch>
+            <a:fillRect/>
+          </a:stretch>
+        </p:blipFill>
+        <p:spPr>
+          <a:xfrm>
+            <a:off x="822960" y="1554480"/>
+            <a:ext cx="274320" cy="274320"/>
+          </a:xfrm>
+          <a:prstGeom prst="rect">
+            <a:avLst/>
+          </a:prstGeom>
+        </p:spPr>
+      </p:pic>
+      <p:sp>
+        <p:nvSpPr>
+          <p:cNvPr id="6" name="Text 3"/>
           <p:cNvSpPr txBox="1"/>
           <p:nvPr/>
         </p:nvSpPr>
         <p:spPr>
           <a:xfrm>
-            <a:off x="685800" y="1280160"/>
-            <a:ext cx="914400" cy="274320"/>
+            <a:off x="1371600" y="1508760"/>
+            <a:ext cx="1554480" cy="365760"/>
           </a:xfrm>
           <a:prstGeom prst="rect">
             <a:avLst/>
@@ -9190,32 +10486,32 @@
           <a:p>
             <a:pPr indent="0" marL="0">
               <a:lnSpc>
-                <a:spcPts val="1500"/>
-              </a:lnSpc>
-              <a:buNone/>
-            </a:pPr>
-            <a:r>
-              <a:rPr lang="en-US" sz="1200" b="1" dirty="0">
-                <a:solidFill>
-                  <a:schemeClr val="accent2"/>
-                </a:solidFill>
-              </a:rPr>
-              <a:t>情境一</a:t>
-            </a:r>
-            <a:endParaRPr lang="en-US" sz="1200" dirty="0"/>
-          </a:p>
-        </p:txBody>
-      </p:sp>
-      <p:sp>
-        <p:nvSpPr>
-          <p:cNvPr id="5" name="Text 3"/>
+                <a:spcPts val="1900"/>
+              </a:lnSpc>
+              <a:buNone/>
+            </a:pPr>
+            <a:r>
+              <a:rPr lang="en-US" sz="1500" b="1" dirty="0">
+                <a:solidFill>
+                  <a:schemeClr val="tx2"/>
+                </a:solidFill>
+              </a:rPr>
+              <a:t>慢性健康困擾</a:t>
+            </a:r>
+            <a:endParaRPr lang="en-US" sz="1500" dirty="0"/>
+          </a:p>
+        </p:txBody>
+      </p:sp>
+      <p:sp>
+        <p:nvSpPr>
+          <p:cNvPr id="7" name="Text 4"/>
           <p:cNvSpPr txBox="1"/>
           <p:nvPr/>
         </p:nvSpPr>
         <p:spPr>
           <a:xfrm>
-            <a:off x="685800" y="1554480"/>
-            <a:ext cx="2103120" cy="365760"/>
+            <a:off x="685800" y="2057400"/>
+            <a:ext cx="2194560" cy="594360"/>
           </a:xfrm>
           <a:prstGeom prst="rect">
             <a:avLst/>
@@ -9229,45 +10525,6 @@
           <a:p>
             <a:pPr indent="0" marL="0">
               <a:lnSpc>
-                <a:spcPts val="2000"/>
-              </a:lnSpc>
-              <a:buNone/>
-            </a:pPr>
-            <a:r>
-              <a:rPr lang="en-US" sz="1600" b="1" dirty="0">
-                <a:solidFill>
-                  <a:schemeClr val="bg1"/>
-                </a:solidFill>
-              </a:rPr>
-              <a:t>現成旅宿改造</a:t>
-            </a:r>
-            <a:endParaRPr lang="en-US" sz="1600" dirty="0"/>
-          </a:p>
-        </p:txBody>
-      </p:sp>
-      <p:sp>
-        <p:nvSpPr>
-          <p:cNvPr id="6" name="Text 4"/>
-          <p:cNvSpPr txBox="1"/>
-          <p:nvPr/>
-        </p:nvSpPr>
-        <p:spPr>
-          <a:xfrm>
-            <a:off x="2926080" y="1252728"/>
-            <a:ext cx="4206240" cy="685800"/>
-          </a:xfrm>
-          <a:prstGeom prst="rect">
-            <a:avLst/>
-          </a:prstGeom>
-          <a:noFill/>
-          <a:ln/>
-        </p:spPr>
-        <p:txBody>
-          <a:bodyPr wrap="square" lIns="0" tIns="0" rIns="0" bIns="0" rtlCol="0" anchor="ctr"/>
-          <a:lstStyle/>
-          <a:p>
-            <a:pPr indent="0" marL="0">
-              <a:lnSpc>
                 <a:spcPts val="1600"/>
               </a:lnSpc>
               <a:buNone/>
@@ -9275,10 +10532,10 @@
             <a:r>
               <a:rPr lang="en-US" sz="1300" dirty="0">
                 <a:solidFill>
-                  <a:schemeClr val="bg1"/>
-                </a:solidFill>
-              </a:rPr>
-              <a:t>優先尋找已有合法住宿條件、消防與機電狀況良好的物業，降低大規模改建風險</a:t>
+                  <a:schemeClr val="tx1"/>
+                </a:solidFill>
+              </a:rPr>
+              <a:t>45–70 歲，有三高、糖尿病、失眠或前列腺困擾者</a:t>
             </a:r>
             <a:endParaRPr lang="en-US" sz="1300" dirty="0"/>
           </a:p>
@@ -9286,19 +10543,44 @@
       </p:sp>
       <p:sp>
         <p:nvSpPr>
-          <p:cNvPr id="7" name="Recommended tag"/>
+          <p:cNvPr id="8" name="Audience 高壓與耗竭"/>
           <p:cNvSpPr/>
           <p:nvPr/>
         </p:nvSpPr>
         <p:spPr>
           <a:xfrm>
-            <a:off x="7315200" y="1417320"/>
-            <a:ext cx="1188720" cy="347472"/>
+            <a:off x="3264408" y="1188720"/>
+            <a:ext cx="2615184" cy="1554480"/>
           </a:xfrm>
           <a:prstGeom prst="roundRect">
             <a:avLst>
-              <a:gd name="adj" fmla="val 50000"/>
+              <a:gd name="adj" fmla="val 4706"/>
             </a:avLst>
+          </a:prstGeom>
+          <a:solidFill>
+            <a:srgbClr val="EEF3EC"/>
+          </a:solidFill>
+          <a:ln w="12700">
+            <a:solidFill>
+              <a:srgbClr val="EEF3EC"/>
+            </a:solidFill>
+            <a:prstDash val="solid"/>
+          </a:ln>
+        </p:spPr>
+      </p:sp>
+      <p:sp>
+        <p:nvSpPr>
+          <p:cNvPr id="9" name="高壓與耗竭 circle"/>
+          <p:cNvSpPr/>
+          <p:nvPr/>
+        </p:nvSpPr>
+        <p:spPr>
+          <a:xfrm>
+            <a:off x="3493008" y="1417320"/>
+            <a:ext cx="548640" cy="548640"/>
+          </a:xfrm>
+          <a:prstGeom prst="ellipse">
+            <a:avLst/>
           </a:prstGeom>
           <a:solidFill>
             <a:srgbClr val="C07A4F"/>
@@ -9311,59 +10593,122 @@
           </a:ln>
         </p:spPr>
       </p:sp>
-      <p:sp>
-        <p:nvSpPr>
-          <p:cNvPr id="8" name="Text 6"/>
+      <p:pic>
+        <p:nvPicPr>
+          <p:cNvPr id="10" name="高壓與耗竭 icon" descr="高壓與耗竭">    </p:cNvPr>
+          <p:cNvPicPr>
+            <a:picLocks noChangeAspect="1"/>
+          </p:cNvPicPr>
+          <p:nvPr/>
+        </p:nvPicPr>
+        <p:blipFill>
+          <a:blip r:embed="rId2"/>
+          <a:stretch>
+            <a:fillRect/>
+          </a:stretch>
+        </p:blipFill>
+        <p:spPr>
+          <a:xfrm>
+            <a:off x="3630168" y="1554480"/>
+            <a:ext cx="274320" cy="274320"/>
+          </a:xfrm>
+          <a:prstGeom prst="rect">
+            <a:avLst/>
+          </a:prstGeom>
+        </p:spPr>
+      </p:pic>
+      <p:sp>
+        <p:nvSpPr>
+          <p:cNvPr id="11" name="Text 7"/>
           <p:cNvSpPr txBox="1"/>
           <p:nvPr/>
         </p:nvSpPr>
         <p:spPr>
           <a:xfrm>
-            <a:off x="7315200" y="1417320"/>
-            <a:ext cx="1188720" cy="347472"/>
-          </a:xfrm>
-          <a:prstGeom prst="rect">
-            <a:avLst/>
-          </a:prstGeom>
-          <a:noFill/>
-          <a:ln/>
-        </p:spPr>
-        <p:txBody>
-          <a:bodyPr wrap="square" lIns="0" tIns="0" rIns="0" bIns="0" rtlCol="0" anchor="ctr"/>
-          <a:lstStyle/>
-          <a:p>
-            <a:pPr algn="ctr" indent="0" marL="0">
-              <a:lnSpc>
-                <a:spcPts val="1500"/>
-              </a:lnSpc>
-              <a:buNone/>
-            </a:pPr>
-            <a:r>
-              <a:rPr lang="en-US" sz="1200" b="1" dirty="0">
-                <a:solidFill>
-                  <a:schemeClr val="bg1"/>
-                </a:solidFill>
-              </a:rPr>
-              <a:t>優先評估</a:t>
-            </a:r>
-            <a:endParaRPr lang="en-US" sz="1200" dirty="0"/>
-          </a:p>
-        </p:txBody>
-      </p:sp>
-      <p:sp>
-        <p:nvSpPr>
-          <p:cNvPr id="9" name="情境二"/>
+            <a:off x="4178808" y="1508760"/>
+            <a:ext cx="1554480" cy="365760"/>
+          </a:xfrm>
+          <a:prstGeom prst="rect">
+            <a:avLst/>
+          </a:prstGeom>
+          <a:noFill/>
+          <a:ln/>
+        </p:spPr>
+        <p:txBody>
+          <a:bodyPr wrap="square" lIns="0" tIns="0" rIns="0" bIns="0" rtlCol="0" anchor="t"/>
+          <a:lstStyle/>
+          <a:p>
+            <a:pPr indent="0" marL="0">
+              <a:lnSpc>
+                <a:spcPts val="1900"/>
+              </a:lnSpc>
+              <a:buNone/>
+            </a:pPr>
+            <a:r>
+              <a:rPr lang="en-US" sz="1500" b="1" dirty="0">
+                <a:solidFill>
+                  <a:schemeClr val="tx2"/>
+                </a:solidFill>
+              </a:rPr>
+              <a:t>高壓與耗竭</a:t>
+            </a:r>
+            <a:endParaRPr lang="en-US" sz="1500" dirty="0"/>
+          </a:p>
+        </p:txBody>
+      </p:sp>
+      <p:sp>
+        <p:nvSpPr>
+          <p:cNvPr id="12" name="Text 8"/>
+          <p:cNvSpPr txBox="1"/>
+          <p:nvPr/>
+        </p:nvSpPr>
+        <p:spPr>
+          <a:xfrm>
+            <a:off x="3493008" y="2057400"/>
+            <a:ext cx="2194560" cy="594360"/>
+          </a:xfrm>
+          <a:prstGeom prst="rect">
+            <a:avLst/>
+          </a:prstGeom>
+          <a:noFill/>
+          <a:ln/>
+        </p:spPr>
+        <p:txBody>
+          <a:bodyPr wrap="square" lIns="0" tIns="0" rIns="0" bIns="0" rtlCol="0" anchor="t"/>
+          <a:lstStyle/>
+          <a:p>
+            <a:pPr indent="0" marL="0">
+              <a:lnSpc>
+                <a:spcPts val="1600"/>
+              </a:lnSpc>
+              <a:buNone/>
+            </a:pPr>
+            <a:r>
+              <a:rPr lang="en-US" sz="1300" dirty="0">
+                <a:solidFill>
+                  <a:schemeClr val="tx1"/>
+                </a:solidFill>
+              </a:rPr>
+              <a:t>高壓工作者、過勞、情緒耗竭者</a:t>
+            </a:r>
+            <a:endParaRPr lang="en-US" sz="1300" dirty="0"/>
+          </a:p>
+        </p:txBody>
+      </p:sp>
+      <p:sp>
+        <p:nvSpPr>
+          <p:cNvPr id="13" name="Audience 恢復期調養"/>
           <p:cNvSpPr/>
           <p:nvPr/>
         </p:nvSpPr>
         <p:spPr>
           <a:xfrm>
-            <a:off x="457200" y="2167128"/>
-            <a:ext cx="8229600" cy="896112"/>
+            <a:off x="6071616" y="1188720"/>
+            <a:ext cx="2615184" cy="1554480"/>
           </a:xfrm>
           <a:prstGeom prst="roundRect">
             <a:avLst>
-              <a:gd name="adj" fmla="val 8163"/>
+              <a:gd name="adj" fmla="val 4706"/>
             </a:avLst>
           </a:prstGeom>
           <a:solidFill>
@@ -9379,14 +10724,63 @@
       </p:sp>
       <p:sp>
         <p:nvSpPr>
-          <p:cNvPr id="10" name="Text 8"/>
+          <p:cNvPr id="14" name="恢復期調養 circle"/>
+          <p:cNvSpPr/>
+          <p:nvPr/>
+        </p:nvSpPr>
+        <p:spPr>
+          <a:xfrm>
+            <a:off x="6300216" y="1417320"/>
+            <a:ext cx="548640" cy="548640"/>
+          </a:xfrm>
+          <a:prstGeom prst="ellipse">
+            <a:avLst/>
+          </a:prstGeom>
+          <a:solidFill>
+            <a:srgbClr val="2F4A3A"/>
+          </a:solidFill>
+          <a:ln w="12700">
+            <a:solidFill>
+              <a:srgbClr val="2F4A3A"/>
+            </a:solidFill>
+            <a:prstDash val="solid"/>
+          </a:ln>
+        </p:spPr>
+      </p:sp>
+      <p:pic>
+        <p:nvPicPr>
+          <p:cNvPr id="15" name="恢復期調養 icon" descr="恢復期調養">    </p:cNvPr>
+          <p:cNvPicPr>
+            <a:picLocks noChangeAspect="1"/>
+          </p:cNvPicPr>
+          <p:nvPr/>
+        </p:nvPicPr>
+        <p:blipFill>
+          <a:blip r:embed="rId3"/>
+          <a:stretch>
+            <a:fillRect/>
+          </a:stretch>
+        </p:blipFill>
+        <p:spPr>
+          <a:xfrm>
+            <a:off x="6437376" y="1554480"/>
+            <a:ext cx="274320" cy="274320"/>
+          </a:xfrm>
+          <a:prstGeom prst="rect">
+            <a:avLst/>
+          </a:prstGeom>
+        </p:spPr>
+      </p:pic>
+      <p:sp>
+        <p:nvSpPr>
+          <p:cNvPr id="16" name="Text 11"/>
           <p:cNvSpPr txBox="1"/>
           <p:nvPr/>
         </p:nvSpPr>
         <p:spPr>
           <a:xfrm>
-            <a:off x="685800" y="2304288"/>
-            <a:ext cx="914400" cy="274320"/>
+            <a:off x="6986016" y="1508760"/>
+            <a:ext cx="1554480" cy="365760"/>
           </a:xfrm>
           <a:prstGeom prst="rect">
             <a:avLst/>
@@ -9400,32 +10794,32 @@
           <a:p>
             <a:pPr indent="0" marL="0">
               <a:lnSpc>
-                <a:spcPts val="1500"/>
-              </a:lnSpc>
-              <a:buNone/>
-            </a:pPr>
-            <a:r>
-              <a:rPr lang="en-US" sz="1200" b="1" dirty="0">
-                <a:solidFill>
-                  <a:schemeClr val="accent3"/>
-                </a:solidFill>
-              </a:rPr>
-              <a:t>情境二</a:t>
-            </a:r>
-            <a:endParaRPr lang="en-US" sz="1200" dirty="0"/>
-          </a:p>
-        </p:txBody>
-      </p:sp>
-      <p:sp>
-        <p:nvSpPr>
-          <p:cNvPr id="11" name="Text 9"/>
+                <a:spcPts val="1900"/>
+              </a:lnSpc>
+              <a:buNone/>
+            </a:pPr>
+            <a:r>
+              <a:rPr lang="en-US" sz="1500" b="1" dirty="0">
+                <a:solidFill>
+                  <a:schemeClr val="tx2"/>
+                </a:solidFill>
+              </a:rPr>
+              <a:t>恢復期調養</a:t>
+            </a:r>
+            <a:endParaRPr lang="en-US" sz="1500" dirty="0"/>
+          </a:p>
+        </p:txBody>
+      </p:sp>
+      <p:sp>
+        <p:nvSpPr>
+          <p:cNvPr id="17" name="Text 12"/>
           <p:cNvSpPr txBox="1"/>
           <p:nvPr/>
         </p:nvSpPr>
         <p:spPr>
           <a:xfrm>
-            <a:off x="685800" y="2578608"/>
-            <a:ext cx="2103120" cy="365760"/>
+            <a:off x="6300216" y="2057400"/>
+            <a:ext cx="2194560" cy="594360"/>
           </a:xfrm>
           <a:prstGeom prst="rect">
             <a:avLst/>
@@ -9439,45 +10833,6 @@
           <a:p>
             <a:pPr indent="0" marL="0">
               <a:lnSpc>
-                <a:spcPts val="2000"/>
-              </a:lnSpc>
-              <a:buNone/>
-            </a:pPr>
-            <a:r>
-              <a:rPr lang="en-US" sz="1600" b="1" dirty="0">
-                <a:solidFill>
-                  <a:schemeClr val="tx2"/>
-                </a:solidFill>
-              </a:rPr>
-              <a:t>庭院型療癒民宿</a:t>
-            </a:r>
-            <a:endParaRPr lang="en-US" sz="1600" dirty="0"/>
-          </a:p>
-        </p:txBody>
-      </p:sp>
-      <p:sp>
-        <p:nvSpPr>
-          <p:cNvPr id="12" name="Text 10"/>
-          <p:cNvSpPr txBox="1"/>
-          <p:nvPr/>
-        </p:nvSpPr>
-        <p:spPr>
-          <a:xfrm>
-            <a:off x="2926080" y="2276856"/>
-            <a:ext cx="5577840" cy="685800"/>
-          </a:xfrm>
-          <a:prstGeom prst="rect">
-            <a:avLst/>
-          </a:prstGeom>
-          <a:noFill/>
-          <a:ln/>
-        </p:spPr>
-        <p:txBody>
-          <a:bodyPr wrap="square" lIns="0" tIns="0" rIns="0" bIns="0" rtlCol="0" anchor="ctr"/>
-          <a:lstStyle/>
-          <a:p>
-            <a:pPr indent="0" marL="0">
-              <a:lnSpc>
                 <a:spcPts val="1600"/>
               </a:lnSpc>
               <a:buNone/>
@@ -9488,7 +10843,7 @@
                   <a:schemeClr val="tx1"/>
                 </a:solidFill>
               </a:rPr>
-              <a:t>增加庭院、戶外活動區與自然景觀；留意景觀維護、季節性客流與戶外安全</a:t>
+              <a:t>產後、術後或病後恢復期者</a:t>
             </a:r>
             <a:endParaRPr lang="en-US" sz="1300" dirty="0"/>
           </a:p>
@@ -9496,18 +10851,18 @@
       </p:sp>
       <p:sp>
         <p:nvSpPr>
-          <p:cNvPr id="13" name="情境三"/>
+          <p:cNvPr id="18" name="Audience 女性調理"/>
           <p:cNvSpPr/>
           <p:nvPr/>
         </p:nvSpPr>
         <p:spPr>
           <a:xfrm>
-            <a:off x="457200" y="3191256"/>
-            <a:ext cx="8229600" cy="896112"/>
+            <a:off x="457200" y="2880360"/>
+            <a:ext cx="2615184" cy="1554480"/>
           </a:xfrm>
           <a:prstGeom prst="roundRect">
             <a:avLst>
-              <a:gd name="adj" fmla="val 8163"/>
+              <a:gd name="adj" fmla="val 4706"/>
             </a:avLst>
           </a:prstGeom>
           <a:solidFill>
@@ -9523,14 +10878,63 @@
       </p:sp>
       <p:sp>
         <p:nvSpPr>
-          <p:cNvPr id="14" name="Text 12"/>
+          <p:cNvPr id="19" name="女性調理 circle"/>
+          <p:cNvSpPr/>
+          <p:nvPr/>
+        </p:nvSpPr>
+        <p:spPr>
+          <a:xfrm>
+            <a:off x="685800" y="3108960"/>
+            <a:ext cx="548640" cy="548640"/>
+          </a:xfrm>
+          <a:prstGeom prst="ellipse">
+            <a:avLst/>
+          </a:prstGeom>
+          <a:solidFill>
+            <a:srgbClr val="C07A4F"/>
+          </a:solidFill>
+          <a:ln w="12700">
+            <a:solidFill>
+              <a:srgbClr val="C07A4F"/>
+            </a:solidFill>
+            <a:prstDash val="solid"/>
+          </a:ln>
+        </p:spPr>
+      </p:sp>
+      <p:pic>
+        <p:nvPicPr>
+          <p:cNvPr id="20" name="女性調理 icon" descr="女性調理">    </p:cNvPr>
+          <p:cNvPicPr>
+            <a:picLocks noChangeAspect="1"/>
+          </p:cNvPicPr>
+          <p:nvPr/>
+        </p:nvPicPr>
+        <p:blipFill>
+          <a:blip r:embed="rId4"/>
+          <a:stretch>
+            <a:fillRect/>
+          </a:stretch>
+        </p:blipFill>
+        <p:spPr>
+          <a:xfrm>
+            <a:off x="822960" y="3246120"/>
+            <a:ext cx="274320" cy="274320"/>
+          </a:xfrm>
+          <a:prstGeom prst="rect">
+            <a:avLst/>
+          </a:prstGeom>
+        </p:spPr>
+      </p:pic>
+      <p:sp>
+        <p:nvSpPr>
+          <p:cNvPr id="21" name="Text 15"/>
           <p:cNvSpPr txBox="1"/>
           <p:nvPr/>
         </p:nvSpPr>
         <p:spPr>
           <a:xfrm>
-            <a:off x="685800" y="3328416"/>
-            <a:ext cx="914400" cy="274320"/>
+            <a:off x="1371600" y="3200400"/>
+            <a:ext cx="1554480" cy="365760"/>
           </a:xfrm>
           <a:prstGeom prst="rect">
             <a:avLst/>
@@ -9544,32 +10948,32 @@
           <a:p>
             <a:pPr indent="0" marL="0">
               <a:lnSpc>
-                <a:spcPts val="1500"/>
-              </a:lnSpc>
-              <a:buNone/>
-            </a:pPr>
-            <a:r>
-              <a:rPr lang="en-US" sz="1200" b="1" dirty="0">
-                <a:solidFill>
-                  <a:schemeClr val="accent3"/>
-                </a:solidFill>
-              </a:rPr>
-              <a:t>情境三</a:t>
-            </a:r>
-            <a:endParaRPr lang="en-US" sz="1200" dirty="0"/>
-          </a:p>
-        </p:txBody>
-      </p:sp>
-      <p:sp>
-        <p:nvSpPr>
-          <p:cNvPr id="15" name="Text 13"/>
+                <a:spcPts val="1900"/>
+              </a:lnSpc>
+              <a:buNone/>
+            </a:pPr>
+            <a:r>
+              <a:rPr lang="en-US" sz="1500" b="1" dirty="0">
+                <a:solidFill>
+                  <a:schemeClr val="tx2"/>
+                </a:solidFill>
+              </a:rPr>
+              <a:t>女性調理</a:t>
+            </a:r>
+            <a:endParaRPr lang="en-US" sz="1500" dirty="0"/>
+          </a:p>
+        </p:txBody>
+      </p:sp>
+      <p:sp>
+        <p:nvSpPr>
+          <p:cNvPr id="22" name="Text 16"/>
           <p:cNvSpPr txBox="1"/>
           <p:nvPr/>
         </p:nvSpPr>
         <p:spPr>
           <a:xfrm>
-            <a:off x="685800" y="3602736"/>
-            <a:ext cx="2103120" cy="365760"/>
+            <a:off x="685800" y="3749040"/>
+            <a:ext cx="2194560" cy="594360"/>
           </a:xfrm>
           <a:prstGeom prst="rect">
             <a:avLst/>
@@ -9583,32 +10987,213 @@
           <a:p>
             <a:pPr indent="0" marL="0">
               <a:lnSpc>
-                <a:spcPts val="2000"/>
-              </a:lnSpc>
-              <a:buNone/>
-            </a:pPr>
-            <a:r>
-              <a:rPr lang="en-US" sz="1600" b="1" dirty="0">
+                <a:spcPts val="1600"/>
+              </a:lnSpc>
+              <a:buNone/>
+            </a:pPr>
+            <a:r>
+              <a:rPr lang="en-US" sz="1300" dirty="0">
+                <a:solidFill>
+                  <a:schemeClr val="tx1"/>
+                </a:solidFill>
+              </a:rPr>
+              <a:t>有痛經、體質調理或減重需求的女性</a:t>
+            </a:r>
+            <a:endParaRPr lang="en-US" sz="1300" dirty="0"/>
+          </a:p>
+        </p:txBody>
+      </p:sp>
+      <p:sp>
+        <p:nvSpPr>
+          <p:cNvPr id="23" name="Audience 送禮與企業福利"/>
+          <p:cNvSpPr/>
+          <p:nvPr/>
+        </p:nvSpPr>
+        <p:spPr>
+          <a:xfrm>
+            <a:off x="3264408" y="2880360"/>
+            <a:ext cx="2615184" cy="1554480"/>
+          </a:xfrm>
+          <a:prstGeom prst="roundRect">
+            <a:avLst>
+              <a:gd name="adj" fmla="val 4706"/>
+            </a:avLst>
+          </a:prstGeom>
+          <a:solidFill>
+            <a:srgbClr val="EEF3EC"/>
+          </a:solidFill>
+          <a:ln w="12700">
+            <a:solidFill>
+              <a:srgbClr val="EEF3EC"/>
+            </a:solidFill>
+            <a:prstDash val="solid"/>
+          </a:ln>
+        </p:spPr>
+      </p:sp>
+      <p:sp>
+        <p:nvSpPr>
+          <p:cNvPr id="24" name="送禮與企業福利 circle"/>
+          <p:cNvSpPr/>
+          <p:nvPr/>
+        </p:nvSpPr>
+        <p:spPr>
+          <a:xfrm>
+            <a:off x="3493008" y="3108960"/>
+            <a:ext cx="548640" cy="548640"/>
+          </a:xfrm>
+          <a:prstGeom prst="ellipse">
+            <a:avLst/>
+          </a:prstGeom>
+          <a:solidFill>
+            <a:srgbClr val="2F4A3A"/>
+          </a:solidFill>
+          <a:ln w="12700">
+            <a:solidFill>
+              <a:srgbClr val="2F4A3A"/>
+            </a:solidFill>
+            <a:prstDash val="solid"/>
+          </a:ln>
+        </p:spPr>
+      </p:sp>
+      <p:pic>
+        <p:nvPicPr>
+          <p:cNvPr id="25" name="送禮與企業福利 icon" descr="送禮與企業福利">    </p:cNvPr>
+          <p:cNvPicPr>
+            <a:picLocks noChangeAspect="1"/>
+          </p:cNvPicPr>
+          <p:nvPr/>
+        </p:nvPicPr>
+        <p:blipFill>
+          <a:blip r:embed="rId5"/>
+          <a:stretch>
+            <a:fillRect/>
+          </a:stretch>
+        </p:blipFill>
+        <p:spPr>
+          <a:xfrm>
+            <a:off x="3630168" y="3246120"/>
+            <a:ext cx="274320" cy="274320"/>
+          </a:xfrm>
+          <a:prstGeom prst="rect">
+            <a:avLst/>
+          </a:prstGeom>
+        </p:spPr>
+      </p:pic>
+      <p:sp>
+        <p:nvSpPr>
+          <p:cNvPr id="26" name="Text 19"/>
+          <p:cNvSpPr txBox="1"/>
+          <p:nvPr/>
+        </p:nvSpPr>
+        <p:spPr>
+          <a:xfrm>
+            <a:off x="4178808" y="3200400"/>
+            <a:ext cx="1554480" cy="365760"/>
+          </a:xfrm>
+          <a:prstGeom prst="rect">
+            <a:avLst/>
+          </a:prstGeom>
+          <a:noFill/>
+          <a:ln/>
+        </p:spPr>
+        <p:txBody>
+          <a:bodyPr wrap="square" lIns="0" tIns="0" rIns="0" bIns="0" rtlCol="0" anchor="t"/>
+          <a:lstStyle/>
+          <a:p>
+            <a:pPr indent="0" marL="0">
+              <a:lnSpc>
+                <a:spcPts val="1900"/>
+              </a:lnSpc>
+              <a:buNone/>
+            </a:pPr>
+            <a:r>
+              <a:rPr lang="en-US" sz="1500" b="1" dirty="0">
                 <a:solidFill>
                   <a:schemeClr val="tx2"/>
                 </a:solidFill>
               </a:rPr>
-              <a:t>新建康養酒店</a:t>
-            </a:r>
-            <a:endParaRPr lang="en-US" sz="1600" dirty="0"/>
-          </a:p>
-        </p:txBody>
-      </p:sp>
-      <p:sp>
-        <p:nvSpPr>
-          <p:cNvPr id="16" name="Text 14"/>
+              <a:t>送禮與企業福利</a:t>
+            </a:r>
+            <a:endParaRPr lang="en-US" sz="1500" dirty="0"/>
+          </a:p>
+        </p:txBody>
+      </p:sp>
+      <p:sp>
+        <p:nvSpPr>
+          <p:cNvPr id="27" name="Text 20"/>
           <p:cNvSpPr txBox="1"/>
           <p:nvPr/>
         </p:nvSpPr>
         <p:spPr>
           <a:xfrm>
-            <a:off x="2926080" y="3300984"/>
-            <a:ext cx="5577840" cy="685800"/>
+            <a:off x="3493008" y="3749040"/>
+            <a:ext cx="2194560" cy="594360"/>
+          </a:xfrm>
+          <a:prstGeom prst="rect">
+            <a:avLst/>
+          </a:prstGeom>
+          <a:noFill/>
+          <a:ln/>
+        </p:spPr>
+        <p:txBody>
+          <a:bodyPr wrap="square" lIns="0" tIns="0" rIns="0" bIns="0" rtlCol="0" anchor="t"/>
+          <a:lstStyle/>
+          <a:p>
+            <a:pPr indent="0" marL="0">
+              <a:lnSpc>
+                <a:spcPts val="1600"/>
+              </a:lnSpc>
+              <a:buNone/>
+            </a:pPr>
+            <a:r>
+              <a:rPr lang="en-US" sz="1300" dirty="0">
+                <a:solidFill>
+                  <a:schemeClr val="tx1"/>
+                </a:solidFill>
+              </a:rPr>
+              <a:t>子女送父母的「孝親禮」、企業高階主管福利</a:t>
+            </a:r>
+            <a:endParaRPr lang="en-US" sz="1300" dirty="0"/>
+          </a:p>
+        </p:txBody>
+      </p:sp>
+      <p:sp>
+        <p:nvSpPr>
+          <p:cNvPr id="28" name="Audience insight"/>
+          <p:cNvSpPr/>
+          <p:nvPr/>
+        </p:nvSpPr>
+        <p:spPr>
+          <a:xfrm>
+            <a:off x="6071616" y="2880360"/>
+            <a:ext cx="2615184" cy="1554480"/>
+          </a:xfrm>
+          <a:prstGeom prst="roundRect">
+            <a:avLst>
+              <a:gd name="adj" fmla="val 4706"/>
+            </a:avLst>
+          </a:prstGeom>
+          <a:solidFill>
+            <a:srgbClr val="2F4A3A"/>
+          </a:solidFill>
+          <a:ln w="12700">
+            <a:solidFill>
+              <a:srgbClr val="2F4A3A"/>
+            </a:solidFill>
+            <a:prstDash val="solid"/>
+          </a:ln>
+        </p:spPr>
+      </p:sp>
+      <p:sp>
+        <p:nvSpPr>
+          <p:cNvPr id="29" name="Text 22"/>
+          <p:cNvSpPr txBox="1"/>
+          <p:nvPr/>
+        </p:nvSpPr>
+        <p:spPr>
+          <a:xfrm>
+            <a:off x="6300216" y="3017520"/>
+            <a:ext cx="2194560" cy="1280160"/>
           </a:xfrm>
           <a:prstGeom prst="rect">
             <a:avLst/>
@@ -9622,58 +11207,19 @@
           <a:p>
             <a:pPr indent="0" marL="0">
               <a:lnSpc>
-                <a:spcPts val="1600"/>
-              </a:lnSpc>
-              <a:buNone/>
-            </a:pPr>
-            <a:r>
-              <a:rPr lang="en-US" sz="1300" dirty="0">
-                <a:solidFill>
-                  <a:schemeClr val="tx1"/>
-                </a:solidFill>
-              </a:rPr>
-              <a:t>需考慮土地、設計、建築、機電、消防與審批，週期長；需求未驗證前不宜貿然投入</a:t>
-            </a:r>
-            <a:endParaRPr lang="en-US" sz="1300" dirty="0"/>
-          </a:p>
-        </p:txBody>
-      </p:sp>
-      <p:sp>
-        <p:nvSpPr>
-          <p:cNvPr id="17" name="Text 15"/>
-          <p:cNvSpPr txBox="1"/>
-          <p:nvPr/>
-        </p:nvSpPr>
-        <p:spPr>
-          <a:xfrm>
-            <a:off x="457200" y="4251960"/>
-            <a:ext cx="8229600" cy="320040"/>
-          </a:xfrm>
-          <a:prstGeom prst="rect">
-            <a:avLst/>
-          </a:prstGeom>
-          <a:noFill/>
-          <a:ln/>
-        </p:spPr>
-        <p:txBody>
-          <a:bodyPr wrap="square" lIns="0" tIns="0" rIns="0" bIns="0" rtlCol="0" anchor="t"/>
-          <a:lstStyle/>
-          <a:p>
-            <a:pPr indent="0" marL="0">
-              <a:lnSpc>
-                <a:spcPts val="1500"/>
-              </a:lnSpc>
-              <a:buNone/>
-            </a:pPr>
-            <a:r>
-              <a:rPr lang="en-US" sz="1200" i="1" dirty="0">
-                <a:solidFill>
-                  <a:schemeClr val="accent5"/>
-                </a:solidFill>
-              </a:rPr>
-              <a:t>具體人民幣金額須取得城市、物業條件、面積與裝修標準後再估算。</a:t>
-            </a:r>
-            <a:endParaRPr lang="en-US" sz="1200" dirty="0"/>
+                <a:spcPts val="1800"/>
+              </a:lnSpc>
+              <a:buNone/>
+            </a:pPr>
+            <a:r>
+              <a:rPr lang="en-US" sz="1400" b="1" dirty="0">
+                <a:solidFill>
+                  <a:schemeClr val="bg1"/>
+                </a:solidFill>
+              </a:rPr>
+              <a:t>客源不只自用，也來自子女孝親與企業福利採購</a:t>
+            </a:r>
+            <a:endParaRPr lang="en-US" sz="1400" dirty="0"/>
           </a:p>
         </p:txBody>
       </p:sp>
@@ -9782,7 +11328,7 @@
                   <a:schemeClr val="tx2"/>
                 </a:solidFill>
               </a:rPr>
-              <a:t>每月損益試算（示例假設）</a:t>
+              <a:t>十大療癒模組</a:t>
             </a:r>
             <a:endParaRPr lang="en-US" sz="2800" dirty="0"/>
           </a:p>
@@ -9796,8 +11342,8 @@
         </p:nvSpPr>
         <p:spPr>
           <a:xfrm>
-            <a:off x="457200" y="1097280"/>
-            <a:ext cx="2926080" cy="502920"/>
+            <a:off x="457200" y="914400"/>
+            <a:ext cx="8229600" cy="320040"/>
           </a:xfrm>
           <a:prstGeom prst="rect">
             <a:avLst/>
@@ -9811,60 +11357,48 @@
           <a:p>
             <a:pPr indent="0" marL="0">
               <a:lnSpc>
-                <a:spcPts val="3800"/>
-              </a:lnSpc>
-              <a:buNone/>
-            </a:pPr>
-            <a:r>
-              <a:rPr lang="en-US" sz="3000" b="1" dirty="0">
-                <a:solidFill>
-                  <a:schemeClr val="tx2"/>
-                </a:solidFill>
-              </a:rPr>
-              <a:t>¥73,440</a:t>
-            </a:r>
-            <a:endParaRPr lang="en-US" sz="3000" dirty="0"/>
-          </a:p>
-        </p:txBody>
-      </p:sp>
-      <p:sp>
-        <p:nvSpPr>
-          <p:cNvPr id="4" name="Text 2"/>
-          <p:cNvSpPr txBox="1"/>
-          <p:nvPr/>
-        </p:nvSpPr>
-        <p:spPr>
-          <a:xfrm>
-            <a:off x="457200" y="1600200"/>
-            <a:ext cx="2926080" cy="274320"/>
-          </a:xfrm>
-          <a:prstGeom prst="rect">
-            <a:avLst/>
-          </a:prstGeom>
-          <a:noFill/>
-          <a:ln/>
-        </p:spPr>
-        <p:txBody>
-          <a:bodyPr wrap="square" lIns="0" tIns="0" rIns="0" bIns="0" rtlCol="0" anchor="t"/>
-          <a:lstStyle/>
-          <a:p>
-            <a:pPr indent="0" marL="0">
-              <a:lnSpc>
-                <a:spcPts val="1500"/>
-              </a:lnSpc>
-              <a:buNone/>
-            </a:pPr>
-            <a:r>
-              <a:rPr lang="en-US" sz="1200" dirty="0">
+                <a:spcPts val="1600"/>
+              </a:lnSpc>
+              <a:buNone/>
+            </a:pPr>
+            <a:r>
+              <a:rPr lang="en-US" sz="1300" dirty="0">
                 <a:solidFill>
                   <a:schemeClr val="accent5"/>
                 </a:solidFill>
               </a:rPr>
-              <a:t>每月住宿營收</a:t>
-            </a:r>
-            <a:endParaRPr lang="en-US" sz="1200" dirty="0"/>
-          </a:p>
-        </p:txBody>
+              <a:t>分為「身、心、食、眠」四大主軸；入住當天先做體質與健康評估，再配對個人化組合</a:t>
+            </a:r>
+            <a:endParaRPr lang="en-US" sz="1300" dirty="0"/>
+          </a:p>
+        </p:txBody>
+      </p:sp>
+      <p:sp>
+        <p:nvSpPr>
+          <p:cNvPr id="4" name="Module 心療"/>
+          <p:cNvSpPr/>
+          <p:nvPr/>
+        </p:nvSpPr>
+        <p:spPr>
+          <a:xfrm>
+            <a:off x="457200" y="1325880"/>
+            <a:ext cx="1554480" cy="1417320"/>
+          </a:xfrm>
+          <a:prstGeom prst="roundRect">
+            <a:avLst>
+              <a:gd name="adj" fmla="val 5161"/>
+            </a:avLst>
+          </a:prstGeom>
+          <a:solidFill>
+            <a:srgbClr val="EEF3EC"/>
+          </a:solidFill>
+          <a:ln w="12700">
+            <a:solidFill>
+              <a:srgbClr val="EEF3EC"/>
+            </a:solidFill>
+            <a:prstDash val="solid"/>
+          </a:ln>
+        </p:spPr>
       </p:sp>
       <p:sp>
         <p:nvSpPr>
@@ -9874,8 +11408,8 @@
         </p:nvSpPr>
         <p:spPr>
           <a:xfrm>
-            <a:off x="457200" y="1965960"/>
-            <a:ext cx="2926080" cy="502920"/>
+            <a:off x="594360" y="1435608"/>
+            <a:ext cx="457200" cy="274320"/>
           </a:xfrm>
           <a:prstGeom prst="rect">
             <a:avLst/>
@@ -9889,60 +11423,46 @@
           <a:p>
             <a:pPr indent="0" marL="0">
               <a:lnSpc>
-                <a:spcPts val="3800"/>
-              </a:lnSpc>
-              <a:buNone/>
-            </a:pPr>
-            <a:r>
-              <a:rPr lang="en-US" sz="3000" b="1" dirty="0">
-                <a:solidFill>
-                  <a:schemeClr val="tx2"/>
-                </a:solidFill>
-              </a:rPr>
-              <a:t>¥85,440</a:t>
-            </a:r>
-            <a:endParaRPr lang="en-US" sz="3000" dirty="0"/>
-          </a:p>
-        </p:txBody>
-      </p:sp>
-      <p:sp>
-        <p:nvSpPr>
-          <p:cNvPr id="6" name="Text 4"/>
-          <p:cNvSpPr txBox="1"/>
-          <p:nvPr/>
-        </p:nvSpPr>
-        <p:spPr>
-          <a:xfrm>
-            <a:off x="457200" y="2468880"/>
-            <a:ext cx="2926080" cy="274320"/>
-          </a:xfrm>
-          <a:prstGeom prst="rect">
-            <a:avLst/>
-          </a:prstGeom>
-          <a:noFill/>
-          <a:ln/>
-        </p:spPr>
-        <p:txBody>
-          <a:bodyPr wrap="square" lIns="0" tIns="0" rIns="0" bIns="0" rtlCol="0" anchor="t"/>
-          <a:lstStyle/>
-          <a:p>
-            <a:pPr indent="0" marL="0">
-              <a:lnSpc>
                 <a:spcPts val="1500"/>
               </a:lnSpc>
               <a:buNone/>
             </a:pPr>
             <a:r>
-              <a:rPr lang="en-US" sz="1200" dirty="0">
+              <a:rPr lang="en-US" sz="1200" b="1" dirty="0">
                 <a:solidFill>
                   <a:schemeClr val="accent5"/>
                 </a:solidFill>
               </a:rPr>
-              <a:t>每月總營收</a:t>
+              <a:t>01</a:t>
             </a:r>
             <a:endParaRPr lang="en-US" sz="1200" dirty="0"/>
           </a:p>
         </p:txBody>
+      </p:sp>
+      <p:sp>
+        <p:nvSpPr>
+          <p:cNvPr id="6" name="Axis 心"/>
+          <p:cNvSpPr/>
+          <p:nvPr/>
+        </p:nvSpPr>
+        <p:spPr>
+          <a:xfrm>
+            <a:off x="1554480" y="1417320"/>
+            <a:ext cx="347472" cy="347472"/>
+          </a:xfrm>
+          <a:prstGeom prst="ellipse">
+            <a:avLst/>
+          </a:prstGeom>
+          <a:solidFill>
+            <a:srgbClr val="C07A4F"/>
+          </a:solidFill>
+          <a:ln w="12700">
+            <a:solidFill>
+              <a:srgbClr val="C07A4F"/>
+            </a:solidFill>
+            <a:prstDash val="solid"/>
+          </a:ln>
+        </p:spPr>
       </p:sp>
       <p:sp>
         <p:nvSpPr>
@@ -9952,34 +11472,34 @@
         </p:nvSpPr>
         <p:spPr>
           <a:xfrm>
-            <a:off x="457200" y="2834640"/>
-            <a:ext cx="2926080" cy="502920"/>
-          </a:xfrm>
-          <a:prstGeom prst="rect">
-            <a:avLst/>
-          </a:prstGeom>
-          <a:noFill/>
-          <a:ln/>
-        </p:spPr>
-        <p:txBody>
-          <a:bodyPr wrap="square" lIns="0" tIns="0" rIns="0" bIns="0" rtlCol="0" anchor="t"/>
-          <a:lstStyle/>
-          <a:p>
-            <a:pPr indent="0" marL="0">
-              <a:lnSpc>
-                <a:spcPts val="3800"/>
-              </a:lnSpc>
-              <a:buNone/>
-            </a:pPr>
-            <a:r>
-              <a:rPr lang="en-US" sz="3000" b="1" dirty="0">
-                <a:solidFill>
-                  <a:schemeClr val="accent3"/>
-                </a:solidFill>
-              </a:rPr>
-              <a:t>¥20,440</a:t>
-            </a:r>
-            <a:endParaRPr lang="en-US" sz="3000" dirty="0"/>
+            <a:off x="1554480" y="1417320"/>
+            <a:ext cx="347472" cy="347472"/>
+          </a:xfrm>
+          <a:prstGeom prst="rect">
+            <a:avLst/>
+          </a:prstGeom>
+          <a:noFill/>
+          <a:ln/>
+        </p:spPr>
+        <p:txBody>
+          <a:bodyPr wrap="square" lIns="0" tIns="0" rIns="0" bIns="0" rtlCol="0" anchor="ctr"/>
+          <a:lstStyle/>
+          <a:p>
+            <a:pPr algn="ctr" indent="0" marL="0">
+              <a:lnSpc>
+                <a:spcPts val="1400"/>
+              </a:lnSpc>
+              <a:buNone/>
+            </a:pPr>
+            <a:r>
+              <a:rPr lang="en-US" sz="1100" b="1" dirty="0">
+                <a:solidFill>
+                  <a:schemeClr val="bg1"/>
+                </a:solidFill>
+              </a:rPr>
+              <a:t>心</a:t>
+            </a:r>
+            <a:endParaRPr lang="en-US" sz="1100" dirty="0"/>
           </a:p>
         </p:txBody>
       </p:sp>
@@ -9991,8 +11511,8 @@
         </p:nvSpPr>
         <p:spPr>
           <a:xfrm>
-            <a:off x="457200" y="3337560"/>
-            <a:ext cx="2926080" cy="274320"/>
+            <a:off x="594360" y="1737360"/>
+            <a:ext cx="1325880" cy="320040"/>
           </a:xfrm>
           <a:prstGeom prst="rect">
             <a:avLst/>
@@ -10006,19 +11526,19 @@
           <a:p>
             <a:pPr indent="0" marL="0">
               <a:lnSpc>
-                <a:spcPts val="1500"/>
-              </a:lnSpc>
-              <a:buNone/>
-            </a:pPr>
-            <a:r>
-              <a:rPr lang="en-US" sz="1200" dirty="0">
-                <a:solidFill>
-                  <a:schemeClr val="accent5"/>
-                </a:solidFill>
-              </a:rPr>
-              <a:t>估算營運結餘</a:t>
-            </a:r>
-            <a:endParaRPr lang="en-US" sz="1200" dirty="0"/>
+                <a:spcPts val="1800"/>
+              </a:lnSpc>
+              <a:buNone/>
+            </a:pPr>
+            <a:r>
+              <a:rPr lang="en-US" sz="1400" b="1" dirty="0">
+                <a:solidFill>
+                  <a:schemeClr val="tx2"/>
+                </a:solidFill>
+              </a:rPr>
+              <a:t>心療</a:t>
+            </a:r>
+            <a:endParaRPr lang="en-US" sz="1400" dirty="0"/>
           </a:p>
         </p:txBody>
       </p:sp>
@@ -10030,8 +11550,8 @@
         </p:nvSpPr>
         <p:spPr>
           <a:xfrm>
-            <a:off x="457200" y="3703320"/>
-            <a:ext cx="3017520" cy="914400"/>
+            <a:off x="594360" y="2075688"/>
+            <a:ext cx="1325880" cy="621792"/>
           </a:xfrm>
           <a:prstGeom prst="rect">
             <a:avLst/>
@@ -10052,41 +11572,155 @@
             <a:r>
               <a:rPr lang="en-US" sz="1100" dirty="0">
                 <a:solidFill>
+                  <a:schemeClr val="tx1"/>
+                </a:solidFill>
+              </a:rPr>
+              <a:t>個別諮商、團體分享、情緒評估</a:t>
+            </a:r>
+            <a:endParaRPr lang="en-US" sz="1100" dirty="0"/>
+          </a:p>
+        </p:txBody>
+      </p:sp>
+      <p:sp>
+        <p:nvSpPr>
+          <p:cNvPr id="10" name="Module 食療"/>
+          <p:cNvSpPr/>
+          <p:nvPr/>
+        </p:nvSpPr>
+        <p:spPr>
+          <a:xfrm>
+            <a:off x="2121408" y="1325880"/>
+            <a:ext cx="1554480" cy="1417320"/>
+          </a:xfrm>
+          <a:prstGeom prst="roundRect">
+            <a:avLst>
+              <a:gd name="adj" fmla="val 5161"/>
+            </a:avLst>
+          </a:prstGeom>
+          <a:solidFill>
+            <a:srgbClr val="EEF3EC"/>
+          </a:solidFill>
+          <a:ln w="12700">
+            <a:solidFill>
+              <a:srgbClr val="EEF3EC"/>
+            </a:solidFill>
+            <a:prstDash val="solid"/>
+          </a:ln>
+        </p:spPr>
+      </p:sp>
+      <p:sp>
+        <p:nvSpPr>
+          <p:cNvPr id="11" name="Text 9"/>
+          <p:cNvSpPr txBox="1"/>
+          <p:nvPr/>
+        </p:nvSpPr>
+        <p:spPr>
+          <a:xfrm>
+            <a:off x="2258568" y="1435608"/>
+            <a:ext cx="457200" cy="274320"/>
+          </a:xfrm>
+          <a:prstGeom prst="rect">
+            <a:avLst/>
+          </a:prstGeom>
+          <a:noFill/>
+          <a:ln/>
+        </p:spPr>
+        <p:txBody>
+          <a:bodyPr wrap="square" lIns="0" tIns="0" rIns="0" bIns="0" rtlCol="0" anchor="t"/>
+          <a:lstStyle/>
+          <a:p>
+            <a:pPr indent="0" marL="0">
+              <a:lnSpc>
+                <a:spcPts val="1500"/>
+              </a:lnSpc>
+              <a:buNone/>
+            </a:pPr>
+            <a:r>
+              <a:rPr lang="en-US" sz="1200" b="1" dirty="0">
+                <a:solidFill>
                   <a:schemeClr val="accent5"/>
                 </a:solidFill>
               </a:rPr>
-              <a:t>假設：8 間 × ¥680 × 45% × 30 天；其他收入 ¥12,000；營運成本 ¥65,000。尚未含折舊、利息、稅與業主薪酬。損益平衡＝(65,000−12,000)÷163,200。</a:t>
+              <a:t>02</a:t>
+            </a:r>
+            <a:endParaRPr lang="en-US" sz="1200" dirty="0"/>
+          </a:p>
+        </p:txBody>
+      </p:sp>
+      <p:sp>
+        <p:nvSpPr>
+          <p:cNvPr id="12" name="Axis 食"/>
+          <p:cNvSpPr/>
+          <p:nvPr/>
+        </p:nvSpPr>
+        <p:spPr>
+          <a:xfrm>
+            <a:off x="3218688" y="1417320"/>
+            <a:ext cx="347472" cy="347472"/>
+          </a:xfrm>
+          <a:prstGeom prst="ellipse">
+            <a:avLst/>
+          </a:prstGeom>
+          <a:solidFill>
+            <a:srgbClr val="7FA37A"/>
+          </a:solidFill>
+          <a:ln w="12700">
+            <a:solidFill>
+              <a:srgbClr val="7FA37A"/>
+            </a:solidFill>
+            <a:prstDash val="solid"/>
+          </a:ln>
+        </p:spPr>
+      </p:sp>
+      <p:sp>
+        <p:nvSpPr>
+          <p:cNvPr id="13" name="Text 11"/>
+          <p:cNvSpPr txBox="1"/>
+          <p:nvPr/>
+        </p:nvSpPr>
+        <p:spPr>
+          <a:xfrm>
+            <a:off x="3218688" y="1417320"/>
+            <a:ext cx="347472" cy="347472"/>
+          </a:xfrm>
+          <a:prstGeom prst="rect">
+            <a:avLst/>
+          </a:prstGeom>
+          <a:noFill/>
+          <a:ln/>
+        </p:spPr>
+        <p:txBody>
+          <a:bodyPr wrap="square" lIns="0" tIns="0" rIns="0" bIns="0" rtlCol="0" anchor="ctr"/>
+          <a:lstStyle/>
+          <a:p>
+            <a:pPr algn="ctr" indent="0" marL="0">
+              <a:lnSpc>
+                <a:spcPts val="1400"/>
+              </a:lnSpc>
+              <a:buNone/>
+            </a:pPr>
+            <a:r>
+              <a:rPr lang="en-US" sz="1100" b="1" dirty="0">
+                <a:solidFill>
+                  <a:schemeClr val="bg1"/>
+                </a:solidFill>
+              </a:rPr>
+              <a:t>食</a:t>
             </a:r>
             <a:endParaRPr lang="en-US" sz="1100" dirty="0"/>
           </a:p>
         </p:txBody>
       </p:sp>
-      <p:graphicFrame>
-        <p:nvGraphicFramePr>
-          <p:cNvPr id="10" name="Chart 0" descr=""/>
-          <p:cNvGraphicFramePr/>
-          <p:nvPr/>
-        </p:nvGraphicFramePr>
-        <p:xfrm>
-          <a:off x="3749040" y="1051560"/>
-          <a:ext cx="4937760" cy="3108960"/>
-        </p:xfrm>
-        <a:graphic xmlns:a="http://schemas.openxmlformats.org/drawingml/2006/main">
-          <a:graphicData uri="http://schemas.openxmlformats.org/drawingml/2006/chart">
-            <c:chart xmlns:c="http://schemas.openxmlformats.org/drawingml/2006/chart" r:id="rId1"/>
-          </a:graphicData>
-        </a:graphic>
-      </p:graphicFrame>
-      <p:sp>
-        <p:nvSpPr>
-          <p:cNvPr id="11" name="Text 8"/>
+      <p:sp>
+        <p:nvSpPr>
+          <p:cNvPr id="14" name="Text 12"/>
           <p:cNvSpPr txBox="1"/>
           <p:nvPr/>
         </p:nvSpPr>
         <p:spPr>
           <a:xfrm>
-            <a:off x="3749040" y="4206240"/>
-            <a:ext cx="4937760" cy="365760"/>
+            <a:off x="2258568" y="1737360"/>
+            <a:ext cx="1325880" cy="320040"/>
           </a:xfrm>
           <a:prstGeom prst="rect">
             <a:avLst/>
@@ -10100,19 +11734,1761 @@
           <a:p>
             <a:pPr indent="0" marL="0">
               <a:lnSpc>
-                <a:spcPts val="1600"/>
-              </a:lnSpc>
-              <a:buNone/>
-            </a:pPr>
-            <a:r>
-              <a:rPr lang="en-US" sz="1300" b="1" dirty="0">
+                <a:spcPts val="1800"/>
+              </a:lnSpc>
+              <a:buNone/>
+            </a:pPr>
+            <a:r>
+              <a:rPr lang="en-US" sz="1400" b="1" dirty="0">
+                <a:solidFill>
+                  <a:schemeClr val="tx2"/>
+                </a:solidFill>
+              </a:rPr>
+              <a:t>食療</a:t>
+            </a:r>
+            <a:endParaRPr lang="en-US" sz="1400" dirty="0"/>
+          </a:p>
+        </p:txBody>
+      </p:sp>
+      <p:sp>
+        <p:nvSpPr>
+          <p:cNvPr id="15" name="Text 13"/>
+          <p:cNvSpPr txBox="1"/>
+          <p:nvPr/>
+        </p:nvSpPr>
+        <p:spPr>
+          <a:xfrm>
+            <a:off x="2258568" y="2075688"/>
+            <a:ext cx="1325880" cy="621792"/>
+          </a:xfrm>
+          <a:prstGeom prst="rect">
+            <a:avLst/>
+          </a:prstGeom>
+          <a:noFill/>
+          <a:ln/>
+        </p:spPr>
+        <p:txBody>
+          <a:bodyPr wrap="square" lIns="0" tIns="0" rIns="0" bIns="0" rtlCol="0" anchor="t"/>
+          <a:lstStyle/>
+          <a:p>
+            <a:pPr indent="0" marL="0">
+              <a:lnSpc>
+                <a:spcPts val="1400"/>
+              </a:lnSpc>
+              <a:buNone/>
+            </a:pPr>
+            <a:r>
+              <a:rPr lang="en-US" sz="1100" dirty="0">
+                <a:solidFill>
+                  <a:schemeClr val="tx1"/>
+                </a:solidFill>
+              </a:rPr>
+              <a:t>藥膳三餐、午後藥飲；三高、糖尿病等九大體質菜單</a:t>
+            </a:r>
+            <a:endParaRPr lang="en-US" sz="1100" dirty="0"/>
+          </a:p>
+        </p:txBody>
+      </p:sp>
+      <p:sp>
+        <p:nvSpPr>
+          <p:cNvPr id="16" name="Module 放鬆療癒"/>
+          <p:cNvSpPr/>
+          <p:nvPr/>
+        </p:nvSpPr>
+        <p:spPr>
+          <a:xfrm>
+            <a:off x="3785616" y="1325880"/>
+            <a:ext cx="1554480" cy="1417320"/>
+          </a:xfrm>
+          <a:prstGeom prst="roundRect">
+            <a:avLst>
+              <a:gd name="adj" fmla="val 5161"/>
+            </a:avLst>
+          </a:prstGeom>
+          <a:solidFill>
+            <a:srgbClr val="EEF3EC"/>
+          </a:solidFill>
+          <a:ln w="12700">
+            <a:solidFill>
+              <a:srgbClr val="EEF3EC"/>
+            </a:solidFill>
+            <a:prstDash val="solid"/>
+          </a:ln>
+        </p:spPr>
+      </p:sp>
+      <p:sp>
+        <p:nvSpPr>
+          <p:cNvPr id="17" name="Text 15"/>
+          <p:cNvSpPr txBox="1"/>
+          <p:nvPr/>
+        </p:nvSpPr>
+        <p:spPr>
+          <a:xfrm>
+            <a:off x="3922776" y="1435608"/>
+            <a:ext cx="457200" cy="274320"/>
+          </a:xfrm>
+          <a:prstGeom prst="rect">
+            <a:avLst/>
+          </a:prstGeom>
+          <a:noFill/>
+          <a:ln/>
+        </p:spPr>
+        <p:txBody>
+          <a:bodyPr wrap="square" lIns="0" tIns="0" rIns="0" bIns="0" rtlCol="0" anchor="t"/>
+          <a:lstStyle/>
+          <a:p>
+            <a:pPr indent="0" marL="0">
+              <a:lnSpc>
+                <a:spcPts val="1500"/>
+              </a:lnSpc>
+              <a:buNone/>
+            </a:pPr>
+            <a:r>
+              <a:rPr lang="en-US" sz="1200" b="1" dirty="0">
+                <a:solidFill>
+                  <a:schemeClr val="accent5"/>
+                </a:solidFill>
+              </a:rPr>
+              <a:t>03</a:t>
+            </a:r>
+            <a:endParaRPr lang="en-US" sz="1200" dirty="0"/>
+          </a:p>
+        </p:txBody>
+      </p:sp>
+      <p:sp>
+        <p:nvSpPr>
+          <p:cNvPr id="18" name="Axis 身"/>
+          <p:cNvSpPr/>
+          <p:nvPr/>
+        </p:nvSpPr>
+        <p:spPr>
+          <a:xfrm>
+            <a:off x="4882896" y="1417320"/>
+            <a:ext cx="347472" cy="347472"/>
+          </a:xfrm>
+          <a:prstGeom prst="ellipse">
+            <a:avLst/>
+          </a:prstGeom>
+          <a:solidFill>
+            <a:srgbClr val="2F4A3A"/>
+          </a:solidFill>
+          <a:ln w="12700">
+            <a:solidFill>
+              <a:srgbClr val="2F4A3A"/>
+            </a:solidFill>
+            <a:prstDash val="solid"/>
+          </a:ln>
+        </p:spPr>
+      </p:sp>
+      <p:sp>
+        <p:nvSpPr>
+          <p:cNvPr id="19" name="Text 17"/>
+          <p:cNvSpPr txBox="1"/>
+          <p:nvPr/>
+        </p:nvSpPr>
+        <p:spPr>
+          <a:xfrm>
+            <a:off x="4882896" y="1417320"/>
+            <a:ext cx="347472" cy="347472"/>
+          </a:xfrm>
+          <a:prstGeom prst="rect">
+            <a:avLst/>
+          </a:prstGeom>
+          <a:noFill/>
+          <a:ln/>
+        </p:spPr>
+        <p:txBody>
+          <a:bodyPr wrap="square" lIns="0" tIns="0" rIns="0" bIns="0" rtlCol="0" anchor="ctr"/>
+          <a:lstStyle/>
+          <a:p>
+            <a:pPr algn="ctr" indent="0" marL="0">
+              <a:lnSpc>
+                <a:spcPts val="1400"/>
+              </a:lnSpc>
+              <a:buNone/>
+            </a:pPr>
+            <a:r>
+              <a:rPr lang="en-US" sz="1100" b="1" dirty="0">
+                <a:solidFill>
+                  <a:schemeClr val="bg1"/>
+                </a:solidFill>
+              </a:rPr>
+              <a:t>身</a:t>
+            </a:r>
+            <a:endParaRPr lang="en-US" sz="1100" dirty="0"/>
+          </a:p>
+        </p:txBody>
+      </p:sp>
+      <p:sp>
+        <p:nvSpPr>
+          <p:cNvPr id="20" name="Text 18"/>
+          <p:cNvSpPr txBox="1"/>
+          <p:nvPr/>
+        </p:nvSpPr>
+        <p:spPr>
+          <a:xfrm>
+            <a:off x="3922776" y="1737360"/>
+            <a:ext cx="1325880" cy="320040"/>
+          </a:xfrm>
+          <a:prstGeom prst="rect">
+            <a:avLst/>
+          </a:prstGeom>
+          <a:noFill/>
+          <a:ln/>
+        </p:spPr>
+        <p:txBody>
+          <a:bodyPr wrap="square" lIns="0" tIns="0" rIns="0" bIns="0" rtlCol="0" anchor="t"/>
+          <a:lstStyle/>
+          <a:p>
+            <a:pPr indent="0" marL="0">
+              <a:lnSpc>
+                <a:spcPts val="1800"/>
+              </a:lnSpc>
+              <a:buNone/>
+            </a:pPr>
+            <a:r>
+              <a:rPr lang="en-US" sz="1400" b="1" dirty="0">
+                <a:solidFill>
+                  <a:schemeClr val="tx2"/>
+                </a:solidFill>
+              </a:rPr>
+              <a:t>放鬆療癒</a:t>
+            </a:r>
+            <a:endParaRPr lang="en-US" sz="1400" dirty="0"/>
+          </a:p>
+        </p:txBody>
+      </p:sp>
+      <p:sp>
+        <p:nvSpPr>
+          <p:cNvPr id="21" name="Text 19"/>
+          <p:cNvSpPr txBox="1"/>
+          <p:nvPr/>
+        </p:nvSpPr>
+        <p:spPr>
+          <a:xfrm>
+            <a:off x="3922776" y="2075688"/>
+            <a:ext cx="1325880" cy="621792"/>
+          </a:xfrm>
+          <a:prstGeom prst="rect">
+            <a:avLst/>
+          </a:prstGeom>
+          <a:noFill/>
+          <a:ln/>
+        </p:spPr>
+        <p:txBody>
+          <a:bodyPr wrap="square" lIns="0" tIns="0" rIns="0" bIns="0" rtlCol="0" anchor="t"/>
+          <a:lstStyle/>
+          <a:p>
+            <a:pPr indent="0" marL="0">
+              <a:lnSpc>
+                <a:spcPts val="1400"/>
+              </a:lnSpc>
+              <a:buNone/>
+            </a:pPr>
+            <a:r>
+              <a:rPr lang="en-US" sz="1100" dirty="0">
+                <a:solidFill>
+                  <a:schemeClr val="tx1"/>
+                </a:solidFill>
+              </a:rPr>
+              <a:t>經絡按摩、溫泡、SPA、足浴</a:t>
+            </a:r>
+            <a:endParaRPr lang="en-US" sz="1100" dirty="0"/>
+          </a:p>
+        </p:txBody>
+      </p:sp>
+      <p:sp>
+        <p:nvSpPr>
+          <p:cNvPr id="22" name="Module 自然療癒"/>
+          <p:cNvSpPr/>
+          <p:nvPr/>
+        </p:nvSpPr>
+        <p:spPr>
+          <a:xfrm>
+            <a:off x="5449824" y="1325880"/>
+            <a:ext cx="1554480" cy="1417320"/>
+          </a:xfrm>
+          <a:prstGeom prst="roundRect">
+            <a:avLst>
+              <a:gd name="adj" fmla="val 5161"/>
+            </a:avLst>
+          </a:prstGeom>
+          <a:solidFill>
+            <a:srgbClr val="EEF3EC"/>
+          </a:solidFill>
+          <a:ln w="12700">
+            <a:solidFill>
+              <a:srgbClr val="EEF3EC"/>
+            </a:solidFill>
+            <a:prstDash val="solid"/>
+          </a:ln>
+        </p:spPr>
+      </p:sp>
+      <p:sp>
+        <p:nvSpPr>
+          <p:cNvPr id="23" name="Text 21"/>
+          <p:cNvSpPr txBox="1"/>
+          <p:nvPr/>
+        </p:nvSpPr>
+        <p:spPr>
+          <a:xfrm>
+            <a:off x="5586984" y="1435608"/>
+            <a:ext cx="457200" cy="274320"/>
+          </a:xfrm>
+          <a:prstGeom prst="rect">
+            <a:avLst/>
+          </a:prstGeom>
+          <a:noFill/>
+          <a:ln/>
+        </p:spPr>
+        <p:txBody>
+          <a:bodyPr wrap="square" lIns="0" tIns="0" rIns="0" bIns="0" rtlCol="0" anchor="t"/>
+          <a:lstStyle/>
+          <a:p>
+            <a:pPr indent="0" marL="0">
+              <a:lnSpc>
+                <a:spcPts val="1500"/>
+              </a:lnSpc>
+              <a:buNone/>
+            </a:pPr>
+            <a:r>
+              <a:rPr lang="en-US" sz="1200" b="1" dirty="0">
+                <a:solidFill>
+                  <a:schemeClr val="accent5"/>
+                </a:solidFill>
+              </a:rPr>
+              <a:t>04</a:t>
+            </a:r>
+            <a:endParaRPr lang="en-US" sz="1200" dirty="0"/>
+          </a:p>
+        </p:txBody>
+      </p:sp>
+      <p:sp>
+        <p:nvSpPr>
+          <p:cNvPr id="24" name="Axis 身"/>
+          <p:cNvSpPr/>
+          <p:nvPr/>
+        </p:nvSpPr>
+        <p:spPr>
+          <a:xfrm>
+            <a:off x="6547104" y="1417320"/>
+            <a:ext cx="347472" cy="347472"/>
+          </a:xfrm>
+          <a:prstGeom prst="ellipse">
+            <a:avLst/>
+          </a:prstGeom>
+          <a:solidFill>
+            <a:srgbClr val="2F4A3A"/>
+          </a:solidFill>
+          <a:ln w="12700">
+            <a:solidFill>
+              <a:srgbClr val="2F4A3A"/>
+            </a:solidFill>
+            <a:prstDash val="solid"/>
+          </a:ln>
+        </p:spPr>
+      </p:sp>
+      <p:sp>
+        <p:nvSpPr>
+          <p:cNvPr id="25" name="Text 23"/>
+          <p:cNvSpPr txBox="1"/>
+          <p:nvPr/>
+        </p:nvSpPr>
+        <p:spPr>
+          <a:xfrm>
+            <a:off x="6547104" y="1417320"/>
+            <a:ext cx="347472" cy="347472"/>
+          </a:xfrm>
+          <a:prstGeom prst="rect">
+            <a:avLst/>
+          </a:prstGeom>
+          <a:noFill/>
+          <a:ln/>
+        </p:spPr>
+        <p:txBody>
+          <a:bodyPr wrap="square" lIns="0" tIns="0" rIns="0" bIns="0" rtlCol="0" anchor="ctr"/>
+          <a:lstStyle/>
+          <a:p>
+            <a:pPr algn="ctr" indent="0" marL="0">
+              <a:lnSpc>
+                <a:spcPts val="1400"/>
+              </a:lnSpc>
+              <a:buNone/>
+            </a:pPr>
+            <a:r>
+              <a:rPr lang="en-US" sz="1100" b="1" dirty="0">
+                <a:solidFill>
+                  <a:schemeClr val="bg1"/>
+                </a:solidFill>
+              </a:rPr>
+              <a:t>身</a:t>
+            </a:r>
+            <a:endParaRPr lang="en-US" sz="1100" dirty="0"/>
+          </a:p>
+        </p:txBody>
+      </p:sp>
+      <p:sp>
+        <p:nvSpPr>
+          <p:cNvPr id="26" name="Text 24"/>
+          <p:cNvSpPr txBox="1"/>
+          <p:nvPr/>
+        </p:nvSpPr>
+        <p:spPr>
+          <a:xfrm>
+            <a:off x="5586984" y="1737360"/>
+            <a:ext cx="1325880" cy="320040"/>
+          </a:xfrm>
+          <a:prstGeom prst="rect">
+            <a:avLst/>
+          </a:prstGeom>
+          <a:noFill/>
+          <a:ln/>
+        </p:spPr>
+        <p:txBody>
+          <a:bodyPr wrap="square" lIns="0" tIns="0" rIns="0" bIns="0" rtlCol="0" anchor="t"/>
+          <a:lstStyle/>
+          <a:p>
+            <a:pPr indent="0" marL="0">
+              <a:lnSpc>
+                <a:spcPts val="1800"/>
+              </a:lnSpc>
+              <a:buNone/>
+            </a:pPr>
+            <a:r>
+              <a:rPr lang="en-US" sz="1400" b="1" dirty="0">
+                <a:solidFill>
+                  <a:schemeClr val="tx2"/>
+                </a:solidFill>
+              </a:rPr>
+              <a:t>自然療癒</a:t>
+            </a:r>
+            <a:endParaRPr lang="en-US" sz="1400" dirty="0"/>
+          </a:p>
+        </p:txBody>
+      </p:sp>
+      <p:sp>
+        <p:nvSpPr>
+          <p:cNvPr id="27" name="Text 25"/>
+          <p:cNvSpPr txBox="1"/>
+          <p:nvPr/>
+        </p:nvSpPr>
+        <p:spPr>
+          <a:xfrm>
+            <a:off x="5586984" y="2075688"/>
+            <a:ext cx="1325880" cy="621792"/>
+          </a:xfrm>
+          <a:prstGeom prst="rect">
+            <a:avLst/>
+          </a:prstGeom>
+          <a:noFill/>
+          <a:ln/>
+        </p:spPr>
+        <p:txBody>
+          <a:bodyPr wrap="square" lIns="0" tIns="0" rIns="0" bIns="0" rtlCol="0" anchor="t"/>
+          <a:lstStyle/>
+          <a:p>
+            <a:pPr indent="0" marL="0">
+              <a:lnSpc>
+                <a:spcPts val="1400"/>
+              </a:lnSpc>
+              <a:buNone/>
+            </a:pPr>
+            <a:r>
+              <a:rPr lang="en-US" sz="1100" dirty="0">
+                <a:solidFill>
+                  <a:schemeClr val="tx1"/>
+                </a:solidFill>
+              </a:rPr>
+              <a:t>森林步道、海邊散步、八段錦、太極拳</a:t>
+            </a:r>
+            <a:endParaRPr lang="en-US" sz="1100" dirty="0"/>
+          </a:p>
+        </p:txBody>
+      </p:sp>
+      <p:sp>
+        <p:nvSpPr>
+          <p:cNvPr id="28" name="Module 香療"/>
+          <p:cNvSpPr/>
+          <p:nvPr/>
+        </p:nvSpPr>
+        <p:spPr>
+          <a:xfrm>
+            <a:off x="7114032" y="1325880"/>
+            <a:ext cx="1554480" cy="1417320"/>
+          </a:xfrm>
+          <a:prstGeom prst="roundRect">
+            <a:avLst>
+              <a:gd name="adj" fmla="val 5161"/>
+            </a:avLst>
+          </a:prstGeom>
+          <a:solidFill>
+            <a:srgbClr val="EEF3EC"/>
+          </a:solidFill>
+          <a:ln w="12700">
+            <a:solidFill>
+              <a:srgbClr val="EEF3EC"/>
+            </a:solidFill>
+            <a:prstDash val="solid"/>
+          </a:ln>
+        </p:spPr>
+      </p:sp>
+      <p:sp>
+        <p:nvSpPr>
+          <p:cNvPr id="29" name="Text 27"/>
+          <p:cNvSpPr txBox="1"/>
+          <p:nvPr/>
+        </p:nvSpPr>
+        <p:spPr>
+          <a:xfrm>
+            <a:off x="7251192" y="1435608"/>
+            <a:ext cx="457200" cy="274320"/>
+          </a:xfrm>
+          <a:prstGeom prst="rect">
+            <a:avLst/>
+          </a:prstGeom>
+          <a:noFill/>
+          <a:ln/>
+        </p:spPr>
+        <p:txBody>
+          <a:bodyPr wrap="square" lIns="0" tIns="0" rIns="0" bIns="0" rtlCol="0" anchor="t"/>
+          <a:lstStyle/>
+          <a:p>
+            <a:pPr indent="0" marL="0">
+              <a:lnSpc>
+                <a:spcPts val="1500"/>
+              </a:lnSpc>
+              <a:buNone/>
+            </a:pPr>
+            <a:r>
+              <a:rPr lang="en-US" sz="1200" b="1" dirty="0">
+                <a:solidFill>
+                  <a:schemeClr val="accent5"/>
+                </a:solidFill>
+              </a:rPr>
+              <a:t>05</a:t>
+            </a:r>
+            <a:endParaRPr lang="en-US" sz="1200" dirty="0"/>
+          </a:p>
+        </p:txBody>
+      </p:sp>
+      <p:sp>
+        <p:nvSpPr>
+          <p:cNvPr id="30" name="Axis 心"/>
+          <p:cNvSpPr/>
+          <p:nvPr/>
+        </p:nvSpPr>
+        <p:spPr>
+          <a:xfrm>
+            <a:off x="8211312" y="1417320"/>
+            <a:ext cx="347472" cy="347472"/>
+          </a:xfrm>
+          <a:prstGeom prst="ellipse">
+            <a:avLst/>
+          </a:prstGeom>
+          <a:solidFill>
+            <a:srgbClr val="C07A4F"/>
+          </a:solidFill>
+          <a:ln w="12700">
+            <a:solidFill>
+              <a:srgbClr val="C07A4F"/>
+            </a:solidFill>
+            <a:prstDash val="solid"/>
+          </a:ln>
+        </p:spPr>
+      </p:sp>
+      <p:sp>
+        <p:nvSpPr>
+          <p:cNvPr id="31" name="Text 29"/>
+          <p:cNvSpPr txBox="1"/>
+          <p:nvPr/>
+        </p:nvSpPr>
+        <p:spPr>
+          <a:xfrm>
+            <a:off x="8211312" y="1417320"/>
+            <a:ext cx="347472" cy="347472"/>
+          </a:xfrm>
+          <a:prstGeom prst="rect">
+            <a:avLst/>
+          </a:prstGeom>
+          <a:noFill/>
+          <a:ln/>
+        </p:spPr>
+        <p:txBody>
+          <a:bodyPr wrap="square" lIns="0" tIns="0" rIns="0" bIns="0" rtlCol="0" anchor="ctr"/>
+          <a:lstStyle/>
+          <a:p>
+            <a:pPr algn="ctr" indent="0" marL="0">
+              <a:lnSpc>
+                <a:spcPts val="1400"/>
+              </a:lnSpc>
+              <a:buNone/>
+            </a:pPr>
+            <a:r>
+              <a:rPr lang="en-US" sz="1100" b="1" dirty="0">
+                <a:solidFill>
+                  <a:schemeClr val="bg1"/>
+                </a:solidFill>
+              </a:rPr>
+              <a:t>心</a:t>
+            </a:r>
+            <a:endParaRPr lang="en-US" sz="1100" dirty="0"/>
+          </a:p>
+        </p:txBody>
+      </p:sp>
+      <p:sp>
+        <p:nvSpPr>
+          <p:cNvPr id="32" name="Text 30"/>
+          <p:cNvSpPr txBox="1"/>
+          <p:nvPr/>
+        </p:nvSpPr>
+        <p:spPr>
+          <a:xfrm>
+            <a:off x="7251192" y="1737360"/>
+            <a:ext cx="1325880" cy="320040"/>
+          </a:xfrm>
+          <a:prstGeom prst="rect">
+            <a:avLst/>
+          </a:prstGeom>
+          <a:noFill/>
+          <a:ln/>
+        </p:spPr>
+        <p:txBody>
+          <a:bodyPr wrap="square" lIns="0" tIns="0" rIns="0" bIns="0" rtlCol="0" anchor="t"/>
+          <a:lstStyle/>
+          <a:p>
+            <a:pPr indent="0" marL="0">
+              <a:lnSpc>
+                <a:spcPts val="1800"/>
+              </a:lnSpc>
+              <a:buNone/>
+            </a:pPr>
+            <a:r>
+              <a:rPr lang="en-US" sz="1400" b="1" dirty="0">
+                <a:solidFill>
+                  <a:schemeClr val="tx2"/>
+                </a:solidFill>
+              </a:rPr>
+              <a:t>香療</a:t>
+            </a:r>
+            <a:endParaRPr lang="en-US" sz="1400" dirty="0"/>
+          </a:p>
+        </p:txBody>
+      </p:sp>
+      <p:sp>
+        <p:nvSpPr>
+          <p:cNvPr id="33" name="Text 31"/>
+          <p:cNvSpPr txBox="1"/>
+          <p:nvPr/>
+        </p:nvSpPr>
+        <p:spPr>
+          <a:xfrm>
+            <a:off x="7251192" y="2075688"/>
+            <a:ext cx="1325880" cy="621792"/>
+          </a:xfrm>
+          <a:prstGeom prst="rect">
+            <a:avLst/>
+          </a:prstGeom>
+          <a:noFill/>
+          <a:ln/>
+        </p:spPr>
+        <p:txBody>
+          <a:bodyPr wrap="square" lIns="0" tIns="0" rIns="0" bIns="0" rtlCol="0" anchor="t"/>
+          <a:lstStyle/>
+          <a:p>
+            <a:pPr indent="0" marL="0">
+              <a:lnSpc>
+                <a:spcPts val="1400"/>
+              </a:lnSpc>
+              <a:buNone/>
+            </a:pPr>
+            <a:r>
+              <a:rPr lang="en-US" sz="1100" dirty="0">
+                <a:solidFill>
+                  <a:schemeClr val="tx1"/>
+                </a:solidFill>
+              </a:rPr>
+              <a:t>芳香調油、精油按摩、房間香氛</a:t>
+            </a:r>
+            <a:endParaRPr lang="en-US" sz="1100" dirty="0"/>
+          </a:p>
+        </p:txBody>
+      </p:sp>
+      <p:sp>
+        <p:nvSpPr>
+          <p:cNvPr id="34" name="Module 音療"/>
+          <p:cNvSpPr/>
+          <p:nvPr/>
+        </p:nvSpPr>
+        <p:spPr>
+          <a:xfrm>
+            <a:off x="457200" y="2862072"/>
+            <a:ext cx="1554480" cy="1417320"/>
+          </a:xfrm>
+          <a:prstGeom prst="roundRect">
+            <a:avLst>
+              <a:gd name="adj" fmla="val 5161"/>
+            </a:avLst>
+          </a:prstGeom>
+          <a:solidFill>
+            <a:srgbClr val="EEF3EC"/>
+          </a:solidFill>
+          <a:ln w="12700">
+            <a:solidFill>
+              <a:srgbClr val="EEF3EC"/>
+            </a:solidFill>
+            <a:prstDash val="solid"/>
+          </a:ln>
+        </p:spPr>
+      </p:sp>
+      <p:sp>
+        <p:nvSpPr>
+          <p:cNvPr id="35" name="Text 33"/>
+          <p:cNvSpPr txBox="1"/>
+          <p:nvPr/>
+        </p:nvSpPr>
+        <p:spPr>
+          <a:xfrm>
+            <a:off x="594360" y="2971800"/>
+            <a:ext cx="457200" cy="274320"/>
+          </a:xfrm>
+          <a:prstGeom prst="rect">
+            <a:avLst/>
+          </a:prstGeom>
+          <a:noFill/>
+          <a:ln/>
+        </p:spPr>
+        <p:txBody>
+          <a:bodyPr wrap="square" lIns="0" tIns="0" rIns="0" bIns="0" rtlCol="0" anchor="t"/>
+          <a:lstStyle/>
+          <a:p>
+            <a:pPr indent="0" marL="0">
+              <a:lnSpc>
+                <a:spcPts val="1500"/>
+              </a:lnSpc>
+              <a:buNone/>
+            </a:pPr>
+            <a:r>
+              <a:rPr lang="en-US" sz="1200" b="1" dirty="0">
+                <a:solidFill>
+                  <a:schemeClr val="accent5"/>
+                </a:solidFill>
+              </a:rPr>
+              <a:t>06</a:t>
+            </a:r>
+            <a:endParaRPr lang="en-US" sz="1200" dirty="0"/>
+          </a:p>
+        </p:txBody>
+      </p:sp>
+      <p:sp>
+        <p:nvSpPr>
+          <p:cNvPr id="36" name="Axis 心"/>
+          <p:cNvSpPr/>
+          <p:nvPr/>
+        </p:nvSpPr>
+        <p:spPr>
+          <a:xfrm>
+            <a:off x="1554480" y="2953512"/>
+            <a:ext cx="347472" cy="347472"/>
+          </a:xfrm>
+          <a:prstGeom prst="ellipse">
+            <a:avLst/>
+          </a:prstGeom>
+          <a:solidFill>
+            <a:srgbClr val="C07A4F"/>
+          </a:solidFill>
+          <a:ln w="12700">
+            <a:solidFill>
+              <a:srgbClr val="C07A4F"/>
+            </a:solidFill>
+            <a:prstDash val="solid"/>
+          </a:ln>
+        </p:spPr>
+      </p:sp>
+      <p:sp>
+        <p:nvSpPr>
+          <p:cNvPr id="37" name="Text 35"/>
+          <p:cNvSpPr txBox="1"/>
+          <p:nvPr/>
+        </p:nvSpPr>
+        <p:spPr>
+          <a:xfrm>
+            <a:off x="1554480" y="2953512"/>
+            <a:ext cx="347472" cy="347472"/>
+          </a:xfrm>
+          <a:prstGeom prst="rect">
+            <a:avLst/>
+          </a:prstGeom>
+          <a:noFill/>
+          <a:ln/>
+        </p:spPr>
+        <p:txBody>
+          <a:bodyPr wrap="square" lIns="0" tIns="0" rIns="0" bIns="0" rtlCol="0" anchor="ctr"/>
+          <a:lstStyle/>
+          <a:p>
+            <a:pPr algn="ctr" indent="0" marL="0">
+              <a:lnSpc>
+                <a:spcPts val="1400"/>
+              </a:lnSpc>
+              <a:buNone/>
+            </a:pPr>
+            <a:r>
+              <a:rPr lang="en-US" sz="1100" b="1" dirty="0">
+                <a:solidFill>
+                  <a:schemeClr val="bg1"/>
+                </a:solidFill>
+              </a:rPr>
+              <a:t>心</a:t>
+            </a:r>
+            <a:endParaRPr lang="en-US" sz="1100" dirty="0"/>
+          </a:p>
+        </p:txBody>
+      </p:sp>
+      <p:sp>
+        <p:nvSpPr>
+          <p:cNvPr id="38" name="Text 36"/>
+          <p:cNvSpPr txBox="1"/>
+          <p:nvPr/>
+        </p:nvSpPr>
+        <p:spPr>
+          <a:xfrm>
+            <a:off x="594360" y="3273552"/>
+            <a:ext cx="1325880" cy="320040"/>
+          </a:xfrm>
+          <a:prstGeom prst="rect">
+            <a:avLst/>
+          </a:prstGeom>
+          <a:noFill/>
+          <a:ln/>
+        </p:spPr>
+        <p:txBody>
+          <a:bodyPr wrap="square" lIns="0" tIns="0" rIns="0" bIns="0" rtlCol="0" anchor="t"/>
+          <a:lstStyle/>
+          <a:p>
+            <a:pPr indent="0" marL="0">
+              <a:lnSpc>
+                <a:spcPts val="1800"/>
+              </a:lnSpc>
+              <a:buNone/>
+            </a:pPr>
+            <a:r>
+              <a:rPr lang="en-US" sz="1400" b="1" dirty="0">
+                <a:solidFill>
+                  <a:schemeClr val="tx2"/>
+                </a:solidFill>
+              </a:rPr>
+              <a:t>音療</a:t>
+            </a:r>
+            <a:endParaRPr lang="en-US" sz="1400" dirty="0"/>
+          </a:p>
+        </p:txBody>
+      </p:sp>
+      <p:sp>
+        <p:nvSpPr>
+          <p:cNvPr id="39" name="Text 37"/>
+          <p:cNvSpPr txBox="1"/>
+          <p:nvPr/>
+        </p:nvSpPr>
+        <p:spPr>
+          <a:xfrm>
+            <a:off x="594360" y="3611880"/>
+            <a:ext cx="1325880" cy="621792"/>
+          </a:xfrm>
+          <a:prstGeom prst="rect">
+            <a:avLst/>
+          </a:prstGeom>
+          <a:noFill/>
+          <a:ln/>
+        </p:spPr>
+        <p:txBody>
+          <a:bodyPr wrap="square" lIns="0" tIns="0" rIns="0" bIns="0" rtlCol="0" anchor="t"/>
+          <a:lstStyle/>
+          <a:p>
+            <a:pPr indent="0" marL="0">
+              <a:lnSpc>
+                <a:spcPts val="1400"/>
+              </a:lnSpc>
+              <a:buNone/>
+            </a:pPr>
+            <a:r>
+              <a:rPr lang="en-US" sz="1100" dirty="0">
+                <a:solidFill>
+                  <a:schemeClr val="tx1"/>
+                </a:solidFill>
+              </a:rPr>
+              <a:t>頌缽、水晶缽、自然聲音浴</a:t>
+            </a:r>
+            <a:endParaRPr lang="en-US" sz="1100" dirty="0"/>
+          </a:p>
+        </p:txBody>
+      </p:sp>
+      <p:sp>
+        <p:nvSpPr>
+          <p:cNvPr id="40" name="Module 康復療癒"/>
+          <p:cNvSpPr/>
+          <p:nvPr/>
+        </p:nvSpPr>
+        <p:spPr>
+          <a:xfrm>
+            <a:off x="2121408" y="2862072"/>
+            <a:ext cx="1554480" cy="1417320"/>
+          </a:xfrm>
+          <a:prstGeom prst="roundRect">
+            <a:avLst>
+              <a:gd name="adj" fmla="val 5161"/>
+            </a:avLst>
+          </a:prstGeom>
+          <a:solidFill>
+            <a:srgbClr val="EEF3EC"/>
+          </a:solidFill>
+          <a:ln w="12700">
+            <a:solidFill>
+              <a:srgbClr val="EEF3EC"/>
+            </a:solidFill>
+            <a:prstDash val="solid"/>
+          </a:ln>
+        </p:spPr>
+      </p:sp>
+      <p:sp>
+        <p:nvSpPr>
+          <p:cNvPr id="41" name="Text 39"/>
+          <p:cNvSpPr txBox="1"/>
+          <p:nvPr/>
+        </p:nvSpPr>
+        <p:spPr>
+          <a:xfrm>
+            <a:off x="2258568" y="2971800"/>
+            <a:ext cx="457200" cy="274320"/>
+          </a:xfrm>
+          <a:prstGeom prst="rect">
+            <a:avLst/>
+          </a:prstGeom>
+          <a:noFill/>
+          <a:ln/>
+        </p:spPr>
+        <p:txBody>
+          <a:bodyPr wrap="square" lIns="0" tIns="0" rIns="0" bIns="0" rtlCol="0" anchor="t"/>
+          <a:lstStyle/>
+          <a:p>
+            <a:pPr indent="0" marL="0">
+              <a:lnSpc>
+                <a:spcPts val="1500"/>
+              </a:lnSpc>
+              <a:buNone/>
+            </a:pPr>
+            <a:r>
+              <a:rPr lang="en-US" sz="1200" b="1" dirty="0">
+                <a:solidFill>
+                  <a:schemeClr val="accent5"/>
+                </a:solidFill>
+              </a:rPr>
+              <a:t>07</a:t>
+            </a:r>
+            <a:endParaRPr lang="en-US" sz="1200" dirty="0"/>
+          </a:p>
+        </p:txBody>
+      </p:sp>
+      <p:sp>
+        <p:nvSpPr>
+          <p:cNvPr id="42" name="Axis 身"/>
+          <p:cNvSpPr/>
+          <p:nvPr/>
+        </p:nvSpPr>
+        <p:spPr>
+          <a:xfrm>
+            <a:off x="3218688" y="2953512"/>
+            <a:ext cx="347472" cy="347472"/>
+          </a:xfrm>
+          <a:prstGeom prst="ellipse">
+            <a:avLst/>
+          </a:prstGeom>
+          <a:solidFill>
+            <a:srgbClr val="2F4A3A"/>
+          </a:solidFill>
+          <a:ln w="12700">
+            <a:solidFill>
+              <a:srgbClr val="2F4A3A"/>
+            </a:solidFill>
+            <a:prstDash val="solid"/>
+          </a:ln>
+        </p:spPr>
+      </p:sp>
+      <p:sp>
+        <p:nvSpPr>
+          <p:cNvPr id="43" name="Text 41"/>
+          <p:cNvSpPr txBox="1"/>
+          <p:nvPr/>
+        </p:nvSpPr>
+        <p:spPr>
+          <a:xfrm>
+            <a:off x="3218688" y="2953512"/>
+            <a:ext cx="347472" cy="347472"/>
+          </a:xfrm>
+          <a:prstGeom prst="rect">
+            <a:avLst/>
+          </a:prstGeom>
+          <a:noFill/>
+          <a:ln/>
+        </p:spPr>
+        <p:txBody>
+          <a:bodyPr wrap="square" lIns="0" tIns="0" rIns="0" bIns="0" rtlCol="0" anchor="ctr"/>
+          <a:lstStyle/>
+          <a:p>
+            <a:pPr algn="ctr" indent="0" marL="0">
+              <a:lnSpc>
+                <a:spcPts val="1400"/>
+              </a:lnSpc>
+              <a:buNone/>
+            </a:pPr>
+            <a:r>
+              <a:rPr lang="en-US" sz="1100" b="1" dirty="0">
+                <a:solidFill>
+                  <a:schemeClr val="bg1"/>
+                </a:solidFill>
+              </a:rPr>
+              <a:t>身</a:t>
+            </a:r>
+            <a:endParaRPr lang="en-US" sz="1100" dirty="0"/>
+          </a:p>
+        </p:txBody>
+      </p:sp>
+      <p:sp>
+        <p:nvSpPr>
+          <p:cNvPr id="44" name="Text 42"/>
+          <p:cNvSpPr txBox="1"/>
+          <p:nvPr/>
+        </p:nvSpPr>
+        <p:spPr>
+          <a:xfrm>
+            <a:off x="2258568" y="3273552"/>
+            <a:ext cx="1325880" cy="320040"/>
+          </a:xfrm>
+          <a:prstGeom prst="rect">
+            <a:avLst/>
+          </a:prstGeom>
+          <a:noFill/>
+          <a:ln/>
+        </p:spPr>
+        <p:txBody>
+          <a:bodyPr wrap="square" lIns="0" tIns="0" rIns="0" bIns="0" rtlCol="0" anchor="t"/>
+          <a:lstStyle/>
+          <a:p>
+            <a:pPr indent="0" marL="0">
+              <a:lnSpc>
+                <a:spcPts val="1800"/>
+              </a:lnSpc>
+              <a:buNone/>
+            </a:pPr>
+            <a:r>
+              <a:rPr lang="en-US" sz="1400" b="1" dirty="0">
+                <a:solidFill>
+                  <a:schemeClr val="tx2"/>
+                </a:solidFill>
+              </a:rPr>
+              <a:t>康復療癒</a:t>
+            </a:r>
+            <a:endParaRPr lang="en-US" sz="1400" dirty="0"/>
+          </a:p>
+        </p:txBody>
+      </p:sp>
+      <p:sp>
+        <p:nvSpPr>
+          <p:cNvPr id="45" name="Text 43"/>
+          <p:cNvSpPr txBox="1"/>
+          <p:nvPr/>
+        </p:nvSpPr>
+        <p:spPr>
+          <a:xfrm>
+            <a:off x="2258568" y="3611880"/>
+            <a:ext cx="1325880" cy="621792"/>
+          </a:xfrm>
+          <a:prstGeom prst="rect">
+            <a:avLst/>
+          </a:prstGeom>
+          <a:noFill/>
+          <a:ln/>
+        </p:spPr>
+        <p:txBody>
+          <a:bodyPr wrap="square" lIns="0" tIns="0" rIns="0" bIns="0" rtlCol="0" anchor="t"/>
+          <a:lstStyle/>
+          <a:p>
+            <a:pPr indent="0" marL="0">
+              <a:lnSpc>
+                <a:spcPts val="1400"/>
+              </a:lnSpc>
+              <a:buNone/>
+            </a:pPr>
+            <a:r>
+              <a:rPr lang="en-US" sz="1100" dirty="0">
+                <a:solidFill>
+                  <a:schemeClr val="tx1"/>
+                </a:solidFill>
+              </a:rPr>
+              <a:t>體能評估、復健設備、肌力訓練</a:t>
+            </a:r>
+            <a:endParaRPr lang="en-US" sz="1100" dirty="0"/>
+          </a:p>
+        </p:txBody>
+      </p:sp>
+      <p:sp>
+        <p:nvSpPr>
+          <p:cNvPr id="46" name="Module 冥想"/>
+          <p:cNvSpPr/>
+          <p:nvPr/>
+        </p:nvSpPr>
+        <p:spPr>
+          <a:xfrm>
+            <a:off x="3785616" y="2862072"/>
+            <a:ext cx="1554480" cy="1417320"/>
+          </a:xfrm>
+          <a:prstGeom prst="roundRect">
+            <a:avLst>
+              <a:gd name="adj" fmla="val 5161"/>
+            </a:avLst>
+          </a:prstGeom>
+          <a:solidFill>
+            <a:srgbClr val="EEF3EC"/>
+          </a:solidFill>
+          <a:ln w="12700">
+            <a:solidFill>
+              <a:srgbClr val="EEF3EC"/>
+            </a:solidFill>
+            <a:prstDash val="solid"/>
+          </a:ln>
+        </p:spPr>
+      </p:sp>
+      <p:sp>
+        <p:nvSpPr>
+          <p:cNvPr id="47" name="Text 45"/>
+          <p:cNvSpPr txBox="1"/>
+          <p:nvPr/>
+        </p:nvSpPr>
+        <p:spPr>
+          <a:xfrm>
+            <a:off x="3922776" y="2971800"/>
+            <a:ext cx="457200" cy="274320"/>
+          </a:xfrm>
+          <a:prstGeom prst="rect">
+            <a:avLst/>
+          </a:prstGeom>
+          <a:noFill/>
+          <a:ln/>
+        </p:spPr>
+        <p:txBody>
+          <a:bodyPr wrap="square" lIns="0" tIns="0" rIns="0" bIns="0" rtlCol="0" anchor="t"/>
+          <a:lstStyle/>
+          <a:p>
+            <a:pPr indent="0" marL="0">
+              <a:lnSpc>
+                <a:spcPts val="1500"/>
+              </a:lnSpc>
+              <a:buNone/>
+            </a:pPr>
+            <a:r>
+              <a:rPr lang="en-US" sz="1200" b="1" dirty="0">
+                <a:solidFill>
+                  <a:schemeClr val="accent5"/>
+                </a:solidFill>
+              </a:rPr>
+              <a:t>08</a:t>
+            </a:r>
+            <a:endParaRPr lang="en-US" sz="1200" dirty="0"/>
+          </a:p>
+        </p:txBody>
+      </p:sp>
+      <p:sp>
+        <p:nvSpPr>
+          <p:cNvPr id="48" name="Axis 心"/>
+          <p:cNvSpPr/>
+          <p:nvPr/>
+        </p:nvSpPr>
+        <p:spPr>
+          <a:xfrm>
+            <a:off x="4882896" y="2953512"/>
+            <a:ext cx="347472" cy="347472"/>
+          </a:xfrm>
+          <a:prstGeom prst="ellipse">
+            <a:avLst/>
+          </a:prstGeom>
+          <a:solidFill>
+            <a:srgbClr val="C07A4F"/>
+          </a:solidFill>
+          <a:ln w="12700">
+            <a:solidFill>
+              <a:srgbClr val="C07A4F"/>
+            </a:solidFill>
+            <a:prstDash val="solid"/>
+          </a:ln>
+        </p:spPr>
+      </p:sp>
+      <p:sp>
+        <p:nvSpPr>
+          <p:cNvPr id="49" name="Text 47"/>
+          <p:cNvSpPr txBox="1"/>
+          <p:nvPr/>
+        </p:nvSpPr>
+        <p:spPr>
+          <a:xfrm>
+            <a:off x="4882896" y="2953512"/>
+            <a:ext cx="347472" cy="347472"/>
+          </a:xfrm>
+          <a:prstGeom prst="rect">
+            <a:avLst/>
+          </a:prstGeom>
+          <a:noFill/>
+          <a:ln/>
+        </p:spPr>
+        <p:txBody>
+          <a:bodyPr wrap="square" lIns="0" tIns="0" rIns="0" bIns="0" rtlCol="0" anchor="ctr"/>
+          <a:lstStyle/>
+          <a:p>
+            <a:pPr algn="ctr" indent="0" marL="0">
+              <a:lnSpc>
+                <a:spcPts val="1400"/>
+              </a:lnSpc>
+              <a:buNone/>
+            </a:pPr>
+            <a:r>
+              <a:rPr lang="en-US" sz="1100" b="1" dirty="0">
+                <a:solidFill>
+                  <a:schemeClr val="bg1"/>
+                </a:solidFill>
+              </a:rPr>
+              <a:t>心</a:t>
+            </a:r>
+            <a:endParaRPr lang="en-US" sz="1100" dirty="0"/>
+          </a:p>
+        </p:txBody>
+      </p:sp>
+      <p:sp>
+        <p:nvSpPr>
+          <p:cNvPr id="50" name="Text 48"/>
+          <p:cNvSpPr txBox="1"/>
+          <p:nvPr/>
+        </p:nvSpPr>
+        <p:spPr>
+          <a:xfrm>
+            <a:off x="3922776" y="3273552"/>
+            <a:ext cx="1325880" cy="320040"/>
+          </a:xfrm>
+          <a:prstGeom prst="rect">
+            <a:avLst/>
+          </a:prstGeom>
+          <a:noFill/>
+          <a:ln/>
+        </p:spPr>
+        <p:txBody>
+          <a:bodyPr wrap="square" lIns="0" tIns="0" rIns="0" bIns="0" rtlCol="0" anchor="t"/>
+          <a:lstStyle/>
+          <a:p>
+            <a:pPr indent="0" marL="0">
+              <a:lnSpc>
+                <a:spcPts val="1800"/>
+              </a:lnSpc>
+              <a:buNone/>
+            </a:pPr>
+            <a:r>
+              <a:rPr lang="en-US" sz="1400" b="1" dirty="0">
+                <a:solidFill>
+                  <a:schemeClr val="tx2"/>
+                </a:solidFill>
+              </a:rPr>
+              <a:t>冥想</a:t>
+            </a:r>
+            <a:endParaRPr lang="en-US" sz="1400" dirty="0"/>
+          </a:p>
+        </p:txBody>
+      </p:sp>
+      <p:sp>
+        <p:nvSpPr>
+          <p:cNvPr id="51" name="Text 49"/>
+          <p:cNvSpPr txBox="1"/>
+          <p:nvPr/>
+        </p:nvSpPr>
+        <p:spPr>
+          <a:xfrm>
+            <a:off x="3922776" y="3611880"/>
+            <a:ext cx="1325880" cy="621792"/>
+          </a:xfrm>
+          <a:prstGeom prst="rect">
+            <a:avLst/>
+          </a:prstGeom>
+          <a:noFill/>
+          <a:ln/>
+        </p:spPr>
+        <p:txBody>
+          <a:bodyPr wrap="square" lIns="0" tIns="0" rIns="0" bIns="0" rtlCol="0" anchor="t"/>
+          <a:lstStyle/>
+          <a:p>
+            <a:pPr indent="0" marL="0">
+              <a:lnSpc>
+                <a:spcPts val="1400"/>
+              </a:lnSpc>
+              <a:buNone/>
+            </a:pPr>
+            <a:r>
+              <a:rPr lang="en-US" sz="1100" dirty="0">
+                <a:solidFill>
+                  <a:schemeClr val="tx1"/>
+                </a:solidFill>
+              </a:rPr>
+              <a:t>晨間正念、呼吸法、睡前放鬆</a:t>
+            </a:r>
+            <a:endParaRPr lang="en-US" sz="1100" dirty="0"/>
+          </a:p>
+        </p:txBody>
+      </p:sp>
+      <p:sp>
+        <p:nvSpPr>
+          <p:cNvPr id="52" name="Module 睡眠療癒"/>
+          <p:cNvSpPr/>
+          <p:nvPr/>
+        </p:nvSpPr>
+        <p:spPr>
+          <a:xfrm>
+            <a:off x="5449824" y="2862072"/>
+            <a:ext cx="1554480" cy="1417320"/>
+          </a:xfrm>
+          <a:prstGeom prst="roundRect">
+            <a:avLst>
+              <a:gd name="adj" fmla="val 5161"/>
+            </a:avLst>
+          </a:prstGeom>
+          <a:solidFill>
+            <a:srgbClr val="EEF3EC"/>
+          </a:solidFill>
+          <a:ln w="12700">
+            <a:solidFill>
+              <a:srgbClr val="EEF3EC"/>
+            </a:solidFill>
+            <a:prstDash val="solid"/>
+          </a:ln>
+        </p:spPr>
+      </p:sp>
+      <p:sp>
+        <p:nvSpPr>
+          <p:cNvPr id="53" name="Text 51"/>
+          <p:cNvSpPr txBox="1"/>
+          <p:nvPr/>
+        </p:nvSpPr>
+        <p:spPr>
+          <a:xfrm>
+            <a:off x="5586984" y="2971800"/>
+            <a:ext cx="457200" cy="274320"/>
+          </a:xfrm>
+          <a:prstGeom prst="rect">
+            <a:avLst/>
+          </a:prstGeom>
+          <a:noFill/>
+          <a:ln/>
+        </p:spPr>
+        <p:txBody>
+          <a:bodyPr wrap="square" lIns="0" tIns="0" rIns="0" bIns="0" rtlCol="0" anchor="t"/>
+          <a:lstStyle/>
+          <a:p>
+            <a:pPr indent="0" marL="0">
+              <a:lnSpc>
+                <a:spcPts val="1500"/>
+              </a:lnSpc>
+              <a:buNone/>
+            </a:pPr>
+            <a:r>
+              <a:rPr lang="en-US" sz="1200" b="1" dirty="0">
+                <a:solidFill>
+                  <a:schemeClr val="accent5"/>
+                </a:solidFill>
+              </a:rPr>
+              <a:t>09</a:t>
+            </a:r>
+            <a:endParaRPr lang="en-US" sz="1200" dirty="0"/>
+          </a:p>
+        </p:txBody>
+      </p:sp>
+      <p:sp>
+        <p:nvSpPr>
+          <p:cNvPr id="54" name="Axis 眠"/>
+          <p:cNvSpPr/>
+          <p:nvPr/>
+        </p:nvSpPr>
+        <p:spPr>
+          <a:xfrm>
+            <a:off x="6547104" y="2953512"/>
+            <a:ext cx="347472" cy="347472"/>
+          </a:xfrm>
+          <a:prstGeom prst="ellipse">
+            <a:avLst/>
+          </a:prstGeom>
+          <a:solidFill>
+            <a:srgbClr val="5E6B63"/>
+          </a:solidFill>
+          <a:ln w="12700">
+            <a:solidFill>
+              <a:srgbClr val="5E6B63"/>
+            </a:solidFill>
+            <a:prstDash val="solid"/>
+          </a:ln>
+        </p:spPr>
+      </p:sp>
+      <p:sp>
+        <p:nvSpPr>
+          <p:cNvPr id="55" name="Text 53"/>
+          <p:cNvSpPr txBox="1"/>
+          <p:nvPr/>
+        </p:nvSpPr>
+        <p:spPr>
+          <a:xfrm>
+            <a:off x="6547104" y="2953512"/>
+            <a:ext cx="347472" cy="347472"/>
+          </a:xfrm>
+          <a:prstGeom prst="rect">
+            <a:avLst/>
+          </a:prstGeom>
+          <a:noFill/>
+          <a:ln/>
+        </p:spPr>
+        <p:txBody>
+          <a:bodyPr wrap="square" lIns="0" tIns="0" rIns="0" bIns="0" rtlCol="0" anchor="ctr"/>
+          <a:lstStyle/>
+          <a:p>
+            <a:pPr algn="ctr" indent="0" marL="0">
+              <a:lnSpc>
+                <a:spcPts val="1400"/>
+              </a:lnSpc>
+              <a:buNone/>
+            </a:pPr>
+            <a:r>
+              <a:rPr lang="en-US" sz="1100" b="1" dirty="0">
+                <a:solidFill>
+                  <a:schemeClr val="bg1"/>
+                </a:solidFill>
+              </a:rPr>
+              <a:t>眠</a:t>
+            </a:r>
+            <a:endParaRPr lang="en-US" sz="1100" dirty="0"/>
+          </a:p>
+        </p:txBody>
+      </p:sp>
+      <p:sp>
+        <p:nvSpPr>
+          <p:cNvPr id="56" name="Text 54"/>
+          <p:cNvSpPr txBox="1"/>
+          <p:nvPr/>
+        </p:nvSpPr>
+        <p:spPr>
+          <a:xfrm>
+            <a:off x="5586984" y="3273552"/>
+            <a:ext cx="1325880" cy="320040"/>
+          </a:xfrm>
+          <a:prstGeom prst="rect">
+            <a:avLst/>
+          </a:prstGeom>
+          <a:noFill/>
+          <a:ln/>
+        </p:spPr>
+        <p:txBody>
+          <a:bodyPr wrap="square" lIns="0" tIns="0" rIns="0" bIns="0" rtlCol="0" anchor="t"/>
+          <a:lstStyle/>
+          <a:p>
+            <a:pPr indent="0" marL="0">
+              <a:lnSpc>
+                <a:spcPts val="1800"/>
+              </a:lnSpc>
+              <a:buNone/>
+            </a:pPr>
+            <a:r>
+              <a:rPr lang="en-US" sz="1400" b="1" dirty="0">
+                <a:solidFill>
+                  <a:schemeClr val="tx2"/>
+                </a:solidFill>
+              </a:rPr>
+              <a:t>睡眠療癒</a:t>
+            </a:r>
+            <a:endParaRPr lang="en-US" sz="1400" dirty="0"/>
+          </a:p>
+        </p:txBody>
+      </p:sp>
+      <p:sp>
+        <p:nvSpPr>
+          <p:cNvPr id="57" name="Text 55"/>
+          <p:cNvSpPr txBox="1"/>
+          <p:nvPr/>
+        </p:nvSpPr>
+        <p:spPr>
+          <a:xfrm>
+            <a:off x="5586984" y="3611880"/>
+            <a:ext cx="1325880" cy="621792"/>
+          </a:xfrm>
+          <a:prstGeom prst="rect">
+            <a:avLst/>
+          </a:prstGeom>
+          <a:noFill/>
+          <a:ln/>
+        </p:spPr>
+        <p:txBody>
+          <a:bodyPr wrap="square" lIns="0" tIns="0" rIns="0" bIns="0" rtlCol="0" anchor="t"/>
+          <a:lstStyle/>
+          <a:p>
+            <a:pPr indent="0" marL="0">
+              <a:lnSpc>
+                <a:spcPts val="1400"/>
+              </a:lnSpc>
+              <a:buNone/>
+            </a:pPr>
+            <a:r>
+              <a:rPr lang="en-US" sz="1100" dirty="0">
+                <a:solidFill>
+                  <a:schemeClr val="tx1"/>
+                </a:solidFill>
+              </a:rPr>
+              <a:t>睡眠評估、睡眠環境調整、睡前儀式</a:t>
+            </a:r>
+            <a:endParaRPr lang="en-US" sz="1100" dirty="0"/>
+          </a:p>
+        </p:txBody>
+      </p:sp>
+      <p:sp>
+        <p:nvSpPr>
+          <p:cNvPr id="58" name="Module 減重管理"/>
+          <p:cNvSpPr/>
+          <p:nvPr/>
+        </p:nvSpPr>
+        <p:spPr>
+          <a:xfrm>
+            <a:off x="7114032" y="2862072"/>
+            <a:ext cx="1554480" cy="1417320"/>
+          </a:xfrm>
+          <a:prstGeom prst="roundRect">
+            <a:avLst>
+              <a:gd name="adj" fmla="val 5161"/>
+            </a:avLst>
+          </a:prstGeom>
+          <a:solidFill>
+            <a:srgbClr val="EEF3EC"/>
+          </a:solidFill>
+          <a:ln w="12700">
+            <a:solidFill>
+              <a:srgbClr val="EEF3EC"/>
+            </a:solidFill>
+            <a:prstDash val="solid"/>
+          </a:ln>
+        </p:spPr>
+      </p:sp>
+      <p:sp>
+        <p:nvSpPr>
+          <p:cNvPr id="59" name="Text 57"/>
+          <p:cNvSpPr txBox="1"/>
+          <p:nvPr/>
+        </p:nvSpPr>
+        <p:spPr>
+          <a:xfrm>
+            <a:off x="7251192" y="2971800"/>
+            <a:ext cx="457200" cy="274320"/>
+          </a:xfrm>
+          <a:prstGeom prst="rect">
+            <a:avLst/>
+          </a:prstGeom>
+          <a:noFill/>
+          <a:ln/>
+        </p:spPr>
+        <p:txBody>
+          <a:bodyPr wrap="square" lIns="0" tIns="0" rIns="0" bIns="0" rtlCol="0" anchor="t"/>
+          <a:lstStyle/>
+          <a:p>
+            <a:pPr indent="0" marL="0">
+              <a:lnSpc>
+                <a:spcPts val="1500"/>
+              </a:lnSpc>
+              <a:buNone/>
+            </a:pPr>
+            <a:r>
+              <a:rPr lang="en-US" sz="1200" b="1" dirty="0">
+                <a:solidFill>
+                  <a:schemeClr val="accent5"/>
+                </a:solidFill>
+              </a:rPr>
+              <a:t>10</a:t>
+            </a:r>
+            <a:endParaRPr lang="en-US" sz="1200" dirty="0"/>
+          </a:p>
+        </p:txBody>
+      </p:sp>
+      <p:sp>
+        <p:nvSpPr>
+          <p:cNvPr id="60" name="Axis 身"/>
+          <p:cNvSpPr/>
+          <p:nvPr/>
+        </p:nvSpPr>
+        <p:spPr>
+          <a:xfrm>
+            <a:off x="8211312" y="2953512"/>
+            <a:ext cx="347472" cy="347472"/>
+          </a:xfrm>
+          <a:prstGeom prst="ellipse">
+            <a:avLst/>
+          </a:prstGeom>
+          <a:solidFill>
+            <a:srgbClr val="2F4A3A"/>
+          </a:solidFill>
+          <a:ln w="12700">
+            <a:solidFill>
+              <a:srgbClr val="2F4A3A"/>
+            </a:solidFill>
+            <a:prstDash val="solid"/>
+          </a:ln>
+        </p:spPr>
+      </p:sp>
+      <p:sp>
+        <p:nvSpPr>
+          <p:cNvPr id="61" name="Text 59"/>
+          <p:cNvSpPr txBox="1"/>
+          <p:nvPr/>
+        </p:nvSpPr>
+        <p:spPr>
+          <a:xfrm>
+            <a:off x="8211312" y="2953512"/>
+            <a:ext cx="347472" cy="347472"/>
+          </a:xfrm>
+          <a:prstGeom prst="rect">
+            <a:avLst/>
+          </a:prstGeom>
+          <a:noFill/>
+          <a:ln/>
+        </p:spPr>
+        <p:txBody>
+          <a:bodyPr wrap="square" lIns="0" tIns="0" rIns="0" bIns="0" rtlCol="0" anchor="ctr"/>
+          <a:lstStyle/>
+          <a:p>
+            <a:pPr algn="ctr" indent="0" marL="0">
+              <a:lnSpc>
+                <a:spcPts val="1400"/>
+              </a:lnSpc>
+              <a:buNone/>
+            </a:pPr>
+            <a:r>
+              <a:rPr lang="en-US" sz="1100" b="1" dirty="0">
+                <a:solidFill>
+                  <a:schemeClr val="bg1"/>
+                </a:solidFill>
+              </a:rPr>
+              <a:t>身</a:t>
+            </a:r>
+            <a:endParaRPr lang="en-US" sz="1100" dirty="0"/>
+          </a:p>
+        </p:txBody>
+      </p:sp>
+      <p:sp>
+        <p:nvSpPr>
+          <p:cNvPr id="62" name="Text 60"/>
+          <p:cNvSpPr txBox="1"/>
+          <p:nvPr/>
+        </p:nvSpPr>
+        <p:spPr>
+          <a:xfrm>
+            <a:off x="7251192" y="3273552"/>
+            <a:ext cx="1325880" cy="320040"/>
+          </a:xfrm>
+          <a:prstGeom prst="rect">
+            <a:avLst/>
+          </a:prstGeom>
+          <a:noFill/>
+          <a:ln/>
+        </p:spPr>
+        <p:txBody>
+          <a:bodyPr wrap="square" lIns="0" tIns="0" rIns="0" bIns="0" rtlCol="0" anchor="t"/>
+          <a:lstStyle/>
+          <a:p>
+            <a:pPr indent="0" marL="0">
+              <a:lnSpc>
+                <a:spcPts val="1800"/>
+              </a:lnSpc>
+              <a:buNone/>
+            </a:pPr>
+            <a:r>
+              <a:rPr lang="en-US" sz="1400" b="1" dirty="0">
+                <a:solidFill>
+                  <a:schemeClr val="tx2"/>
+                </a:solidFill>
+              </a:rPr>
+              <a:t>減重管理</a:t>
+            </a:r>
+            <a:endParaRPr lang="en-US" sz="1400" dirty="0"/>
+          </a:p>
+        </p:txBody>
+      </p:sp>
+      <p:sp>
+        <p:nvSpPr>
+          <p:cNvPr id="63" name="Text 61"/>
+          <p:cNvSpPr txBox="1"/>
+          <p:nvPr/>
+        </p:nvSpPr>
+        <p:spPr>
+          <a:xfrm>
+            <a:off x="7251192" y="3611880"/>
+            <a:ext cx="1325880" cy="621792"/>
+          </a:xfrm>
+          <a:prstGeom prst="rect">
+            <a:avLst/>
+          </a:prstGeom>
+          <a:noFill/>
+          <a:ln/>
+        </p:spPr>
+        <p:txBody>
+          <a:bodyPr wrap="square" lIns="0" tIns="0" rIns="0" bIns="0" rtlCol="0" anchor="t"/>
+          <a:lstStyle/>
+          <a:p>
+            <a:pPr indent="0" marL="0">
+              <a:lnSpc>
+                <a:spcPts val="1400"/>
+              </a:lnSpc>
+              <a:buNone/>
+            </a:pPr>
+            <a:r>
+              <a:rPr lang="en-US" sz="1100" dirty="0">
+                <a:solidFill>
+                  <a:schemeClr val="tx1"/>
+                </a:solidFill>
+              </a:rPr>
+              <a:t>體組成量測、飲食計畫、結業後 30 天追蹤</a:t>
+            </a:r>
+            <a:endParaRPr lang="en-US" sz="1100" dirty="0"/>
+          </a:p>
+        </p:txBody>
+      </p:sp>
+      <p:sp>
+        <p:nvSpPr>
+          <p:cNvPr id="64" name="Text 62"/>
+          <p:cNvSpPr txBox="1"/>
+          <p:nvPr/>
+        </p:nvSpPr>
+        <p:spPr>
+          <a:xfrm>
+            <a:off x="457200" y="4416552"/>
+            <a:ext cx="8229600" cy="274320"/>
+          </a:xfrm>
+          <a:prstGeom prst="rect">
+            <a:avLst/>
+          </a:prstGeom>
+          <a:noFill/>
+          <a:ln/>
+        </p:spPr>
+        <p:txBody>
+          <a:bodyPr wrap="square" lIns="0" tIns="0" rIns="0" bIns="0" rtlCol="0" anchor="t"/>
+          <a:lstStyle/>
+          <a:p>
+            <a:pPr indent="0" marL="0">
+              <a:lnSpc>
+                <a:spcPts val="1300"/>
+              </a:lnSpc>
+              <a:buNone/>
+            </a:pPr>
+            <a:r>
+              <a:rPr lang="en-US" sz="1000" i="1" dirty="0">
                 <a:solidFill>
                   <a:schemeClr val="accent3"/>
                 </a:solidFill>
               </a:rPr>
-              <a:t>損益平衡入住率約 32.5%</a:t>
-            </a:r>
-            <a:endParaRPr lang="en-US" sz="1300" dirty="0"/>
+              <a:t>康復評估、血壓血糖量測等由合格專業人員執行；涉及醫療的項目與合格醫療機構合作。</a:t>
+            </a:r>
+            <a:endParaRPr lang="en-US" sz="1000" dirty="0"/>
           </a:p>
         </p:txBody>
       </p:sp>

--- a/康復療癒酒店整體設計規劃.pptx
+++ b/康復療癒酒店整體設計規劃.pptx
@@ -17,9 +17,10 @@
     <p:sldId id="265" r:id="rId11"/>
     <p:sldId id="266" r:id="rId12"/>
     <p:sldId id="267" r:id="rId13"/>
+    <p:sldId id="268" r:id="rId14"/>
   </p:sldIdLst>
   <p:notesMasterIdLst>
-    <p:notesMasterId r:id="rId14"/>
+    <p:notesMasterId r:id="rId15"/>
   </p:notesMasterIdLst>
   <p:sldSz cx="9144000" cy="5143500"/>
   <p:notesSz cx="5143500" cy="9144000"/>
@@ -118,40 +119,41 @@
   <p:extLst>
     <p:ext uri="{521415D9-36F7-43E2-AB2F-B90AF26B5E84}">
       <p14:sectionLst xmlns:p14="http://schemas.microsoft.com/office/powerpoint/2010/main">
-        <p14:section name="開場" id="{eeb361df-8729-6cf6-1289-02bc3550e254}">
+        <p14:section name="開場" id="{44cc793a-0c94-3fb5-0a6d-48a4f99adfd6}">
           <p14:sldIdLst>
             <p14:sldId id="256"/>
           </p14:sldIdLst>
         </p14:section>
-        <p14:section name="定位" id="{77af16d0-a66a-66ee-919a-7416422463c5}">
+        <p14:section name="定位" id="{46d26de9-7962-5d0c-2fa7-a46fd0884c42}">
           <p14:sldIdLst>
             <p14:sldId id="257"/>
             <p14:sldId id="258"/>
             <p14:sldId id="259"/>
           </p14:sldIdLst>
         </p14:section>
-        <p14:section name="空間與服務" id="{0cd7e448-0afc-3d1f-c91c-38510a793257}">
+        <p14:section name="空間與服務" id="{c654ee90-74c5-2333-f2c6-cadd9be1e011}">
           <p14:sldIdLst>
             <p14:sldId id="260"/>
             <p14:sldId id="261"/>
           </p14:sldIdLst>
         </p14:section>
-        <p14:section name="品牌與客群" id="{f0b65bdb-b3f3-99fe-cf4b-edf90bd24e48}">
+        <p14:section name="品牌與客群" id="{e77aebea-9f6d-8711-51a6-242e82e9556e}">
           <p14:sldIdLst>
             <p14:sldId id="262"/>
             <p14:sldId id="263"/>
           </p14:sldIdLst>
         </p14:section>
-        <p14:section name="療程設計" id="{f8925866-a920-8fab-e3c7-ac5d5a186ee3}">
+        <p14:section name="療程設計" id="{fdf08d86-e546-7fda-e54e-037c78c9ec51}">
           <p14:sldIdLst>
             <p14:sldId id="264"/>
             <p14:sldId id="265"/>
             <p14:sldId id="266"/>
+            <p14:sldId id="267"/>
           </p14:sldIdLst>
         </p14:section>
-        <p14:section name="合作價值" id="{b5770f3a-f332-6b32-e1ff-5c1c0407c50f}">
+        <p14:section name="合作價值" id="{4ebc06b0-b144-a7b7-afc9-808214474af6}">
           <p14:sldIdLst>
-            <p14:sldId id="267"/>
+            <p14:sldId id="268"/>
           </p14:sldIdLst>
         </p14:section>
       </p14:sectionLst>
@@ -558,7 +560,7 @@
           <a:p>
             <a:r>
               <a:rPr lang="en-US" dirty="0"/>
-              <a:t>本簡報整理康復療癒酒店的定位、空間、服務、產品、成本、損益、合規與開業順序。</a:t>
+              <a:t>本提案整理康復療癒酒店的定位、空間、服務、品牌、客群、十大療癒模組、山水地景、個人化流程與五天四夜行程。</a:t>
             </a:r>
             <a:endParaRPr lang="en-US" dirty="0"/>
           </a:p>
@@ -846,6 +848,94 @@
             <a:fld id="{F7021451-1387-4CA6-816F-3879F97B5CBC}" type="slidenum">
               <a:rPr lang="en-US"/>
               <a:t>12</a:t>
+            </a:fld>
+            <a:endParaRPr lang="en-US"/>
+          </a:p>
+        </p:txBody>
+      </p:sp>
+    </p:spTree>
+    <p:extLst>
+      <p:ext uri="{BB962C8B-B14F-4D97-AF65-F5344CB8AC3E}">
+        <p14:creationId xmlns:p14="http://schemas.microsoft.com/office/powerpoint/2010/main" val="1024086991"/>
+      </p:ext>
+    </p:extLst>
+  </p:cSld>
+  <p:clrMapOvr>
+    <a:masterClrMapping/>
+  </p:clrMapOvr>
+</p:notes>
+</file>
+
+<file path=ppt/notesSlides/notesSlide13.xml><?xml version="1.0" encoding="utf-8"?>
+<p:notes xmlns:a="http://schemas.openxmlformats.org/drawingml/2006/main" xmlns:r="http://schemas.openxmlformats.org/officeDocument/2006/relationships" xmlns:p="http://schemas.openxmlformats.org/presentationml/2006/main">
+  <p:cSld>
+    <p:spTree>
+      <p:nvGrpSpPr>
+        <p:cNvPr id="1" name=""/>
+        <p:cNvGrpSpPr/>
+        <p:nvPr/>
+      </p:nvGrpSpPr>
+      <p:grpSpPr>
+        <a:xfrm>
+          <a:off x="0" y="0"/>
+          <a:ext cx="0" cy="0"/>
+          <a:chOff x="0" y="0"/>
+          <a:chExt cx="0" cy="0"/>
+        </a:xfrm>
+      </p:grpSpPr>
+      <p:sp>
+        <p:nvSpPr>
+          <p:cNvPr id="2" name="Slide Image Placeholder 1"/>
+          <p:cNvSpPr>
+            <a:spLocks noGrp="1" noRot="1" noChangeAspect="1"/>
+          </p:cNvSpPr>
+          <p:nvPr>
+            <p:ph type="sldImg"/>
+          </p:nvPr>
+        </p:nvSpPr>
+        <p:spPr/>
+      </p:sp>
+      <p:sp>
+        <p:nvSpPr>
+          <p:cNvPr id="3" name="Notes Placeholder 2"/>
+          <p:cNvSpPr>
+            <a:spLocks noGrp="1"/>
+          </p:cNvSpPr>
+          <p:nvPr>
+            <p:ph type="body" idx="1"/>
+          </p:nvPr>
+        </p:nvSpPr>
+        <p:spPr/>
+        <p:txBody>
+          <a:bodyPr/>
+          <a:lstStyle/>
+          <a:p>
+            <a:r>
+              <a:rPr lang="en-US" dirty="0"/>
+              <a:t/>
+            </a:r>
+            <a:endParaRPr lang="en-US" dirty="0"/>
+          </a:p>
+        </p:txBody>
+      </p:sp>
+      <p:sp>
+        <p:nvSpPr>
+          <p:cNvPr id="4" name="Slide Number Placeholder 3"/>
+          <p:cNvSpPr>
+            <a:spLocks noGrp="1"/>
+          </p:cNvSpPr>
+          <p:nvPr>
+            <p:ph type="sldNum" sz="quarter" idx="10"/>
+          </p:nvPr>
+        </p:nvSpPr>
+        <p:spPr/>
+        <p:txBody>
+          <a:bodyPr/>
+          <a:lstStyle/>
+          <a:p>
+            <a:fld id="{F7021451-1387-4CA6-816F-3879F97B5CBC}" type="slidenum">
+              <a:rPr lang="en-US"/>
+              <a:t>13</a:t>
             </a:fld>
             <a:endParaRPr lang="en-US"/>
           </a:p>
@@ -2427,7 +2517,7 @@
                   <a:schemeClr val="tx2"/>
                 </a:solidFill>
               </a:rPr>
-              <a:t>個人化方式：前測 → 後測 → 五日健康報告</a:t>
+              <a:t>山水地景 × 十療：相輔相乘</a:t>
             </a:r>
             <a:endParaRPr lang="en-US" sz="2800" dirty="0"/>
           </a:p>
@@ -2435,14 +2525,80 @@
       </p:sp>
       <p:sp>
         <p:nvSpPr>
-          <p:cNvPr id="3" name="入住前測 circle"/>
+          <p:cNvPr id="3" name="Text 1"/>
+          <p:cNvSpPr txBox="1"/>
+          <p:nvPr/>
+        </p:nvSpPr>
+        <p:spPr>
+          <a:xfrm>
+            <a:off x="457200" y="914400"/>
+            <a:ext cx="8229600" cy="320040"/>
+          </a:xfrm>
+          <a:prstGeom prst="rect">
+            <a:avLst/>
+          </a:prstGeom>
+          <a:noFill/>
+          <a:ln/>
+        </p:spPr>
+        <p:txBody>
+          <a:bodyPr wrap="square" lIns="0" tIns="0" rIns="0" bIns="0" rtlCol="0" anchor="t"/>
+          <a:lstStyle/>
+          <a:p>
+            <a:pPr indent="0" marL="0">
+              <a:lnSpc>
+                <a:spcPts val="1600"/>
+              </a:lnSpc>
+              <a:buNone/>
+            </a:pPr>
+            <a:r>
+              <a:rPr lang="en-US" sz="1300" dirty="0">
+                <a:solidFill>
+                  <a:schemeClr val="accent5"/>
+                </a:solidFill>
+              </a:rPr>
+              <a:t>地景提供療癒場域，十療提供方法——兩者結合，效果與體驗都放大</a:t>
+            </a:r>
+            <a:endParaRPr lang="en-US" sz="1300" dirty="0"/>
+          </a:p>
+        </p:txBody>
+      </p:sp>
+      <p:sp>
+        <p:nvSpPr>
+          <p:cNvPr id="4" name="山・山居療癒"/>
           <p:cNvSpPr/>
           <p:nvPr/>
         </p:nvSpPr>
         <p:spPr>
           <a:xfrm>
-            <a:off x="1005840" y="1234440"/>
-            <a:ext cx="777240" cy="777240"/>
+            <a:off x="457200" y="1325880"/>
+            <a:ext cx="4023360" cy="2514600"/>
+          </a:xfrm>
+          <a:prstGeom prst="roundRect">
+            <a:avLst>
+              <a:gd name="adj" fmla="val 2909"/>
+            </a:avLst>
+          </a:prstGeom>
+          <a:solidFill>
+            <a:srgbClr val="EEF3EC"/>
+          </a:solidFill>
+          <a:ln w="12700">
+            <a:solidFill>
+              <a:srgbClr val="EEF3EC"/>
+            </a:solidFill>
+            <a:prstDash val="solid"/>
+          </a:ln>
+        </p:spPr>
+      </p:sp>
+      <p:sp>
+        <p:nvSpPr>
+          <p:cNvPr id="5" name="山・山居療癒 circle"/>
+          <p:cNvSpPr/>
+          <p:nvPr/>
+        </p:nvSpPr>
+        <p:spPr>
+          <a:xfrm>
+            <a:off x="685800" y="1463040"/>
+            <a:ext cx="548640" cy="548640"/>
           </a:xfrm>
           <a:prstGeom prst="ellipse">
             <a:avLst/>
@@ -2460,7 +2616,7 @@
       </p:sp>
       <p:pic>
         <p:nvPicPr>
-          <p:cNvPr id="4" name="入住前測 icon" descr="入住前測">    </p:cNvPr>
+          <p:cNvPr id="6" name="山・山居療癒 icon" descr="山・山居療癒">    </p:cNvPr>
           <p:cNvPicPr>
             <a:picLocks noChangeAspect="1"/>
           </p:cNvPicPr>
@@ -2474,48 +2630,24 @@
         </p:blipFill>
         <p:spPr>
           <a:xfrm>
-            <a:off x="1200150" y="1428750"/>
-            <a:ext cx="388620" cy="388620"/>
+            <a:off x="822960" y="1600200"/>
+            <a:ext cx="274320" cy="274320"/>
           </a:xfrm>
           <a:prstGeom prst="rect">
             <a:avLst/>
           </a:prstGeom>
         </p:spPr>
       </p:pic>
-      <p:pic>
-        <p:nvPicPr>
-          <p:cNvPr id="5" name="Arrow 1" descr="next">    </p:cNvPr>
-          <p:cNvPicPr>
-            <a:picLocks noChangeAspect="1"/>
-          </p:cNvPicPr>
-          <p:nvPr/>
-        </p:nvPicPr>
-        <p:blipFill>
-          <a:blip r:embed="rId2"/>
-          <a:stretch>
-            <a:fillRect/>
-          </a:stretch>
-        </p:blipFill>
-        <p:spPr>
-          <a:xfrm>
-            <a:off x="2148840" y="1463040"/>
-            <a:ext cx="320040" cy="320040"/>
-          </a:xfrm>
-          <a:prstGeom prst="rect">
-            <a:avLst/>
-          </a:prstGeom>
-        </p:spPr>
-      </p:pic>
-      <p:sp>
-        <p:nvSpPr>
-          <p:cNvPr id="6" name="Text 2"/>
+      <p:sp>
+        <p:nvSpPr>
+          <p:cNvPr id="7" name="Text 4"/>
           <p:cNvSpPr txBox="1"/>
           <p:nvPr/>
         </p:nvSpPr>
         <p:spPr>
           <a:xfrm>
-            <a:off x="457200" y="2148840"/>
-            <a:ext cx="1874520" cy="365760"/>
+            <a:off x="1371600" y="1572768"/>
+            <a:ext cx="2926080" cy="365760"/>
           </a:xfrm>
           <a:prstGeom prst="rect">
             <a:avLst/>
@@ -2527,76 +2659,39 @@
           <a:bodyPr wrap="square" lIns="0" tIns="0" rIns="0" bIns="0" rtlCol="0" anchor="t"/>
           <a:lstStyle/>
           <a:p>
-            <a:pPr algn="ctr" indent="0" marL="0">
-              <a:lnSpc>
-                <a:spcPts val="2000"/>
-              </a:lnSpc>
-              <a:buNone/>
-            </a:pPr>
-            <a:r>
-              <a:rPr lang="en-US" sz="1600" b="1" dirty="0">
+            <a:pPr indent="0" marL="0">
+              <a:lnSpc>
+                <a:spcPts val="2100"/>
+              </a:lnSpc>
+              <a:buNone/>
+            </a:pPr>
+            <a:r>
+              <a:rPr lang="en-US" sz="1700" b="1" dirty="0">
                 <a:solidFill>
                   <a:schemeClr val="tx2"/>
                 </a:solidFill>
               </a:rPr>
-              <a:t>入住前測</a:t>
-            </a:r>
-            <a:endParaRPr lang="en-US" sz="1600" dirty="0"/>
-          </a:p>
-        </p:txBody>
-      </p:sp>
-      <p:sp>
-        <p:nvSpPr>
-          <p:cNvPr id="7" name="Text 3"/>
-          <p:cNvSpPr txBox="1"/>
-          <p:nvPr/>
-        </p:nvSpPr>
-        <p:spPr>
-          <a:xfrm>
-            <a:off x="548640" y="2560320"/>
-            <a:ext cx="1691640" cy="777240"/>
-          </a:xfrm>
-          <a:prstGeom prst="rect">
-            <a:avLst/>
-          </a:prstGeom>
-          <a:noFill/>
-          <a:ln/>
-        </p:spPr>
-        <p:txBody>
-          <a:bodyPr wrap="square" lIns="0" tIns="0" rIns="0" bIns="0" rtlCol="0" anchor="t"/>
-          <a:lstStyle/>
-          <a:p>
-            <a:pPr indent="0" marL="0">
-              <a:lnSpc>
-                <a:spcPts val="1500"/>
-              </a:lnSpc>
-              <a:buNone/>
-            </a:pPr>
-            <a:r>
-              <a:rPr lang="en-US" sz="1200" dirty="0">
-                <a:solidFill>
-                  <a:schemeClr val="tx1"/>
-                </a:solidFill>
-              </a:rPr>
-              <a:t>血壓、血糖、體組成、睡眠問卷、九大體質判定</a:t>
-            </a:r>
-            <a:endParaRPr lang="en-US" sz="1200" dirty="0"/>
-          </a:p>
-        </p:txBody>
-      </p:sp>
-      <p:sp>
-        <p:nvSpPr>
-          <p:cNvPr id="8" name="配對組合 circle"/>
+              <a:t>山・山居療癒</a:t>
+            </a:r>
+            <a:endParaRPr lang="en-US" sz="1700" dirty="0"/>
+          </a:p>
+        </p:txBody>
+      </p:sp>
+      <p:sp>
+        <p:nvSpPr>
+          <p:cNvPr id="8" name="山・山居療癒 tag 1"/>
           <p:cNvSpPr/>
           <p:nvPr/>
         </p:nvSpPr>
         <p:spPr>
           <a:xfrm>
-            <a:off x="3108960" y="1234440"/>
-            <a:ext cx="777240" cy="777240"/>
-          </a:xfrm>
-          <a:prstGeom prst="ellipse">
-            <a:avLst/>
+            <a:off x="685800" y="2194560"/>
+            <a:ext cx="1005840" cy="292608"/>
+          </a:xfrm>
+          <a:prstGeom prst="roundRect">
+            <a:avLst>
+              <a:gd name="adj" fmla="val 50000"/>
+            </a:avLst>
           </a:prstGeom>
           <a:solidFill>
             <a:srgbClr val="2F4A3A"/>
@@ -2609,145 +2704,99 @@
           </a:ln>
         </p:spPr>
       </p:sp>
-      <p:pic>
-        <p:nvPicPr>
-          <p:cNvPr id="9" name="配對組合 icon" descr="配對組合">    </p:cNvPr>
-          <p:cNvPicPr>
-            <a:picLocks noChangeAspect="1"/>
-          </p:cNvPicPr>
-          <p:nvPr/>
-        </p:nvPicPr>
-        <p:blipFill>
-          <a:blip r:embed="rId3"/>
-          <a:stretch>
-            <a:fillRect/>
-          </a:stretch>
-        </p:blipFill>
-        <p:spPr>
-          <a:xfrm>
-            <a:off x="3303270" y="1428750"/>
-            <a:ext cx="388620" cy="388620"/>
-          </a:xfrm>
-          <a:prstGeom prst="rect">
-            <a:avLst/>
-          </a:prstGeom>
-        </p:spPr>
-      </p:pic>
-      <p:pic>
-        <p:nvPicPr>
-          <p:cNvPr id="10" name="Arrow 2" descr="next">    </p:cNvPr>
-          <p:cNvPicPr>
-            <a:picLocks noChangeAspect="1"/>
-          </p:cNvPicPr>
-          <p:nvPr/>
-        </p:nvPicPr>
-        <p:blipFill>
-          <a:blip r:embed="rId4"/>
-          <a:stretch>
-            <a:fillRect/>
-          </a:stretch>
-        </p:blipFill>
-        <p:spPr>
-          <a:xfrm>
-            <a:off x="4251960" y="1463040"/>
-            <a:ext cx="320040" cy="320040"/>
-          </a:xfrm>
-          <a:prstGeom prst="rect">
-            <a:avLst/>
-          </a:prstGeom>
-        </p:spPr>
-      </p:pic>
-      <p:sp>
-        <p:nvSpPr>
-          <p:cNvPr id="11" name="Text 5"/>
+      <p:sp>
+        <p:nvSpPr>
+          <p:cNvPr id="9" name="Text 6"/>
           <p:cNvSpPr txBox="1"/>
           <p:nvPr/>
         </p:nvSpPr>
         <p:spPr>
           <a:xfrm>
-            <a:off x="2560320" y="2148840"/>
-            <a:ext cx="1874520" cy="365760"/>
-          </a:xfrm>
-          <a:prstGeom prst="rect">
-            <a:avLst/>
-          </a:prstGeom>
-          <a:noFill/>
-          <a:ln/>
-        </p:spPr>
-        <p:txBody>
-          <a:bodyPr wrap="square" lIns="0" tIns="0" rIns="0" bIns="0" rtlCol="0" anchor="t"/>
+            <a:off x="685800" y="2194560"/>
+            <a:ext cx="1005840" cy="292608"/>
+          </a:xfrm>
+          <a:prstGeom prst="rect">
+            <a:avLst/>
+          </a:prstGeom>
+          <a:noFill/>
+          <a:ln/>
+        </p:spPr>
+        <p:txBody>
+          <a:bodyPr wrap="square" lIns="0" tIns="0" rIns="0" bIns="0" rtlCol="0" anchor="ctr"/>
           <a:lstStyle/>
           <a:p>
             <a:pPr algn="ctr" indent="0" marL="0">
               <a:lnSpc>
-                <a:spcPts val="2000"/>
-              </a:lnSpc>
-              <a:buNone/>
-            </a:pPr>
-            <a:r>
-              <a:rPr lang="en-US" sz="1600" b="1" dirty="0">
-                <a:solidFill>
-                  <a:schemeClr val="tx2"/>
-                </a:solidFill>
-              </a:rPr>
-              <a:t>配對組合</a:t>
-            </a:r>
-            <a:endParaRPr lang="en-US" sz="1600" dirty="0"/>
-          </a:p>
-        </p:txBody>
-      </p:sp>
-      <p:sp>
-        <p:nvSpPr>
-          <p:cNvPr id="12" name="Text 6"/>
+                <a:spcPts val="1400"/>
+              </a:lnSpc>
+              <a:buNone/>
+            </a:pPr>
+            <a:r>
+              <a:rPr lang="en-US" sz="1100" b="1" dirty="0">
+                <a:solidFill>
+                  <a:schemeClr val="bg1"/>
+                </a:solidFill>
+              </a:rPr>
+              <a:t>自然療癒</a:t>
+            </a:r>
+            <a:endParaRPr lang="en-US" sz="1100" dirty="0"/>
+          </a:p>
+        </p:txBody>
+      </p:sp>
+      <p:sp>
+        <p:nvSpPr>
+          <p:cNvPr id="10" name="Text 7"/>
           <p:cNvSpPr txBox="1"/>
           <p:nvPr/>
         </p:nvSpPr>
         <p:spPr>
           <a:xfrm>
-            <a:off x="2651760" y="2560320"/>
-            <a:ext cx="1691640" cy="777240"/>
-          </a:xfrm>
-          <a:prstGeom prst="rect">
-            <a:avLst/>
-          </a:prstGeom>
-          <a:noFill/>
-          <a:ln/>
-        </p:spPr>
-        <p:txBody>
-          <a:bodyPr wrap="square" lIns="0" tIns="0" rIns="0" bIns="0" rtlCol="0" anchor="t"/>
+            <a:off x="1828800" y="2194560"/>
+            <a:ext cx="2514600" cy="292608"/>
+          </a:xfrm>
+          <a:prstGeom prst="rect">
+            <a:avLst/>
+          </a:prstGeom>
+          <a:noFill/>
+          <a:ln/>
+        </p:spPr>
+        <p:txBody>
+          <a:bodyPr wrap="square" lIns="0" tIns="0" rIns="0" bIns="0" rtlCol="0" anchor="ctr"/>
           <a:lstStyle/>
           <a:p>
             <a:pPr indent="0" marL="0">
               <a:lnSpc>
-                <a:spcPts val="1500"/>
-              </a:lnSpc>
-              <a:buNone/>
-            </a:pPr>
-            <a:r>
-              <a:rPr lang="en-US" sz="1200" dirty="0">
+                <a:spcPts val="1600"/>
+              </a:lnSpc>
+              <a:buNone/>
+            </a:pPr>
+            <a:r>
+              <a:rPr lang="en-US" sz="1300" dirty="0">
                 <a:solidFill>
                   <a:schemeClr val="tx1"/>
                 </a:solidFill>
               </a:rPr>
-              <a:t>依評估結果，從十大模組配對個人化療程</a:t>
-            </a:r>
-            <a:endParaRPr lang="en-US" sz="1200" dirty="0"/>
-          </a:p>
-        </p:txBody>
-      </p:sp>
-      <p:sp>
-        <p:nvSpPr>
-          <p:cNvPr id="13" name="五日療程 circle"/>
+              <a:t>森林步道、林間太極與八段錦</a:t>
+            </a:r>
+            <a:endParaRPr lang="en-US" sz="1300" dirty="0"/>
+          </a:p>
+        </p:txBody>
+      </p:sp>
+      <p:sp>
+        <p:nvSpPr>
+          <p:cNvPr id="11" name="山・山居療癒 tag 2"/>
           <p:cNvSpPr/>
           <p:nvPr/>
         </p:nvSpPr>
         <p:spPr>
           <a:xfrm>
-            <a:off x="5212080" y="1234440"/>
-            <a:ext cx="777240" cy="777240"/>
-          </a:xfrm>
-          <a:prstGeom prst="ellipse">
-            <a:avLst/>
+            <a:off x="685800" y="2596896"/>
+            <a:ext cx="1005840" cy="292608"/>
+          </a:xfrm>
+          <a:prstGeom prst="roundRect">
+            <a:avLst>
+              <a:gd name="adj" fmla="val 50000"/>
+            </a:avLst>
           </a:prstGeom>
           <a:solidFill>
             <a:srgbClr val="2F4A3A"/>
@@ -2760,273 +2809,98 @@
           </a:ln>
         </p:spPr>
       </p:sp>
-      <p:pic>
-        <p:nvPicPr>
-          <p:cNvPr id="14" name="五日療程 icon" descr="五日療程">    </p:cNvPr>
-          <p:cNvPicPr>
-            <a:picLocks noChangeAspect="1"/>
-          </p:cNvPicPr>
-          <p:nvPr/>
-        </p:nvPicPr>
-        <p:blipFill>
-          <a:blip r:embed="rId5"/>
-          <a:stretch>
-            <a:fillRect/>
-          </a:stretch>
-        </p:blipFill>
-        <p:spPr>
-          <a:xfrm>
-            <a:off x="5406390" y="1428750"/>
-            <a:ext cx="388620" cy="388620"/>
-          </a:xfrm>
-          <a:prstGeom prst="rect">
-            <a:avLst/>
-          </a:prstGeom>
-        </p:spPr>
-      </p:pic>
-      <p:pic>
-        <p:nvPicPr>
-          <p:cNvPr id="15" name="Arrow 3" descr="next">    </p:cNvPr>
-          <p:cNvPicPr>
-            <a:picLocks noChangeAspect="1"/>
-          </p:cNvPicPr>
-          <p:nvPr/>
-        </p:nvPicPr>
-        <p:blipFill>
-          <a:blip r:embed="rId6"/>
-          <a:stretch>
-            <a:fillRect/>
-          </a:stretch>
-        </p:blipFill>
-        <p:spPr>
-          <a:xfrm>
-            <a:off x="6355080" y="1463040"/>
-            <a:ext cx="320040" cy="320040"/>
-          </a:xfrm>
-          <a:prstGeom prst="rect">
-            <a:avLst/>
-          </a:prstGeom>
-        </p:spPr>
-      </p:pic>
-      <p:sp>
-        <p:nvSpPr>
-          <p:cNvPr id="16" name="Text 8"/>
+      <p:sp>
+        <p:nvSpPr>
+          <p:cNvPr id="12" name="Text 9"/>
           <p:cNvSpPr txBox="1"/>
           <p:nvPr/>
         </p:nvSpPr>
         <p:spPr>
           <a:xfrm>
-            <a:off x="4663440" y="2148840"/>
-            <a:ext cx="1874520" cy="365760"/>
-          </a:xfrm>
-          <a:prstGeom prst="rect">
-            <a:avLst/>
-          </a:prstGeom>
-          <a:noFill/>
-          <a:ln/>
-        </p:spPr>
-        <p:txBody>
-          <a:bodyPr wrap="square" lIns="0" tIns="0" rIns="0" bIns="0" rtlCol="0" anchor="t"/>
+            <a:off x="685800" y="2596896"/>
+            <a:ext cx="1005840" cy="292608"/>
+          </a:xfrm>
+          <a:prstGeom prst="rect">
+            <a:avLst/>
+          </a:prstGeom>
+          <a:noFill/>
+          <a:ln/>
+        </p:spPr>
+        <p:txBody>
+          <a:bodyPr wrap="square" lIns="0" tIns="0" rIns="0" bIns="0" rtlCol="0" anchor="ctr"/>
           <a:lstStyle/>
           <a:p>
             <a:pPr algn="ctr" indent="0" marL="0">
               <a:lnSpc>
-                <a:spcPts val="2000"/>
-              </a:lnSpc>
-              <a:buNone/>
-            </a:pPr>
-            <a:r>
-              <a:rPr lang="en-US" sz="1600" b="1" dirty="0">
-                <a:solidFill>
-                  <a:schemeClr val="tx2"/>
-                </a:solidFill>
-              </a:rPr>
-              <a:t>五日療程</a:t>
-            </a:r>
-            <a:endParaRPr lang="en-US" sz="1600" dirty="0"/>
-          </a:p>
-        </p:txBody>
-      </p:sp>
-      <p:sp>
-        <p:nvSpPr>
-          <p:cNvPr id="17" name="Text 9"/>
+                <a:spcPts val="1400"/>
+              </a:lnSpc>
+              <a:buNone/>
+            </a:pPr>
+            <a:r>
+              <a:rPr lang="en-US" sz="1100" b="1" dirty="0">
+                <a:solidFill>
+                  <a:schemeClr val="bg1"/>
+                </a:solidFill>
+              </a:rPr>
+              <a:t>音療</a:t>
+            </a:r>
+            <a:endParaRPr lang="en-US" sz="1100" dirty="0"/>
+          </a:p>
+        </p:txBody>
+      </p:sp>
+      <p:sp>
+        <p:nvSpPr>
+          <p:cNvPr id="13" name="Text 10"/>
           <p:cNvSpPr txBox="1"/>
           <p:nvPr/>
         </p:nvSpPr>
         <p:spPr>
           <a:xfrm>
-            <a:off x="4754880" y="2560320"/>
-            <a:ext cx="1691640" cy="777240"/>
-          </a:xfrm>
-          <a:prstGeom prst="rect">
-            <a:avLst/>
-          </a:prstGeom>
-          <a:noFill/>
-          <a:ln/>
-        </p:spPr>
-        <p:txBody>
-          <a:bodyPr wrap="square" lIns="0" tIns="0" rIns="0" bIns="0" rtlCol="0" anchor="t"/>
+            <a:off x="1828800" y="2596896"/>
+            <a:ext cx="2514600" cy="292608"/>
+          </a:xfrm>
+          <a:prstGeom prst="rect">
+            <a:avLst/>
+          </a:prstGeom>
+          <a:noFill/>
+          <a:ln/>
+        </p:spPr>
+        <p:txBody>
+          <a:bodyPr wrap="square" lIns="0" tIns="0" rIns="0" bIns="0" rtlCol="0" anchor="ctr"/>
           <a:lstStyle/>
           <a:p>
             <a:pPr indent="0" marL="0">
               <a:lnSpc>
-                <a:spcPts val="1500"/>
-              </a:lnSpc>
-              <a:buNone/>
-            </a:pPr>
-            <a:r>
-              <a:rPr lang="en-US" sz="1200" dirty="0">
+                <a:spcPts val="1600"/>
+              </a:lnSpc>
+              <a:buNone/>
+            </a:pPr>
+            <a:r>
+              <a:rPr lang="en-US" sz="1300" dirty="0">
                 <a:solidFill>
                   <a:schemeClr val="tx1"/>
                 </a:solidFill>
               </a:rPr>
-              <a:t>評估 → 放鬆 → 調理 → 整合 → 返家</a:t>
-            </a:r>
-            <a:endParaRPr lang="en-US" sz="1200" dirty="0"/>
-          </a:p>
-        </p:txBody>
-      </p:sp>
-      <p:sp>
-        <p:nvSpPr>
-          <p:cNvPr id="18" name="退房後測 circle"/>
+              <a:t>山泉、鳥鳴自然聲音浴</a:t>
+            </a:r>
+            <a:endParaRPr lang="en-US" sz="1300" dirty="0"/>
+          </a:p>
+        </p:txBody>
+      </p:sp>
+      <p:sp>
+        <p:nvSpPr>
+          <p:cNvPr id="14" name="山・山居療癒 tag 3"/>
           <p:cNvSpPr/>
           <p:nvPr/>
         </p:nvSpPr>
         <p:spPr>
           <a:xfrm>
-            <a:off x="7315200" y="1234440"/>
-            <a:ext cx="777240" cy="777240"/>
-          </a:xfrm>
-          <a:prstGeom prst="ellipse">
-            <a:avLst/>
-          </a:prstGeom>
-          <a:solidFill>
-            <a:srgbClr val="C07A4F"/>
-          </a:solidFill>
-          <a:ln w="12700">
-            <a:solidFill>
-              <a:srgbClr val="C07A4F"/>
-            </a:solidFill>
-            <a:prstDash val="solid"/>
-          </a:ln>
-        </p:spPr>
-      </p:sp>
-      <p:pic>
-        <p:nvPicPr>
-          <p:cNvPr id="19" name="退房後測 icon" descr="退房後測">    </p:cNvPr>
-          <p:cNvPicPr>
-            <a:picLocks noChangeAspect="1"/>
-          </p:cNvPicPr>
-          <p:nvPr/>
-        </p:nvPicPr>
-        <p:blipFill>
-          <a:blip r:embed="rId7"/>
-          <a:stretch>
-            <a:fillRect/>
-          </a:stretch>
-        </p:blipFill>
-        <p:spPr>
-          <a:xfrm>
-            <a:off x="7509510" y="1428750"/>
-            <a:ext cx="388620" cy="388620"/>
-          </a:xfrm>
-          <a:prstGeom prst="rect">
-            <a:avLst/>
-          </a:prstGeom>
-        </p:spPr>
-      </p:pic>
-      <p:sp>
-        <p:nvSpPr>
-          <p:cNvPr id="20" name="Text 11"/>
-          <p:cNvSpPr txBox="1"/>
-          <p:nvPr/>
-        </p:nvSpPr>
-        <p:spPr>
-          <a:xfrm>
-            <a:off x="6766560" y="2148840"/>
-            <a:ext cx="1874520" cy="365760"/>
-          </a:xfrm>
-          <a:prstGeom prst="rect">
-            <a:avLst/>
-          </a:prstGeom>
-          <a:noFill/>
-          <a:ln/>
-        </p:spPr>
-        <p:txBody>
-          <a:bodyPr wrap="square" lIns="0" tIns="0" rIns="0" bIns="0" rtlCol="0" anchor="t"/>
-          <a:lstStyle/>
-          <a:p>
-            <a:pPr algn="ctr" indent="0" marL="0">
-              <a:lnSpc>
-                <a:spcPts val="2000"/>
-              </a:lnSpc>
-              <a:buNone/>
-            </a:pPr>
-            <a:r>
-              <a:rPr lang="en-US" sz="1600" b="1" dirty="0">
-                <a:solidFill>
-                  <a:schemeClr val="tx2"/>
-                </a:solidFill>
-              </a:rPr>
-              <a:t>退房後測</a:t>
-            </a:r>
-            <a:endParaRPr lang="en-US" sz="1600" dirty="0"/>
-          </a:p>
-        </p:txBody>
-      </p:sp>
-      <p:sp>
-        <p:nvSpPr>
-          <p:cNvPr id="21" name="Text 12"/>
-          <p:cNvSpPr txBox="1"/>
-          <p:nvPr/>
-        </p:nvSpPr>
-        <p:spPr>
-          <a:xfrm>
-            <a:off x="6858000" y="2560320"/>
-            <a:ext cx="1691640" cy="777240"/>
-          </a:xfrm>
-          <a:prstGeom prst="rect">
-            <a:avLst/>
-          </a:prstGeom>
-          <a:noFill/>
-          <a:ln/>
-        </p:spPr>
-        <p:txBody>
-          <a:bodyPr wrap="square" lIns="0" tIns="0" rIns="0" bIns="0" rtlCol="0" anchor="t"/>
-          <a:lstStyle/>
-          <a:p>
-            <a:pPr indent="0" marL="0">
-              <a:lnSpc>
-                <a:spcPts val="1500"/>
-              </a:lnSpc>
-              <a:buNone/>
-            </a:pPr>
-            <a:r>
-              <a:rPr lang="en-US" sz="1200" dirty="0">
-                <a:solidFill>
-                  <a:schemeClr val="tx1"/>
-                </a:solidFill>
-              </a:rPr>
-              <a:t>退房前再測一次，與前測對照</a:t>
-            </a:r>
-            <a:endParaRPr lang="en-US" sz="1200" dirty="0"/>
-          </a:p>
-        </p:txBody>
-      </p:sp>
-      <p:sp>
-        <p:nvSpPr>
-          <p:cNvPr id="22" name="Report callout"/>
-          <p:cNvSpPr/>
-          <p:nvPr/>
-        </p:nvSpPr>
-        <p:spPr>
-          <a:xfrm>
-            <a:off x="457200" y="3520440"/>
-            <a:ext cx="8229600" cy="914400"/>
+            <a:off x="685800" y="2999232"/>
+            <a:ext cx="1005840" cy="292608"/>
           </a:xfrm>
           <a:prstGeom prst="roundRect">
             <a:avLst>
-              <a:gd name="adj" fmla="val 8000"/>
+              <a:gd name="adj" fmla="val 50000"/>
             </a:avLst>
           </a:prstGeom>
           <a:solidFill>
@@ -3042,14 +2916,14 @@
       </p:sp>
       <p:sp>
         <p:nvSpPr>
-          <p:cNvPr id="23" name="Text 14"/>
+          <p:cNvPr id="15" name="Text 12"/>
           <p:cNvSpPr txBox="1"/>
           <p:nvPr/>
         </p:nvSpPr>
         <p:spPr>
           <a:xfrm>
-            <a:off x="731520" y="3520440"/>
-            <a:ext cx="2377440" cy="914400"/>
+            <a:off x="685800" y="2999232"/>
+            <a:ext cx="1005840" cy="292608"/>
           </a:xfrm>
           <a:prstGeom prst="rect">
             <a:avLst/>
@@ -3061,34 +2935,139 @@
           <a:bodyPr wrap="square" lIns="0" tIns="0" rIns="0" bIns="0" rtlCol="0" anchor="ctr"/>
           <a:lstStyle/>
           <a:p>
+            <a:pPr algn="ctr" indent="0" marL="0">
+              <a:lnSpc>
+                <a:spcPts val="1400"/>
+              </a:lnSpc>
+              <a:buNone/>
+            </a:pPr>
+            <a:r>
+              <a:rPr lang="en-US" sz="1100" b="1" dirty="0">
+                <a:solidFill>
+                  <a:schemeClr val="bg1"/>
+                </a:solidFill>
+              </a:rPr>
+              <a:t>放鬆療癒</a:t>
+            </a:r>
+            <a:endParaRPr lang="en-US" sz="1100" dirty="0"/>
+          </a:p>
+        </p:txBody>
+      </p:sp>
+      <p:sp>
+        <p:nvSpPr>
+          <p:cNvPr id="16" name="Text 13"/>
+          <p:cNvSpPr txBox="1"/>
+          <p:nvPr/>
+        </p:nvSpPr>
+        <p:spPr>
+          <a:xfrm>
+            <a:off x="1828800" y="2999232"/>
+            <a:ext cx="2514600" cy="292608"/>
+          </a:xfrm>
+          <a:prstGeom prst="rect">
+            <a:avLst/>
+          </a:prstGeom>
+          <a:noFill/>
+          <a:ln/>
+        </p:spPr>
+        <p:txBody>
+          <a:bodyPr wrap="square" lIns="0" tIns="0" rIns="0" bIns="0" rtlCol="0" anchor="ctr"/>
+          <a:lstStyle/>
+          <a:p>
             <a:pPr indent="0" marL="0">
               <a:lnSpc>
-                <a:spcPts val="2500"/>
-              </a:lnSpc>
-              <a:buNone/>
-            </a:pPr>
-            <a:r>
-              <a:rPr lang="en-US" sz="2000" b="1" dirty="0">
+                <a:spcPts val="1600"/>
+              </a:lnSpc>
+              <a:buNone/>
+            </a:pPr>
+            <a:r>
+              <a:rPr lang="en-US" sz="1300" dirty="0">
+                <a:solidFill>
+                  <a:schemeClr val="tx1"/>
+                </a:solidFill>
+              </a:rPr>
+              <a:t>山泉溫泡、足浴</a:t>
+            </a:r>
+            <a:endParaRPr lang="en-US" sz="1300" dirty="0"/>
+          </a:p>
+        </p:txBody>
+      </p:sp>
+      <p:sp>
+        <p:nvSpPr>
+          <p:cNvPr id="17" name="山・山居療癒 tag 4"/>
+          <p:cNvSpPr/>
+          <p:nvPr/>
+        </p:nvSpPr>
+        <p:spPr>
+          <a:xfrm>
+            <a:off x="685800" y="3401568"/>
+            <a:ext cx="1005840" cy="292608"/>
+          </a:xfrm>
+          <a:prstGeom prst="roundRect">
+            <a:avLst>
+              <a:gd name="adj" fmla="val 50000"/>
+            </a:avLst>
+          </a:prstGeom>
+          <a:solidFill>
+            <a:srgbClr val="2F4A3A"/>
+          </a:solidFill>
+          <a:ln w="12700">
+            <a:solidFill>
+              <a:srgbClr val="2F4A3A"/>
+            </a:solidFill>
+            <a:prstDash val="solid"/>
+          </a:ln>
+        </p:spPr>
+      </p:sp>
+      <p:sp>
+        <p:nvSpPr>
+          <p:cNvPr id="18" name="Text 15"/>
+          <p:cNvSpPr txBox="1"/>
+          <p:nvPr/>
+        </p:nvSpPr>
+        <p:spPr>
+          <a:xfrm>
+            <a:off x="685800" y="3401568"/>
+            <a:ext cx="1005840" cy="292608"/>
+          </a:xfrm>
+          <a:prstGeom prst="rect">
+            <a:avLst/>
+          </a:prstGeom>
+          <a:noFill/>
+          <a:ln/>
+        </p:spPr>
+        <p:txBody>
+          <a:bodyPr wrap="square" lIns="0" tIns="0" rIns="0" bIns="0" rtlCol="0" anchor="ctr"/>
+          <a:lstStyle/>
+          <a:p>
+            <a:pPr algn="ctr" indent="0" marL="0">
+              <a:lnSpc>
+                <a:spcPts val="1400"/>
+              </a:lnSpc>
+              <a:buNone/>
+            </a:pPr>
+            <a:r>
+              <a:rPr lang="en-US" sz="1100" b="1" dirty="0">
                 <a:solidFill>
                   <a:schemeClr val="bg1"/>
                 </a:solidFill>
               </a:rPr>
-              <a:t>「五日健康報告」</a:t>
-            </a:r>
-            <a:endParaRPr lang="en-US" sz="2000" dirty="0"/>
-          </a:p>
-        </p:txBody>
-      </p:sp>
-      <p:sp>
-        <p:nvSpPr>
-          <p:cNvPr id="24" name="Text 15"/>
+              <a:t>食療</a:t>
+            </a:r>
+            <a:endParaRPr lang="en-US" sz="1100" dirty="0"/>
+          </a:p>
+        </p:txBody>
+      </p:sp>
+      <p:sp>
+        <p:nvSpPr>
+          <p:cNvPr id="19" name="Text 16"/>
           <p:cNvSpPr txBox="1"/>
           <p:nvPr/>
         </p:nvSpPr>
         <p:spPr>
           <a:xfrm>
-            <a:off x="3200400" y="3520440"/>
-            <a:ext cx="5303520" cy="914400"/>
+            <a:off x="1828800" y="3401568"/>
+            <a:ext cx="2514600" cy="292608"/>
           </a:xfrm>
           <a:prstGeom prst="rect">
             <a:avLst/>
@@ -3102,19 +3081,620 @@
           <a:p>
             <a:pPr indent="0" marL="0">
               <a:lnSpc>
-                <a:spcPts val="1800"/>
-              </a:lnSpc>
-              <a:buNone/>
-            </a:pPr>
-            <a:r>
-              <a:rPr lang="en-US" sz="1400" dirty="0">
-                <a:solidFill>
-                  <a:schemeClr val="accent4"/>
-                </a:solidFill>
-              </a:rPr>
-              <a:t>前後測對照，讓學員看見五天的變化——是口碑與回購的關鍵。</a:t>
-            </a:r>
-            <a:endParaRPr lang="en-US" sz="1400" dirty="0"/>
+                <a:spcPts val="1600"/>
+              </a:lnSpc>
+              <a:buNone/>
+            </a:pPr>
+            <a:r>
+              <a:rPr lang="en-US" sz="1300" dirty="0">
+                <a:solidFill>
+                  <a:schemeClr val="tx1"/>
+                </a:solidFill>
+              </a:rPr>
+              <a:t>山野時令食材入藥膳</a:t>
+            </a:r>
+            <a:endParaRPr lang="en-US" sz="1300" dirty="0"/>
+          </a:p>
+        </p:txBody>
+      </p:sp>
+      <p:sp>
+        <p:nvSpPr>
+          <p:cNvPr id="20" name="水・海居／水岸療癒"/>
+          <p:cNvSpPr/>
+          <p:nvPr/>
+        </p:nvSpPr>
+        <p:spPr>
+          <a:xfrm>
+            <a:off x="4663440" y="1325880"/>
+            <a:ext cx="4023360" cy="2514600"/>
+          </a:xfrm>
+          <a:prstGeom prst="roundRect">
+            <a:avLst>
+              <a:gd name="adj" fmla="val 2909"/>
+            </a:avLst>
+          </a:prstGeom>
+          <a:solidFill>
+            <a:srgbClr val="EEF3EC"/>
+          </a:solidFill>
+          <a:ln w="12700">
+            <a:solidFill>
+              <a:srgbClr val="EEF3EC"/>
+            </a:solidFill>
+            <a:prstDash val="solid"/>
+          </a:ln>
+        </p:spPr>
+      </p:sp>
+      <p:sp>
+        <p:nvSpPr>
+          <p:cNvPr id="21" name="水・海居／水岸療癒 circle"/>
+          <p:cNvSpPr/>
+          <p:nvPr/>
+        </p:nvSpPr>
+        <p:spPr>
+          <a:xfrm>
+            <a:off x="4892040" y="1463040"/>
+            <a:ext cx="548640" cy="548640"/>
+          </a:xfrm>
+          <a:prstGeom prst="ellipse">
+            <a:avLst/>
+          </a:prstGeom>
+          <a:solidFill>
+            <a:srgbClr val="3E6B7A"/>
+          </a:solidFill>
+          <a:ln w="12700">
+            <a:solidFill>
+              <a:srgbClr val="3E6B7A"/>
+            </a:solidFill>
+            <a:prstDash val="solid"/>
+          </a:ln>
+        </p:spPr>
+      </p:sp>
+      <p:pic>
+        <p:nvPicPr>
+          <p:cNvPr id="22" name="水・海居／水岸療癒 icon" descr="水・海居／水岸療癒">    </p:cNvPr>
+          <p:cNvPicPr>
+            <a:picLocks noChangeAspect="1"/>
+          </p:cNvPicPr>
+          <p:nvPr/>
+        </p:nvPicPr>
+        <p:blipFill>
+          <a:blip r:embed="rId2"/>
+          <a:stretch>
+            <a:fillRect/>
+          </a:stretch>
+        </p:blipFill>
+        <p:spPr>
+          <a:xfrm>
+            <a:off x="5029200" y="1600200"/>
+            <a:ext cx="274320" cy="274320"/>
+          </a:xfrm>
+          <a:prstGeom prst="rect">
+            <a:avLst/>
+          </a:prstGeom>
+        </p:spPr>
+      </p:pic>
+      <p:sp>
+        <p:nvSpPr>
+          <p:cNvPr id="23" name="Text 19"/>
+          <p:cNvSpPr txBox="1"/>
+          <p:nvPr/>
+        </p:nvSpPr>
+        <p:spPr>
+          <a:xfrm>
+            <a:off x="5577840" y="1572768"/>
+            <a:ext cx="2926080" cy="365760"/>
+          </a:xfrm>
+          <a:prstGeom prst="rect">
+            <a:avLst/>
+          </a:prstGeom>
+          <a:noFill/>
+          <a:ln/>
+        </p:spPr>
+        <p:txBody>
+          <a:bodyPr wrap="square" lIns="0" tIns="0" rIns="0" bIns="0" rtlCol="0" anchor="t"/>
+          <a:lstStyle/>
+          <a:p>
+            <a:pPr indent="0" marL="0">
+              <a:lnSpc>
+                <a:spcPts val="2100"/>
+              </a:lnSpc>
+              <a:buNone/>
+            </a:pPr>
+            <a:r>
+              <a:rPr lang="en-US" sz="1700" b="1" dirty="0">
+                <a:solidFill>
+                  <a:schemeClr val="tx2"/>
+                </a:solidFill>
+              </a:rPr>
+              <a:t>水・海居／水岸療癒</a:t>
+            </a:r>
+            <a:endParaRPr lang="en-US" sz="1700" dirty="0"/>
+          </a:p>
+        </p:txBody>
+      </p:sp>
+      <p:sp>
+        <p:nvSpPr>
+          <p:cNvPr id="24" name="水・海居／水岸療癒 tag 1"/>
+          <p:cNvSpPr/>
+          <p:nvPr/>
+        </p:nvSpPr>
+        <p:spPr>
+          <a:xfrm>
+            <a:off x="4892040" y="2194560"/>
+            <a:ext cx="1005840" cy="292608"/>
+          </a:xfrm>
+          <a:prstGeom prst="roundRect">
+            <a:avLst>
+              <a:gd name="adj" fmla="val 50000"/>
+            </a:avLst>
+          </a:prstGeom>
+          <a:solidFill>
+            <a:srgbClr val="3E6B7A"/>
+          </a:solidFill>
+          <a:ln w="12700">
+            <a:solidFill>
+              <a:srgbClr val="3E6B7A"/>
+            </a:solidFill>
+            <a:prstDash val="solid"/>
+          </a:ln>
+        </p:spPr>
+      </p:sp>
+      <p:sp>
+        <p:nvSpPr>
+          <p:cNvPr id="25" name="Text 21"/>
+          <p:cNvSpPr txBox="1"/>
+          <p:nvPr/>
+        </p:nvSpPr>
+        <p:spPr>
+          <a:xfrm>
+            <a:off x="4892040" y="2194560"/>
+            <a:ext cx="1005840" cy="292608"/>
+          </a:xfrm>
+          <a:prstGeom prst="rect">
+            <a:avLst/>
+          </a:prstGeom>
+          <a:noFill/>
+          <a:ln/>
+        </p:spPr>
+        <p:txBody>
+          <a:bodyPr wrap="square" lIns="0" tIns="0" rIns="0" bIns="0" rtlCol="0" anchor="ctr"/>
+          <a:lstStyle/>
+          <a:p>
+            <a:pPr algn="ctr" indent="0" marL="0">
+              <a:lnSpc>
+                <a:spcPts val="1400"/>
+              </a:lnSpc>
+              <a:buNone/>
+            </a:pPr>
+            <a:r>
+              <a:rPr lang="en-US" sz="1100" b="1" dirty="0">
+                <a:solidFill>
+                  <a:schemeClr val="bg1"/>
+                </a:solidFill>
+              </a:rPr>
+              <a:t>自然療癒</a:t>
+            </a:r>
+            <a:endParaRPr lang="en-US" sz="1100" dirty="0"/>
+          </a:p>
+        </p:txBody>
+      </p:sp>
+      <p:sp>
+        <p:nvSpPr>
+          <p:cNvPr id="26" name="Text 22"/>
+          <p:cNvSpPr txBox="1"/>
+          <p:nvPr/>
+        </p:nvSpPr>
+        <p:spPr>
+          <a:xfrm>
+            <a:off x="6035040" y="2194560"/>
+            <a:ext cx="2514600" cy="292608"/>
+          </a:xfrm>
+          <a:prstGeom prst="rect">
+            <a:avLst/>
+          </a:prstGeom>
+          <a:noFill/>
+          <a:ln/>
+        </p:spPr>
+        <p:txBody>
+          <a:bodyPr wrap="square" lIns="0" tIns="0" rIns="0" bIns="0" rtlCol="0" anchor="ctr"/>
+          <a:lstStyle/>
+          <a:p>
+            <a:pPr indent="0" marL="0">
+              <a:lnSpc>
+                <a:spcPts val="1600"/>
+              </a:lnSpc>
+              <a:buNone/>
+            </a:pPr>
+            <a:r>
+              <a:rPr lang="en-US" sz="1300" dirty="0">
+                <a:solidFill>
+                  <a:schemeClr val="tx1"/>
+                </a:solidFill>
+              </a:rPr>
+              <a:t>海邊／湖畔散步、呼吸練習</a:t>
+            </a:r>
+            <a:endParaRPr lang="en-US" sz="1300" dirty="0"/>
+          </a:p>
+        </p:txBody>
+      </p:sp>
+      <p:sp>
+        <p:nvSpPr>
+          <p:cNvPr id="27" name="水・海居／水岸療癒 tag 2"/>
+          <p:cNvSpPr/>
+          <p:nvPr/>
+        </p:nvSpPr>
+        <p:spPr>
+          <a:xfrm>
+            <a:off x="4892040" y="2596896"/>
+            <a:ext cx="1005840" cy="292608"/>
+          </a:xfrm>
+          <a:prstGeom prst="roundRect">
+            <a:avLst>
+              <a:gd name="adj" fmla="val 50000"/>
+            </a:avLst>
+          </a:prstGeom>
+          <a:solidFill>
+            <a:srgbClr val="3E6B7A"/>
+          </a:solidFill>
+          <a:ln w="12700">
+            <a:solidFill>
+              <a:srgbClr val="3E6B7A"/>
+            </a:solidFill>
+            <a:prstDash val="solid"/>
+          </a:ln>
+        </p:spPr>
+      </p:sp>
+      <p:sp>
+        <p:nvSpPr>
+          <p:cNvPr id="28" name="Text 24"/>
+          <p:cNvSpPr txBox="1"/>
+          <p:nvPr/>
+        </p:nvSpPr>
+        <p:spPr>
+          <a:xfrm>
+            <a:off x="4892040" y="2596896"/>
+            <a:ext cx="1005840" cy="292608"/>
+          </a:xfrm>
+          <a:prstGeom prst="rect">
+            <a:avLst/>
+          </a:prstGeom>
+          <a:noFill/>
+          <a:ln/>
+        </p:spPr>
+        <p:txBody>
+          <a:bodyPr wrap="square" lIns="0" tIns="0" rIns="0" bIns="0" rtlCol="0" anchor="ctr"/>
+          <a:lstStyle/>
+          <a:p>
+            <a:pPr algn="ctr" indent="0" marL="0">
+              <a:lnSpc>
+                <a:spcPts val="1400"/>
+              </a:lnSpc>
+              <a:buNone/>
+            </a:pPr>
+            <a:r>
+              <a:rPr lang="en-US" sz="1100" b="1" dirty="0">
+                <a:solidFill>
+                  <a:schemeClr val="bg1"/>
+                </a:solidFill>
+              </a:rPr>
+              <a:t>音療</a:t>
+            </a:r>
+            <a:endParaRPr lang="en-US" sz="1100" dirty="0"/>
+          </a:p>
+        </p:txBody>
+      </p:sp>
+      <p:sp>
+        <p:nvSpPr>
+          <p:cNvPr id="29" name="Text 25"/>
+          <p:cNvSpPr txBox="1"/>
+          <p:nvPr/>
+        </p:nvSpPr>
+        <p:spPr>
+          <a:xfrm>
+            <a:off x="6035040" y="2596896"/>
+            <a:ext cx="2514600" cy="292608"/>
+          </a:xfrm>
+          <a:prstGeom prst="rect">
+            <a:avLst/>
+          </a:prstGeom>
+          <a:noFill/>
+          <a:ln/>
+        </p:spPr>
+        <p:txBody>
+          <a:bodyPr wrap="square" lIns="0" tIns="0" rIns="0" bIns="0" rtlCol="0" anchor="ctr"/>
+          <a:lstStyle/>
+          <a:p>
+            <a:pPr indent="0" marL="0">
+              <a:lnSpc>
+                <a:spcPts val="1600"/>
+              </a:lnSpc>
+              <a:buNone/>
+            </a:pPr>
+            <a:r>
+              <a:rPr lang="en-US" sz="1300" dirty="0">
+                <a:solidFill>
+                  <a:schemeClr val="tx1"/>
+                </a:solidFill>
+              </a:rPr>
+              <a:t>海浪、流水聲音浴</a:t>
+            </a:r>
+            <a:endParaRPr lang="en-US" sz="1300" dirty="0"/>
+          </a:p>
+        </p:txBody>
+      </p:sp>
+      <p:sp>
+        <p:nvSpPr>
+          <p:cNvPr id="30" name="水・海居／水岸療癒 tag 3"/>
+          <p:cNvSpPr/>
+          <p:nvPr/>
+        </p:nvSpPr>
+        <p:spPr>
+          <a:xfrm>
+            <a:off x="4892040" y="2999232"/>
+            <a:ext cx="1005840" cy="292608"/>
+          </a:xfrm>
+          <a:prstGeom prst="roundRect">
+            <a:avLst>
+              <a:gd name="adj" fmla="val 50000"/>
+            </a:avLst>
+          </a:prstGeom>
+          <a:solidFill>
+            <a:srgbClr val="3E6B7A"/>
+          </a:solidFill>
+          <a:ln w="12700">
+            <a:solidFill>
+              <a:srgbClr val="3E6B7A"/>
+            </a:solidFill>
+            <a:prstDash val="solid"/>
+          </a:ln>
+        </p:spPr>
+      </p:sp>
+      <p:sp>
+        <p:nvSpPr>
+          <p:cNvPr id="31" name="Text 27"/>
+          <p:cNvSpPr txBox="1"/>
+          <p:nvPr/>
+        </p:nvSpPr>
+        <p:spPr>
+          <a:xfrm>
+            <a:off x="4892040" y="2999232"/>
+            <a:ext cx="1005840" cy="292608"/>
+          </a:xfrm>
+          <a:prstGeom prst="rect">
+            <a:avLst/>
+          </a:prstGeom>
+          <a:noFill/>
+          <a:ln/>
+        </p:spPr>
+        <p:txBody>
+          <a:bodyPr wrap="square" lIns="0" tIns="0" rIns="0" bIns="0" rtlCol="0" anchor="ctr"/>
+          <a:lstStyle/>
+          <a:p>
+            <a:pPr algn="ctr" indent="0" marL="0">
+              <a:lnSpc>
+                <a:spcPts val="1400"/>
+              </a:lnSpc>
+              <a:buNone/>
+            </a:pPr>
+            <a:r>
+              <a:rPr lang="en-US" sz="1100" b="1" dirty="0">
+                <a:solidFill>
+                  <a:schemeClr val="bg1"/>
+                </a:solidFill>
+              </a:rPr>
+              <a:t>冥想</a:t>
+            </a:r>
+            <a:endParaRPr lang="en-US" sz="1100" dirty="0"/>
+          </a:p>
+        </p:txBody>
+      </p:sp>
+      <p:sp>
+        <p:nvSpPr>
+          <p:cNvPr id="32" name="Text 28"/>
+          <p:cNvSpPr txBox="1"/>
+          <p:nvPr/>
+        </p:nvSpPr>
+        <p:spPr>
+          <a:xfrm>
+            <a:off x="6035040" y="2999232"/>
+            <a:ext cx="2514600" cy="292608"/>
+          </a:xfrm>
+          <a:prstGeom prst="rect">
+            <a:avLst/>
+          </a:prstGeom>
+          <a:noFill/>
+          <a:ln/>
+        </p:spPr>
+        <p:txBody>
+          <a:bodyPr wrap="square" lIns="0" tIns="0" rIns="0" bIns="0" rtlCol="0" anchor="ctr"/>
+          <a:lstStyle/>
+          <a:p>
+            <a:pPr indent="0" marL="0">
+              <a:lnSpc>
+                <a:spcPts val="1600"/>
+              </a:lnSpc>
+              <a:buNone/>
+            </a:pPr>
+            <a:r>
+              <a:rPr lang="en-US" sz="1300" dirty="0">
+                <a:solidFill>
+                  <a:schemeClr val="tx1"/>
+                </a:solidFill>
+              </a:rPr>
+              <a:t>水岸日出正念冥想</a:t>
+            </a:r>
+            <a:endParaRPr lang="en-US" sz="1300" dirty="0"/>
+          </a:p>
+        </p:txBody>
+      </p:sp>
+      <p:sp>
+        <p:nvSpPr>
+          <p:cNvPr id="33" name="水・海居／水岸療癒 tag 4"/>
+          <p:cNvSpPr/>
+          <p:nvPr/>
+        </p:nvSpPr>
+        <p:spPr>
+          <a:xfrm>
+            <a:off x="4892040" y="3401568"/>
+            <a:ext cx="1005840" cy="292608"/>
+          </a:xfrm>
+          <a:prstGeom prst="roundRect">
+            <a:avLst>
+              <a:gd name="adj" fmla="val 50000"/>
+            </a:avLst>
+          </a:prstGeom>
+          <a:solidFill>
+            <a:srgbClr val="3E6B7A"/>
+          </a:solidFill>
+          <a:ln w="12700">
+            <a:solidFill>
+              <a:srgbClr val="3E6B7A"/>
+            </a:solidFill>
+            <a:prstDash val="solid"/>
+          </a:ln>
+        </p:spPr>
+      </p:sp>
+      <p:sp>
+        <p:nvSpPr>
+          <p:cNvPr id="34" name="Text 30"/>
+          <p:cNvSpPr txBox="1"/>
+          <p:nvPr/>
+        </p:nvSpPr>
+        <p:spPr>
+          <a:xfrm>
+            <a:off x="4892040" y="3401568"/>
+            <a:ext cx="1005840" cy="292608"/>
+          </a:xfrm>
+          <a:prstGeom prst="rect">
+            <a:avLst/>
+          </a:prstGeom>
+          <a:noFill/>
+          <a:ln/>
+        </p:spPr>
+        <p:txBody>
+          <a:bodyPr wrap="square" lIns="0" tIns="0" rIns="0" bIns="0" rtlCol="0" anchor="ctr"/>
+          <a:lstStyle/>
+          <a:p>
+            <a:pPr algn="ctr" indent="0" marL="0">
+              <a:lnSpc>
+                <a:spcPts val="1400"/>
+              </a:lnSpc>
+              <a:buNone/>
+            </a:pPr>
+            <a:r>
+              <a:rPr lang="en-US" sz="1100" b="1" dirty="0">
+                <a:solidFill>
+                  <a:schemeClr val="bg1"/>
+                </a:solidFill>
+              </a:rPr>
+              <a:t>睡眠療癒</a:t>
+            </a:r>
+            <a:endParaRPr lang="en-US" sz="1100" dirty="0"/>
+          </a:p>
+        </p:txBody>
+      </p:sp>
+      <p:sp>
+        <p:nvSpPr>
+          <p:cNvPr id="35" name="Text 31"/>
+          <p:cNvSpPr txBox="1"/>
+          <p:nvPr/>
+        </p:nvSpPr>
+        <p:spPr>
+          <a:xfrm>
+            <a:off x="6035040" y="3401568"/>
+            <a:ext cx="2514600" cy="292608"/>
+          </a:xfrm>
+          <a:prstGeom prst="rect">
+            <a:avLst/>
+          </a:prstGeom>
+          <a:noFill/>
+          <a:ln/>
+        </p:spPr>
+        <p:txBody>
+          <a:bodyPr wrap="square" lIns="0" tIns="0" rIns="0" bIns="0" rtlCol="0" anchor="ctr"/>
+          <a:lstStyle/>
+          <a:p>
+            <a:pPr indent="0" marL="0">
+              <a:lnSpc>
+                <a:spcPts val="1600"/>
+              </a:lnSpc>
+              <a:buNone/>
+            </a:pPr>
+            <a:r>
+              <a:rPr lang="en-US" sz="1300" dirty="0">
+                <a:solidFill>
+                  <a:schemeClr val="tx1"/>
+                </a:solidFill>
+              </a:rPr>
+              <a:t>水聲伴眠、靜夜水景</a:t>
+            </a:r>
+            <a:endParaRPr lang="en-US" sz="1300" dirty="0"/>
+          </a:p>
+        </p:txBody>
+      </p:sp>
+      <p:sp>
+        <p:nvSpPr>
+          <p:cNvPr id="36" name="Synergy callout"/>
+          <p:cNvSpPr/>
+          <p:nvPr/>
+        </p:nvSpPr>
+        <p:spPr>
+          <a:xfrm>
+            <a:off x="457200" y="3977640"/>
+            <a:ext cx="8229600" cy="594360"/>
+          </a:xfrm>
+          <a:prstGeom prst="roundRect">
+            <a:avLst>
+              <a:gd name="adj" fmla="val 12308"/>
+            </a:avLst>
+          </a:prstGeom>
+          <a:solidFill>
+            <a:srgbClr val="2F4A3A"/>
+          </a:solidFill>
+          <a:ln w="12700">
+            <a:solidFill>
+              <a:srgbClr val="2F4A3A"/>
+            </a:solidFill>
+            <a:prstDash val="solid"/>
+          </a:ln>
+        </p:spPr>
+      </p:sp>
+      <p:sp>
+        <p:nvSpPr>
+          <p:cNvPr id="37" name="Text 33"/>
+          <p:cNvSpPr txBox="1"/>
+          <p:nvPr/>
+        </p:nvSpPr>
+        <p:spPr>
+          <a:xfrm>
+            <a:off x="685800" y="3977640"/>
+            <a:ext cx="7772400" cy="594360"/>
+          </a:xfrm>
+          <a:prstGeom prst="rect">
+            <a:avLst/>
+          </a:prstGeom>
+          <a:noFill/>
+          <a:ln/>
+        </p:spPr>
+        <p:txBody>
+          <a:bodyPr wrap="square" lIns="0" tIns="0" rIns="0" bIns="0" rtlCol="0" anchor="ctr"/>
+          <a:lstStyle/>
+          <a:p>
+            <a:pPr indent="0" marL="0">
+              <a:lnSpc>
+                <a:spcPts val="1600"/>
+              </a:lnSpc>
+              <a:buNone/>
+            </a:pPr>
+            <a:r>
+              <a:rPr lang="en-US" sz="1300" b="1" dirty="0">
+                <a:solidFill>
+                  <a:schemeClr val="bg1"/>
+                </a:solidFill>
+              </a:rPr>
+              <a:t>同一套十療，依飯店地景切換「山居版」或「水居版」——酒店的山水資源成為療程的一部分，也利於多酒店複製</a:t>
+            </a:r>
+            <a:endParaRPr lang="en-US" sz="1300" dirty="0"/>
           </a:p>
         </p:txBody>
       </p:sp>
@@ -3223,6 +3803,802 @@
                   <a:schemeClr val="tx2"/>
                 </a:solidFill>
               </a:rPr>
+              <a:t>個人化方式：前測 → 後測 → 五日健康報告</a:t>
+            </a:r>
+            <a:endParaRPr lang="en-US" sz="2800" dirty="0"/>
+          </a:p>
+        </p:txBody>
+      </p:sp>
+      <p:sp>
+        <p:nvSpPr>
+          <p:cNvPr id="3" name="入住前測 circle"/>
+          <p:cNvSpPr/>
+          <p:nvPr/>
+        </p:nvSpPr>
+        <p:spPr>
+          <a:xfrm>
+            <a:off x="1005840" y="1234440"/>
+            <a:ext cx="777240" cy="777240"/>
+          </a:xfrm>
+          <a:prstGeom prst="ellipse">
+            <a:avLst/>
+          </a:prstGeom>
+          <a:solidFill>
+            <a:srgbClr val="2F4A3A"/>
+          </a:solidFill>
+          <a:ln w="12700">
+            <a:solidFill>
+              <a:srgbClr val="2F4A3A"/>
+            </a:solidFill>
+            <a:prstDash val="solid"/>
+          </a:ln>
+        </p:spPr>
+      </p:sp>
+      <p:pic>
+        <p:nvPicPr>
+          <p:cNvPr id="4" name="入住前測 icon" descr="入住前測">    </p:cNvPr>
+          <p:cNvPicPr>
+            <a:picLocks noChangeAspect="1"/>
+          </p:cNvPicPr>
+          <p:nvPr/>
+        </p:nvPicPr>
+        <p:blipFill>
+          <a:blip r:embed="rId1"/>
+          <a:stretch>
+            <a:fillRect/>
+          </a:stretch>
+        </p:blipFill>
+        <p:spPr>
+          <a:xfrm>
+            <a:off x="1200150" y="1428750"/>
+            <a:ext cx="388620" cy="388620"/>
+          </a:xfrm>
+          <a:prstGeom prst="rect">
+            <a:avLst/>
+          </a:prstGeom>
+        </p:spPr>
+      </p:pic>
+      <p:pic>
+        <p:nvPicPr>
+          <p:cNvPr id="5" name="Arrow 1" descr="next">    </p:cNvPr>
+          <p:cNvPicPr>
+            <a:picLocks noChangeAspect="1"/>
+          </p:cNvPicPr>
+          <p:nvPr/>
+        </p:nvPicPr>
+        <p:blipFill>
+          <a:blip r:embed="rId2"/>
+          <a:stretch>
+            <a:fillRect/>
+          </a:stretch>
+        </p:blipFill>
+        <p:spPr>
+          <a:xfrm>
+            <a:off x="2148840" y="1463040"/>
+            <a:ext cx="320040" cy="320040"/>
+          </a:xfrm>
+          <a:prstGeom prst="rect">
+            <a:avLst/>
+          </a:prstGeom>
+        </p:spPr>
+      </p:pic>
+      <p:sp>
+        <p:nvSpPr>
+          <p:cNvPr id="6" name="Text 2"/>
+          <p:cNvSpPr txBox="1"/>
+          <p:nvPr/>
+        </p:nvSpPr>
+        <p:spPr>
+          <a:xfrm>
+            <a:off x="457200" y="2148840"/>
+            <a:ext cx="1874520" cy="365760"/>
+          </a:xfrm>
+          <a:prstGeom prst="rect">
+            <a:avLst/>
+          </a:prstGeom>
+          <a:noFill/>
+          <a:ln/>
+        </p:spPr>
+        <p:txBody>
+          <a:bodyPr wrap="square" lIns="0" tIns="0" rIns="0" bIns="0" rtlCol="0" anchor="t"/>
+          <a:lstStyle/>
+          <a:p>
+            <a:pPr algn="ctr" indent="0" marL="0">
+              <a:lnSpc>
+                <a:spcPts val="2000"/>
+              </a:lnSpc>
+              <a:buNone/>
+            </a:pPr>
+            <a:r>
+              <a:rPr lang="en-US" sz="1600" b="1" dirty="0">
+                <a:solidFill>
+                  <a:schemeClr val="tx2"/>
+                </a:solidFill>
+              </a:rPr>
+              <a:t>入住前測</a:t>
+            </a:r>
+            <a:endParaRPr lang="en-US" sz="1600" dirty="0"/>
+          </a:p>
+        </p:txBody>
+      </p:sp>
+      <p:sp>
+        <p:nvSpPr>
+          <p:cNvPr id="7" name="Text 3"/>
+          <p:cNvSpPr txBox="1"/>
+          <p:nvPr/>
+        </p:nvSpPr>
+        <p:spPr>
+          <a:xfrm>
+            <a:off x="548640" y="2560320"/>
+            <a:ext cx="1691640" cy="777240"/>
+          </a:xfrm>
+          <a:prstGeom prst="rect">
+            <a:avLst/>
+          </a:prstGeom>
+          <a:noFill/>
+          <a:ln/>
+        </p:spPr>
+        <p:txBody>
+          <a:bodyPr wrap="square" lIns="0" tIns="0" rIns="0" bIns="0" rtlCol="0" anchor="t"/>
+          <a:lstStyle/>
+          <a:p>
+            <a:pPr indent="0" marL="0">
+              <a:lnSpc>
+                <a:spcPts val="1500"/>
+              </a:lnSpc>
+              <a:buNone/>
+            </a:pPr>
+            <a:r>
+              <a:rPr lang="en-US" sz="1200" dirty="0">
+                <a:solidFill>
+                  <a:schemeClr val="tx1"/>
+                </a:solidFill>
+              </a:rPr>
+              <a:t>血壓、血糖、體組成、睡眠問卷、九大體質判定</a:t>
+            </a:r>
+            <a:endParaRPr lang="en-US" sz="1200" dirty="0"/>
+          </a:p>
+        </p:txBody>
+      </p:sp>
+      <p:sp>
+        <p:nvSpPr>
+          <p:cNvPr id="8" name="配對組合 circle"/>
+          <p:cNvSpPr/>
+          <p:nvPr/>
+        </p:nvSpPr>
+        <p:spPr>
+          <a:xfrm>
+            <a:off x="3108960" y="1234440"/>
+            <a:ext cx="777240" cy="777240"/>
+          </a:xfrm>
+          <a:prstGeom prst="ellipse">
+            <a:avLst/>
+          </a:prstGeom>
+          <a:solidFill>
+            <a:srgbClr val="2F4A3A"/>
+          </a:solidFill>
+          <a:ln w="12700">
+            <a:solidFill>
+              <a:srgbClr val="2F4A3A"/>
+            </a:solidFill>
+            <a:prstDash val="solid"/>
+          </a:ln>
+        </p:spPr>
+      </p:sp>
+      <p:pic>
+        <p:nvPicPr>
+          <p:cNvPr id="9" name="配對組合 icon" descr="配對組合">    </p:cNvPr>
+          <p:cNvPicPr>
+            <a:picLocks noChangeAspect="1"/>
+          </p:cNvPicPr>
+          <p:nvPr/>
+        </p:nvPicPr>
+        <p:blipFill>
+          <a:blip r:embed="rId3"/>
+          <a:stretch>
+            <a:fillRect/>
+          </a:stretch>
+        </p:blipFill>
+        <p:spPr>
+          <a:xfrm>
+            <a:off x="3303270" y="1428750"/>
+            <a:ext cx="388620" cy="388620"/>
+          </a:xfrm>
+          <a:prstGeom prst="rect">
+            <a:avLst/>
+          </a:prstGeom>
+        </p:spPr>
+      </p:pic>
+      <p:pic>
+        <p:nvPicPr>
+          <p:cNvPr id="10" name="Arrow 2" descr="next">    </p:cNvPr>
+          <p:cNvPicPr>
+            <a:picLocks noChangeAspect="1"/>
+          </p:cNvPicPr>
+          <p:nvPr/>
+        </p:nvPicPr>
+        <p:blipFill>
+          <a:blip r:embed="rId4"/>
+          <a:stretch>
+            <a:fillRect/>
+          </a:stretch>
+        </p:blipFill>
+        <p:spPr>
+          <a:xfrm>
+            <a:off x="4251960" y="1463040"/>
+            <a:ext cx="320040" cy="320040"/>
+          </a:xfrm>
+          <a:prstGeom prst="rect">
+            <a:avLst/>
+          </a:prstGeom>
+        </p:spPr>
+      </p:pic>
+      <p:sp>
+        <p:nvSpPr>
+          <p:cNvPr id="11" name="Text 5"/>
+          <p:cNvSpPr txBox="1"/>
+          <p:nvPr/>
+        </p:nvSpPr>
+        <p:spPr>
+          <a:xfrm>
+            <a:off x="2560320" y="2148840"/>
+            <a:ext cx="1874520" cy="365760"/>
+          </a:xfrm>
+          <a:prstGeom prst="rect">
+            <a:avLst/>
+          </a:prstGeom>
+          <a:noFill/>
+          <a:ln/>
+        </p:spPr>
+        <p:txBody>
+          <a:bodyPr wrap="square" lIns="0" tIns="0" rIns="0" bIns="0" rtlCol="0" anchor="t"/>
+          <a:lstStyle/>
+          <a:p>
+            <a:pPr algn="ctr" indent="0" marL="0">
+              <a:lnSpc>
+                <a:spcPts val="2000"/>
+              </a:lnSpc>
+              <a:buNone/>
+            </a:pPr>
+            <a:r>
+              <a:rPr lang="en-US" sz="1600" b="1" dirty="0">
+                <a:solidFill>
+                  <a:schemeClr val="tx2"/>
+                </a:solidFill>
+              </a:rPr>
+              <a:t>配對組合</a:t>
+            </a:r>
+            <a:endParaRPr lang="en-US" sz="1600" dirty="0"/>
+          </a:p>
+        </p:txBody>
+      </p:sp>
+      <p:sp>
+        <p:nvSpPr>
+          <p:cNvPr id="12" name="Text 6"/>
+          <p:cNvSpPr txBox="1"/>
+          <p:nvPr/>
+        </p:nvSpPr>
+        <p:spPr>
+          <a:xfrm>
+            <a:off x="2651760" y="2560320"/>
+            <a:ext cx="1691640" cy="777240"/>
+          </a:xfrm>
+          <a:prstGeom prst="rect">
+            <a:avLst/>
+          </a:prstGeom>
+          <a:noFill/>
+          <a:ln/>
+        </p:spPr>
+        <p:txBody>
+          <a:bodyPr wrap="square" lIns="0" tIns="0" rIns="0" bIns="0" rtlCol="0" anchor="t"/>
+          <a:lstStyle/>
+          <a:p>
+            <a:pPr indent="0" marL="0">
+              <a:lnSpc>
+                <a:spcPts val="1500"/>
+              </a:lnSpc>
+              <a:buNone/>
+            </a:pPr>
+            <a:r>
+              <a:rPr lang="en-US" sz="1200" dirty="0">
+                <a:solidFill>
+                  <a:schemeClr val="tx1"/>
+                </a:solidFill>
+              </a:rPr>
+              <a:t>依評估結果，從十大模組配對個人化療程</a:t>
+            </a:r>
+            <a:endParaRPr lang="en-US" sz="1200" dirty="0"/>
+          </a:p>
+        </p:txBody>
+      </p:sp>
+      <p:sp>
+        <p:nvSpPr>
+          <p:cNvPr id="13" name="五日療程 circle"/>
+          <p:cNvSpPr/>
+          <p:nvPr/>
+        </p:nvSpPr>
+        <p:spPr>
+          <a:xfrm>
+            <a:off x="5212080" y="1234440"/>
+            <a:ext cx="777240" cy="777240"/>
+          </a:xfrm>
+          <a:prstGeom prst="ellipse">
+            <a:avLst/>
+          </a:prstGeom>
+          <a:solidFill>
+            <a:srgbClr val="2F4A3A"/>
+          </a:solidFill>
+          <a:ln w="12700">
+            <a:solidFill>
+              <a:srgbClr val="2F4A3A"/>
+            </a:solidFill>
+            <a:prstDash val="solid"/>
+          </a:ln>
+        </p:spPr>
+      </p:sp>
+      <p:pic>
+        <p:nvPicPr>
+          <p:cNvPr id="14" name="五日療程 icon" descr="五日療程">    </p:cNvPr>
+          <p:cNvPicPr>
+            <a:picLocks noChangeAspect="1"/>
+          </p:cNvPicPr>
+          <p:nvPr/>
+        </p:nvPicPr>
+        <p:blipFill>
+          <a:blip r:embed="rId5"/>
+          <a:stretch>
+            <a:fillRect/>
+          </a:stretch>
+        </p:blipFill>
+        <p:spPr>
+          <a:xfrm>
+            <a:off x="5406390" y="1428750"/>
+            <a:ext cx="388620" cy="388620"/>
+          </a:xfrm>
+          <a:prstGeom prst="rect">
+            <a:avLst/>
+          </a:prstGeom>
+        </p:spPr>
+      </p:pic>
+      <p:pic>
+        <p:nvPicPr>
+          <p:cNvPr id="15" name="Arrow 3" descr="next">    </p:cNvPr>
+          <p:cNvPicPr>
+            <a:picLocks noChangeAspect="1"/>
+          </p:cNvPicPr>
+          <p:nvPr/>
+        </p:nvPicPr>
+        <p:blipFill>
+          <a:blip r:embed="rId6"/>
+          <a:stretch>
+            <a:fillRect/>
+          </a:stretch>
+        </p:blipFill>
+        <p:spPr>
+          <a:xfrm>
+            <a:off x="6355080" y="1463040"/>
+            <a:ext cx="320040" cy="320040"/>
+          </a:xfrm>
+          <a:prstGeom prst="rect">
+            <a:avLst/>
+          </a:prstGeom>
+        </p:spPr>
+      </p:pic>
+      <p:sp>
+        <p:nvSpPr>
+          <p:cNvPr id="16" name="Text 8"/>
+          <p:cNvSpPr txBox="1"/>
+          <p:nvPr/>
+        </p:nvSpPr>
+        <p:spPr>
+          <a:xfrm>
+            <a:off x="4663440" y="2148840"/>
+            <a:ext cx="1874520" cy="365760"/>
+          </a:xfrm>
+          <a:prstGeom prst="rect">
+            <a:avLst/>
+          </a:prstGeom>
+          <a:noFill/>
+          <a:ln/>
+        </p:spPr>
+        <p:txBody>
+          <a:bodyPr wrap="square" lIns="0" tIns="0" rIns="0" bIns="0" rtlCol="0" anchor="t"/>
+          <a:lstStyle/>
+          <a:p>
+            <a:pPr algn="ctr" indent="0" marL="0">
+              <a:lnSpc>
+                <a:spcPts val="2000"/>
+              </a:lnSpc>
+              <a:buNone/>
+            </a:pPr>
+            <a:r>
+              <a:rPr lang="en-US" sz="1600" b="1" dirty="0">
+                <a:solidFill>
+                  <a:schemeClr val="tx2"/>
+                </a:solidFill>
+              </a:rPr>
+              <a:t>五日療程</a:t>
+            </a:r>
+            <a:endParaRPr lang="en-US" sz="1600" dirty="0"/>
+          </a:p>
+        </p:txBody>
+      </p:sp>
+      <p:sp>
+        <p:nvSpPr>
+          <p:cNvPr id="17" name="Text 9"/>
+          <p:cNvSpPr txBox="1"/>
+          <p:nvPr/>
+        </p:nvSpPr>
+        <p:spPr>
+          <a:xfrm>
+            <a:off x="4754880" y="2560320"/>
+            <a:ext cx="1691640" cy="777240"/>
+          </a:xfrm>
+          <a:prstGeom prst="rect">
+            <a:avLst/>
+          </a:prstGeom>
+          <a:noFill/>
+          <a:ln/>
+        </p:spPr>
+        <p:txBody>
+          <a:bodyPr wrap="square" lIns="0" tIns="0" rIns="0" bIns="0" rtlCol="0" anchor="t"/>
+          <a:lstStyle/>
+          <a:p>
+            <a:pPr indent="0" marL="0">
+              <a:lnSpc>
+                <a:spcPts val="1500"/>
+              </a:lnSpc>
+              <a:buNone/>
+            </a:pPr>
+            <a:r>
+              <a:rPr lang="en-US" sz="1200" dirty="0">
+                <a:solidFill>
+                  <a:schemeClr val="tx1"/>
+                </a:solidFill>
+              </a:rPr>
+              <a:t>評估 → 放鬆 → 調理 → 整合 → 返家</a:t>
+            </a:r>
+            <a:endParaRPr lang="en-US" sz="1200" dirty="0"/>
+          </a:p>
+        </p:txBody>
+      </p:sp>
+      <p:sp>
+        <p:nvSpPr>
+          <p:cNvPr id="18" name="退房後測 circle"/>
+          <p:cNvSpPr/>
+          <p:nvPr/>
+        </p:nvSpPr>
+        <p:spPr>
+          <a:xfrm>
+            <a:off x="7315200" y="1234440"/>
+            <a:ext cx="777240" cy="777240"/>
+          </a:xfrm>
+          <a:prstGeom prst="ellipse">
+            <a:avLst/>
+          </a:prstGeom>
+          <a:solidFill>
+            <a:srgbClr val="C07A4F"/>
+          </a:solidFill>
+          <a:ln w="12700">
+            <a:solidFill>
+              <a:srgbClr val="C07A4F"/>
+            </a:solidFill>
+            <a:prstDash val="solid"/>
+          </a:ln>
+        </p:spPr>
+      </p:sp>
+      <p:pic>
+        <p:nvPicPr>
+          <p:cNvPr id="19" name="退房後測 icon" descr="退房後測">    </p:cNvPr>
+          <p:cNvPicPr>
+            <a:picLocks noChangeAspect="1"/>
+          </p:cNvPicPr>
+          <p:nvPr/>
+        </p:nvPicPr>
+        <p:blipFill>
+          <a:blip r:embed="rId7"/>
+          <a:stretch>
+            <a:fillRect/>
+          </a:stretch>
+        </p:blipFill>
+        <p:spPr>
+          <a:xfrm>
+            <a:off x="7509510" y="1428750"/>
+            <a:ext cx="388620" cy="388620"/>
+          </a:xfrm>
+          <a:prstGeom prst="rect">
+            <a:avLst/>
+          </a:prstGeom>
+        </p:spPr>
+      </p:pic>
+      <p:sp>
+        <p:nvSpPr>
+          <p:cNvPr id="20" name="Text 11"/>
+          <p:cNvSpPr txBox="1"/>
+          <p:nvPr/>
+        </p:nvSpPr>
+        <p:spPr>
+          <a:xfrm>
+            <a:off x="6766560" y="2148840"/>
+            <a:ext cx="1874520" cy="365760"/>
+          </a:xfrm>
+          <a:prstGeom prst="rect">
+            <a:avLst/>
+          </a:prstGeom>
+          <a:noFill/>
+          <a:ln/>
+        </p:spPr>
+        <p:txBody>
+          <a:bodyPr wrap="square" lIns="0" tIns="0" rIns="0" bIns="0" rtlCol="0" anchor="t"/>
+          <a:lstStyle/>
+          <a:p>
+            <a:pPr algn="ctr" indent="0" marL="0">
+              <a:lnSpc>
+                <a:spcPts val="2000"/>
+              </a:lnSpc>
+              <a:buNone/>
+            </a:pPr>
+            <a:r>
+              <a:rPr lang="en-US" sz="1600" b="1" dirty="0">
+                <a:solidFill>
+                  <a:schemeClr val="tx2"/>
+                </a:solidFill>
+              </a:rPr>
+              <a:t>退房後測</a:t>
+            </a:r>
+            <a:endParaRPr lang="en-US" sz="1600" dirty="0"/>
+          </a:p>
+        </p:txBody>
+      </p:sp>
+      <p:sp>
+        <p:nvSpPr>
+          <p:cNvPr id="21" name="Text 12"/>
+          <p:cNvSpPr txBox="1"/>
+          <p:nvPr/>
+        </p:nvSpPr>
+        <p:spPr>
+          <a:xfrm>
+            <a:off x="6858000" y="2560320"/>
+            <a:ext cx="1691640" cy="777240"/>
+          </a:xfrm>
+          <a:prstGeom prst="rect">
+            <a:avLst/>
+          </a:prstGeom>
+          <a:noFill/>
+          <a:ln/>
+        </p:spPr>
+        <p:txBody>
+          <a:bodyPr wrap="square" lIns="0" tIns="0" rIns="0" bIns="0" rtlCol="0" anchor="t"/>
+          <a:lstStyle/>
+          <a:p>
+            <a:pPr indent="0" marL="0">
+              <a:lnSpc>
+                <a:spcPts val="1500"/>
+              </a:lnSpc>
+              <a:buNone/>
+            </a:pPr>
+            <a:r>
+              <a:rPr lang="en-US" sz="1200" dirty="0">
+                <a:solidFill>
+                  <a:schemeClr val="tx1"/>
+                </a:solidFill>
+              </a:rPr>
+              <a:t>退房前再測一次，與前測對照</a:t>
+            </a:r>
+            <a:endParaRPr lang="en-US" sz="1200" dirty="0"/>
+          </a:p>
+        </p:txBody>
+      </p:sp>
+      <p:sp>
+        <p:nvSpPr>
+          <p:cNvPr id="22" name="Report callout"/>
+          <p:cNvSpPr/>
+          <p:nvPr/>
+        </p:nvSpPr>
+        <p:spPr>
+          <a:xfrm>
+            <a:off x="457200" y="3520440"/>
+            <a:ext cx="8229600" cy="914400"/>
+          </a:xfrm>
+          <a:prstGeom prst="roundRect">
+            <a:avLst>
+              <a:gd name="adj" fmla="val 8000"/>
+            </a:avLst>
+          </a:prstGeom>
+          <a:solidFill>
+            <a:srgbClr val="2F4A3A"/>
+          </a:solidFill>
+          <a:ln w="12700">
+            <a:solidFill>
+              <a:srgbClr val="2F4A3A"/>
+            </a:solidFill>
+            <a:prstDash val="solid"/>
+          </a:ln>
+        </p:spPr>
+      </p:sp>
+      <p:sp>
+        <p:nvSpPr>
+          <p:cNvPr id="23" name="Text 14"/>
+          <p:cNvSpPr txBox="1"/>
+          <p:nvPr/>
+        </p:nvSpPr>
+        <p:spPr>
+          <a:xfrm>
+            <a:off x="731520" y="3520440"/>
+            <a:ext cx="2377440" cy="914400"/>
+          </a:xfrm>
+          <a:prstGeom prst="rect">
+            <a:avLst/>
+          </a:prstGeom>
+          <a:noFill/>
+          <a:ln/>
+        </p:spPr>
+        <p:txBody>
+          <a:bodyPr wrap="square" lIns="0" tIns="0" rIns="0" bIns="0" rtlCol="0" anchor="ctr"/>
+          <a:lstStyle/>
+          <a:p>
+            <a:pPr indent="0" marL="0">
+              <a:lnSpc>
+                <a:spcPts val="2500"/>
+              </a:lnSpc>
+              <a:buNone/>
+            </a:pPr>
+            <a:r>
+              <a:rPr lang="en-US" sz="2000" b="1" dirty="0">
+                <a:solidFill>
+                  <a:schemeClr val="bg1"/>
+                </a:solidFill>
+              </a:rPr>
+              <a:t>「五日健康報告」</a:t>
+            </a:r>
+            <a:endParaRPr lang="en-US" sz="2000" dirty="0"/>
+          </a:p>
+        </p:txBody>
+      </p:sp>
+      <p:sp>
+        <p:nvSpPr>
+          <p:cNvPr id="24" name="Text 15"/>
+          <p:cNvSpPr txBox="1"/>
+          <p:nvPr/>
+        </p:nvSpPr>
+        <p:spPr>
+          <a:xfrm>
+            <a:off x="3200400" y="3520440"/>
+            <a:ext cx="5303520" cy="914400"/>
+          </a:xfrm>
+          <a:prstGeom prst="rect">
+            <a:avLst/>
+          </a:prstGeom>
+          <a:noFill/>
+          <a:ln/>
+        </p:spPr>
+        <p:txBody>
+          <a:bodyPr wrap="square" lIns="0" tIns="0" rIns="0" bIns="0" rtlCol="0" anchor="ctr"/>
+          <a:lstStyle/>
+          <a:p>
+            <a:pPr indent="0" marL="0">
+              <a:lnSpc>
+                <a:spcPts val="1800"/>
+              </a:lnSpc>
+              <a:buNone/>
+            </a:pPr>
+            <a:r>
+              <a:rPr lang="en-US" sz="1400" dirty="0">
+                <a:solidFill>
+                  <a:schemeClr val="accent4"/>
+                </a:solidFill>
+              </a:rPr>
+              <a:t>前後測對照，讓學員看見五天的變化——是口碑與回購的關鍵。</a:t>
+            </a:r>
+            <a:endParaRPr lang="en-US" sz="1400" dirty="0"/>
+          </a:p>
+        </p:txBody>
+      </p:sp>
+      <p:sp>
+        <p:nvSpPr>
+          <p:cNvPr id="25" name="Slide Number Placeholder 0"/>
+          <p:cNvSpPr>
+            <a:spLocks noGrp="1"/>
+          </p:cNvSpPr>
+          <p:nvPr>
+            <p:ph type="sldNum" sz="quarter" idx="4294967295"/>
+          </p:nvPr>
+        </p:nvSpPr>
+        <p:spPr>
+          <a:xfrm>
+            <a:off x="8229600" y="4754880"/>
+            <a:ext cx="457200" cy="274320"/>
+          </a:xfrm>
+          <a:prstGeom prst="rect">
+            <a:avLst/>
+          </a:prstGeom>
+          <a:extLst>
+            <a:ext uri="{C572A759-6A51-4108-AA02-DFA0A04FC94B}">
+              <ma14:wrappingTextBoxFlag xmlns:ma14="http://schemas.microsoft.com/office/mac/drawingml/2011/main" val="0"/>
+            </a:ext>
+          </a:extLst>
+        </p:spPr>
+        <p:txBody>
+          <a:bodyPr/>
+          <a:lstStyle>
+            <a:lvl1pPr>
+              <a:defRPr sz="1000">
+                <a:solidFill>
+                  <a:schemeClr val="accent5"/>
+                </a:solidFill>
+              </a:defRPr>
+            </a:lvl1pPr>
+          </a:lstStyle>
+          <a:p>
+            <a:pPr algn="r"/>
+            <a:fld id="{F7021451-1387-4CA6-816F-3879F97B5CBC}" type="slidenum">
+              <a:rPr b="0" lang="en-US"/>
+              <a:t>11</a:t>
+            </a:fld>
+            <a:endParaRPr lang="en-US"/>
+          </a:p>
+        </p:txBody>
+      </p:sp>
+    </p:spTree>
+  </p:cSld>
+  <p:clrMapOvr>
+    <a:masterClrMapping/>
+  </p:clrMapOvr>
+</p:sld>
+</file>
+
+<file path=ppt/slides/slide12.xml><?xml version="1.0" encoding="utf-8"?>
+<p:sld xmlns:a="http://schemas.openxmlformats.org/drawingml/2006/main" xmlns:r="http://schemas.openxmlformats.org/officeDocument/2006/relationships" xmlns:p="http://schemas.openxmlformats.org/presentationml/2006/main">
+  <p:cSld name="Slide 12">
+    <p:spTree>
+      <p:nvGrpSpPr>
+        <p:cNvPr id="1" name=""/>
+        <p:cNvGrpSpPr/>
+        <p:nvPr/>
+      </p:nvGrpSpPr>
+      <p:grpSpPr>
+        <a:xfrm>
+          <a:off x="0" y="0"/>
+          <a:ext cx="0" cy="0"/>
+          <a:chOff x="0" y="0"/>
+          <a:chExt cx="0" cy="0"/>
+        </a:xfrm>
+      </p:grpSpPr>
+      <p:sp>
+        <p:nvSpPr>
+          <p:cNvPr id="2" name="Text 0"/>
+          <p:cNvSpPr/>
+          <p:nvPr>
+            <p:ph idx="100" type="title" hasCustomPrompt="1"/>
+          </p:nvPr>
+        </p:nvSpPr>
+        <p:spPr>
+          <a:xfrm>
+            <a:off x="457200" y="274320"/>
+            <a:ext cx="8229600" cy="685800"/>
+          </a:xfrm>
+          <a:prstGeom prst="rect">
+            <a:avLst/>
+          </a:prstGeom>
+          <a:noFill/>
+          <a:ln/>
+        </p:spPr>
+        <p:txBody>
+          <a:bodyPr wrap="square" lIns="0" tIns="0" rIns="0" bIns="0" rtlCol="0" anchor="ctr"/>
+          <a:lstStyle/>
+          <a:p>
+            <a:pPr indent="0" marL="0">
+              <a:lnSpc>
+                <a:spcPts val="3400"/>
+              </a:lnSpc>
+              <a:buNone/>
+            </a:pPr>
+            <a:r>
+              <a:rPr lang="en-US" sz="2800" b="1" dirty="0">
+                <a:solidFill>
+                  <a:schemeClr val="tx2"/>
+                </a:solidFill>
+              </a:rPr>
               <a:t>5 天 4 夜行程</a:t>
             </a:r>
             <a:endParaRPr lang="en-US" sz="2800" dirty="0"/>
@@ -3231,7 +4607,7 @@
       </p:sp>
       <p:graphicFrame>
         <p:nvGraphicFramePr>
-          <p:cNvPr id="12" name="Table 0"/>
+          <p:cNvPr id="13" name="Table 0"/>
           <p:cNvGraphicFramePr>
             <a:graphicFrameLocks noGrp="1"/>
           </p:cNvGraphicFramePr>
@@ -4986,7 +6362,7 @@
             <a:pPr algn="r"/>
             <a:fld id="{F7021451-1387-4CA6-816F-3879F97B5CBC}" type="slidenum">
               <a:rPr b="0" lang="en-US"/>
-              <a:t>11</a:t>
+              <a:t>12</a:t>
             </a:fld>
             <a:endParaRPr lang="en-US"/>
           </a:p>
@@ -5000,9 +6376,9 @@
 </p:sld>
 </file>
 
-<file path=ppt/slides/slide12.xml><?xml version="1.0" encoding="utf-8"?>
+<file path=ppt/slides/slide13.xml><?xml version="1.0" encoding="utf-8"?>
 <p:sld xmlns:a="http://schemas.openxmlformats.org/drawingml/2006/main" xmlns:r="http://schemas.openxmlformats.org/officeDocument/2006/relationships" xmlns:p="http://schemas.openxmlformats.org/presentationml/2006/main">
-  <p:cSld name="Slide 12">
+  <p:cSld name="Slide 13">
     <p:spTree>
       <p:nvGrpSpPr>
         <p:cNvPr id="1" name=""/>
@@ -7691,7 +9067,7 @@
                   <a:schemeClr val="tx2"/>
                 </a:solidFill>
               </a:rPr>
-              <a:t>空間規劃：以 8 間客房作為設計樣板</a:t>
+              <a:t>空間規劃：15–20 間客房形成經濟規模</a:t>
             </a:r>
             <a:endParaRPr lang="en-US" sz="2800" dirty="0"/>
           </a:p>
@@ -7732,8 +9108,8 @@
         </p:nvSpPr>
         <p:spPr>
           <a:xfrm>
-            <a:off x="457200" y="1417320"/>
-            <a:ext cx="2377440" cy="1188720"/>
+            <a:off x="457200" y="1508760"/>
+            <a:ext cx="2377440" cy="1005840"/>
           </a:xfrm>
           <a:prstGeom prst="rect">
             <a:avLst/>
@@ -7747,19 +9123,19 @@
           <a:p>
             <a:pPr algn="ctr" indent="0" marL="0">
               <a:lnSpc>
-                <a:spcPts val="9000"/>
-              </a:lnSpc>
-              <a:buNone/>
-            </a:pPr>
-            <a:r>
-              <a:rPr lang="en-US" sz="7200" b="1" dirty="0">
+                <a:spcPts val="6300"/>
+              </a:lnSpc>
+              <a:buNone/>
+            </a:pPr>
+            <a:r>
+              <a:rPr lang="en-US" sz="5000" b="1" dirty="0">
                 <a:solidFill>
                   <a:schemeClr val="bg1"/>
                 </a:solidFill>
               </a:rPr>
-              <a:t>8</a:t>
-            </a:r>
-            <a:endParaRPr lang="en-US" sz="7200" dirty="0"/>
+              <a:t>15–20</a:t>
+            </a:r>
+            <a:endParaRPr lang="en-US" sz="5000" dirty="0"/>
           </a:p>
         </p:txBody>
       </p:sp>
@@ -7835,7 +9211,7 @@
                   <a:schemeClr val="accent4"/>
                 </a:solidFill>
               </a:rPr>
-              <a:t>兼顧個人、伴侶、小家庭與團體活動，又不必承擔大型酒店管理成本</a:t>
+              <a:t>足以分攤療癒師、廚房與活動人力，形成經濟規模；又能維持小團體的陪伴品質</a:t>
             </a:r>
             <a:endParaRPr lang="en-US" sz="1200" dirty="0"/>
           </a:p>
@@ -13450,45 +14826,6 @@
               <a:t>體組成量測、飲食計畫、結業後 30 天追蹤</a:t>
             </a:r>
             <a:endParaRPr lang="en-US" sz="1100" dirty="0"/>
-          </a:p>
-        </p:txBody>
-      </p:sp>
-      <p:sp>
-        <p:nvSpPr>
-          <p:cNvPr id="64" name="Text 62"/>
-          <p:cNvSpPr txBox="1"/>
-          <p:nvPr/>
-        </p:nvSpPr>
-        <p:spPr>
-          <a:xfrm>
-            <a:off x="457200" y="4416552"/>
-            <a:ext cx="8229600" cy="274320"/>
-          </a:xfrm>
-          <a:prstGeom prst="rect">
-            <a:avLst/>
-          </a:prstGeom>
-          <a:noFill/>
-          <a:ln/>
-        </p:spPr>
-        <p:txBody>
-          <a:bodyPr wrap="square" lIns="0" tIns="0" rIns="0" bIns="0" rtlCol="0" anchor="t"/>
-          <a:lstStyle/>
-          <a:p>
-            <a:pPr indent="0" marL="0">
-              <a:lnSpc>
-                <a:spcPts val="1300"/>
-              </a:lnSpc>
-              <a:buNone/>
-            </a:pPr>
-            <a:r>
-              <a:rPr lang="en-US" sz="1000" i="1" dirty="0">
-                <a:solidFill>
-                  <a:schemeClr val="accent3"/>
-                </a:solidFill>
-              </a:rPr>
-              <a:t>康復評估、血壓血糖量測等由合格專業人員執行；涉及醫療的項目與合格醫療機構合作。</a:t>
-            </a:r>
-            <a:endParaRPr lang="en-US" sz="1000" dirty="0"/>
           </a:p>
         </p:txBody>
       </p:sp>

--- a/康復療癒酒店整體設計規劃.pptx
+++ b/康復療癒酒店整體設計規劃.pptx
@@ -18,9 +18,10 @@
     <p:sldId id="266" r:id="rId12"/>
     <p:sldId id="267" r:id="rId13"/>
     <p:sldId id="268" r:id="rId14"/>
+    <p:sldId id="269" r:id="rId15"/>
   </p:sldIdLst>
   <p:notesMasterIdLst>
-    <p:notesMasterId r:id="rId15"/>
+    <p:notesMasterId r:id="rId16"/>
   </p:notesMasterIdLst>
   <p:sldSz cx="9144000" cy="5143500"/>
   <p:notesSz cx="5143500" cy="9144000"/>
@@ -119,41 +120,42 @@
   <p:extLst>
     <p:ext uri="{521415D9-36F7-43E2-AB2F-B90AF26B5E84}">
       <p14:sectionLst xmlns:p14="http://schemas.microsoft.com/office/powerpoint/2010/main">
-        <p14:section name="開場" id="{44cc793a-0c94-3fb5-0a6d-48a4f99adfd6}">
+        <p14:section name="開場" id="{d9ee3859-792d-6c87-fcc3-effff860e44b}">
           <p14:sldIdLst>
             <p14:sldId id="256"/>
           </p14:sldIdLst>
         </p14:section>
-        <p14:section name="定位" id="{46d26de9-7962-5d0c-2fa7-a46fd0884c42}">
+        <p14:section name="定位" id="{98dd0f4e-a5b8-f8c4-2448-fa96d180178a}">
           <p14:sldIdLst>
             <p14:sldId id="257"/>
             <p14:sldId id="258"/>
             <p14:sldId id="259"/>
           </p14:sldIdLst>
         </p14:section>
-        <p14:section name="空間與服務" id="{c654ee90-74c5-2333-f2c6-cadd9be1e011}">
+        <p14:section name="空間與服務" id="{183a6ba5-f3d5-a459-6cf1-02162d01fa5a}">
           <p14:sldIdLst>
             <p14:sldId id="260"/>
             <p14:sldId id="261"/>
           </p14:sldIdLst>
         </p14:section>
-        <p14:section name="品牌與客群" id="{e77aebea-9f6d-8711-51a6-242e82e9556e}">
+        <p14:section name="品牌與客群" id="{15692b6b-f87b-8368-4f45-10bf1a3b573c}">
           <p14:sldIdLst>
             <p14:sldId id="262"/>
             <p14:sldId id="263"/>
           </p14:sldIdLst>
         </p14:section>
-        <p14:section name="療程設計" id="{fdf08d86-e546-7fda-e54e-037c78c9ec51}">
+        <p14:section name="療程設計" id="{361357fe-9430-a648-46ca-a03d68bab60d}">
           <p14:sldIdLst>
             <p14:sldId id="264"/>
             <p14:sldId id="265"/>
             <p14:sldId id="266"/>
             <p14:sldId id="267"/>
+            <p14:sldId id="268"/>
           </p14:sldIdLst>
         </p14:section>
-        <p14:section name="合作價值" id="{4ebc06b0-b144-a7b7-afc9-808214474af6}">
+        <p14:section name="合作價值" id="{4ecc420d-fc6d-ccab-25bc-5b65e36becd0}">
           <p14:sldIdLst>
-            <p14:sldId id="268"/>
+            <p14:sldId id="269"/>
           </p14:sldIdLst>
         </p14:section>
       </p14:sectionLst>
@@ -560,7 +562,7 @@
           <a:p>
             <a:r>
               <a:rPr lang="en-US" dirty="0"/>
-              <a:t>本提案整理康復療癒酒店的定位、空間、服務、品牌、客群、十大療癒模組、山水地景、個人化流程與五天四夜行程。</a:t>
+              <a:t>本提案整理康復療癒酒店的定位、空間、服務、品牌、客群、十大療癒模組、山海湖三境、辟穀、個人化流程與五天四夜行程。</a:t>
             </a:r>
             <a:endParaRPr lang="en-US" dirty="0"/>
           </a:p>
@@ -936,6 +938,94 @@
             <a:fld id="{F7021451-1387-4CA6-816F-3879F97B5CBC}" type="slidenum">
               <a:rPr lang="en-US"/>
               <a:t>13</a:t>
+            </a:fld>
+            <a:endParaRPr lang="en-US"/>
+          </a:p>
+        </p:txBody>
+      </p:sp>
+    </p:spTree>
+    <p:extLst>
+      <p:ext uri="{BB962C8B-B14F-4D97-AF65-F5344CB8AC3E}">
+        <p14:creationId xmlns:p14="http://schemas.microsoft.com/office/powerpoint/2010/main" val="1024086991"/>
+      </p:ext>
+    </p:extLst>
+  </p:cSld>
+  <p:clrMapOvr>
+    <a:masterClrMapping/>
+  </p:clrMapOvr>
+</p:notes>
+</file>
+
+<file path=ppt/notesSlides/notesSlide14.xml><?xml version="1.0" encoding="utf-8"?>
+<p:notes xmlns:a="http://schemas.openxmlformats.org/drawingml/2006/main" xmlns:r="http://schemas.openxmlformats.org/officeDocument/2006/relationships" xmlns:p="http://schemas.openxmlformats.org/presentationml/2006/main">
+  <p:cSld>
+    <p:spTree>
+      <p:nvGrpSpPr>
+        <p:cNvPr id="1" name=""/>
+        <p:cNvGrpSpPr/>
+        <p:nvPr/>
+      </p:nvGrpSpPr>
+      <p:grpSpPr>
+        <a:xfrm>
+          <a:off x="0" y="0"/>
+          <a:ext cx="0" cy="0"/>
+          <a:chOff x="0" y="0"/>
+          <a:chExt cx="0" cy="0"/>
+        </a:xfrm>
+      </p:grpSpPr>
+      <p:sp>
+        <p:nvSpPr>
+          <p:cNvPr id="2" name="Slide Image Placeholder 1"/>
+          <p:cNvSpPr>
+            <a:spLocks noGrp="1" noRot="1" noChangeAspect="1"/>
+          </p:cNvSpPr>
+          <p:nvPr>
+            <p:ph type="sldImg"/>
+          </p:nvPr>
+        </p:nvSpPr>
+        <p:spPr/>
+      </p:sp>
+      <p:sp>
+        <p:nvSpPr>
+          <p:cNvPr id="3" name="Notes Placeholder 2"/>
+          <p:cNvSpPr>
+            <a:spLocks noGrp="1"/>
+          </p:cNvSpPr>
+          <p:nvPr>
+            <p:ph type="body" idx="1"/>
+          </p:nvPr>
+        </p:nvSpPr>
+        <p:spPr/>
+        <p:txBody>
+          <a:bodyPr/>
+          <a:lstStyle/>
+          <a:p>
+            <a:r>
+              <a:rPr lang="en-US" dirty="0"/>
+              <a:t/>
+            </a:r>
+            <a:endParaRPr lang="en-US" dirty="0"/>
+          </a:p>
+        </p:txBody>
+      </p:sp>
+      <p:sp>
+        <p:nvSpPr>
+          <p:cNvPr id="4" name="Slide Number Placeholder 3"/>
+          <p:cNvSpPr>
+            <a:spLocks noGrp="1"/>
+          </p:cNvSpPr>
+          <p:nvPr>
+            <p:ph type="sldNum" sz="quarter" idx="10"/>
+          </p:nvPr>
+        </p:nvSpPr>
+        <p:spPr/>
+        <p:txBody>
+          <a:bodyPr/>
+          <a:lstStyle/>
+          <a:p>
+            <a:fld id="{F7021451-1387-4CA6-816F-3879F97B5CBC}" type="slidenum">
+              <a:rPr lang="en-US"/>
+              <a:t>14</a:t>
             </a:fld>
             <a:endParaRPr lang="en-US"/>
           </a:p>
@@ -2517,7 +2607,7 @@
                   <a:schemeClr val="tx2"/>
                 </a:solidFill>
               </a:rPr>
-              <a:t>山水地景 × 十療：相輔相乘</a:t>
+              <a:t>山・海・湖三境 × 十療辟穀</a:t>
             </a:r>
             <a:endParaRPr lang="en-US" sz="2800" dirty="0"/>
           </a:p>
@@ -2556,7 +2646,7 @@
                   <a:schemeClr val="accent5"/>
                 </a:solidFill>
               </a:rPr>
-              <a:t>地景提供療癒場域，十療提供方法——兩者結合，效果與體驗都放大</a:t>
+              <a:t>地景提供療癒場域，十療與辟穀提供方法——兩者相輔相乘</a:t>
             </a:r>
             <a:endParaRPr lang="en-US" sz="1300" dirty="0"/>
           </a:p>
@@ -2564,18 +2654,18 @@
       </p:sp>
       <p:sp>
         <p:nvSpPr>
-          <p:cNvPr id="4" name="山・山居療癒"/>
+          <p:cNvPr id="4" name="山境"/>
           <p:cNvSpPr/>
           <p:nvPr/>
         </p:nvSpPr>
         <p:spPr>
           <a:xfrm>
             <a:off x="457200" y="1325880"/>
-            <a:ext cx="4023360" cy="2514600"/>
+            <a:ext cx="2615184" cy="2606040"/>
           </a:xfrm>
           <a:prstGeom prst="roundRect">
             <a:avLst>
-              <a:gd name="adj" fmla="val 2909"/>
+              <a:gd name="adj" fmla="val 2807"/>
             </a:avLst>
           </a:prstGeom>
           <a:solidFill>
@@ -2591,13 +2681,13 @@
       </p:sp>
       <p:sp>
         <p:nvSpPr>
-          <p:cNvPr id="5" name="山・山居療癒 circle"/>
+          <p:cNvPr id="5" name="山境 circle"/>
           <p:cNvSpPr/>
           <p:nvPr/>
         </p:nvSpPr>
         <p:spPr>
           <a:xfrm>
-            <a:off x="685800" y="1463040"/>
+            <a:off x="640080" y="1463040"/>
             <a:ext cx="548640" cy="548640"/>
           </a:xfrm>
           <a:prstGeom prst="ellipse">
@@ -2616,7 +2706,7 @@
       </p:sp>
       <p:pic>
         <p:nvPicPr>
-          <p:cNvPr id="6" name="山・山居療癒 icon" descr="山・山居療癒">    </p:cNvPr>
+          <p:cNvPr id="6" name="山境 icon" descr="山境">    </p:cNvPr>
           <p:cNvPicPr>
             <a:picLocks noChangeAspect="1"/>
           </p:cNvPicPr>
@@ -2630,7 +2720,7 @@
         </p:blipFill>
         <p:spPr>
           <a:xfrm>
-            <a:off x="822960" y="1600200"/>
+            <a:off x="777240" y="1600200"/>
             <a:ext cx="274320" cy="274320"/>
           </a:xfrm>
           <a:prstGeom prst="rect">
@@ -2646,8 +2736,8 @@
         </p:nvSpPr>
         <p:spPr>
           <a:xfrm>
-            <a:off x="1371600" y="1572768"/>
-            <a:ext cx="2926080" cy="365760"/>
+            <a:off x="1325880" y="1481328"/>
+            <a:ext cx="1645920" cy="320040"/>
           </a:xfrm>
           <a:prstGeom prst="rect">
             <a:avLst/>
@@ -2661,32 +2751,71 @@
           <a:p>
             <a:pPr indent="0" marL="0">
               <a:lnSpc>
-                <a:spcPts val="2100"/>
-              </a:lnSpc>
-              <a:buNone/>
-            </a:pPr>
-            <a:r>
-              <a:rPr lang="en-US" sz="1700" b="1" dirty="0">
+                <a:spcPts val="2000"/>
+              </a:lnSpc>
+              <a:buNone/>
+            </a:pPr>
+            <a:r>
+              <a:rPr lang="en-US" sz="1600" b="1" dirty="0">
                 <a:solidFill>
                   <a:schemeClr val="tx2"/>
                 </a:solidFill>
               </a:rPr>
-              <a:t>山・山居療癒</a:t>
-            </a:r>
-            <a:endParaRPr lang="en-US" sz="1700" dirty="0"/>
-          </a:p>
-        </p:txBody>
-      </p:sp>
-      <p:sp>
-        <p:nvSpPr>
-          <p:cNvPr id="8" name="山・山居療癒 tag 1"/>
+              <a:t>山境・清修辟穀</a:t>
+            </a:r>
+            <a:endParaRPr lang="en-US" sz="1600" dirty="0"/>
+          </a:p>
+        </p:txBody>
+      </p:sp>
+      <p:sp>
+        <p:nvSpPr>
+          <p:cNvPr id="8" name="Text 5"/>
+          <p:cNvSpPr txBox="1"/>
+          <p:nvPr/>
+        </p:nvSpPr>
+        <p:spPr>
+          <a:xfrm>
+            <a:off x="1325880" y="1801368"/>
+            <a:ext cx="1645920" cy="274320"/>
+          </a:xfrm>
+          <a:prstGeom prst="rect">
+            <a:avLst/>
+          </a:prstGeom>
+          <a:noFill/>
+          <a:ln/>
+        </p:spPr>
+        <p:txBody>
+          <a:bodyPr wrap="square" lIns="0" tIns="0" rIns="0" bIns="0" rtlCol="0" anchor="t"/>
+          <a:lstStyle/>
+          <a:p>
+            <a:pPr indent="0" marL="0">
+              <a:lnSpc>
+                <a:spcPts val="1500"/>
+              </a:lnSpc>
+              <a:buNone/>
+            </a:pPr>
+            <a:r>
+              <a:rPr lang="en-US" sz="1200" b="1" i="1" dirty="0">
+                <a:solidFill>
+                  <a:schemeClr val="accent3"/>
+                </a:solidFill>
+              </a:rPr>
+              <a:t>以山養靜</a:t>
+            </a:r>
+            <a:endParaRPr lang="en-US" sz="1200" dirty="0"/>
+          </a:p>
+        </p:txBody>
+      </p:sp>
+      <p:sp>
+        <p:nvSpPr>
+          <p:cNvPr id="9" name="山境 tag 1"/>
           <p:cNvSpPr/>
           <p:nvPr/>
         </p:nvSpPr>
         <p:spPr>
           <a:xfrm>
-            <a:off x="685800" y="2194560"/>
-            <a:ext cx="1005840" cy="292608"/>
+            <a:off x="640080" y="2231136"/>
+            <a:ext cx="548640" cy="256032"/>
           </a:xfrm>
           <a:prstGeom prst="roundRect">
             <a:avLst>
@@ -2706,53 +2835,14 @@
       </p:sp>
       <p:sp>
         <p:nvSpPr>
-          <p:cNvPr id="9" name="Text 6"/>
-          <p:cNvSpPr txBox="1"/>
-          <p:nvPr/>
-        </p:nvSpPr>
-        <p:spPr>
-          <a:xfrm>
-            <a:off x="685800" y="2194560"/>
-            <a:ext cx="1005840" cy="292608"/>
-          </a:xfrm>
-          <a:prstGeom prst="rect">
-            <a:avLst/>
-          </a:prstGeom>
-          <a:noFill/>
-          <a:ln/>
-        </p:spPr>
-        <p:txBody>
-          <a:bodyPr wrap="square" lIns="0" tIns="0" rIns="0" bIns="0" rtlCol="0" anchor="ctr"/>
-          <a:lstStyle/>
-          <a:p>
-            <a:pPr algn="ctr" indent="0" marL="0">
-              <a:lnSpc>
-                <a:spcPts val="1400"/>
-              </a:lnSpc>
-              <a:buNone/>
-            </a:pPr>
-            <a:r>
-              <a:rPr lang="en-US" sz="1100" b="1" dirty="0">
-                <a:solidFill>
-                  <a:schemeClr val="bg1"/>
-                </a:solidFill>
-              </a:rPr>
-              <a:t>自然療癒</a:t>
-            </a:r>
-            <a:endParaRPr lang="en-US" sz="1100" dirty="0"/>
-          </a:p>
-        </p:txBody>
-      </p:sp>
-      <p:sp>
-        <p:nvSpPr>
           <p:cNvPr id="10" name="Text 7"/>
           <p:cNvSpPr txBox="1"/>
           <p:nvPr/>
         </p:nvSpPr>
         <p:spPr>
           <a:xfrm>
-            <a:off x="1828800" y="2194560"/>
-            <a:ext cx="2514600" cy="292608"/>
+            <a:off x="640080" y="2231136"/>
+            <a:ext cx="548640" cy="256032"/>
           </a:xfrm>
           <a:prstGeom prst="rect">
             <a:avLst/>
@@ -2764,34 +2854,73 @@
           <a:bodyPr wrap="square" lIns="0" tIns="0" rIns="0" bIns="0" rtlCol="0" anchor="ctr"/>
           <a:lstStyle/>
           <a:p>
+            <a:pPr algn="ctr" indent="0" marL="0">
+              <a:lnSpc>
+                <a:spcPts val="1300"/>
+              </a:lnSpc>
+              <a:buNone/>
+            </a:pPr>
+            <a:r>
+              <a:rPr lang="en-US" sz="1000" b="1" dirty="0">
+                <a:solidFill>
+                  <a:schemeClr val="bg1"/>
+                </a:solidFill>
+              </a:rPr>
+              <a:t>場域</a:t>
+            </a:r>
+            <a:endParaRPr lang="en-US" sz="1000" dirty="0"/>
+          </a:p>
+        </p:txBody>
+      </p:sp>
+      <p:sp>
+        <p:nvSpPr>
+          <p:cNvPr id="11" name="Text 8"/>
+          <p:cNvSpPr txBox="1"/>
+          <p:nvPr/>
+        </p:nvSpPr>
+        <p:spPr>
+          <a:xfrm>
+            <a:off x="1280160" y="2212848"/>
+            <a:ext cx="1645920" cy="502920"/>
+          </a:xfrm>
+          <a:prstGeom prst="rect">
+            <a:avLst/>
+          </a:prstGeom>
+          <a:noFill/>
+          <a:ln/>
+        </p:spPr>
+        <p:txBody>
+          <a:bodyPr wrap="square" lIns="0" tIns="0" rIns="0" bIns="0" rtlCol="0" anchor="t"/>
+          <a:lstStyle/>
+          <a:p>
             <a:pPr indent="0" marL="0">
               <a:lnSpc>
-                <a:spcPts val="1600"/>
-              </a:lnSpc>
-              <a:buNone/>
-            </a:pPr>
-            <a:r>
-              <a:rPr lang="en-US" sz="1300" dirty="0">
+                <a:spcPts val="1500"/>
+              </a:lnSpc>
+              <a:buNone/>
+            </a:pPr>
+            <a:r>
+              <a:rPr lang="en-US" sz="1200" dirty="0">
                 <a:solidFill>
                   <a:schemeClr val="tx1"/>
                 </a:solidFill>
               </a:rPr>
-              <a:t>森林步道、林間太極與八段錦</a:t>
-            </a:r>
-            <a:endParaRPr lang="en-US" sz="1300" dirty="0"/>
-          </a:p>
-        </p:txBody>
-      </p:sp>
-      <p:sp>
-        <p:nvSpPr>
-          <p:cNvPr id="11" name="山・山居療癒 tag 2"/>
+              <a:t>森林、山泉、林間平台</a:t>
+            </a:r>
+            <a:endParaRPr lang="en-US" sz="1200" dirty="0"/>
+          </a:p>
+        </p:txBody>
+      </p:sp>
+      <p:sp>
+        <p:nvSpPr>
+          <p:cNvPr id="12" name="山境 tag 2"/>
           <p:cNvSpPr/>
           <p:nvPr/>
         </p:nvSpPr>
         <p:spPr>
           <a:xfrm>
-            <a:off x="685800" y="2596896"/>
-            <a:ext cx="1005840" cy="292608"/>
+            <a:off x="640080" y="2779776"/>
+            <a:ext cx="548640" cy="256032"/>
           </a:xfrm>
           <a:prstGeom prst="roundRect">
             <a:avLst>
@@ -2811,53 +2940,14 @@
       </p:sp>
       <p:sp>
         <p:nvSpPr>
-          <p:cNvPr id="12" name="Text 9"/>
-          <p:cNvSpPr txBox="1"/>
-          <p:nvPr/>
-        </p:nvSpPr>
-        <p:spPr>
-          <a:xfrm>
-            <a:off x="685800" y="2596896"/>
-            <a:ext cx="1005840" cy="292608"/>
-          </a:xfrm>
-          <a:prstGeom prst="rect">
-            <a:avLst/>
-          </a:prstGeom>
-          <a:noFill/>
-          <a:ln/>
-        </p:spPr>
-        <p:txBody>
-          <a:bodyPr wrap="square" lIns="0" tIns="0" rIns="0" bIns="0" rtlCol="0" anchor="ctr"/>
-          <a:lstStyle/>
-          <a:p>
-            <a:pPr algn="ctr" indent="0" marL="0">
-              <a:lnSpc>
-                <a:spcPts val="1400"/>
-              </a:lnSpc>
-              <a:buNone/>
-            </a:pPr>
-            <a:r>
-              <a:rPr lang="en-US" sz="1100" b="1" dirty="0">
-                <a:solidFill>
-                  <a:schemeClr val="bg1"/>
-                </a:solidFill>
-              </a:rPr>
-              <a:t>音療</a:t>
-            </a:r>
-            <a:endParaRPr lang="en-US" sz="1100" dirty="0"/>
-          </a:p>
-        </p:txBody>
-      </p:sp>
-      <p:sp>
-        <p:nvSpPr>
           <p:cNvPr id="13" name="Text 10"/>
           <p:cNvSpPr txBox="1"/>
           <p:nvPr/>
         </p:nvSpPr>
         <p:spPr>
           <a:xfrm>
-            <a:off x="1828800" y="2596896"/>
-            <a:ext cx="2514600" cy="292608"/>
+            <a:off x="640080" y="2779776"/>
+            <a:ext cx="548640" cy="256032"/>
           </a:xfrm>
           <a:prstGeom prst="rect">
             <a:avLst/>
@@ -2869,34 +2959,73 @@
           <a:bodyPr wrap="square" lIns="0" tIns="0" rIns="0" bIns="0" rtlCol="0" anchor="ctr"/>
           <a:lstStyle/>
           <a:p>
+            <a:pPr algn="ctr" indent="0" marL="0">
+              <a:lnSpc>
+                <a:spcPts val="1300"/>
+              </a:lnSpc>
+              <a:buNone/>
+            </a:pPr>
+            <a:r>
+              <a:rPr lang="en-US" sz="1000" b="1" dirty="0">
+                <a:solidFill>
+                  <a:schemeClr val="bg1"/>
+                </a:solidFill>
+              </a:rPr>
+              <a:t>十療</a:t>
+            </a:r>
+            <a:endParaRPr lang="en-US" sz="1000" dirty="0"/>
+          </a:p>
+        </p:txBody>
+      </p:sp>
+      <p:sp>
+        <p:nvSpPr>
+          <p:cNvPr id="14" name="Text 11"/>
+          <p:cNvSpPr txBox="1"/>
+          <p:nvPr/>
+        </p:nvSpPr>
+        <p:spPr>
+          <a:xfrm>
+            <a:off x="1280160" y="2761488"/>
+            <a:ext cx="1645920" cy="502920"/>
+          </a:xfrm>
+          <a:prstGeom prst="rect">
+            <a:avLst/>
+          </a:prstGeom>
+          <a:noFill/>
+          <a:ln/>
+        </p:spPr>
+        <p:txBody>
+          <a:bodyPr wrap="square" lIns="0" tIns="0" rIns="0" bIns="0" rtlCol="0" anchor="t"/>
+          <a:lstStyle/>
+          <a:p>
             <a:pPr indent="0" marL="0">
               <a:lnSpc>
-                <a:spcPts val="1600"/>
-              </a:lnSpc>
-              <a:buNone/>
-            </a:pPr>
-            <a:r>
-              <a:rPr lang="en-US" sz="1300" dirty="0">
+                <a:spcPts val="1500"/>
+              </a:lnSpc>
+              <a:buNone/>
+            </a:pPr>
+            <a:r>
+              <a:rPr lang="en-US" sz="1200" dirty="0">
                 <a:solidFill>
                   <a:schemeClr val="tx1"/>
                 </a:solidFill>
               </a:rPr>
-              <a:t>山泉、鳥鳴自然聲音浴</a:t>
-            </a:r>
-            <a:endParaRPr lang="en-US" sz="1300" dirty="0"/>
-          </a:p>
-        </p:txBody>
-      </p:sp>
-      <p:sp>
-        <p:nvSpPr>
-          <p:cNvPr id="14" name="山・山居療癒 tag 3"/>
+              <a:t>林間太極八段錦、山泉溫泡、鳥鳴聲音浴</a:t>
+            </a:r>
+            <a:endParaRPr lang="en-US" sz="1200" dirty="0"/>
+          </a:p>
+        </p:txBody>
+      </p:sp>
+      <p:sp>
+        <p:nvSpPr>
+          <p:cNvPr id="15" name="山境 tag 3"/>
           <p:cNvSpPr/>
           <p:nvPr/>
         </p:nvSpPr>
         <p:spPr>
           <a:xfrm>
-            <a:off x="685800" y="2999232"/>
-            <a:ext cx="1005840" cy="292608"/>
+            <a:off x="640080" y="3328416"/>
+            <a:ext cx="548640" cy="256032"/>
           </a:xfrm>
           <a:prstGeom prst="roundRect">
             <a:avLst>
@@ -2916,53 +3045,14 @@
       </p:sp>
       <p:sp>
         <p:nvSpPr>
-          <p:cNvPr id="15" name="Text 12"/>
-          <p:cNvSpPr txBox="1"/>
-          <p:nvPr/>
-        </p:nvSpPr>
-        <p:spPr>
-          <a:xfrm>
-            <a:off x="685800" y="2999232"/>
-            <a:ext cx="1005840" cy="292608"/>
-          </a:xfrm>
-          <a:prstGeom prst="rect">
-            <a:avLst/>
-          </a:prstGeom>
-          <a:noFill/>
-          <a:ln/>
-        </p:spPr>
-        <p:txBody>
-          <a:bodyPr wrap="square" lIns="0" tIns="0" rIns="0" bIns="0" rtlCol="0" anchor="ctr"/>
-          <a:lstStyle/>
-          <a:p>
-            <a:pPr algn="ctr" indent="0" marL="0">
-              <a:lnSpc>
-                <a:spcPts val="1400"/>
-              </a:lnSpc>
-              <a:buNone/>
-            </a:pPr>
-            <a:r>
-              <a:rPr lang="en-US" sz="1100" b="1" dirty="0">
-                <a:solidFill>
-                  <a:schemeClr val="bg1"/>
-                </a:solidFill>
-              </a:rPr>
-              <a:t>放鬆療癒</a:t>
-            </a:r>
-            <a:endParaRPr lang="en-US" sz="1100" dirty="0"/>
-          </a:p>
-        </p:txBody>
-      </p:sp>
-      <p:sp>
-        <p:nvSpPr>
           <p:cNvPr id="16" name="Text 13"/>
           <p:cNvSpPr txBox="1"/>
           <p:nvPr/>
         </p:nvSpPr>
         <p:spPr>
           <a:xfrm>
-            <a:off x="1828800" y="2999232"/>
-            <a:ext cx="2514600" cy="292608"/>
+            <a:off x="640080" y="3328416"/>
+            <a:ext cx="548640" cy="256032"/>
           </a:xfrm>
           <a:prstGeom prst="rect">
             <a:avLst/>
@@ -2974,38 +3064,1015 @@
           <a:bodyPr wrap="square" lIns="0" tIns="0" rIns="0" bIns="0" rtlCol="0" anchor="ctr"/>
           <a:lstStyle/>
           <a:p>
+            <a:pPr algn="ctr" indent="0" marL="0">
+              <a:lnSpc>
+                <a:spcPts val="1300"/>
+              </a:lnSpc>
+              <a:buNone/>
+            </a:pPr>
+            <a:r>
+              <a:rPr lang="en-US" sz="1000" b="1" dirty="0">
+                <a:solidFill>
+                  <a:schemeClr val="bg1"/>
+                </a:solidFill>
+              </a:rPr>
+              <a:t>辟穀</a:t>
+            </a:r>
+            <a:endParaRPr lang="en-US" sz="1000" dirty="0"/>
+          </a:p>
+        </p:txBody>
+      </p:sp>
+      <p:sp>
+        <p:nvSpPr>
+          <p:cNvPr id="17" name="Text 14"/>
+          <p:cNvSpPr txBox="1"/>
+          <p:nvPr/>
+        </p:nvSpPr>
+        <p:spPr>
+          <a:xfrm>
+            <a:off x="1280160" y="3310128"/>
+            <a:ext cx="1645920" cy="502920"/>
+          </a:xfrm>
+          <a:prstGeom prst="rect">
+            <a:avLst/>
+          </a:prstGeom>
+          <a:noFill/>
+          <a:ln/>
+        </p:spPr>
+        <p:txBody>
+          <a:bodyPr wrap="square" lIns="0" tIns="0" rIns="0" bIns="0" rtlCol="0" anchor="t"/>
+          <a:lstStyle/>
+          <a:p>
             <a:pPr indent="0" marL="0">
               <a:lnSpc>
-                <a:spcPts val="1600"/>
-              </a:lnSpc>
-              <a:buNone/>
-            </a:pPr>
-            <a:r>
-              <a:rPr lang="en-US" sz="1300" dirty="0">
+                <a:spcPts val="1500"/>
+              </a:lnSpc>
+              <a:buNone/>
+            </a:pPr>
+            <a:r>
+              <a:rPr lang="en-US" sz="1200" dirty="0">
                 <a:solidFill>
                   <a:schemeClr val="tx1"/>
                 </a:solidFill>
               </a:rPr>
-              <a:t>山泉溫泡、足浴</a:t>
-            </a:r>
-            <a:endParaRPr lang="en-US" sz="1300" dirty="0"/>
-          </a:p>
-        </p:txBody>
-      </p:sp>
-      <p:sp>
-        <p:nvSpPr>
-          <p:cNvPr id="17" name="山・山居療癒 tag 4"/>
+              <a:t>林間吐納、山泉草本飲</a:t>
+            </a:r>
+            <a:endParaRPr lang="en-US" sz="1200" dirty="0"/>
+          </a:p>
+        </p:txBody>
+      </p:sp>
+      <p:sp>
+        <p:nvSpPr>
+          <p:cNvPr id="18" name="海境"/>
           <p:cNvSpPr/>
           <p:nvPr/>
         </p:nvSpPr>
         <p:spPr>
           <a:xfrm>
-            <a:off x="685800" y="3401568"/>
-            <a:ext cx="1005840" cy="292608"/>
+            <a:off x="3264408" y="1325880"/>
+            <a:ext cx="2615184" cy="2606040"/>
+          </a:xfrm>
+          <a:prstGeom prst="roundRect">
+            <a:avLst>
+              <a:gd name="adj" fmla="val 2807"/>
+            </a:avLst>
+          </a:prstGeom>
+          <a:solidFill>
+            <a:srgbClr val="EEF3EC"/>
+          </a:solidFill>
+          <a:ln w="12700">
+            <a:solidFill>
+              <a:srgbClr val="EEF3EC"/>
+            </a:solidFill>
+            <a:prstDash val="solid"/>
+          </a:ln>
+        </p:spPr>
+      </p:sp>
+      <p:sp>
+        <p:nvSpPr>
+          <p:cNvPr id="19" name="海境 circle"/>
+          <p:cNvSpPr/>
+          <p:nvPr/>
+        </p:nvSpPr>
+        <p:spPr>
+          <a:xfrm>
+            <a:off x="3447288" y="1463040"/>
+            <a:ext cx="548640" cy="548640"/>
+          </a:xfrm>
+          <a:prstGeom prst="ellipse">
+            <a:avLst/>
+          </a:prstGeom>
+          <a:solidFill>
+            <a:srgbClr val="3E6B7A"/>
+          </a:solidFill>
+          <a:ln w="12700">
+            <a:solidFill>
+              <a:srgbClr val="3E6B7A"/>
+            </a:solidFill>
+            <a:prstDash val="solid"/>
+          </a:ln>
+        </p:spPr>
+      </p:sp>
+      <p:pic>
+        <p:nvPicPr>
+          <p:cNvPr id="20" name="海境 icon" descr="海境">    </p:cNvPr>
+          <p:cNvPicPr>
+            <a:picLocks noChangeAspect="1"/>
+          </p:cNvPicPr>
+          <p:nvPr/>
+        </p:nvPicPr>
+        <p:blipFill>
+          <a:blip r:embed="rId2"/>
+          <a:stretch>
+            <a:fillRect/>
+          </a:stretch>
+        </p:blipFill>
+        <p:spPr>
+          <a:xfrm>
+            <a:off x="3584448" y="1600200"/>
+            <a:ext cx="274320" cy="274320"/>
+          </a:xfrm>
+          <a:prstGeom prst="rect">
+            <a:avLst/>
+          </a:prstGeom>
+        </p:spPr>
+      </p:pic>
+      <p:sp>
+        <p:nvSpPr>
+          <p:cNvPr id="21" name="Text 17"/>
+          <p:cNvSpPr txBox="1"/>
+          <p:nvPr/>
+        </p:nvSpPr>
+        <p:spPr>
+          <a:xfrm>
+            <a:off x="4133088" y="1481328"/>
+            <a:ext cx="1645920" cy="320040"/>
+          </a:xfrm>
+          <a:prstGeom prst="rect">
+            <a:avLst/>
+          </a:prstGeom>
+          <a:noFill/>
+          <a:ln/>
+        </p:spPr>
+        <p:txBody>
+          <a:bodyPr wrap="square" lIns="0" tIns="0" rIns="0" bIns="0" rtlCol="0" anchor="t"/>
+          <a:lstStyle/>
+          <a:p>
+            <a:pPr indent="0" marL="0">
+              <a:lnSpc>
+                <a:spcPts val="2000"/>
+              </a:lnSpc>
+              <a:buNone/>
+            </a:pPr>
+            <a:r>
+              <a:rPr lang="en-US" sz="1600" b="1" dirty="0">
+                <a:solidFill>
+                  <a:schemeClr val="tx2"/>
+                </a:solidFill>
+              </a:rPr>
+              <a:t>海境・潮息辟穀</a:t>
+            </a:r>
+            <a:endParaRPr lang="en-US" sz="1600" dirty="0"/>
+          </a:p>
+        </p:txBody>
+      </p:sp>
+      <p:sp>
+        <p:nvSpPr>
+          <p:cNvPr id="22" name="Text 18"/>
+          <p:cNvSpPr txBox="1"/>
+          <p:nvPr/>
+        </p:nvSpPr>
+        <p:spPr>
+          <a:xfrm>
+            <a:off x="4133088" y="1801368"/>
+            <a:ext cx="1645920" cy="274320"/>
+          </a:xfrm>
+          <a:prstGeom prst="rect">
+            <a:avLst/>
+          </a:prstGeom>
+          <a:noFill/>
+          <a:ln/>
+        </p:spPr>
+        <p:txBody>
+          <a:bodyPr wrap="square" lIns="0" tIns="0" rIns="0" bIns="0" rtlCol="0" anchor="t"/>
+          <a:lstStyle/>
+          <a:p>
+            <a:pPr indent="0" marL="0">
+              <a:lnSpc>
+                <a:spcPts val="1500"/>
+              </a:lnSpc>
+              <a:buNone/>
+            </a:pPr>
+            <a:r>
+              <a:rPr lang="en-US" sz="1200" b="1" i="1" dirty="0">
+                <a:solidFill>
+                  <a:schemeClr val="accent3"/>
+                </a:solidFill>
+              </a:rPr>
+              <a:t>以海調息</a:t>
+            </a:r>
+            <a:endParaRPr lang="en-US" sz="1200" dirty="0"/>
+          </a:p>
+        </p:txBody>
+      </p:sp>
+      <p:sp>
+        <p:nvSpPr>
+          <p:cNvPr id="23" name="海境 tag 1"/>
+          <p:cNvSpPr/>
+          <p:nvPr/>
+        </p:nvSpPr>
+        <p:spPr>
+          <a:xfrm>
+            <a:off x="3447288" y="2231136"/>
+            <a:ext cx="548640" cy="256032"/>
           </a:xfrm>
           <a:prstGeom prst="roundRect">
             <a:avLst>
               <a:gd name="adj" fmla="val 50000"/>
+            </a:avLst>
+          </a:prstGeom>
+          <a:solidFill>
+            <a:srgbClr val="3E6B7A"/>
+          </a:solidFill>
+          <a:ln w="12700">
+            <a:solidFill>
+              <a:srgbClr val="3E6B7A"/>
+            </a:solidFill>
+            <a:prstDash val="solid"/>
+          </a:ln>
+        </p:spPr>
+      </p:sp>
+      <p:sp>
+        <p:nvSpPr>
+          <p:cNvPr id="24" name="Text 20"/>
+          <p:cNvSpPr txBox="1"/>
+          <p:nvPr/>
+        </p:nvSpPr>
+        <p:spPr>
+          <a:xfrm>
+            <a:off x="3447288" y="2231136"/>
+            <a:ext cx="548640" cy="256032"/>
+          </a:xfrm>
+          <a:prstGeom prst="rect">
+            <a:avLst/>
+          </a:prstGeom>
+          <a:noFill/>
+          <a:ln/>
+        </p:spPr>
+        <p:txBody>
+          <a:bodyPr wrap="square" lIns="0" tIns="0" rIns="0" bIns="0" rtlCol="0" anchor="ctr"/>
+          <a:lstStyle/>
+          <a:p>
+            <a:pPr algn="ctr" indent="0" marL="0">
+              <a:lnSpc>
+                <a:spcPts val="1300"/>
+              </a:lnSpc>
+              <a:buNone/>
+            </a:pPr>
+            <a:r>
+              <a:rPr lang="en-US" sz="1000" b="1" dirty="0">
+                <a:solidFill>
+                  <a:schemeClr val="bg1"/>
+                </a:solidFill>
+              </a:rPr>
+              <a:t>場域</a:t>
+            </a:r>
+            <a:endParaRPr lang="en-US" sz="1000" dirty="0"/>
+          </a:p>
+        </p:txBody>
+      </p:sp>
+      <p:sp>
+        <p:nvSpPr>
+          <p:cNvPr id="25" name="Text 21"/>
+          <p:cNvSpPr txBox="1"/>
+          <p:nvPr/>
+        </p:nvSpPr>
+        <p:spPr>
+          <a:xfrm>
+            <a:off x="4087368" y="2212848"/>
+            <a:ext cx="1645920" cy="502920"/>
+          </a:xfrm>
+          <a:prstGeom prst="rect">
+            <a:avLst/>
+          </a:prstGeom>
+          <a:noFill/>
+          <a:ln/>
+        </p:spPr>
+        <p:txBody>
+          <a:bodyPr wrap="square" lIns="0" tIns="0" rIns="0" bIns="0" rtlCol="0" anchor="t"/>
+          <a:lstStyle/>
+          <a:p>
+            <a:pPr indent="0" marL="0">
+              <a:lnSpc>
+                <a:spcPts val="1500"/>
+              </a:lnSpc>
+              <a:buNone/>
+            </a:pPr>
+            <a:r>
+              <a:rPr lang="en-US" sz="1200" dirty="0">
+                <a:solidFill>
+                  <a:schemeClr val="tx1"/>
+                </a:solidFill>
+              </a:rPr>
+              <a:t>海岸、沙灘、海風</a:t>
+            </a:r>
+            <a:endParaRPr lang="en-US" sz="1200" dirty="0"/>
+          </a:p>
+        </p:txBody>
+      </p:sp>
+      <p:sp>
+        <p:nvSpPr>
+          <p:cNvPr id="26" name="海境 tag 2"/>
+          <p:cNvSpPr/>
+          <p:nvPr/>
+        </p:nvSpPr>
+        <p:spPr>
+          <a:xfrm>
+            <a:off x="3447288" y="2779776"/>
+            <a:ext cx="548640" cy="256032"/>
+          </a:xfrm>
+          <a:prstGeom prst="roundRect">
+            <a:avLst>
+              <a:gd name="adj" fmla="val 50000"/>
+            </a:avLst>
+          </a:prstGeom>
+          <a:solidFill>
+            <a:srgbClr val="3E6B7A"/>
+          </a:solidFill>
+          <a:ln w="12700">
+            <a:solidFill>
+              <a:srgbClr val="3E6B7A"/>
+            </a:solidFill>
+            <a:prstDash val="solid"/>
+          </a:ln>
+        </p:spPr>
+      </p:sp>
+      <p:sp>
+        <p:nvSpPr>
+          <p:cNvPr id="27" name="Text 23"/>
+          <p:cNvSpPr txBox="1"/>
+          <p:nvPr/>
+        </p:nvSpPr>
+        <p:spPr>
+          <a:xfrm>
+            <a:off x="3447288" y="2779776"/>
+            <a:ext cx="548640" cy="256032"/>
+          </a:xfrm>
+          <a:prstGeom prst="rect">
+            <a:avLst/>
+          </a:prstGeom>
+          <a:noFill/>
+          <a:ln/>
+        </p:spPr>
+        <p:txBody>
+          <a:bodyPr wrap="square" lIns="0" tIns="0" rIns="0" bIns="0" rtlCol="0" anchor="ctr"/>
+          <a:lstStyle/>
+          <a:p>
+            <a:pPr algn="ctr" indent="0" marL="0">
+              <a:lnSpc>
+                <a:spcPts val="1300"/>
+              </a:lnSpc>
+              <a:buNone/>
+            </a:pPr>
+            <a:r>
+              <a:rPr lang="en-US" sz="1000" b="1" dirty="0">
+                <a:solidFill>
+                  <a:schemeClr val="bg1"/>
+                </a:solidFill>
+              </a:rPr>
+              <a:t>十療</a:t>
+            </a:r>
+            <a:endParaRPr lang="en-US" sz="1000" dirty="0"/>
+          </a:p>
+        </p:txBody>
+      </p:sp>
+      <p:sp>
+        <p:nvSpPr>
+          <p:cNvPr id="28" name="Text 24"/>
+          <p:cNvSpPr txBox="1"/>
+          <p:nvPr/>
+        </p:nvSpPr>
+        <p:spPr>
+          <a:xfrm>
+            <a:off x="4087368" y="2761488"/>
+            <a:ext cx="1645920" cy="502920"/>
+          </a:xfrm>
+          <a:prstGeom prst="rect">
+            <a:avLst/>
+          </a:prstGeom>
+          <a:noFill/>
+          <a:ln/>
+        </p:spPr>
+        <p:txBody>
+          <a:bodyPr wrap="square" lIns="0" tIns="0" rIns="0" bIns="0" rtlCol="0" anchor="t"/>
+          <a:lstStyle/>
+          <a:p>
+            <a:pPr indent="0" marL="0">
+              <a:lnSpc>
+                <a:spcPts val="1500"/>
+              </a:lnSpc>
+              <a:buNone/>
+            </a:pPr>
+            <a:r>
+              <a:rPr lang="en-US" sz="1200" dirty="0">
+                <a:solidFill>
+                  <a:schemeClr val="tx1"/>
+                </a:solidFill>
+              </a:rPr>
+              <a:t>海邊散步、海浪聲音浴、日出冥想</a:t>
+            </a:r>
+            <a:endParaRPr lang="en-US" sz="1200" dirty="0"/>
+          </a:p>
+        </p:txBody>
+      </p:sp>
+      <p:sp>
+        <p:nvSpPr>
+          <p:cNvPr id="29" name="海境 tag 3"/>
+          <p:cNvSpPr/>
+          <p:nvPr/>
+        </p:nvSpPr>
+        <p:spPr>
+          <a:xfrm>
+            <a:off x="3447288" y="3328416"/>
+            <a:ext cx="548640" cy="256032"/>
+          </a:xfrm>
+          <a:prstGeom prst="roundRect">
+            <a:avLst>
+              <a:gd name="adj" fmla="val 50000"/>
+            </a:avLst>
+          </a:prstGeom>
+          <a:solidFill>
+            <a:srgbClr val="3E6B7A"/>
+          </a:solidFill>
+          <a:ln w="12700">
+            <a:solidFill>
+              <a:srgbClr val="3E6B7A"/>
+            </a:solidFill>
+            <a:prstDash val="solid"/>
+          </a:ln>
+        </p:spPr>
+      </p:sp>
+      <p:sp>
+        <p:nvSpPr>
+          <p:cNvPr id="30" name="Text 26"/>
+          <p:cNvSpPr txBox="1"/>
+          <p:nvPr/>
+        </p:nvSpPr>
+        <p:spPr>
+          <a:xfrm>
+            <a:off x="3447288" y="3328416"/>
+            <a:ext cx="548640" cy="256032"/>
+          </a:xfrm>
+          <a:prstGeom prst="rect">
+            <a:avLst/>
+          </a:prstGeom>
+          <a:noFill/>
+          <a:ln/>
+        </p:spPr>
+        <p:txBody>
+          <a:bodyPr wrap="square" lIns="0" tIns="0" rIns="0" bIns="0" rtlCol="0" anchor="ctr"/>
+          <a:lstStyle/>
+          <a:p>
+            <a:pPr algn="ctr" indent="0" marL="0">
+              <a:lnSpc>
+                <a:spcPts val="1300"/>
+              </a:lnSpc>
+              <a:buNone/>
+            </a:pPr>
+            <a:r>
+              <a:rPr lang="en-US" sz="1000" b="1" dirty="0">
+                <a:solidFill>
+                  <a:schemeClr val="bg1"/>
+                </a:solidFill>
+              </a:rPr>
+              <a:t>辟穀</a:t>
+            </a:r>
+            <a:endParaRPr lang="en-US" sz="1000" dirty="0"/>
+          </a:p>
+        </p:txBody>
+      </p:sp>
+      <p:sp>
+        <p:nvSpPr>
+          <p:cNvPr id="31" name="Text 27"/>
+          <p:cNvSpPr txBox="1"/>
+          <p:nvPr/>
+        </p:nvSpPr>
+        <p:spPr>
+          <a:xfrm>
+            <a:off x="4087368" y="3310128"/>
+            <a:ext cx="1645920" cy="502920"/>
+          </a:xfrm>
+          <a:prstGeom prst="rect">
+            <a:avLst/>
+          </a:prstGeom>
+          <a:noFill/>
+          <a:ln/>
+        </p:spPr>
+        <p:txBody>
+          <a:bodyPr wrap="square" lIns="0" tIns="0" rIns="0" bIns="0" rtlCol="0" anchor="t"/>
+          <a:lstStyle/>
+          <a:p>
+            <a:pPr indent="0" marL="0">
+              <a:lnSpc>
+                <a:spcPts val="1500"/>
+              </a:lnSpc>
+              <a:buNone/>
+            </a:pPr>
+            <a:r>
+              <a:rPr lang="en-US" sz="1200" dirty="0">
+                <a:solidFill>
+                  <a:schemeClr val="tx1"/>
+                </a:solidFill>
+              </a:rPr>
+              <a:t>海風服氣、潮汐呼吸法</a:t>
+            </a:r>
+            <a:endParaRPr lang="en-US" sz="1200" dirty="0"/>
+          </a:p>
+        </p:txBody>
+      </p:sp>
+      <p:sp>
+        <p:nvSpPr>
+          <p:cNvPr id="32" name="湖境"/>
+          <p:cNvSpPr/>
+          <p:nvPr/>
+        </p:nvSpPr>
+        <p:spPr>
+          <a:xfrm>
+            <a:off x="6071616" y="1325880"/>
+            <a:ext cx="2615184" cy="2606040"/>
+          </a:xfrm>
+          <a:prstGeom prst="roundRect">
+            <a:avLst>
+              <a:gd name="adj" fmla="val 2807"/>
+            </a:avLst>
+          </a:prstGeom>
+          <a:solidFill>
+            <a:srgbClr val="EEF3EC"/>
+          </a:solidFill>
+          <a:ln w="12700">
+            <a:solidFill>
+              <a:srgbClr val="EEF3EC"/>
+            </a:solidFill>
+            <a:prstDash val="solid"/>
+          </a:ln>
+        </p:spPr>
+      </p:sp>
+      <p:sp>
+        <p:nvSpPr>
+          <p:cNvPr id="33" name="湖境 circle"/>
+          <p:cNvSpPr/>
+          <p:nvPr/>
+        </p:nvSpPr>
+        <p:spPr>
+          <a:xfrm>
+            <a:off x="6254496" y="1463040"/>
+            <a:ext cx="548640" cy="548640"/>
+          </a:xfrm>
+          <a:prstGeom prst="ellipse">
+            <a:avLst/>
+          </a:prstGeom>
+          <a:solidFill>
+            <a:srgbClr val="C07A4F"/>
+          </a:solidFill>
+          <a:ln w="12700">
+            <a:solidFill>
+              <a:srgbClr val="C07A4F"/>
+            </a:solidFill>
+            <a:prstDash val="solid"/>
+          </a:ln>
+        </p:spPr>
+      </p:sp>
+      <p:pic>
+        <p:nvPicPr>
+          <p:cNvPr id="34" name="湖境 icon" descr="湖境">    </p:cNvPr>
+          <p:cNvPicPr>
+            <a:picLocks noChangeAspect="1"/>
+          </p:cNvPicPr>
+          <p:nvPr/>
+        </p:nvPicPr>
+        <p:blipFill>
+          <a:blip r:embed="rId3"/>
+          <a:stretch>
+            <a:fillRect/>
+          </a:stretch>
+        </p:blipFill>
+        <p:spPr>
+          <a:xfrm>
+            <a:off x="6391656" y="1600200"/>
+            <a:ext cx="274320" cy="274320"/>
+          </a:xfrm>
+          <a:prstGeom prst="rect">
+            <a:avLst/>
+          </a:prstGeom>
+        </p:spPr>
+      </p:pic>
+      <p:sp>
+        <p:nvSpPr>
+          <p:cNvPr id="35" name="Text 30"/>
+          <p:cNvSpPr txBox="1"/>
+          <p:nvPr/>
+        </p:nvSpPr>
+        <p:spPr>
+          <a:xfrm>
+            <a:off x="6940296" y="1481328"/>
+            <a:ext cx="1645920" cy="320040"/>
+          </a:xfrm>
+          <a:prstGeom prst="rect">
+            <a:avLst/>
+          </a:prstGeom>
+          <a:noFill/>
+          <a:ln/>
+        </p:spPr>
+        <p:txBody>
+          <a:bodyPr wrap="square" lIns="0" tIns="0" rIns="0" bIns="0" rtlCol="0" anchor="t"/>
+          <a:lstStyle/>
+          <a:p>
+            <a:pPr indent="0" marL="0">
+              <a:lnSpc>
+                <a:spcPts val="2000"/>
+              </a:lnSpc>
+              <a:buNone/>
+            </a:pPr>
+            <a:r>
+              <a:rPr lang="en-US" sz="1600" b="1" dirty="0">
+                <a:solidFill>
+                  <a:schemeClr val="tx2"/>
+                </a:solidFill>
+              </a:rPr>
+              <a:t>湖境・澄心辟穀</a:t>
+            </a:r>
+            <a:endParaRPr lang="en-US" sz="1600" dirty="0"/>
+          </a:p>
+        </p:txBody>
+      </p:sp>
+      <p:sp>
+        <p:nvSpPr>
+          <p:cNvPr id="36" name="Text 31"/>
+          <p:cNvSpPr txBox="1"/>
+          <p:nvPr/>
+        </p:nvSpPr>
+        <p:spPr>
+          <a:xfrm>
+            <a:off x="6940296" y="1801368"/>
+            <a:ext cx="1645920" cy="274320"/>
+          </a:xfrm>
+          <a:prstGeom prst="rect">
+            <a:avLst/>
+          </a:prstGeom>
+          <a:noFill/>
+          <a:ln/>
+        </p:spPr>
+        <p:txBody>
+          <a:bodyPr wrap="square" lIns="0" tIns="0" rIns="0" bIns="0" rtlCol="0" anchor="t"/>
+          <a:lstStyle/>
+          <a:p>
+            <a:pPr indent="0" marL="0">
+              <a:lnSpc>
+                <a:spcPts val="1500"/>
+              </a:lnSpc>
+              <a:buNone/>
+            </a:pPr>
+            <a:r>
+              <a:rPr lang="en-US" sz="1200" b="1" i="1" dirty="0">
+                <a:solidFill>
+                  <a:schemeClr val="accent3"/>
+                </a:solidFill>
+              </a:rPr>
+              <a:t>以湖澄心</a:t>
+            </a:r>
+            <a:endParaRPr lang="en-US" sz="1200" dirty="0"/>
+          </a:p>
+        </p:txBody>
+      </p:sp>
+      <p:sp>
+        <p:nvSpPr>
+          <p:cNvPr id="37" name="湖境 tag 1"/>
+          <p:cNvSpPr/>
+          <p:nvPr/>
+        </p:nvSpPr>
+        <p:spPr>
+          <a:xfrm>
+            <a:off x="6254496" y="2231136"/>
+            <a:ext cx="548640" cy="256032"/>
+          </a:xfrm>
+          <a:prstGeom prst="roundRect">
+            <a:avLst>
+              <a:gd name="adj" fmla="val 50000"/>
+            </a:avLst>
+          </a:prstGeom>
+          <a:solidFill>
+            <a:srgbClr val="C07A4F"/>
+          </a:solidFill>
+          <a:ln w="12700">
+            <a:solidFill>
+              <a:srgbClr val="C07A4F"/>
+            </a:solidFill>
+            <a:prstDash val="solid"/>
+          </a:ln>
+        </p:spPr>
+      </p:sp>
+      <p:sp>
+        <p:nvSpPr>
+          <p:cNvPr id="38" name="Text 33"/>
+          <p:cNvSpPr txBox="1"/>
+          <p:nvPr/>
+        </p:nvSpPr>
+        <p:spPr>
+          <a:xfrm>
+            <a:off x="6254496" y="2231136"/>
+            <a:ext cx="548640" cy="256032"/>
+          </a:xfrm>
+          <a:prstGeom prst="rect">
+            <a:avLst/>
+          </a:prstGeom>
+          <a:noFill/>
+          <a:ln/>
+        </p:spPr>
+        <p:txBody>
+          <a:bodyPr wrap="square" lIns="0" tIns="0" rIns="0" bIns="0" rtlCol="0" anchor="ctr"/>
+          <a:lstStyle/>
+          <a:p>
+            <a:pPr algn="ctr" indent="0" marL="0">
+              <a:lnSpc>
+                <a:spcPts val="1300"/>
+              </a:lnSpc>
+              <a:buNone/>
+            </a:pPr>
+            <a:r>
+              <a:rPr lang="en-US" sz="1000" b="1" dirty="0">
+                <a:solidFill>
+                  <a:schemeClr val="bg1"/>
+                </a:solidFill>
+              </a:rPr>
+              <a:t>場域</a:t>
+            </a:r>
+            <a:endParaRPr lang="en-US" sz="1000" dirty="0"/>
+          </a:p>
+        </p:txBody>
+      </p:sp>
+      <p:sp>
+        <p:nvSpPr>
+          <p:cNvPr id="39" name="Text 34"/>
+          <p:cNvSpPr txBox="1"/>
+          <p:nvPr/>
+        </p:nvSpPr>
+        <p:spPr>
+          <a:xfrm>
+            <a:off x="6894576" y="2212848"/>
+            <a:ext cx="1645920" cy="502920"/>
+          </a:xfrm>
+          <a:prstGeom prst="rect">
+            <a:avLst/>
+          </a:prstGeom>
+          <a:noFill/>
+          <a:ln/>
+        </p:spPr>
+        <p:txBody>
+          <a:bodyPr wrap="square" lIns="0" tIns="0" rIns="0" bIns="0" rtlCol="0" anchor="t"/>
+          <a:lstStyle/>
+          <a:p>
+            <a:pPr indent="0" marL="0">
+              <a:lnSpc>
+                <a:spcPts val="1500"/>
+              </a:lnSpc>
+              <a:buNone/>
+            </a:pPr>
+            <a:r>
+              <a:rPr lang="en-US" sz="1200" dirty="0">
+                <a:solidFill>
+                  <a:schemeClr val="tx1"/>
+                </a:solidFill>
+              </a:rPr>
+              <a:t>湖畔、晨霧、靜水</a:t>
+            </a:r>
+            <a:endParaRPr lang="en-US" sz="1200" dirty="0"/>
+          </a:p>
+        </p:txBody>
+      </p:sp>
+      <p:sp>
+        <p:nvSpPr>
+          <p:cNvPr id="40" name="湖境 tag 2"/>
+          <p:cNvSpPr/>
+          <p:nvPr/>
+        </p:nvSpPr>
+        <p:spPr>
+          <a:xfrm>
+            <a:off x="6254496" y="2779776"/>
+            <a:ext cx="548640" cy="256032"/>
+          </a:xfrm>
+          <a:prstGeom prst="roundRect">
+            <a:avLst>
+              <a:gd name="adj" fmla="val 50000"/>
+            </a:avLst>
+          </a:prstGeom>
+          <a:solidFill>
+            <a:srgbClr val="C07A4F"/>
+          </a:solidFill>
+          <a:ln w="12700">
+            <a:solidFill>
+              <a:srgbClr val="C07A4F"/>
+            </a:solidFill>
+            <a:prstDash val="solid"/>
+          </a:ln>
+        </p:spPr>
+      </p:sp>
+      <p:sp>
+        <p:nvSpPr>
+          <p:cNvPr id="41" name="Text 36"/>
+          <p:cNvSpPr txBox="1"/>
+          <p:nvPr/>
+        </p:nvSpPr>
+        <p:spPr>
+          <a:xfrm>
+            <a:off x="6254496" y="2779776"/>
+            <a:ext cx="548640" cy="256032"/>
+          </a:xfrm>
+          <a:prstGeom prst="rect">
+            <a:avLst/>
+          </a:prstGeom>
+          <a:noFill/>
+          <a:ln/>
+        </p:spPr>
+        <p:txBody>
+          <a:bodyPr wrap="square" lIns="0" tIns="0" rIns="0" bIns="0" rtlCol="0" anchor="ctr"/>
+          <a:lstStyle/>
+          <a:p>
+            <a:pPr algn="ctr" indent="0" marL="0">
+              <a:lnSpc>
+                <a:spcPts val="1300"/>
+              </a:lnSpc>
+              <a:buNone/>
+            </a:pPr>
+            <a:r>
+              <a:rPr lang="en-US" sz="1000" b="1" dirty="0">
+                <a:solidFill>
+                  <a:schemeClr val="bg1"/>
+                </a:solidFill>
+              </a:rPr>
+              <a:t>十療</a:t>
+            </a:r>
+            <a:endParaRPr lang="en-US" sz="1000" dirty="0"/>
+          </a:p>
+        </p:txBody>
+      </p:sp>
+      <p:sp>
+        <p:nvSpPr>
+          <p:cNvPr id="42" name="Text 37"/>
+          <p:cNvSpPr txBox="1"/>
+          <p:nvPr/>
+        </p:nvSpPr>
+        <p:spPr>
+          <a:xfrm>
+            <a:off x="6894576" y="2761488"/>
+            <a:ext cx="1645920" cy="502920"/>
+          </a:xfrm>
+          <a:prstGeom prst="rect">
+            <a:avLst/>
+          </a:prstGeom>
+          <a:noFill/>
+          <a:ln/>
+        </p:spPr>
+        <p:txBody>
+          <a:bodyPr wrap="square" lIns="0" tIns="0" rIns="0" bIns="0" rtlCol="0" anchor="t"/>
+          <a:lstStyle/>
+          <a:p>
+            <a:pPr indent="0" marL="0">
+              <a:lnSpc>
+                <a:spcPts val="1500"/>
+              </a:lnSpc>
+              <a:buNone/>
+            </a:pPr>
+            <a:r>
+              <a:rPr lang="en-US" sz="1200" dirty="0">
+                <a:solidFill>
+                  <a:schemeClr val="tx1"/>
+                </a:solidFill>
+              </a:rPr>
+              <a:t>湖畔散步、晨霧靜坐、水聲伴眠</a:t>
+            </a:r>
+            <a:endParaRPr lang="en-US" sz="1200" dirty="0"/>
+          </a:p>
+        </p:txBody>
+      </p:sp>
+      <p:sp>
+        <p:nvSpPr>
+          <p:cNvPr id="43" name="湖境 tag 3"/>
+          <p:cNvSpPr/>
+          <p:nvPr/>
+        </p:nvSpPr>
+        <p:spPr>
+          <a:xfrm>
+            <a:off x="6254496" y="3328416"/>
+            <a:ext cx="548640" cy="256032"/>
+          </a:xfrm>
+          <a:prstGeom prst="roundRect">
+            <a:avLst>
+              <a:gd name="adj" fmla="val 50000"/>
+            </a:avLst>
+          </a:prstGeom>
+          <a:solidFill>
+            <a:srgbClr val="C07A4F"/>
+          </a:solidFill>
+          <a:ln w="12700">
+            <a:solidFill>
+              <a:srgbClr val="C07A4F"/>
+            </a:solidFill>
+            <a:prstDash val="solid"/>
+          </a:ln>
+        </p:spPr>
+      </p:sp>
+      <p:sp>
+        <p:nvSpPr>
+          <p:cNvPr id="44" name="Text 39"/>
+          <p:cNvSpPr txBox="1"/>
+          <p:nvPr/>
+        </p:nvSpPr>
+        <p:spPr>
+          <a:xfrm>
+            <a:off x="6254496" y="3328416"/>
+            <a:ext cx="548640" cy="256032"/>
+          </a:xfrm>
+          <a:prstGeom prst="rect">
+            <a:avLst/>
+          </a:prstGeom>
+          <a:noFill/>
+          <a:ln/>
+        </p:spPr>
+        <p:txBody>
+          <a:bodyPr wrap="square" lIns="0" tIns="0" rIns="0" bIns="0" rtlCol="0" anchor="ctr"/>
+          <a:lstStyle/>
+          <a:p>
+            <a:pPr algn="ctr" indent="0" marL="0">
+              <a:lnSpc>
+                <a:spcPts val="1300"/>
+              </a:lnSpc>
+              <a:buNone/>
+            </a:pPr>
+            <a:r>
+              <a:rPr lang="en-US" sz="1000" b="1" dirty="0">
+                <a:solidFill>
+                  <a:schemeClr val="bg1"/>
+                </a:solidFill>
+              </a:rPr>
+              <a:t>辟穀</a:t>
+            </a:r>
+            <a:endParaRPr lang="en-US" sz="1000" dirty="0"/>
+          </a:p>
+        </p:txBody>
+      </p:sp>
+      <p:sp>
+        <p:nvSpPr>
+          <p:cNvPr id="45" name="Text 40"/>
+          <p:cNvSpPr txBox="1"/>
+          <p:nvPr/>
+        </p:nvSpPr>
+        <p:spPr>
+          <a:xfrm>
+            <a:off x="6894576" y="3310128"/>
+            <a:ext cx="1645920" cy="502920"/>
+          </a:xfrm>
+          <a:prstGeom prst="rect">
+            <a:avLst/>
+          </a:prstGeom>
+          <a:noFill/>
+          <a:ln/>
+        </p:spPr>
+        <p:txBody>
+          <a:bodyPr wrap="square" lIns="0" tIns="0" rIns="0" bIns="0" rtlCol="0" anchor="t"/>
+          <a:lstStyle/>
+          <a:p>
+            <a:pPr indent="0" marL="0">
+              <a:lnSpc>
+                <a:spcPts val="1500"/>
+              </a:lnSpc>
+              <a:buNone/>
+            </a:pPr>
+            <a:r>
+              <a:rPr lang="en-US" sz="1200" dirty="0">
+                <a:solidFill>
+                  <a:schemeClr val="tx1"/>
+                </a:solidFill>
+              </a:rPr>
+              <a:t>靜觀服氣、湖畔正念</a:t>
+            </a:r>
+            <a:endParaRPr lang="en-US" sz="1200" dirty="0"/>
+          </a:p>
+        </p:txBody>
+      </p:sp>
+      <p:sp>
+        <p:nvSpPr>
+          <p:cNvPr id="46" name="Series callout"/>
+          <p:cNvSpPr/>
+          <p:nvPr/>
+        </p:nvSpPr>
+        <p:spPr>
+          <a:xfrm>
+            <a:off x="457200" y="4041648"/>
+            <a:ext cx="8229600" cy="548640"/>
+          </a:xfrm>
+          <a:prstGeom prst="roundRect">
+            <a:avLst>
+              <a:gd name="adj" fmla="val 13333"/>
             </a:avLst>
           </a:prstGeom>
           <a:solidFill>
@@ -3021,14 +4088,14 @@
       </p:sp>
       <p:sp>
         <p:nvSpPr>
-          <p:cNvPr id="18" name="Text 15"/>
+          <p:cNvPr id="47" name="Text 42"/>
           <p:cNvSpPr txBox="1"/>
           <p:nvPr/>
         </p:nvSpPr>
         <p:spPr>
           <a:xfrm>
-            <a:off x="685800" y="3401568"/>
-            <a:ext cx="1005840" cy="292608"/>
+            <a:off x="685800" y="4041648"/>
+            <a:ext cx="7772400" cy="548640"/>
           </a:xfrm>
           <a:prstGeom prst="rect">
             <a:avLst/>
@@ -3040,659 +4107,19 @@
           <a:bodyPr wrap="square" lIns="0" tIns="0" rIns="0" bIns="0" rtlCol="0" anchor="ctr"/>
           <a:lstStyle/>
           <a:p>
-            <a:pPr algn="ctr" indent="0" marL="0">
-              <a:lnSpc>
-                <a:spcPts val="1400"/>
-              </a:lnSpc>
-              <a:buNone/>
-            </a:pPr>
-            <a:r>
-              <a:rPr lang="en-US" sz="1100" b="1" dirty="0">
+            <a:pPr indent="0" marL="0">
+              <a:lnSpc>
+                <a:spcPts val="1600"/>
+              </a:lnSpc>
+              <a:buNone/>
+            </a:pPr>
+            <a:r>
+              <a:rPr lang="en-US" sz="1300" b="1" dirty="0">
                 <a:solidFill>
                   <a:schemeClr val="bg1"/>
                 </a:solidFill>
               </a:rPr>
-              <a:t>食療</a:t>
-            </a:r>
-            <a:endParaRPr lang="en-US" sz="1100" dirty="0"/>
-          </a:p>
-        </p:txBody>
-      </p:sp>
-      <p:sp>
-        <p:nvSpPr>
-          <p:cNvPr id="19" name="Text 16"/>
-          <p:cNvSpPr txBox="1"/>
-          <p:nvPr/>
-        </p:nvSpPr>
-        <p:spPr>
-          <a:xfrm>
-            <a:off x="1828800" y="3401568"/>
-            <a:ext cx="2514600" cy="292608"/>
-          </a:xfrm>
-          <a:prstGeom prst="rect">
-            <a:avLst/>
-          </a:prstGeom>
-          <a:noFill/>
-          <a:ln/>
-        </p:spPr>
-        <p:txBody>
-          <a:bodyPr wrap="square" lIns="0" tIns="0" rIns="0" bIns="0" rtlCol="0" anchor="ctr"/>
-          <a:lstStyle/>
-          <a:p>
-            <a:pPr indent="0" marL="0">
-              <a:lnSpc>
-                <a:spcPts val="1600"/>
-              </a:lnSpc>
-              <a:buNone/>
-            </a:pPr>
-            <a:r>
-              <a:rPr lang="en-US" sz="1300" dirty="0">
-                <a:solidFill>
-                  <a:schemeClr val="tx1"/>
-                </a:solidFill>
-              </a:rPr>
-              <a:t>山野時令食材入藥膳</a:t>
-            </a:r>
-            <a:endParaRPr lang="en-US" sz="1300" dirty="0"/>
-          </a:p>
-        </p:txBody>
-      </p:sp>
-      <p:sp>
-        <p:nvSpPr>
-          <p:cNvPr id="20" name="水・海居／水岸療癒"/>
-          <p:cNvSpPr/>
-          <p:nvPr/>
-        </p:nvSpPr>
-        <p:spPr>
-          <a:xfrm>
-            <a:off x="4663440" y="1325880"/>
-            <a:ext cx="4023360" cy="2514600"/>
-          </a:xfrm>
-          <a:prstGeom prst="roundRect">
-            <a:avLst>
-              <a:gd name="adj" fmla="val 2909"/>
-            </a:avLst>
-          </a:prstGeom>
-          <a:solidFill>
-            <a:srgbClr val="EEF3EC"/>
-          </a:solidFill>
-          <a:ln w="12700">
-            <a:solidFill>
-              <a:srgbClr val="EEF3EC"/>
-            </a:solidFill>
-            <a:prstDash val="solid"/>
-          </a:ln>
-        </p:spPr>
-      </p:sp>
-      <p:sp>
-        <p:nvSpPr>
-          <p:cNvPr id="21" name="水・海居／水岸療癒 circle"/>
-          <p:cNvSpPr/>
-          <p:nvPr/>
-        </p:nvSpPr>
-        <p:spPr>
-          <a:xfrm>
-            <a:off x="4892040" y="1463040"/>
-            <a:ext cx="548640" cy="548640"/>
-          </a:xfrm>
-          <a:prstGeom prst="ellipse">
-            <a:avLst/>
-          </a:prstGeom>
-          <a:solidFill>
-            <a:srgbClr val="3E6B7A"/>
-          </a:solidFill>
-          <a:ln w="12700">
-            <a:solidFill>
-              <a:srgbClr val="3E6B7A"/>
-            </a:solidFill>
-            <a:prstDash val="solid"/>
-          </a:ln>
-        </p:spPr>
-      </p:sp>
-      <p:pic>
-        <p:nvPicPr>
-          <p:cNvPr id="22" name="水・海居／水岸療癒 icon" descr="水・海居／水岸療癒">    </p:cNvPr>
-          <p:cNvPicPr>
-            <a:picLocks noChangeAspect="1"/>
-          </p:cNvPicPr>
-          <p:nvPr/>
-        </p:nvPicPr>
-        <p:blipFill>
-          <a:blip r:embed="rId2"/>
-          <a:stretch>
-            <a:fillRect/>
-          </a:stretch>
-        </p:blipFill>
-        <p:spPr>
-          <a:xfrm>
-            <a:off x="5029200" y="1600200"/>
-            <a:ext cx="274320" cy="274320"/>
-          </a:xfrm>
-          <a:prstGeom prst="rect">
-            <a:avLst/>
-          </a:prstGeom>
-        </p:spPr>
-      </p:pic>
-      <p:sp>
-        <p:nvSpPr>
-          <p:cNvPr id="23" name="Text 19"/>
-          <p:cNvSpPr txBox="1"/>
-          <p:nvPr/>
-        </p:nvSpPr>
-        <p:spPr>
-          <a:xfrm>
-            <a:off x="5577840" y="1572768"/>
-            <a:ext cx="2926080" cy="365760"/>
-          </a:xfrm>
-          <a:prstGeom prst="rect">
-            <a:avLst/>
-          </a:prstGeom>
-          <a:noFill/>
-          <a:ln/>
-        </p:spPr>
-        <p:txBody>
-          <a:bodyPr wrap="square" lIns="0" tIns="0" rIns="0" bIns="0" rtlCol="0" anchor="t"/>
-          <a:lstStyle/>
-          <a:p>
-            <a:pPr indent="0" marL="0">
-              <a:lnSpc>
-                <a:spcPts val="2100"/>
-              </a:lnSpc>
-              <a:buNone/>
-            </a:pPr>
-            <a:r>
-              <a:rPr lang="en-US" sz="1700" b="1" dirty="0">
-                <a:solidFill>
-                  <a:schemeClr val="tx2"/>
-                </a:solidFill>
-              </a:rPr>
-              <a:t>水・海居／水岸療癒</a:t>
-            </a:r>
-            <a:endParaRPr lang="en-US" sz="1700" dirty="0"/>
-          </a:p>
-        </p:txBody>
-      </p:sp>
-      <p:sp>
-        <p:nvSpPr>
-          <p:cNvPr id="24" name="水・海居／水岸療癒 tag 1"/>
-          <p:cNvSpPr/>
-          <p:nvPr/>
-        </p:nvSpPr>
-        <p:spPr>
-          <a:xfrm>
-            <a:off x="4892040" y="2194560"/>
-            <a:ext cx="1005840" cy="292608"/>
-          </a:xfrm>
-          <a:prstGeom prst="roundRect">
-            <a:avLst>
-              <a:gd name="adj" fmla="val 50000"/>
-            </a:avLst>
-          </a:prstGeom>
-          <a:solidFill>
-            <a:srgbClr val="3E6B7A"/>
-          </a:solidFill>
-          <a:ln w="12700">
-            <a:solidFill>
-              <a:srgbClr val="3E6B7A"/>
-            </a:solidFill>
-            <a:prstDash val="solid"/>
-          </a:ln>
-        </p:spPr>
-      </p:sp>
-      <p:sp>
-        <p:nvSpPr>
-          <p:cNvPr id="25" name="Text 21"/>
-          <p:cNvSpPr txBox="1"/>
-          <p:nvPr/>
-        </p:nvSpPr>
-        <p:spPr>
-          <a:xfrm>
-            <a:off x="4892040" y="2194560"/>
-            <a:ext cx="1005840" cy="292608"/>
-          </a:xfrm>
-          <a:prstGeom prst="rect">
-            <a:avLst/>
-          </a:prstGeom>
-          <a:noFill/>
-          <a:ln/>
-        </p:spPr>
-        <p:txBody>
-          <a:bodyPr wrap="square" lIns="0" tIns="0" rIns="0" bIns="0" rtlCol="0" anchor="ctr"/>
-          <a:lstStyle/>
-          <a:p>
-            <a:pPr algn="ctr" indent="0" marL="0">
-              <a:lnSpc>
-                <a:spcPts val="1400"/>
-              </a:lnSpc>
-              <a:buNone/>
-            </a:pPr>
-            <a:r>
-              <a:rPr lang="en-US" sz="1100" b="1" dirty="0">
-                <a:solidFill>
-                  <a:schemeClr val="bg1"/>
-                </a:solidFill>
-              </a:rPr>
-              <a:t>自然療癒</a:t>
-            </a:r>
-            <a:endParaRPr lang="en-US" sz="1100" dirty="0"/>
-          </a:p>
-        </p:txBody>
-      </p:sp>
-      <p:sp>
-        <p:nvSpPr>
-          <p:cNvPr id="26" name="Text 22"/>
-          <p:cNvSpPr txBox="1"/>
-          <p:nvPr/>
-        </p:nvSpPr>
-        <p:spPr>
-          <a:xfrm>
-            <a:off x="6035040" y="2194560"/>
-            <a:ext cx="2514600" cy="292608"/>
-          </a:xfrm>
-          <a:prstGeom prst="rect">
-            <a:avLst/>
-          </a:prstGeom>
-          <a:noFill/>
-          <a:ln/>
-        </p:spPr>
-        <p:txBody>
-          <a:bodyPr wrap="square" lIns="0" tIns="0" rIns="0" bIns="0" rtlCol="0" anchor="ctr"/>
-          <a:lstStyle/>
-          <a:p>
-            <a:pPr indent="0" marL="0">
-              <a:lnSpc>
-                <a:spcPts val="1600"/>
-              </a:lnSpc>
-              <a:buNone/>
-            </a:pPr>
-            <a:r>
-              <a:rPr lang="en-US" sz="1300" dirty="0">
-                <a:solidFill>
-                  <a:schemeClr val="tx1"/>
-                </a:solidFill>
-              </a:rPr>
-              <a:t>海邊／湖畔散步、呼吸練習</a:t>
-            </a:r>
-            <a:endParaRPr lang="en-US" sz="1300" dirty="0"/>
-          </a:p>
-        </p:txBody>
-      </p:sp>
-      <p:sp>
-        <p:nvSpPr>
-          <p:cNvPr id="27" name="水・海居／水岸療癒 tag 2"/>
-          <p:cNvSpPr/>
-          <p:nvPr/>
-        </p:nvSpPr>
-        <p:spPr>
-          <a:xfrm>
-            <a:off x="4892040" y="2596896"/>
-            <a:ext cx="1005840" cy="292608"/>
-          </a:xfrm>
-          <a:prstGeom prst="roundRect">
-            <a:avLst>
-              <a:gd name="adj" fmla="val 50000"/>
-            </a:avLst>
-          </a:prstGeom>
-          <a:solidFill>
-            <a:srgbClr val="3E6B7A"/>
-          </a:solidFill>
-          <a:ln w="12700">
-            <a:solidFill>
-              <a:srgbClr val="3E6B7A"/>
-            </a:solidFill>
-            <a:prstDash val="solid"/>
-          </a:ln>
-        </p:spPr>
-      </p:sp>
-      <p:sp>
-        <p:nvSpPr>
-          <p:cNvPr id="28" name="Text 24"/>
-          <p:cNvSpPr txBox="1"/>
-          <p:nvPr/>
-        </p:nvSpPr>
-        <p:spPr>
-          <a:xfrm>
-            <a:off x="4892040" y="2596896"/>
-            <a:ext cx="1005840" cy="292608"/>
-          </a:xfrm>
-          <a:prstGeom prst="rect">
-            <a:avLst/>
-          </a:prstGeom>
-          <a:noFill/>
-          <a:ln/>
-        </p:spPr>
-        <p:txBody>
-          <a:bodyPr wrap="square" lIns="0" tIns="0" rIns="0" bIns="0" rtlCol="0" anchor="ctr"/>
-          <a:lstStyle/>
-          <a:p>
-            <a:pPr algn="ctr" indent="0" marL="0">
-              <a:lnSpc>
-                <a:spcPts val="1400"/>
-              </a:lnSpc>
-              <a:buNone/>
-            </a:pPr>
-            <a:r>
-              <a:rPr lang="en-US" sz="1100" b="1" dirty="0">
-                <a:solidFill>
-                  <a:schemeClr val="bg1"/>
-                </a:solidFill>
-              </a:rPr>
-              <a:t>音療</a:t>
-            </a:r>
-            <a:endParaRPr lang="en-US" sz="1100" dirty="0"/>
-          </a:p>
-        </p:txBody>
-      </p:sp>
-      <p:sp>
-        <p:nvSpPr>
-          <p:cNvPr id="29" name="Text 25"/>
-          <p:cNvSpPr txBox="1"/>
-          <p:nvPr/>
-        </p:nvSpPr>
-        <p:spPr>
-          <a:xfrm>
-            <a:off x="6035040" y="2596896"/>
-            <a:ext cx="2514600" cy="292608"/>
-          </a:xfrm>
-          <a:prstGeom prst="rect">
-            <a:avLst/>
-          </a:prstGeom>
-          <a:noFill/>
-          <a:ln/>
-        </p:spPr>
-        <p:txBody>
-          <a:bodyPr wrap="square" lIns="0" tIns="0" rIns="0" bIns="0" rtlCol="0" anchor="ctr"/>
-          <a:lstStyle/>
-          <a:p>
-            <a:pPr indent="0" marL="0">
-              <a:lnSpc>
-                <a:spcPts val="1600"/>
-              </a:lnSpc>
-              <a:buNone/>
-            </a:pPr>
-            <a:r>
-              <a:rPr lang="en-US" sz="1300" dirty="0">
-                <a:solidFill>
-                  <a:schemeClr val="tx1"/>
-                </a:solidFill>
-              </a:rPr>
-              <a:t>海浪、流水聲音浴</a:t>
-            </a:r>
-            <a:endParaRPr lang="en-US" sz="1300" dirty="0"/>
-          </a:p>
-        </p:txBody>
-      </p:sp>
-      <p:sp>
-        <p:nvSpPr>
-          <p:cNvPr id="30" name="水・海居／水岸療癒 tag 3"/>
-          <p:cNvSpPr/>
-          <p:nvPr/>
-        </p:nvSpPr>
-        <p:spPr>
-          <a:xfrm>
-            <a:off x="4892040" y="2999232"/>
-            <a:ext cx="1005840" cy="292608"/>
-          </a:xfrm>
-          <a:prstGeom prst="roundRect">
-            <a:avLst>
-              <a:gd name="adj" fmla="val 50000"/>
-            </a:avLst>
-          </a:prstGeom>
-          <a:solidFill>
-            <a:srgbClr val="3E6B7A"/>
-          </a:solidFill>
-          <a:ln w="12700">
-            <a:solidFill>
-              <a:srgbClr val="3E6B7A"/>
-            </a:solidFill>
-            <a:prstDash val="solid"/>
-          </a:ln>
-        </p:spPr>
-      </p:sp>
-      <p:sp>
-        <p:nvSpPr>
-          <p:cNvPr id="31" name="Text 27"/>
-          <p:cNvSpPr txBox="1"/>
-          <p:nvPr/>
-        </p:nvSpPr>
-        <p:spPr>
-          <a:xfrm>
-            <a:off x="4892040" y="2999232"/>
-            <a:ext cx="1005840" cy="292608"/>
-          </a:xfrm>
-          <a:prstGeom prst="rect">
-            <a:avLst/>
-          </a:prstGeom>
-          <a:noFill/>
-          <a:ln/>
-        </p:spPr>
-        <p:txBody>
-          <a:bodyPr wrap="square" lIns="0" tIns="0" rIns="0" bIns="0" rtlCol="0" anchor="ctr"/>
-          <a:lstStyle/>
-          <a:p>
-            <a:pPr algn="ctr" indent="0" marL="0">
-              <a:lnSpc>
-                <a:spcPts val="1400"/>
-              </a:lnSpc>
-              <a:buNone/>
-            </a:pPr>
-            <a:r>
-              <a:rPr lang="en-US" sz="1100" b="1" dirty="0">
-                <a:solidFill>
-                  <a:schemeClr val="bg1"/>
-                </a:solidFill>
-              </a:rPr>
-              <a:t>冥想</a:t>
-            </a:r>
-            <a:endParaRPr lang="en-US" sz="1100" dirty="0"/>
-          </a:p>
-        </p:txBody>
-      </p:sp>
-      <p:sp>
-        <p:nvSpPr>
-          <p:cNvPr id="32" name="Text 28"/>
-          <p:cNvSpPr txBox="1"/>
-          <p:nvPr/>
-        </p:nvSpPr>
-        <p:spPr>
-          <a:xfrm>
-            <a:off x="6035040" y="2999232"/>
-            <a:ext cx="2514600" cy="292608"/>
-          </a:xfrm>
-          <a:prstGeom prst="rect">
-            <a:avLst/>
-          </a:prstGeom>
-          <a:noFill/>
-          <a:ln/>
-        </p:spPr>
-        <p:txBody>
-          <a:bodyPr wrap="square" lIns="0" tIns="0" rIns="0" bIns="0" rtlCol="0" anchor="ctr"/>
-          <a:lstStyle/>
-          <a:p>
-            <a:pPr indent="0" marL="0">
-              <a:lnSpc>
-                <a:spcPts val="1600"/>
-              </a:lnSpc>
-              <a:buNone/>
-            </a:pPr>
-            <a:r>
-              <a:rPr lang="en-US" sz="1300" dirty="0">
-                <a:solidFill>
-                  <a:schemeClr val="tx1"/>
-                </a:solidFill>
-              </a:rPr>
-              <a:t>水岸日出正念冥想</a:t>
-            </a:r>
-            <a:endParaRPr lang="en-US" sz="1300" dirty="0"/>
-          </a:p>
-        </p:txBody>
-      </p:sp>
-      <p:sp>
-        <p:nvSpPr>
-          <p:cNvPr id="33" name="水・海居／水岸療癒 tag 4"/>
-          <p:cNvSpPr/>
-          <p:nvPr/>
-        </p:nvSpPr>
-        <p:spPr>
-          <a:xfrm>
-            <a:off x="4892040" y="3401568"/>
-            <a:ext cx="1005840" cy="292608"/>
-          </a:xfrm>
-          <a:prstGeom prst="roundRect">
-            <a:avLst>
-              <a:gd name="adj" fmla="val 50000"/>
-            </a:avLst>
-          </a:prstGeom>
-          <a:solidFill>
-            <a:srgbClr val="3E6B7A"/>
-          </a:solidFill>
-          <a:ln w="12700">
-            <a:solidFill>
-              <a:srgbClr val="3E6B7A"/>
-            </a:solidFill>
-            <a:prstDash val="solid"/>
-          </a:ln>
-        </p:spPr>
-      </p:sp>
-      <p:sp>
-        <p:nvSpPr>
-          <p:cNvPr id="34" name="Text 30"/>
-          <p:cNvSpPr txBox="1"/>
-          <p:nvPr/>
-        </p:nvSpPr>
-        <p:spPr>
-          <a:xfrm>
-            <a:off x="4892040" y="3401568"/>
-            <a:ext cx="1005840" cy="292608"/>
-          </a:xfrm>
-          <a:prstGeom prst="rect">
-            <a:avLst/>
-          </a:prstGeom>
-          <a:noFill/>
-          <a:ln/>
-        </p:spPr>
-        <p:txBody>
-          <a:bodyPr wrap="square" lIns="0" tIns="0" rIns="0" bIns="0" rtlCol="0" anchor="ctr"/>
-          <a:lstStyle/>
-          <a:p>
-            <a:pPr algn="ctr" indent="0" marL="0">
-              <a:lnSpc>
-                <a:spcPts val="1400"/>
-              </a:lnSpc>
-              <a:buNone/>
-            </a:pPr>
-            <a:r>
-              <a:rPr lang="en-US" sz="1100" b="1" dirty="0">
-                <a:solidFill>
-                  <a:schemeClr val="bg1"/>
-                </a:solidFill>
-              </a:rPr>
-              <a:t>睡眠療癒</a:t>
-            </a:r>
-            <a:endParaRPr lang="en-US" sz="1100" dirty="0"/>
-          </a:p>
-        </p:txBody>
-      </p:sp>
-      <p:sp>
-        <p:nvSpPr>
-          <p:cNvPr id="35" name="Text 31"/>
-          <p:cNvSpPr txBox="1"/>
-          <p:nvPr/>
-        </p:nvSpPr>
-        <p:spPr>
-          <a:xfrm>
-            <a:off x="6035040" y="3401568"/>
-            <a:ext cx="2514600" cy="292608"/>
-          </a:xfrm>
-          <a:prstGeom prst="rect">
-            <a:avLst/>
-          </a:prstGeom>
-          <a:noFill/>
-          <a:ln/>
-        </p:spPr>
-        <p:txBody>
-          <a:bodyPr wrap="square" lIns="0" tIns="0" rIns="0" bIns="0" rtlCol="0" anchor="ctr"/>
-          <a:lstStyle/>
-          <a:p>
-            <a:pPr indent="0" marL="0">
-              <a:lnSpc>
-                <a:spcPts val="1600"/>
-              </a:lnSpc>
-              <a:buNone/>
-            </a:pPr>
-            <a:r>
-              <a:rPr lang="en-US" sz="1300" dirty="0">
-                <a:solidFill>
-                  <a:schemeClr val="tx1"/>
-                </a:solidFill>
-              </a:rPr>
-              <a:t>水聲伴眠、靜夜水景</a:t>
-            </a:r>
-            <a:endParaRPr lang="en-US" sz="1300" dirty="0"/>
-          </a:p>
-        </p:txBody>
-      </p:sp>
-      <p:sp>
-        <p:nvSpPr>
-          <p:cNvPr id="36" name="Synergy callout"/>
-          <p:cNvSpPr/>
-          <p:nvPr/>
-        </p:nvSpPr>
-        <p:spPr>
-          <a:xfrm>
-            <a:off x="457200" y="3977640"/>
-            <a:ext cx="8229600" cy="594360"/>
-          </a:xfrm>
-          <a:prstGeom prst="roundRect">
-            <a:avLst>
-              <a:gd name="adj" fmla="val 12308"/>
-            </a:avLst>
-          </a:prstGeom>
-          <a:solidFill>
-            <a:srgbClr val="2F4A3A"/>
-          </a:solidFill>
-          <a:ln w="12700">
-            <a:solidFill>
-              <a:srgbClr val="2F4A3A"/>
-            </a:solidFill>
-            <a:prstDash val="solid"/>
-          </a:ln>
-        </p:spPr>
-      </p:sp>
-      <p:sp>
-        <p:nvSpPr>
-          <p:cNvPr id="37" name="Text 33"/>
-          <p:cNvSpPr txBox="1"/>
-          <p:nvPr/>
-        </p:nvSpPr>
-        <p:spPr>
-          <a:xfrm>
-            <a:off x="685800" y="3977640"/>
-            <a:ext cx="7772400" cy="594360"/>
-          </a:xfrm>
-          <a:prstGeom prst="rect">
-            <a:avLst/>
-          </a:prstGeom>
-          <a:noFill/>
-          <a:ln/>
-        </p:spPr>
-        <p:txBody>
-          <a:bodyPr wrap="square" lIns="0" tIns="0" rIns="0" bIns="0" rtlCol="0" anchor="ctr"/>
-          <a:lstStyle/>
-          <a:p>
-            <a:pPr indent="0" marL="0">
-              <a:lnSpc>
-                <a:spcPts val="1600"/>
-              </a:lnSpc>
-              <a:buNone/>
-            </a:pPr>
-            <a:r>
-              <a:rPr lang="en-US" sz="1300" b="1" dirty="0">
-                <a:solidFill>
-                  <a:schemeClr val="bg1"/>
-                </a:solidFill>
-              </a:rPr>
-              <a:t>同一套十療，依飯店地景切換「山居版」或「水居版」——酒店的山水資源成為療程的一部分，也利於多酒店複製</a:t>
+              <a:t>系列名「十療・三境辟穀」：同一套十療＋辟穀，依飯店地景選擇山境、海境或湖境，利於多酒店複製</a:t>
             </a:r>
             <a:endParaRPr lang="en-US" sz="1300" dirty="0"/>
           </a:p>
@@ -3803,7 +4230,7 @@
                   <a:schemeClr val="tx2"/>
                 </a:solidFill>
               </a:rPr>
-              <a:t>個人化方式：前測 → 後測 → 五日健康報告</a:t>
+              <a:t>辟穀五日：減食 → 辟穀 → 復食</a:t>
             </a:r>
             <a:endParaRPr lang="en-US" sz="2800" dirty="0"/>
           </a:p>
@@ -3811,17 +4238,307 @@
       </p:sp>
       <p:sp>
         <p:nvSpPr>
-          <p:cNvPr id="3" name="入住前測 circle"/>
+          <p:cNvPr id="3" name="Bigu D1"/>
           <p:cNvSpPr/>
           <p:nvPr/>
         </p:nvSpPr>
         <p:spPr>
           <a:xfrm>
-            <a:off x="1005840" y="1234440"/>
-            <a:ext cx="777240" cy="777240"/>
-          </a:xfrm>
-          <a:prstGeom prst="ellipse">
-            <a:avLst/>
+            <a:off x="457200" y="1188720"/>
+            <a:ext cx="1554480" cy="1691640"/>
+          </a:xfrm>
+          <a:prstGeom prst="roundRect">
+            <a:avLst>
+              <a:gd name="adj" fmla="val 4706"/>
+            </a:avLst>
+          </a:prstGeom>
+          <a:solidFill>
+            <a:srgbClr val="EEF3EC"/>
+          </a:solidFill>
+          <a:ln w="12700">
+            <a:solidFill>
+              <a:srgbClr val="EEF3EC"/>
+            </a:solidFill>
+            <a:prstDash val="solid"/>
+          </a:ln>
+        </p:spPr>
+      </p:sp>
+      <p:sp>
+        <p:nvSpPr>
+          <p:cNvPr id="4" name="Text 2"/>
+          <p:cNvSpPr txBox="1"/>
+          <p:nvPr/>
+        </p:nvSpPr>
+        <p:spPr>
+          <a:xfrm>
+            <a:off x="594360" y="1298448"/>
+            <a:ext cx="1280160" cy="274320"/>
+          </a:xfrm>
+          <a:prstGeom prst="rect">
+            <a:avLst/>
+          </a:prstGeom>
+          <a:noFill/>
+          <a:ln/>
+        </p:spPr>
+        <p:txBody>
+          <a:bodyPr wrap="square" lIns="0" tIns="0" rIns="0" bIns="0" rtlCol="0" anchor="t"/>
+          <a:lstStyle/>
+          <a:p>
+            <a:pPr indent="0" marL="0">
+              <a:lnSpc>
+                <a:spcPts val="1500"/>
+              </a:lnSpc>
+              <a:buNone/>
+            </a:pPr>
+            <a:r>
+              <a:rPr lang="en-US" sz="1200" b="1" dirty="0">
+                <a:solidFill>
+                  <a:schemeClr val="accent3"/>
+                </a:solidFill>
+              </a:rPr>
+              <a:t>D1</a:t>
+            </a:r>
+            <a:endParaRPr lang="en-US" sz="1200" dirty="0"/>
+          </a:p>
+        </p:txBody>
+      </p:sp>
+      <p:sp>
+        <p:nvSpPr>
+          <p:cNvPr id="5" name="Text 3"/>
+          <p:cNvSpPr txBox="1"/>
+          <p:nvPr/>
+        </p:nvSpPr>
+        <p:spPr>
+          <a:xfrm>
+            <a:off x="594360" y="1572768"/>
+            <a:ext cx="1280160" cy="347472"/>
+          </a:xfrm>
+          <a:prstGeom prst="rect">
+            <a:avLst/>
+          </a:prstGeom>
+          <a:noFill/>
+          <a:ln/>
+        </p:spPr>
+        <p:txBody>
+          <a:bodyPr wrap="square" lIns="0" tIns="0" rIns="0" bIns="0" rtlCol="0" anchor="t"/>
+          <a:lstStyle/>
+          <a:p>
+            <a:pPr indent="0" marL="0">
+              <a:lnSpc>
+                <a:spcPts val="2000"/>
+              </a:lnSpc>
+              <a:buNone/>
+            </a:pPr>
+            <a:r>
+              <a:rPr lang="en-US" sz="1600" b="1" dirty="0">
+                <a:solidFill>
+                  <a:schemeClr val="tx2"/>
+                </a:solidFill>
+              </a:rPr>
+              <a:t>評估・常食</a:t>
+            </a:r>
+            <a:endParaRPr lang="en-US" sz="1600" dirty="0"/>
+          </a:p>
+        </p:txBody>
+      </p:sp>
+      <p:sp>
+        <p:nvSpPr>
+          <p:cNvPr id="6" name="Text 4"/>
+          <p:cNvSpPr txBox="1"/>
+          <p:nvPr/>
+        </p:nvSpPr>
+        <p:spPr>
+          <a:xfrm>
+            <a:off x="594360" y="1984248"/>
+            <a:ext cx="1307592" cy="822960"/>
+          </a:xfrm>
+          <a:prstGeom prst="rect">
+            <a:avLst/>
+          </a:prstGeom>
+          <a:noFill/>
+          <a:ln/>
+        </p:spPr>
+        <p:txBody>
+          <a:bodyPr wrap="square" lIns="0" tIns="0" rIns="0" bIns="0" rtlCol="0" anchor="t"/>
+          <a:lstStyle/>
+          <a:p>
+            <a:pPr indent="0" marL="0">
+              <a:lnSpc>
+                <a:spcPts val="1500"/>
+              </a:lnSpc>
+              <a:buNone/>
+            </a:pPr>
+            <a:r>
+              <a:rPr lang="en-US" sz="1200" dirty="0">
+                <a:solidFill>
+                  <a:schemeClr val="tx1"/>
+                </a:solidFill>
+              </a:rPr>
+              <a:t>入住前測，藥膳常食，決定辟穀分級</a:t>
+            </a:r>
+            <a:endParaRPr lang="en-US" sz="1200" dirty="0"/>
+          </a:p>
+        </p:txBody>
+      </p:sp>
+      <p:sp>
+        <p:nvSpPr>
+          <p:cNvPr id="7" name="Bigu D2"/>
+          <p:cNvSpPr/>
+          <p:nvPr/>
+        </p:nvSpPr>
+        <p:spPr>
+          <a:xfrm>
+            <a:off x="2121408" y="1188720"/>
+            <a:ext cx="1554480" cy="1691640"/>
+          </a:xfrm>
+          <a:prstGeom prst="roundRect">
+            <a:avLst>
+              <a:gd name="adj" fmla="val 4706"/>
+            </a:avLst>
+          </a:prstGeom>
+          <a:solidFill>
+            <a:srgbClr val="EEF3EC"/>
+          </a:solidFill>
+          <a:ln w="12700">
+            <a:solidFill>
+              <a:srgbClr val="EEF3EC"/>
+            </a:solidFill>
+            <a:prstDash val="solid"/>
+          </a:ln>
+        </p:spPr>
+      </p:sp>
+      <p:sp>
+        <p:nvSpPr>
+          <p:cNvPr id="8" name="Text 6"/>
+          <p:cNvSpPr txBox="1"/>
+          <p:nvPr/>
+        </p:nvSpPr>
+        <p:spPr>
+          <a:xfrm>
+            <a:off x="2258568" y="1298448"/>
+            <a:ext cx="1280160" cy="274320"/>
+          </a:xfrm>
+          <a:prstGeom prst="rect">
+            <a:avLst/>
+          </a:prstGeom>
+          <a:noFill/>
+          <a:ln/>
+        </p:spPr>
+        <p:txBody>
+          <a:bodyPr wrap="square" lIns="0" tIns="0" rIns="0" bIns="0" rtlCol="0" anchor="t"/>
+          <a:lstStyle/>
+          <a:p>
+            <a:pPr indent="0" marL="0">
+              <a:lnSpc>
+                <a:spcPts val="1500"/>
+              </a:lnSpc>
+              <a:buNone/>
+            </a:pPr>
+            <a:r>
+              <a:rPr lang="en-US" sz="1200" b="1" dirty="0">
+                <a:solidFill>
+                  <a:schemeClr val="accent3"/>
+                </a:solidFill>
+              </a:rPr>
+              <a:t>D2</a:t>
+            </a:r>
+            <a:endParaRPr lang="en-US" sz="1200" dirty="0"/>
+          </a:p>
+        </p:txBody>
+      </p:sp>
+      <p:sp>
+        <p:nvSpPr>
+          <p:cNvPr id="9" name="Text 7"/>
+          <p:cNvSpPr txBox="1"/>
+          <p:nvPr/>
+        </p:nvSpPr>
+        <p:spPr>
+          <a:xfrm>
+            <a:off x="2258568" y="1572768"/>
+            <a:ext cx="1280160" cy="347472"/>
+          </a:xfrm>
+          <a:prstGeom prst="rect">
+            <a:avLst/>
+          </a:prstGeom>
+          <a:noFill/>
+          <a:ln/>
+        </p:spPr>
+        <p:txBody>
+          <a:bodyPr wrap="square" lIns="0" tIns="0" rIns="0" bIns="0" rtlCol="0" anchor="t"/>
+          <a:lstStyle/>
+          <a:p>
+            <a:pPr indent="0" marL="0">
+              <a:lnSpc>
+                <a:spcPts val="2000"/>
+              </a:lnSpc>
+              <a:buNone/>
+            </a:pPr>
+            <a:r>
+              <a:rPr lang="en-US" sz="1600" b="1" dirty="0">
+                <a:solidFill>
+                  <a:schemeClr val="tx2"/>
+                </a:solidFill>
+              </a:rPr>
+              <a:t>減食</a:t>
+            </a:r>
+            <a:endParaRPr lang="en-US" sz="1600" dirty="0"/>
+          </a:p>
+        </p:txBody>
+      </p:sp>
+      <p:sp>
+        <p:nvSpPr>
+          <p:cNvPr id="10" name="Text 8"/>
+          <p:cNvSpPr txBox="1"/>
+          <p:nvPr/>
+        </p:nvSpPr>
+        <p:spPr>
+          <a:xfrm>
+            <a:off x="2258568" y="1984248"/>
+            <a:ext cx="1307592" cy="822960"/>
+          </a:xfrm>
+          <a:prstGeom prst="rect">
+            <a:avLst/>
+          </a:prstGeom>
+          <a:noFill/>
+          <a:ln/>
+        </p:spPr>
+        <p:txBody>
+          <a:bodyPr wrap="square" lIns="0" tIns="0" rIns="0" bIns="0" rtlCol="0" anchor="t"/>
+          <a:lstStyle/>
+          <a:p>
+            <a:pPr indent="0" marL="0">
+              <a:lnSpc>
+                <a:spcPts val="1500"/>
+              </a:lnSpc>
+              <a:buNone/>
+            </a:pPr>
+            <a:r>
+              <a:rPr lang="en-US" sz="1200" dirty="0">
+                <a:solidFill>
+                  <a:schemeClr val="tx1"/>
+                </a:solidFill>
+              </a:rPr>
+              <a:t>清淡藥膳、逐步減量，讓身體適應</a:t>
+            </a:r>
+            <a:endParaRPr lang="en-US" sz="1200" dirty="0"/>
+          </a:p>
+        </p:txBody>
+      </p:sp>
+      <p:sp>
+        <p:nvSpPr>
+          <p:cNvPr id="11" name="Bigu D3"/>
+          <p:cNvSpPr/>
+          <p:nvPr/>
+        </p:nvSpPr>
+        <p:spPr>
+          <a:xfrm>
+            <a:off x="3785616" y="1188720"/>
+            <a:ext cx="1554480" cy="1691640"/>
+          </a:xfrm>
+          <a:prstGeom prst="roundRect">
+            <a:avLst>
+              <a:gd name="adj" fmla="val 4706"/>
+            </a:avLst>
           </a:prstGeom>
           <a:solidFill>
             <a:srgbClr val="2F4A3A"/>
@@ -3834,64 +4551,16 @@
           </a:ln>
         </p:spPr>
       </p:sp>
-      <p:pic>
-        <p:nvPicPr>
-          <p:cNvPr id="4" name="入住前測 icon" descr="入住前測">    </p:cNvPr>
-          <p:cNvPicPr>
-            <a:picLocks noChangeAspect="1"/>
-          </p:cNvPicPr>
-          <p:nvPr/>
-        </p:nvPicPr>
-        <p:blipFill>
-          <a:blip r:embed="rId1"/>
-          <a:stretch>
-            <a:fillRect/>
-          </a:stretch>
-        </p:blipFill>
-        <p:spPr>
-          <a:xfrm>
-            <a:off x="1200150" y="1428750"/>
-            <a:ext cx="388620" cy="388620"/>
-          </a:xfrm>
-          <a:prstGeom prst="rect">
-            <a:avLst/>
-          </a:prstGeom>
-        </p:spPr>
-      </p:pic>
-      <p:pic>
-        <p:nvPicPr>
-          <p:cNvPr id="5" name="Arrow 1" descr="next">    </p:cNvPr>
-          <p:cNvPicPr>
-            <a:picLocks noChangeAspect="1"/>
-          </p:cNvPicPr>
-          <p:nvPr/>
-        </p:nvPicPr>
-        <p:blipFill>
-          <a:blip r:embed="rId2"/>
-          <a:stretch>
-            <a:fillRect/>
-          </a:stretch>
-        </p:blipFill>
-        <p:spPr>
-          <a:xfrm>
-            <a:off x="2148840" y="1463040"/>
-            <a:ext cx="320040" cy="320040"/>
-          </a:xfrm>
-          <a:prstGeom prst="rect">
-            <a:avLst/>
-          </a:prstGeom>
-        </p:spPr>
-      </p:pic>
-      <p:sp>
-        <p:nvSpPr>
-          <p:cNvPr id="6" name="Text 2"/>
+      <p:sp>
+        <p:nvSpPr>
+          <p:cNvPr id="12" name="Text 10"/>
           <p:cNvSpPr txBox="1"/>
           <p:nvPr/>
         </p:nvSpPr>
         <p:spPr>
           <a:xfrm>
-            <a:off x="457200" y="2148840"/>
-            <a:ext cx="1874520" cy="365760"/>
+            <a:off x="3922776" y="1298448"/>
+            <a:ext cx="1280160" cy="274320"/>
           </a:xfrm>
           <a:prstGeom prst="rect">
             <a:avLst/>
@@ -3903,7 +4572,46 @@
           <a:bodyPr wrap="square" lIns="0" tIns="0" rIns="0" bIns="0" rtlCol="0" anchor="t"/>
           <a:lstStyle/>
           <a:p>
-            <a:pPr algn="ctr" indent="0" marL="0">
+            <a:pPr indent="0" marL="0">
+              <a:lnSpc>
+                <a:spcPts val="1500"/>
+              </a:lnSpc>
+              <a:buNone/>
+            </a:pPr>
+            <a:r>
+              <a:rPr lang="en-US" sz="1200" b="1" dirty="0">
+                <a:solidFill>
+                  <a:schemeClr val="accent2"/>
+                </a:solidFill>
+              </a:rPr>
+              <a:t>D3</a:t>
+            </a:r>
+            <a:endParaRPr lang="en-US" sz="1200" dirty="0"/>
+          </a:p>
+        </p:txBody>
+      </p:sp>
+      <p:sp>
+        <p:nvSpPr>
+          <p:cNvPr id="13" name="Text 11"/>
+          <p:cNvSpPr txBox="1"/>
+          <p:nvPr/>
+        </p:nvSpPr>
+        <p:spPr>
+          <a:xfrm>
+            <a:off x="3922776" y="1572768"/>
+            <a:ext cx="1280160" cy="347472"/>
+          </a:xfrm>
+          <a:prstGeom prst="rect">
+            <a:avLst/>
+          </a:prstGeom>
+          <a:noFill/>
+          <a:ln/>
+        </p:spPr>
+        <p:txBody>
+          <a:bodyPr wrap="square" lIns="0" tIns="0" rIns="0" bIns="0" rtlCol="0" anchor="t"/>
+          <a:lstStyle/>
+          <a:p>
+            <a:pPr indent="0" marL="0">
               <a:lnSpc>
                 <a:spcPts val="2000"/>
               </a:lnSpc>
@@ -3912,10 +4620,10 @@
             <a:r>
               <a:rPr lang="en-US" sz="1600" b="1" dirty="0">
                 <a:solidFill>
-                  <a:schemeClr val="tx2"/>
-                </a:solidFill>
-              </a:rPr>
-              <a:t>入住前測</a:t>
+                  <a:schemeClr val="bg1"/>
+                </a:solidFill>
+              </a:rPr>
+              <a:t>辟穀</a:t>
             </a:r>
             <a:endParaRPr lang="en-US" sz="1600" dirty="0"/>
           </a:p>
@@ -3923,14 +4631,14 @@
       </p:sp>
       <p:sp>
         <p:nvSpPr>
-          <p:cNvPr id="7" name="Text 3"/>
+          <p:cNvPr id="14" name="Text 12"/>
           <p:cNvSpPr txBox="1"/>
           <p:nvPr/>
         </p:nvSpPr>
         <p:spPr>
           <a:xfrm>
-            <a:off x="548640" y="2560320"/>
-            <a:ext cx="1691640" cy="777240"/>
+            <a:off x="3922776" y="1984248"/>
+            <a:ext cx="1307592" cy="822960"/>
           </a:xfrm>
           <a:prstGeom prst="rect">
             <a:avLst/>
@@ -3951,10 +4659,10 @@
             <a:r>
               <a:rPr lang="en-US" sz="1200" dirty="0">
                 <a:solidFill>
-                  <a:schemeClr val="tx1"/>
-                </a:solidFill>
-              </a:rPr>
-              <a:t>血壓、血糖、體組成、睡眠問卷、九大體質判定</a:t>
+                  <a:schemeClr val="accent4"/>
+                </a:solidFill>
+              </a:rPr>
+              <a:t>草本藥飲、清湯；服氣吐納、靜坐</a:t>
             </a:r>
             <a:endParaRPr lang="en-US" sz="1200" dirty="0"/>
           </a:p>
@@ -3962,17 +4670,19 @@
       </p:sp>
       <p:sp>
         <p:nvSpPr>
-          <p:cNvPr id="8" name="配對組合 circle"/>
+          <p:cNvPr id="15" name="Bigu D4"/>
           <p:cNvSpPr/>
           <p:nvPr/>
         </p:nvSpPr>
         <p:spPr>
           <a:xfrm>
-            <a:off x="3108960" y="1234440"/>
-            <a:ext cx="777240" cy="777240"/>
-          </a:xfrm>
-          <a:prstGeom prst="ellipse">
-            <a:avLst/>
+            <a:off x="5449824" y="1188720"/>
+            <a:ext cx="1554480" cy="1691640"/>
+          </a:xfrm>
+          <a:prstGeom prst="roundRect">
+            <a:avLst>
+              <a:gd name="adj" fmla="val 4706"/>
+            </a:avLst>
           </a:prstGeom>
           <a:solidFill>
             <a:srgbClr val="2F4A3A"/>
@@ -3985,64 +4695,353 @@
           </a:ln>
         </p:spPr>
       </p:sp>
+      <p:sp>
+        <p:nvSpPr>
+          <p:cNvPr id="16" name="Text 14"/>
+          <p:cNvSpPr txBox="1"/>
+          <p:nvPr/>
+        </p:nvSpPr>
+        <p:spPr>
+          <a:xfrm>
+            <a:off x="5586984" y="1298448"/>
+            <a:ext cx="1280160" cy="274320"/>
+          </a:xfrm>
+          <a:prstGeom prst="rect">
+            <a:avLst/>
+          </a:prstGeom>
+          <a:noFill/>
+          <a:ln/>
+        </p:spPr>
+        <p:txBody>
+          <a:bodyPr wrap="square" lIns="0" tIns="0" rIns="0" bIns="0" rtlCol="0" anchor="t"/>
+          <a:lstStyle/>
+          <a:p>
+            <a:pPr indent="0" marL="0">
+              <a:lnSpc>
+                <a:spcPts val="1500"/>
+              </a:lnSpc>
+              <a:buNone/>
+            </a:pPr>
+            <a:r>
+              <a:rPr lang="en-US" sz="1200" b="1" dirty="0">
+                <a:solidFill>
+                  <a:schemeClr val="accent2"/>
+                </a:solidFill>
+              </a:rPr>
+              <a:t>D4</a:t>
+            </a:r>
+            <a:endParaRPr lang="en-US" sz="1200" dirty="0"/>
+          </a:p>
+        </p:txBody>
+      </p:sp>
+      <p:sp>
+        <p:nvSpPr>
+          <p:cNvPr id="17" name="Text 15"/>
+          <p:cNvSpPr txBox="1"/>
+          <p:nvPr/>
+        </p:nvSpPr>
+        <p:spPr>
+          <a:xfrm>
+            <a:off x="5586984" y="1572768"/>
+            <a:ext cx="1280160" cy="347472"/>
+          </a:xfrm>
+          <a:prstGeom prst="rect">
+            <a:avLst/>
+          </a:prstGeom>
+          <a:noFill/>
+          <a:ln/>
+        </p:spPr>
+        <p:txBody>
+          <a:bodyPr wrap="square" lIns="0" tIns="0" rIns="0" bIns="0" rtlCol="0" anchor="t"/>
+          <a:lstStyle/>
+          <a:p>
+            <a:pPr indent="0" marL="0">
+              <a:lnSpc>
+                <a:spcPts val="2000"/>
+              </a:lnSpc>
+              <a:buNone/>
+            </a:pPr>
+            <a:r>
+              <a:rPr lang="en-US" sz="1600" b="1" dirty="0">
+                <a:solidFill>
+                  <a:schemeClr val="bg1"/>
+                </a:solidFill>
+              </a:rPr>
+              <a:t>辟穀</a:t>
+            </a:r>
+            <a:endParaRPr lang="en-US" sz="1600" dirty="0"/>
+          </a:p>
+        </p:txBody>
+      </p:sp>
+      <p:sp>
+        <p:nvSpPr>
+          <p:cNvPr id="18" name="Text 16"/>
+          <p:cNvSpPr txBox="1"/>
+          <p:nvPr/>
+        </p:nvSpPr>
+        <p:spPr>
+          <a:xfrm>
+            <a:off x="5586984" y="1984248"/>
+            <a:ext cx="1307592" cy="822960"/>
+          </a:xfrm>
+          <a:prstGeom prst="rect">
+            <a:avLst/>
+          </a:prstGeom>
+          <a:noFill/>
+          <a:ln/>
+        </p:spPr>
+        <p:txBody>
+          <a:bodyPr wrap="square" lIns="0" tIns="0" rIns="0" bIns="0" rtlCol="0" anchor="t"/>
+          <a:lstStyle/>
+          <a:p>
+            <a:pPr indent="0" marL="0">
+              <a:lnSpc>
+                <a:spcPts val="1500"/>
+              </a:lnSpc>
+              <a:buNone/>
+            </a:pPr>
+            <a:r>
+              <a:rPr lang="en-US" sz="1200" dirty="0">
+                <a:solidFill>
+                  <a:schemeClr val="accent4"/>
+                </a:solidFill>
+              </a:rPr>
+              <a:t>延續辟穀，搭配溫和活動與充足休息</a:t>
+            </a:r>
+            <a:endParaRPr lang="en-US" sz="1200" dirty="0"/>
+          </a:p>
+        </p:txBody>
+      </p:sp>
+      <p:sp>
+        <p:nvSpPr>
+          <p:cNvPr id="19" name="Bigu D5"/>
+          <p:cNvSpPr/>
+          <p:nvPr/>
+        </p:nvSpPr>
+        <p:spPr>
+          <a:xfrm>
+            <a:off x="7114032" y="1188720"/>
+            <a:ext cx="1554480" cy="1691640"/>
+          </a:xfrm>
+          <a:prstGeom prst="roundRect">
+            <a:avLst>
+              <a:gd name="adj" fmla="val 4706"/>
+            </a:avLst>
+          </a:prstGeom>
+          <a:solidFill>
+            <a:srgbClr val="EEF3EC"/>
+          </a:solidFill>
+          <a:ln w="12700">
+            <a:solidFill>
+              <a:srgbClr val="EEF3EC"/>
+            </a:solidFill>
+            <a:prstDash val="solid"/>
+          </a:ln>
+        </p:spPr>
+      </p:sp>
+      <p:sp>
+        <p:nvSpPr>
+          <p:cNvPr id="20" name="Text 18"/>
+          <p:cNvSpPr txBox="1"/>
+          <p:nvPr/>
+        </p:nvSpPr>
+        <p:spPr>
+          <a:xfrm>
+            <a:off x="7251192" y="1298448"/>
+            <a:ext cx="1280160" cy="274320"/>
+          </a:xfrm>
+          <a:prstGeom prst="rect">
+            <a:avLst/>
+          </a:prstGeom>
+          <a:noFill/>
+          <a:ln/>
+        </p:spPr>
+        <p:txBody>
+          <a:bodyPr wrap="square" lIns="0" tIns="0" rIns="0" bIns="0" rtlCol="0" anchor="t"/>
+          <a:lstStyle/>
+          <a:p>
+            <a:pPr indent="0" marL="0">
+              <a:lnSpc>
+                <a:spcPts val="1500"/>
+              </a:lnSpc>
+              <a:buNone/>
+            </a:pPr>
+            <a:r>
+              <a:rPr lang="en-US" sz="1200" b="1" dirty="0">
+                <a:solidFill>
+                  <a:schemeClr val="accent3"/>
+                </a:solidFill>
+              </a:rPr>
+              <a:t>D5</a:t>
+            </a:r>
+            <a:endParaRPr lang="en-US" sz="1200" dirty="0"/>
+          </a:p>
+        </p:txBody>
+      </p:sp>
+      <p:sp>
+        <p:nvSpPr>
+          <p:cNvPr id="21" name="Text 19"/>
+          <p:cNvSpPr txBox="1"/>
+          <p:nvPr/>
+        </p:nvSpPr>
+        <p:spPr>
+          <a:xfrm>
+            <a:off x="7251192" y="1572768"/>
+            <a:ext cx="1280160" cy="347472"/>
+          </a:xfrm>
+          <a:prstGeom prst="rect">
+            <a:avLst/>
+          </a:prstGeom>
+          <a:noFill/>
+          <a:ln/>
+        </p:spPr>
+        <p:txBody>
+          <a:bodyPr wrap="square" lIns="0" tIns="0" rIns="0" bIns="0" rtlCol="0" anchor="t"/>
+          <a:lstStyle/>
+          <a:p>
+            <a:pPr indent="0" marL="0">
+              <a:lnSpc>
+                <a:spcPts val="2000"/>
+              </a:lnSpc>
+              <a:buNone/>
+            </a:pPr>
+            <a:r>
+              <a:rPr lang="en-US" sz="1600" b="1" dirty="0">
+                <a:solidFill>
+                  <a:schemeClr val="tx2"/>
+                </a:solidFill>
+              </a:rPr>
+              <a:t>復食</a:t>
+            </a:r>
+            <a:endParaRPr lang="en-US" sz="1600" dirty="0"/>
+          </a:p>
+        </p:txBody>
+      </p:sp>
+      <p:sp>
+        <p:nvSpPr>
+          <p:cNvPr id="22" name="Text 20"/>
+          <p:cNvSpPr txBox="1"/>
+          <p:nvPr/>
+        </p:nvSpPr>
+        <p:spPr>
+          <a:xfrm>
+            <a:off x="7251192" y="1984248"/>
+            <a:ext cx="1307592" cy="822960"/>
+          </a:xfrm>
+          <a:prstGeom prst="rect">
+            <a:avLst/>
+          </a:prstGeom>
+          <a:noFill/>
+          <a:ln/>
+        </p:spPr>
+        <p:txBody>
+          <a:bodyPr wrap="square" lIns="0" tIns="0" rIns="0" bIns="0" rtlCol="0" anchor="t"/>
+          <a:lstStyle/>
+          <a:p>
+            <a:pPr indent="0" marL="0">
+              <a:lnSpc>
+                <a:spcPts val="1500"/>
+              </a:lnSpc>
+              <a:buNone/>
+            </a:pPr>
+            <a:r>
+              <a:rPr lang="en-US" sz="1200" dirty="0">
+                <a:solidFill>
+                  <a:schemeClr val="tx1"/>
+                </a:solidFill>
+              </a:rPr>
+              <a:t>米湯、粥品漸進復食；退房後測</a:t>
+            </a:r>
+            <a:endParaRPr lang="en-US" sz="1200" dirty="0"/>
+          </a:p>
+        </p:txBody>
+      </p:sp>
+      <p:sp>
+        <p:nvSpPr>
+          <p:cNvPr id="23" name="依前測分級"/>
+          <p:cNvSpPr/>
+          <p:nvPr/>
+        </p:nvSpPr>
+        <p:spPr>
+          <a:xfrm>
+            <a:off x="457200" y="3063240"/>
+            <a:ext cx="4023360" cy="1371600"/>
+          </a:xfrm>
+          <a:prstGeom prst="roundRect">
+            <a:avLst>
+              <a:gd name="adj" fmla="val 5333"/>
+            </a:avLst>
+          </a:prstGeom>
+          <a:solidFill>
+            <a:srgbClr val="EEF3EC"/>
+          </a:solidFill>
+          <a:ln w="12700">
+            <a:solidFill>
+              <a:srgbClr val="EEF3EC"/>
+            </a:solidFill>
+            <a:prstDash val="solid"/>
+          </a:ln>
+        </p:spPr>
+      </p:sp>
+      <p:sp>
+        <p:nvSpPr>
+          <p:cNvPr id="24" name="依前測分級 circle"/>
+          <p:cNvSpPr/>
+          <p:nvPr/>
+        </p:nvSpPr>
+        <p:spPr>
+          <a:xfrm>
+            <a:off x="685800" y="3246120"/>
+            <a:ext cx="548640" cy="548640"/>
+          </a:xfrm>
+          <a:prstGeom prst="ellipse">
+            <a:avLst/>
+          </a:prstGeom>
+          <a:solidFill>
+            <a:srgbClr val="C07A4F"/>
+          </a:solidFill>
+          <a:ln w="12700">
+            <a:solidFill>
+              <a:srgbClr val="C07A4F"/>
+            </a:solidFill>
+            <a:prstDash val="solid"/>
+          </a:ln>
+        </p:spPr>
+      </p:sp>
       <p:pic>
         <p:nvPicPr>
-          <p:cNvPr id="9" name="配對組合 icon" descr="配對組合">    </p:cNvPr>
+          <p:cNvPr id="25" name="依前測分級 icon" descr="依前測分級">    </p:cNvPr>
           <p:cNvPicPr>
             <a:picLocks noChangeAspect="1"/>
           </p:cNvPicPr>
           <p:nvPr/>
         </p:nvPicPr>
         <p:blipFill>
-          <a:blip r:embed="rId3"/>
+          <a:blip r:embed="rId1"/>
           <a:stretch>
             <a:fillRect/>
           </a:stretch>
         </p:blipFill>
         <p:spPr>
           <a:xfrm>
-            <a:off x="3303270" y="1428750"/>
-            <a:ext cx="388620" cy="388620"/>
+            <a:off x="822960" y="3383280"/>
+            <a:ext cx="274320" cy="274320"/>
           </a:xfrm>
           <a:prstGeom prst="rect">
             <a:avLst/>
           </a:prstGeom>
         </p:spPr>
       </p:pic>
-      <p:pic>
-        <p:nvPicPr>
-          <p:cNvPr id="10" name="Arrow 2" descr="next">    </p:cNvPr>
-          <p:cNvPicPr>
-            <a:picLocks noChangeAspect="1"/>
-          </p:cNvPicPr>
-          <p:nvPr/>
-        </p:nvPicPr>
-        <p:blipFill>
-          <a:blip r:embed="rId4"/>
-          <a:stretch>
-            <a:fillRect/>
-          </a:stretch>
-        </p:blipFill>
-        <p:spPr>
-          <a:xfrm>
-            <a:off x="4251960" y="1463040"/>
-            <a:ext cx="320040" cy="320040"/>
-          </a:xfrm>
-          <a:prstGeom prst="rect">
-            <a:avLst/>
-          </a:prstGeom>
-        </p:spPr>
-      </p:pic>
-      <p:sp>
-        <p:nvSpPr>
-          <p:cNvPr id="11" name="Text 5"/>
+      <p:sp>
+        <p:nvSpPr>
+          <p:cNvPr id="26" name="Text 23"/>
           <p:cNvSpPr txBox="1"/>
           <p:nvPr/>
         </p:nvSpPr>
         <p:spPr>
           <a:xfrm>
-            <a:off x="2560320" y="2148840"/>
-            <a:ext cx="1874520" cy="365760"/>
+            <a:off x="1417320" y="3246120"/>
+            <a:ext cx="2834640" cy="320040"/>
           </a:xfrm>
           <a:prstGeom prst="rect">
             <a:avLst/>
@@ -4054,34 +5053,34 @@
           <a:bodyPr wrap="square" lIns="0" tIns="0" rIns="0" bIns="0" rtlCol="0" anchor="t"/>
           <a:lstStyle/>
           <a:p>
-            <a:pPr algn="ctr" indent="0" marL="0">
-              <a:lnSpc>
-                <a:spcPts val="2000"/>
-              </a:lnSpc>
-              <a:buNone/>
-            </a:pPr>
-            <a:r>
-              <a:rPr lang="en-US" sz="1600" b="1" dirty="0">
+            <a:pPr indent="0" marL="0">
+              <a:lnSpc>
+                <a:spcPts val="1900"/>
+              </a:lnSpc>
+              <a:buNone/>
+            </a:pPr>
+            <a:r>
+              <a:rPr lang="en-US" sz="1500" b="1" dirty="0">
                 <a:solidFill>
                   <a:schemeClr val="tx2"/>
                 </a:solidFill>
               </a:rPr>
-              <a:t>配對組合</a:t>
-            </a:r>
-            <a:endParaRPr lang="en-US" sz="1600" dirty="0"/>
-          </a:p>
-        </p:txBody>
-      </p:sp>
-      <p:sp>
-        <p:nvSpPr>
-          <p:cNvPr id="12" name="Text 6"/>
+              <a:t>依前測分級</a:t>
+            </a:r>
+            <a:endParaRPr lang="en-US" sz="1500" dirty="0"/>
+          </a:p>
+        </p:txBody>
+      </p:sp>
+      <p:sp>
+        <p:nvSpPr>
+          <p:cNvPr id="27" name="Text 24"/>
           <p:cNvSpPr txBox="1"/>
           <p:nvPr/>
         </p:nvSpPr>
         <p:spPr>
           <a:xfrm>
-            <a:off x="2651760" y="2560320"/>
-            <a:ext cx="1691640" cy="777240"/>
+            <a:off x="1417320" y="3611880"/>
+            <a:ext cx="2880360" cy="731520"/>
           </a:xfrm>
           <a:prstGeom prst="rect">
             <a:avLst/>
@@ -4105,7 +5104,7 @@
                   <a:schemeClr val="tx1"/>
                 </a:solidFill>
               </a:rPr>
-              <a:t>依評估結果，從十大模組配對個人化療程</a:t>
+              <a:t>全辟穀／半辟穀／輕食調理三級；糖尿病、慢性病服藥者以半辟穀或輕食調理為主</a:t>
             </a:r>
             <a:endParaRPr lang="en-US" sz="1200" dirty="0"/>
           </a:p>
@@ -4113,14 +5112,41 @@
       </p:sp>
       <p:sp>
         <p:nvSpPr>
-          <p:cNvPr id="13" name="五日療程 circle"/>
+          <p:cNvPr id="28" name="辟穀期間陪伴"/>
           <p:cNvSpPr/>
           <p:nvPr/>
         </p:nvSpPr>
         <p:spPr>
           <a:xfrm>
-            <a:off x="5212080" y="1234440"/>
-            <a:ext cx="777240" cy="777240"/>
+            <a:off x="4663440" y="3063240"/>
+            <a:ext cx="4023360" cy="1371600"/>
+          </a:xfrm>
+          <a:prstGeom prst="roundRect">
+            <a:avLst>
+              <a:gd name="adj" fmla="val 5333"/>
+            </a:avLst>
+          </a:prstGeom>
+          <a:solidFill>
+            <a:srgbClr val="EEF3EC"/>
+          </a:solidFill>
+          <a:ln w="12700">
+            <a:solidFill>
+              <a:srgbClr val="EEF3EC"/>
+            </a:solidFill>
+            <a:prstDash val="solid"/>
+          </a:ln>
+        </p:spPr>
+      </p:sp>
+      <p:sp>
+        <p:nvSpPr>
+          <p:cNvPr id="29" name="辟穀期間陪伴 circle"/>
+          <p:cNvSpPr/>
+          <p:nvPr/>
+        </p:nvSpPr>
+        <p:spPr>
+          <a:xfrm>
+            <a:off x="4892040" y="3246120"/>
+            <a:ext cx="548640" cy="548640"/>
           </a:xfrm>
           <a:prstGeom prst="ellipse">
             <a:avLst/>
@@ -4138,62 +5164,38 @@
       </p:sp>
       <p:pic>
         <p:nvPicPr>
-          <p:cNvPr id="14" name="五日療程 icon" descr="五日療程">    </p:cNvPr>
+          <p:cNvPr id="30" name="辟穀期間陪伴 icon" descr="辟穀期間陪伴">    </p:cNvPr>
           <p:cNvPicPr>
             <a:picLocks noChangeAspect="1"/>
           </p:cNvPicPr>
           <p:nvPr/>
         </p:nvPicPr>
         <p:blipFill>
-          <a:blip r:embed="rId5"/>
+          <a:blip r:embed="rId2"/>
           <a:stretch>
             <a:fillRect/>
           </a:stretch>
         </p:blipFill>
         <p:spPr>
           <a:xfrm>
-            <a:off x="5406390" y="1428750"/>
-            <a:ext cx="388620" cy="388620"/>
+            <a:off x="5029200" y="3383280"/>
+            <a:ext cx="274320" cy="274320"/>
           </a:xfrm>
           <a:prstGeom prst="rect">
             <a:avLst/>
           </a:prstGeom>
         </p:spPr>
       </p:pic>
-      <p:pic>
-        <p:nvPicPr>
-          <p:cNvPr id="15" name="Arrow 3" descr="next">    </p:cNvPr>
-          <p:cNvPicPr>
-            <a:picLocks noChangeAspect="1"/>
-          </p:cNvPicPr>
-          <p:nvPr/>
-        </p:nvPicPr>
-        <p:blipFill>
-          <a:blip r:embed="rId6"/>
-          <a:stretch>
-            <a:fillRect/>
-          </a:stretch>
-        </p:blipFill>
-        <p:spPr>
-          <a:xfrm>
-            <a:off x="6355080" y="1463040"/>
-            <a:ext cx="320040" cy="320040"/>
-          </a:xfrm>
-          <a:prstGeom prst="rect">
-            <a:avLst/>
-          </a:prstGeom>
-        </p:spPr>
-      </p:pic>
-      <p:sp>
-        <p:nvSpPr>
-          <p:cNvPr id="16" name="Text 8"/>
+      <p:sp>
+        <p:nvSpPr>
+          <p:cNvPr id="31" name="Text 27"/>
           <p:cNvSpPr txBox="1"/>
           <p:nvPr/>
         </p:nvSpPr>
         <p:spPr>
           <a:xfrm>
-            <a:off x="4663440" y="2148840"/>
-            <a:ext cx="1874520" cy="365760"/>
+            <a:off x="5623560" y="3246120"/>
+            <a:ext cx="2834640" cy="320040"/>
           </a:xfrm>
           <a:prstGeom prst="rect">
             <a:avLst/>
@@ -4205,34 +5207,34 @@
           <a:bodyPr wrap="square" lIns="0" tIns="0" rIns="0" bIns="0" rtlCol="0" anchor="t"/>
           <a:lstStyle/>
           <a:p>
-            <a:pPr algn="ctr" indent="0" marL="0">
-              <a:lnSpc>
-                <a:spcPts val="2000"/>
-              </a:lnSpc>
-              <a:buNone/>
-            </a:pPr>
-            <a:r>
-              <a:rPr lang="en-US" sz="1600" b="1" dirty="0">
+            <a:pPr indent="0" marL="0">
+              <a:lnSpc>
+                <a:spcPts val="1900"/>
+              </a:lnSpc>
+              <a:buNone/>
+            </a:pPr>
+            <a:r>
+              <a:rPr lang="en-US" sz="1500" b="1" dirty="0">
                 <a:solidFill>
                   <a:schemeClr val="tx2"/>
                 </a:solidFill>
               </a:rPr>
-              <a:t>五日療程</a:t>
-            </a:r>
-            <a:endParaRPr lang="en-US" sz="1600" dirty="0"/>
-          </a:p>
-        </p:txBody>
-      </p:sp>
-      <p:sp>
-        <p:nvSpPr>
-          <p:cNvPr id="17" name="Text 9"/>
+              <a:t>辟穀期間陪伴</a:t>
+            </a:r>
+            <a:endParaRPr lang="en-US" sz="1500" dirty="0"/>
+          </a:p>
+        </p:txBody>
+      </p:sp>
+      <p:sp>
+        <p:nvSpPr>
+          <p:cNvPr id="32" name="Text 28"/>
           <p:cNvSpPr txBox="1"/>
           <p:nvPr/>
         </p:nvSpPr>
         <p:spPr>
           <a:xfrm>
-            <a:off x="4754880" y="2560320"/>
-            <a:ext cx="1691640" cy="777240"/>
+            <a:off x="5623560" y="3611880"/>
+            <a:ext cx="2880360" cy="731520"/>
           </a:xfrm>
           <a:prstGeom prst="rect">
             <a:avLst/>
@@ -4256,241 +5258,9 @@
                   <a:schemeClr val="tx1"/>
                 </a:solidFill>
               </a:rPr>
-              <a:t>評估 → 放鬆 → 調理 → 整合 → 返家</a:t>
+              <a:t>服氣吐納、靜坐冥想、溫和伸展、草本藥飲，團隊每日關照身體狀況</a:t>
             </a:r>
             <a:endParaRPr lang="en-US" sz="1200" dirty="0"/>
-          </a:p>
-        </p:txBody>
-      </p:sp>
-      <p:sp>
-        <p:nvSpPr>
-          <p:cNvPr id="18" name="退房後測 circle"/>
-          <p:cNvSpPr/>
-          <p:nvPr/>
-        </p:nvSpPr>
-        <p:spPr>
-          <a:xfrm>
-            <a:off x="7315200" y="1234440"/>
-            <a:ext cx="777240" cy="777240"/>
-          </a:xfrm>
-          <a:prstGeom prst="ellipse">
-            <a:avLst/>
-          </a:prstGeom>
-          <a:solidFill>
-            <a:srgbClr val="C07A4F"/>
-          </a:solidFill>
-          <a:ln w="12700">
-            <a:solidFill>
-              <a:srgbClr val="C07A4F"/>
-            </a:solidFill>
-            <a:prstDash val="solid"/>
-          </a:ln>
-        </p:spPr>
-      </p:sp>
-      <p:pic>
-        <p:nvPicPr>
-          <p:cNvPr id="19" name="退房後測 icon" descr="退房後測">    </p:cNvPr>
-          <p:cNvPicPr>
-            <a:picLocks noChangeAspect="1"/>
-          </p:cNvPicPr>
-          <p:nvPr/>
-        </p:nvPicPr>
-        <p:blipFill>
-          <a:blip r:embed="rId7"/>
-          <a:stretch>
-            <a:fillRect/>
-          </a:stretch>
-        </p:blipFill>
-        <p:spPr>
-          <a:xfrm>
-            <a:off x="7509510" y="1428750"/>
-            <a:ext cx="388620" cy="388620"/>
-          </a:xfrm>
-          <a:prstGeom prst="rect">
-            <a:avLst/>
-          </a:prstGeom>
-        </p:spPr>
-      </p:pic>
-      <p:sp>
-        <p:nvSpPr>
-          <p:cNvPr id="20" name="Text 11"/>
-          <p:cNvSpPr txBox="1"/>
-          <p:nvPr/>
-        </p:nvSpPr>
-        <p:spPr>
-          <a:xfrm>
-            <a:off x="6766560" y="2148840"/>
-            <a:ext cx="1874520" cy="365760"/>
-          </a:xfrm>
-          <a:prstGeom prst="rect">
-            <a:avLst/>
-          </a:prstGeom>
-          <a:noFill/>
-          <a:ln/>
-        </p:spPr>
-        <p:txBody>
-          <a:bodyPr wrap="square" lIns="0" tIns="0" rIns="0" bIns="0" rtlCol="0" anchor="t"/>
-          <a:lstStyle/>
-          <a:p>
-            <a:pPr algn="ctr" indent="0" marL="0">
-              <a:lnSpc>
-                <a:spcPts val="2000"/>
-              </a:lnSpc>
-              <a:buNone/>
-            </a:pPr>
-            <a:r>
-              <a:rPr lang="en-US" sz="1600" b="1" dirty="0">
-                <a:solidFill>
-                  <a:schemeClr val="tx2"/>
-                </a:solidFill>
-              </a:rPr>
-              <a:t>退房後測</a:t>
-            </a:r>
-            <a:endParaRPr lang="en-US" sz="1600" dirty="0"/>
-          </a:p>
-        </p:txBody>
-      </p:sp>
-      <p:sp>
-        <p:nvSpPr>
-          <p:cNvPr id="21" name="Text 12"/>
-          <p:cNvSpPr txBox="1"/>
-          <p:nvPr/>
-        </p:nvSpPr>
-        <p:spPr>
-          <a:xfrm>
-            <a:off x="6858000" y="2560320"/>
-            <a:ext cx="1691640" cy="777240"/>
-          </a:xfrm>
-          <a:prstGeom prst="rect">
-            <a:avLst/>
-          </a:prstGeom>
-          <a:noFill/>
-          <a:ln/>
-        </p:spPr>
-        <p:txBody>
-          <a:bodyPr wrap="square" lIns="0" tIns="0" rIns="0" bIns="0" rtlCol="0" anchor="t"/>
-          <a:lstStyle/>
-          <a:p>
-            <a:pPr indent="0" marL="0">
-              <a:lnSpc>
-                <a:spcPts val="1500"/>
-              </a:lnSpc>
-              <a:buNone/>
-            </a:pPr>
-            <a:r>
-              <a:rPr lang="en-US" sz="1200" dirty="0">
-                <a:solidFill>
-                  <a:schemeClr val="tx1"/>
-                </a:solidFill>
-              </a:rPr>
-              <a:t>退房前再測一次，與前測對照</a:t>
-            </a:r>
-            <a:endParaRPr lang="en-US" sz="1200" dirty="0"/>
-          </a:p>
-        </p:txBody>
-      </p:sp>
-      <p:sp>
-        <p:nvSpPr>
-          <p:cNvPr id="22" name="Report callout"/>
-          <p:cNvSpPr/>
-          <p:nvPr/>
-        </p:nvSpPr>
-        <p:spPr>
-          <a:xfrm>
-            <a:off x="457200" y="3520440"/>
-            <a:ext cx="8229600" cy="914400"/>
-          </a:xfrm>
-          <a:prstGeom prst="roundRect">
-            <a:avLst>
-              <a:gd name="adj" fmla="val 8000"/>
-            </a:avLst>
-          </a:prstGeom>
-          <a:solidFill>
-            <a:srgbClr val="2F4A3A"/>
-          </a:solidFill>
-          <a:ln w="12700">
-            <a:solidFill>
-              <a:srgbClr val="2F4A3A"/>
-            </a:solidFill>
-            <a:prstDash val="solid"/>
-          </a:ln>
-        </p:spPr>
-      </p:sp>
-      <p:sp>
-        <p:nvSpPr>
-          <p:cNvPr id="23" name="Text 14"/>
-          <p:cNvSpPr txBox="1"/>
-          <p:nvPr/>
-        </p:nvSpPr>
-        <p:spPr>
-          <a:xfrm>
-            <a:off x="731520" y="3520440"/>
-            <a:ext cx="2377440" cy="914400"/>
-          </a:xfrm>
-          <a:prstGeom prst="rect">
-            <a:avLst/>
-          </a:prstGeom>
-          <a:noFill/>
-          <a:ln/>
-        </p:spPr>
-        <p:txBody>
-          <a:bodyPr wrap="square" lIns="0" tIns="0" rIns="0" bIns="0" rtlCol="0" anchor="ctr"/>
-          <a:lstStyle/>
-          <a:p>
-            <a:pPr indent="0" marL="0">
-              <a:lnSpc>
-                <a:spcPts val="2500"/>
-              </a:lnSpc>
-              <a:buNone/>
-            </a:pPr>
-            <a:r>
-              <a:rPr lang="en-US" sz="2000" b="1" dirty="0">
-                <a:solidFill>
-                  <a:schemeClr val="bg1"/>
-                </a:solidFill>
-              </a:rPr>
-              <a:t>「五日健康報告」</a:t>
-            </a:r>
-            <a:endParaRPr lang="en-US" sz="2000" dirty="0"/>
-          </a:p>
-        </p:txBody>
-      </p:sp>
-      <p:sp>
-        <p:nvSpPr>
-          <p:cNvPr id="24" name="Text 15"/>
-          <p:cNvSpPr txBox="1"/>
-          <p:nvPr/>
-        </p:nvSpPr>
-        <p:spPr>
-          <a:xfrm>
-            <a:off x="3200400" y="3520440"/>
-            <a:ext cx="5303520" cy="914400"/>
-          </a:xfrm>
-          <a:prstGeom prst="rect">
-            <a:avLst/>
-          </a:prstGeom>
-          <a:noFill/>
-          <a:ln/>
-        </p:spPr>
-        <p:txBody>
-          <a:bodyPr wrap="square" lIns="0" tIns="0" rIns="0" bIns="0" rtlCol="0" anchor="ctr"/>
-          <a:lstStyle/>
-          <a:p>
-            <a:pPr indent="0" marL="0">
-              <a:lnSpc>
-                <a:spcPts val="1800"/>
-              </a:lnSpc>
-              <a:buNone/>
-            </a:pPr>
-            <a:r>
-              <a:rPr lang="en-US" sz="1400" dirty="0">
-                <a:solidFill>
-                  <a:schemeClr val="accent4"/>
-                </a:solidFill>
-              </a:rPr>
-              <a:t>前後測對照，讓學員看見五天的變化——是口碑與回購的關鍵。</a:t>
-            </a:r>
-            <a:endParaRPr lang="en-US" sz="1400" dirty="0"/>
           </a:p>
         </p:txBody>
       </p:sp>
@@ -4599,6 +5369,802 @@
                   <a:schemeClr val="tx2"/>
                 </a:solidFill>
               </a:rPr>
+              <a:t>個人化方式：前測 → 後測 → 五日健康報告</a:t>
+            </a:r>
+            <a:endParaRPr lang="en-US" sz="2800" dirty="0"/>
+          </a:p>
+        </p:txBody>
+      </p:sp>
+      <p:sp>
+        <p:nvSpPr>
+          <p:cNvPr id="3" name="入住前測 circle"/>
+          <p:cNvSpPr/>
+          <p:nvPr/>
+        </p:nvSpPr>
+        <p:spPr>
+          <a:xfrm>
+            <a:off x="1005840" y="1234440"/>
+            <a:ext cx="777240" cy="777240"/>
+          </a:xfrm>
+          <a:prstGeom prst="ellipse">
+            <a:avLst/>
+          </a:prstGeom>
+          <a:solidFill>
+            <a:srgbClr val="2F4A3A"/>
+          </a:solidFill>
+          <a:ln w="12700">
+            <a:solidFill>
+              <a:srgbClr val="2F4A3A"/>
+            </a:solidFill>
+            <a:prstDash val="solid"/>
+          </a:ln>
+        </p:spPr>
+      </p:sp>
+      <p:pic>
+        <p:nvPicPr>
+          <p:cNvPr id="4" name="入住前測 icon" descr="入住前測">    </p:cNvPr>
+          <p:cNvPicPr>
+            <a:picLocks noChangeAspect="1"/>
+          </p:cNvPicPr>
+          <p:nvPr/>
+        </p:nvPicPr>
+        <p:blipFill>
+          <a:blip r:embed="rId1"/>
+          <a:stretch>
+            <a:fillRect/>
+          </a:stretch>
+        </p:blipFill>
+        <p:spPr>
+          <a:xfrm>
+            <a:off x="1200150" y="1428750"/>
+            <a:ext cx="388620" cy="388620"/>
+          </a:xfrm>
+          <a:prstGeom prst="rect">
+            <a:avLst/>
+          </a:prstGeom>
+        </p:spPr>
+      </p:pic>
+      <p:pic>
+        <p:nvPicPr>
+          <p:cNvPr id="5" name="Arrow 1" descr="next">    </p:cNvPr>
+          <p:cNvPicPr>
+            <a:picLocks noChangeAspect="1"/>
+          </p:cNvPicPr>
+          <p:nvPr/>
+        </p:nvPicPr>
+        <p:blipFill>
+          <a:blip r:embed="rId2"/>
+          <a:stretch>
+            <a:fillRect/>
+          </a:stretch>
+        </p:blipFill>
+        <p:spPr>
+          <a:xfrm>
+            <a:off x="2148840" y="1463040"/>
+            <a:ext cx="320040" cy="320040"/>
+          </a:xfrm>
+          <a:prstGeom prst="rect">
+            <a:avLst/>
+          </a:prstGeom>
+        </p:spPr>
+      </p:pic>
+      <p:sp>
+        <p:nvSpPr>
+          <p:cNvPr id="6" name="Text 2"/>
+          <p:cNvSpPr txBox="1"/>
+          <p:nvPr/>
+        </p:nvSpPr>
+        <p:spPr>
+          <a:xfrm>
+            <a:off x="457200" y="2148840"/>
+            <a:ext cx="1874520" cy="365760"/>
+          </a:xfrm>
+          <a:prstGeom prst="rect">
+            <a:avLst/>
+          </a:prstGeom>
+          <a:noFill/>
+          <a:ln/>
+        </p:spPr>
+        <p:txBody>
+          <a:bodyPr wrap="square" lIns="0" tIns="0" rIns="0" bIns="0" rtlCol="0" anchor="t"/>
+          <a:lstStyle/>
+          <a:p>
+            <a:pPr algn="ctr" indent="0" marL="0">
+              <a:lnSpc>
+                <a:spcPts val="2000"/>
+              </a:lnSpc>
+              <a:buNone/>
+            </a:pPr>
+            <a:r>
+              <a:rPr lang="en-US" sz="1600" b="1" dirty="0">
+                <a:solidFill>
+                  <a:schemeClr val="tx2"/>
+                </a:solidFill>
+              </a:rPr>
+              <a:t>入住前測</a:t>
+            </a:r>
+            <a:endParaRPr lang="en-US" sz="1600" dirty="0"/>
+          </a:p>
+        </p:txBody>
+      </p:sp>
+      <p:sp>
+        <p:nvSpPr>
+          <p:cNvPr id="7" name="Text 3"/>
+          <p:cNvSpPr txBox="1"/>
+          <p:nvPr/>
+        </p:nvSpPr>
+        <p:spPr>
+          <a:xfrm>
+            <a:off x="548640" y="2560320"/>
+            <a:ext cx="1691640" cy="777240"/>
+          </a:xfrm>
+          <a:prstGeom prst="rect">
+            <a:avLst/>
+          </a:prstGeom>
+          <a:noFill/>
+          <a:ln/>
+        </p:spPr>
+        <p:txBody>
+          <a:bodyPr wrap="square" lIns="0" tIns="0" rIns="0" bIns="0" rtlCol="0" anchor="t"/>
+          <a:lstStyle/>
+          <a:p>
+            <a:pPr indent="0" marL="0">
+              <a:lnSpc>
+                <a:spcPts val="1500"/>
+              </a:lnSpc>
+              <a:buNone/>
+            </a:pPr>
+            <a:r>
+              <a:rPr lang="en-US" sz="1200" dirty="0">
+                <a:solidFill>
+                  <a:schemeClr val="tx1"/>
+                </a:solidFill>
+              </a:rPr>
+              <a:t>血壓、血糖、體組成、睡眠問卷、九大體質判定</a:t>
+            </a:r>
+            <a:endParaRPr lang="en-US" sz="1200" dirty="0"/>
+          </a:p>
+        </p:txBody>
+      </p:sp>
+      <p:sp>
+        <p:nvSpPr>
+          <p:cNvPr id="8" name="配對組合 circle"/>
+          <p:cNvSpPr/>
+          <p:nvPr/>
+        </p:nvSpPr>
+        <p:spPr>
+          <a:xfrm>
+            <a:off x="3108960" y="1234440"/>
+            <a:ext cx="777240" cy="777240"/>
+          </a:xfrm>
+          <a:prstGeom prst="ellipse">
+            <a:avLst/>
+          </a:prstGeom>
+          <a:solidFill>
+            <a:srgbClr val="2F4A3A"/>
+          </a:solidFill>
+          <a:ln w="12700">
+            <a:solidFill>
+              <a:srgbClr val="2F4A3A"/>
+            </a:solidFill>
+            <a:prstDash val="solid"/>
+          </a:ln>
+        </p:spPr>
+      </p:sp>
+      <p:pic>
+        <p:nvPicPr>
+          <p:cNvPr id="9" name="配對組合 icon" descr="配對組合">    </p:cNvPr>
+          <p:cNvPicPr>
+            <a:picLocks noChangeAspect="1"/>
+          </p:cNvPicPr>
+          <p:nvPr/>
+        </p:nvPicPr>
+        <p:blipFill>
+          <a:blip r:embed="rId3"/>
+          <a:stretch>
+            <a:fillRect/>
+          </a:stretch>
+        </p:blipFill>
+        <p:spPr>
+          <a:xfrm>
+            <a:off x="3303270" y="1428750"/>
+            <a:ext cx="388620" cy="388620"/>
+          </a:xfrm>
+          <a:prstGeom prst="rect">
+            <a:avLst/>
+          </a:prstGeom>
+        </p:spPr>
+      </p:pic>
+      <p:pic>
+        <p:nvPicPr>
+          <p:cNvPr id="10" name="Arrow 2" descr="next">    </p:cNvPr>
+          <p:cNvPicPr>
+            <a:picLocks noChangeAspect="1"/>
+          </p:cNvPicPr>
+          <p:nvPr/>
+        </p:nvPicPr>
+        <p:blipFill>
+          <a:blip r:embed="rId4"/>
+          <a:stretch>
+            <a:fillRect/>
+          </a:stretch>
+        </p:blipFill>
+        <p:spPr>
+          <a:xfrm>
+            <a:off x="4251960" y="1463040"/>
+            <a:ext cx="320040" cy="320040"/>
+          </a:xfrm>
+          <a:prstGeom prst="rect">
+            <a:avLst/>
+          </a:prstGeom>
+        </p:spPr>
+      </p:pic>
+      <p:sp>
+        <p:nvSpPr>
+          <p:cNvPr id="11" name="Text 5"/>
+          <p:cNvSpPr txBox="1"/>
+          <p:nvPr/>
+        </p:nvSpPr>
+        <p:spPr>
+          <a:xfrm>
+            <a:off x="2560320" y="2148840"/>
+            <a:ext cx="1874520" cy="365760"/>
+          </a:xfrm>
+          <a:prstGeom prst="rect">
+            <a:avLst/>
+          </a:prstGeom>
+          <a:noFill/>
+          <a:ln/>
+        </p:spPr>
+        <p:txBody>
+          <a:bodyPr wrap="square" lIns="0" tIns="0" rIns="0" bIns="0" rtlCol="0" anchor="t"/>
+          <a:lstStyle/>
+          <a:p>
+            <a:pPr algn="ctr" indent="0" marL="0">
+              <a:lnSpc>
+                <a:spcPts val="2000"/>
+              </a:lnSpc>
+              <a:buNone/>
+            </a:pPr>
+            <a:r>
+              <a:rPr lang="en-US" sz="1600" b="1" dirty="0">
+                <a:solidFill>
+                  <a:schemeClr val="tx2"/>
+                </a:solidFill>
+              </a:rPr>
+              <a:t>配對組合</a:t>
+            </a:r>
+            <a:endParaRPr lang="en-US" sz="1600" dirty="0"/>
+          </a:p>
+        </p:txBody>
+      </p:sp>
+      <p:sp>
+        <p:nvSpPr>
+          <p:cNvPr id="12" name="Text 6"/>
+          <p:cNvSpPr txBox="1"/>
+          <p:nvPr/>
+        </p:nvSpPr>
+        <p:spPr>
+          <a:xfrm>
+            <a:off x="2651760" y="2560320"/>
+            <a:ext cx="1691640" cy="777240"/>
+          </a:xfrm>
+          <a:prstGeom prst="rect">
+            <a:avLst/>
+          </a:prstGeom>
+          <a:noFill/>
+          <a:ln/>
+        </p:spPr>
+        <p:txBody>
+          <a:bodyPr wrap="square" lIns="0" tIns="0" rIns="0" bIns="0" rtlCol="0" anchor="t"/>
+          <a:lstStyle/>
+          <a:p>
+            <a:pPr indent="0" marL="0">
+              <a:lnSpc>
+                <a:spcPts val="1500"/>
+              </a:lnSpc>
+              <a:buNone/>
+            </a:pPr>
+            <a:r>
+              <a:rPr lang="en-US" sz="1200" dirty="0">
+                <a:solidFill>
+                  <a:schemeClr val="tx1"/>
+                </a:solidFill>
+              </a:rPr>
+              <a:t>依評估結果，從十大模組配對個人化療程</a:t>
+            </a:r>
+            <a:endParaRPr lang="en-US" sz="1200" dirty="0"/>
+          </a:p>
+        </p:txBody>
+      </p:sp>
+      <p:sp>
+        <p:nvSpPr>
+          <p:cNvPr id="13" name="五日療程 circle"/>
+          <p:cNvSpPr/>
+          <p:nvPr/>
+        </p:nvSpPr>
+        <p:spPr>
+          <a:xfrm>
+            <a:off x="5212080" y="1234440"/>
+            <a:ext cx="777240" cy="777240"/>
+          </a:xfrm>
+          <a:prstGeom prst="ellipse">
+            <a:avLst/>
+          </a:prstGeom>
+          <a:solidFill>
+            <a:srgbClr val="2F4A3A"/>
+          </a:solidFill>
+          <a:ln w="12700">
+            <a:solidFill>
+              <a:srgbClr val="2F4A3A"/>
+            </a:solidFill>
+            <a:prstDash val="solid"/>
+          </a:ln>
+        </p:spPr>
+      </p:sp>
+      <p:pic>
+        <p:nvPicPr>
+          <p:cNvPr id="14" name="五日療程 icon" descr="五日療程">    </p:cNvPr>
+          <p:cNvPicPr>
+            <a:picLocks noChangeAspect="1"/>
+          </p:cNvPicPr>
+          <p:nvPr/>
+        </p:nvPicPr>
+        <p:blipFill>
+          <a:blip r:embed="rId5"/>
+          <a:stretch>
+            <a:fillRect/>
+          </a:stretch>
+        </p:blipFill>
+        <p:spPr>
+          <a:xfrm>
+            <a:off x="5406390" y="1428750"/>
+            <a:ext cx="388620" cy="388620"/>
+          </a:xfrm>
+          <a:prstGeom prst="rect">
+            <a:avLst/>
+          </a:prstGeom>
+        </p:spPr>
+      </p:pic>
+      <p:pic>
+        <p:nvPicPr>
+          <p:cNvPr id="15" name="Arrow 3" descr="next">    </p:cNvPr>
+          <p:cNvPicPr>
+            <a:picLocks noChangeAspect="1"/>
+          </p:cNvPicPr>
+          <p:nvPr/>
+        </p:nvPicPr>
+        <p:blipFill>
+          <a:blip r:embed="rId6"/>
+          <a:stretch>
+            <a:fillRect/>
+          </a:stretch>
+        </p:blipFill>
+        <p:spPr>
+          <a:xfrm>
+            <a:off x="6355080" y="1463040"/>
+            <a:ext cx="320040" cy="320040"/>
+          </a:xfrm>
+          <a:prstGeom prst="rect">
+            <a:avLst/>
+          </a:prstGeom>
+        </p:spPr>
+      </p:pic>
+      <p:sp>
+        <p:nvSpPr>
+          <p:cNvPr id="16" name="Text 8"/>
+          <p:cNvSpPr txBox="1"/>
+          <p:nvPr/>
+        </p:nvSpPr>
+        <p:spPr>
+          <a:xfrm>
+            <a:off x="4663440" y="2148840"/>
+            <a:ext cx="1874520" cy="365760"/>
+          </a:xfrm>
+          <a:prstGeom prst="rect">
+            <a:avLst/>
+          </a:prstGeom>
+          <a:noFill/>
+          <a:ln/>
+        </p:spPr>
+        <p:txBody>
+          <a:bodyPr wrap="square" lIns="0" tIns="0" rIns="0" bIns="0" rtlCol="0" anchor="t"/>
+          <a:lstStyle/>
+          <a:p>
+            <a:pPr algn="ctr" indent="0" marL="0">
+              <a:lnSpc>
+                <a:spcPts val="2000"/>
+              </a:lnSpc>
+              <a:buNone/>
+            </a:pPr>
+            <a:r>
+              <a:rPr lang="en-US" sz="1600" b="1" dirty="0">
+                <a:solidFill>
+                  <a:schemeClr val="tx2"/>
+                </a:solidFill>
+              </a:rPr>
+              <a:t>五日療程</a:t>
+            </a:r>
+            <a:endParaRPr lang="en-US" sz="1600" dirty="0"/>
+          </a:p>
+        </p:txBody>
+      </p:sp>
+      <p:sp>
+        <p:nvSpPr>
+          <p:cNvPr id="17" name="Text 9"/>
+          <p:cNvSpPr txBox="1"/>
+          <p:nvPr/>
+        </p:nvSpPr>
+        <p:spPr>
+          <a:xfrm>
+            <a:off x="4754880" y="2560320"/>
+            <a:ext cx="1691640" cy="777240"/>
+          </a:xfrm>
+          <a:prstGeom prst="rect">
+            <a:avLst/>
+          </a:prstGeom>
+          <a:noFill/>
+          <a:ln/>
+        </p:spPr>
+        <p:txBody>
+          <a:bodyPr wrap="square" lIns="0" tIns="0" rIns="0" bIns="0" rtlCol="0" anchor="t"/>
+          <a:lstStyle/>
+          <a:p>
+            <a:pPr indent="0" marL="0">
+              <a:lnSpc>
+                <a:spcPts val="1500"/>
+              </a:lnSpc>
+              <a:buNone/>
+            </a:pPr>
+            <a:r>
+              <a:rPr lang="en-US" sz="1200" dirty="0">
+                <a:solidFill>
+                  <a:schemeClr val="tx1"/>
+                </a:solidFill>
+              </a:rPr>
+              <a:t>評估 → 放鬆 → 調理 → 整合 → 返家</a:t>
+            </a:r>
+            <a:endParaRPr lang="en-US" sz="1200" dirty="0"/>
+          </a:p>
+        </p:txBody>
+      </p:sp>
+      <p:sp>
+        <p:nvSpPr>
+          <p:cNvPr id="18" name="退房後測 circle"/>
+          <p:cNvSpPr/>
+          <p:nvPr/>
+        </p:nvSpPr>
+        <p:spPr>
+          <a:xfrm>
+            <a:off x="7315200" y="1234440"/>
+            <a:ext cx="777240" cy="777240"/>
+          </a:xfrm>
+          <a:prstGeom prst="ellipse">
+            <a:avLst/>
+          </a:prstGeom>
+          <a:solidFill>
+            <a:srgbClr val="C07A4F"/>
+          </a:solidFill>
+          <a:ln w="12700">
+            <a:solidFill>
+              <a:srgbClr val="C07A4F"/>
+            </a:solidFill>
+            <a:prstDash val="solid"/>
+          </a:ln>
+        </p:spPr>
+      </p:sp>
+      <p:pic>
+        <p:nvPicPr>
+          <p:cNvPr id="19" name="退房後測 icon" descr="退房後測">    </p:cNvPr>
+          <p:cNvPicPr>
+            <a:picLocks noChangeAspect="1"/>
+          </p:cNvPicPr>
+          <p:nvPr/>
+        </p:nvPicPr>
+        <p:blipFill>
+          <a:blip r:embed="rId7"/>
+          <a:stretch>
+            <a:fillRect/>
+          </a:stretch>
+        </p:blipFill>
+        <p:spPr>
+          <a:xfrm>
+            <a:off x="7509510" y="1428750"/>
+            <a:ext cx="388620" cy="388620"/>
+          </a:xfrm>
+          <a:prstGeom prst="rect">
+            <a:avLst/>
+          </a:prstGeom>
+        </p:spPr>
+      </p:pic>
+      <p:sp>
+        <p:nvSpPr>
+          <p:cNvPr id="20" name="Text 11"/>
+          <p:cNvSpPr txBox="1"/>
+          <p:nvPr/>
+        </p:nvSpPr>
+        <p:spPr>
+          <a:xfrm>
+            <a:off x="6766560" y="2148840"/>
+            <a:ext cx="1874520" cy="365760"/>
+          </a:xfrm>
+          <a:prstGeom prst="rect">
+            <a:avLst/>
+          </a:prstGeom>
+          <a:noFill/>
+          <a:ln/>
+        </p:spPr>
+        <p:txBody>
+          <a:bodyPr wrap="square" lIns="0" tIns="0" rIns="0" bIns="0" rtlCol="0" anchor="t"/>
+          <a:lstStyle/>
+          <a:p>
+            <a:pPr algn="ctr" indent="0" marL="0">
+              <a:lnSpc>
+                <a:spcPts val="2000"/>
+              </a:lnSpc>
+              <a:buNone/>
+            </a:pPr>
+            <a:r>
+              <a:rPr lang="en-US" sz="1600" b="1" dirty="0">
+                <a:solidFill>
+                  <a:schemeClr val="tx2"/>
+                </a:solidFill>
+              </a:rPr>
+              <a:t>退房後測</a:t>
+            </a:r>
+            <a:endParaRPr lang="en-US" sz="1600" dirty="0"/>
+          </a:p>
+        </p:txBody>
+      </p:sp>
+      <p:sp>
+        <p:nvSpPr>
+          <p:cNvPr id="21" name="Text 12"/>
+          <p:cNvSpPr txBox="1"/>
+          <p:nvPr/>
+        </p:nvSpPr>
+        <p:spPr>
+          <a:xfrm>
+            <a:off x="6858000" y="2560320"/>
+            <a:ext cx="1691640" cy="777240"/>
+          </a:xfrm>
+          <a:prstGeom prst="rect">
+            <a:avLst/>
+          </a:prstGeom>
+          <a:noFill/>
+          <a:ln/>
+        </p:spPr>
+        <p:txBody>
+          <a:bodyPr wrap="square" lIns="0" tIns="0" rIns="0" bIns="0" rtlCol="0" anchor="t"/>
+          <a:lstStyle/>
+          <a:p>
+            <a:pPr indent="0" marL="0">
+              <a:lnSpc>
+                <a:spcPts val="1500"/>
+              </a:lnSpc>
+              <a:buNone/>
+            </a:pPr>
+            <a:r>
+              <a:rPr lang="en-US" sz="1200" dirty="0">
+                <a:solidFill>
+                  <a:schemeClr val="tx1"/>
+                </a:solidFill>
+              </a:rPr>
+              <a:t>退房前再測一次，與前測對照</a:t>
+            </a:r>
+            <a:endParaRPr lang="en-US" sz="1200" dirty="0"/>
+          </a:p>
+        </p:txBody>
+      </p:sp>
+      <p:sp>
+        <p:nvSpPr>
+          <p:cNvPr id="22" name="Report callout"/>
+          <p:cNvSpPr/>
+          <p:nvPr/>
+        </p:nvSpPr>
+        <p:spPr>
+          <a:xfrm>
+            <a:off x="457200" y="3520440"/>
+            <a:ext cx="8229600" cy="914400"/>
+          </a:xfrm>
+          <a:prstGeom prst="roundRect">
+            <a:avLst>
+              <a:gd name="adj" fmla="val 8000"/>
+            </a:avLst>
+          </a:prstGeom>
+          <a:solidFill>
+            <a:srgbClr val="2F4A3A"/>
+          </a:solidFill>
+          <a:ln w="12700">
+            <a:solidFill>
+              <a:srgbClr val="2F4A3A"/>
+            </a:solidFill>
+            <a:prstDash val="solid"/>
+          </a:ln>
+        </p:spPr>
+      </p:sp>
+      <p:sp>
+        <p:nvSpPr>
+          <p:cNvPr id="23" name="Text 14"/>
+          <p:cNvSpPr txBox="1"/>
+          <p:nvPr/>
+        </p:nvSpPr>
+        <p:spPr>
+          <a:xfrm>
+            <a:off x="731520" y="3520440"/>
+            <a:ext cx="2377440" cy="914400"/>
+          </a:xfrm>
+          <a:prstGeom prst="rect">
+            <a:avLst/>
+          </a:prstGeom>
+          <a:noFill/>
+          <a:ln/>
+        </p:spPr>
+        <p:txBody>
+          <a:bodyPr wrap="square" lIns="0" tIns="0" rIns="0" bIns="0" rtlCol="0" anchor="ctr"/>
+          <a:lstStyle/>
+          <a:p>
+            <a:pPr indent="0" marL="0">
+              <a:lnSpc>
+                <a:spcPts val="2500"/>
+              </a:lnSpc>
+              <a:buNone/>
+            </a:pPr>
+            <a:r>
+              <a:rPr lang="en-US" sz="2000" b="1" dirty="0">
+                <a:solidFill>
+                  <a:schemeClr val="bg1"/>
+                </a:solidFill>
+              </a:rPr>
+              <a:t>「五日健康報告」</a:t>
+            </a:r>
+            <a:endParaRPr lang="en-US" sz="2000" dirty="0"/>
+          </a:p>
+        </p:txBody>
+      </p:sp>
+      <p:sp>
+        <p:nvSpPr>
+          <p:cNvPr id="24" name="Text 15"/>
+          <p:cNvSpPr txBox="1"/>
+          <p:nvPr/>
+        </p:nvSpPr>
+        <p:spPr>
+          <a:xfrm>
+            <a:off x="3200400" y="3520440"/>
+            <a:ext cx="5303520" cy="914400"/>
+          </a:xfrm>
+          <a:prstGeom prst="rect">
+            <a:avLst/>
+          </a:prstGeom>
+          <a:noFill/>
+          <a:ln/>
+        </p:spPr>
+        <p:txBody>
+          <a:bodyPr wrap="square" lIns="0" tIns="0" rIns="0" bIns="0" rtlCol="0" anchor="ctr"/>
+          <a:lstStyle/>
+          <a:p>
+            <a:pPr indent="0" marL="0">
+              <a:lnSpc>
+                <a:spcPts val="1800"/>
+              </a:lnSpc>
+              <a:buNone/>
+            </a:pPr>
+            <a:r>
+              <a:rPr lang="en-US" sz="1400" dirty="0">
+                <a:solidFill>
+                  <a:schemeClr val="accent4"/>
+                </a:solidFill>
+              </a:rPr>
+              <a:t>前後測對照，讓學員看見五天的變化——是口碑與回購的關鍵。</a:t>
+            </a:r>
+            <a:endParaRPr lang="en-US" sz="1400" dirty="0"/>
+          </a:p>
+        </p:txBody>
+      </p:sp>
+      <p:sp>
+        <p:nvSpPr>
+          <p:cNvPr id="25" name="Slide Number Placeholder 0"/>
+          <p:cNvSpPr>
+            <a:spLocks noGrp="1"/>
+          </p:cNvSpPr>
+          <p:nvPr>
+            <p:ph type="sldNum" sz="quarter" idx="4294967295"/>
+          </p:nvPr>
+        </p:nvSpPr>
+        <p:spPr>
+          <a:xfrm>
+            <a:off x="8229600" y="4754880"/>
+            <a:ext cx="457200" cy="274320"/>
+          </a:xfrm>
+          <a:prstGeom prst="rect">
+            <a:avLst/>
+          </a:prstGeom>
+          <a:extLst>
+            <a:ext uri="{C572A759-6A51-4108-AA02-DFA0A04FC94B}">
+              <ma14:wrappingTextBoxFlag xmlns:ma14="http://schemas.microsoft.com/office/mac/drawingml/2011/main" val="0"/>
+            </a:ext>
+          </a:extLst>
+        </p:spPr>
+        <p:txBody>
+          <a:bodyPr/>
+          <a:lstStyle>
+            <a:lvl1pPr>
+              <a:defRPr sz="1000">
+                <a:solidFill>
+                  <a:schemeClr val="accent5"/>
+                </a:solidFill>
+              </a:defRPr>
+            </a:lvl1pPr>
+          </a:lstStyle>
+          <a:p>
+            <a:pPr algn="r"/>
+            <a:fld id="{F7021451-1387-4CA6-816F-3879F97B5CBC}" type="slidenum">
+              <a:rPr b="0" lang="en-US"/>
+              <a:t>12</a:t>
+            </a:fld>
+            <a:endParaRPr lang="en-US"/>
+          </a:p>
+        </p:txBody>
+      </p:sp>
+    </p:spTree>
+  </p:cSld>
+  <p:clrMapOvr>
+    <a:masterClrMapping/>
+  </p:clrMapOvr>
+</p:sld>
+</file>
+
+<file path=ppt/slides/slide13.xml><?xml version="1.0" encoding="utf-8"?>
+<p:sld xmlns:a="http://schemas.openxmlformats.org/drawingml/2006/main" xmlns:r="http://schemas.openxmlformats.org/officeDocument/2006/relationships" xmlns:p="http://schemas.openxmlformats.org/presentationml/2006/main">
+  <p:cSld name="Slide 13">
+    <p:spTree>
+      <p:nvGrpSpPr>
+        <p:cNvPr id="1" name=""/>
+        <p:cNvGrpSpPr/>
+        <p:nvPr/>
+      </p:nvGrpSpPr>
+      <p:grpSpPr>
+        <a:xfrm>
+          <a:off x="0" y="0"/>
+          <a:ext cx="0" cy="0"/>
+          <a:chOff x="0" y="0"/>
+          <a:chExt cx="0" cy="0"/>
+        </a:xfrm>
+      </p:grpSpPr>
+      <p:sp>
+        <p:nvSpPr>
+          <p:cNvPr id="2" name="Text 0"/>
+          <p:cNvSpPr/>
+          <p:nvPr>
+            <p:ph idx="100" type="title" hasCustomPrompt="1"/>
+          </p:nvPr>
+        </p:nvSpPr>
+        <p:spPr>
+          <a:xfrm>
+            <a:off x="457200" y="274320"/>
+            <a:ext cx="8229600" cy="685800"/>
+          </a:xfrm>
+          <a:prstGeom prst="rect">
+            <a:avLst/>
+          </a:prstGeom>
+          <a:noFill/>
+          <a:ln/>
+        </p:spPr>
+        <p:txBody>
+          <a:bodyPr wrap="square" lIns="0" tIns="0" rIns="0" bIns="0" rtlCol="0" anchor="ctr"/>
+          <a:lstStyle/>
+          <a:p>
+            <a:pPr indent="0" marL="0">
+              <a:lnSpc>
+                <a:spcPts val="3400"/>
+              </a:lnSpc>
+              <a:buNone/>
+            </a:pPr>
+            <a:r>
+              <a:rPr lang="en-US" sz="2800" b="1" dirty="0">
+                <a:solidFill>
+                  <a:schemeClr val="tx2"/>
+                </a:solidFill>
+              </a:rPr>
               <a:t>5 天 4 夜行程</a:t>
             </a:r>
             <a:endParaRPr lang="en-US" sz="2800" dirty="0"/>
@@ -4607,7 +6173,7 @@
       </p:sp>
       <p:graphicFrame>
         <p:nvGraphicFramePr>
-          <p:cNvPr id="13" name="Table 0"/>
+          <p:cNvPr id="14" name="Table 0"/>
           <p:cNvGraphicFramePr>
             <a:graphicFrameLocks noGrp="1"/>
           </p:cNvGraphicFramePr>
@@ -4628,10 +6194,11 @@
             <a:tbl>
               <a:tblPr/>
               <a:tblGrid>
-                <a:gridCol w="1143000"/>
-                <a:gridCol w="1188720"/>
                 <a:gridCol w="1051560"/>
-                <a:gridCol w="2011680"/>
+                <a:gridCol w="1051560"/>
+                <a:gridCol w="914400"/>
+                <a:gridCol w="640080"/>
+                <a:gridCol w="1737360"/>
               </a:tblGrid>
               <a:tr h="530352">
                 <a:tc>
@@ -4643,14 +6210,14 @@
                         <a:buNone/>
                       </a:pPr>
                       <a:r>
-                        <a:rPr lang="en-US" sz="1300" b="1" dirty="0">
+                        <a:rPr lang="en-US" sz="1200" b="1" dirty="0">
                           <a:solidFill>
                             <a:schemeClr val="bg1"/>
                           </a:solidFill>
                         </a:rPr>
                         <a:t>天</a:t>
                       </a:r>
-                      <a:endParaRPr lang="en-US" sz="1300" dirty="0"/>
+                      <a:endParaRPr lang="en-US" sz="1200" dirty="0"/>
                     </a:p>
                   </a:txBody>
                   <a:tcPr marL="73152" marR="73152" marT="27432" marB="27432" anchor="ctr">
@@ -4704,14 +6271,14 @@
                         <a:buNone/>
                       </a:pPr>
                       <a:r>
-                        <a:rPr lang="en-US" sz="1300" b="1" dirty="0">
+                        <a:rPr lang="en-US" sz="1200" b="1" dirty="0">
                           <a:solidFill>
                             <a:schemeClr val="bg1"/>
                           </a:solidFill>
                         </a:rPr>
                         <a:t>主題</a:t>
                       </a:r>
-                      <a:endParaRPr lang="en-US" sz="1300" dirty="0"/>
+                      <a:endParaRPr lang="en-US" sz="1200" dirty="0"/>
                     </a:p>
                   </a:txBody>
                   <a:tcPr marL="73152" marR="73152" marT="27432" marB="27432" anchor="ctr">
@@ -4765,14 +6332,14 @@
                         <a:buNone/>
                       </a:pPr>
                       <a:r>
-                        <a:rPr lang="en-US" sz="1300" b="1" dirty="0">
+                        <a:rPr lang="en-US" sz="1200" b="1" dirty="0">
                           <a:solidFill>
                             <a:schemeClr val="bg1"/>
                           </a:solidFill>
                         </a:rPr>
                         <a:t>清晨 6:30</a:t>
                       </a:r>
-                      <a:endParaRPr lang="en-US" sz="1300" dirty="0"/>
+                      <a:endParaRPr lang="en-US" sz="1200" dirty="0"/>
                     </a:p>
                   </a:txBody>
                   <a:tcPr marL="73152" marR="73152" marT="27432" marB="27432" anchor="ctr">
@@ -4826,14 +6393,75 @@
                         <a:buNone/>
                       </a:pPr>
                       <a:r>
-                        <a:rPr lang="en-US" sz="1300" b="1" dirty="0">
+                        <a:rPr lang="en-US" sz="1200" b="1" dirty="0">
+                          <a:solidFill>
+                            <a:schemeClr val="bg1"/>
+                          </a:solidFill>
+                        </a:rPr>
+                        <a:t>飲食</a:t>
+                      </a:r>
+                      <a:endParaRPr lang="en-US" sz="1200" dirty="0"/>
+                    </a:p>
+                  </a:txBody>
+                  <a:tcPr marL="73152" marR="73152" marT="27432" marB="27432" anchor="ctr">
+                    <a:lnL w="9525" cap="flat" cmpd="sng" algn="ctr">
+                      <a:solidFill>
+                        <a:srgbClr val="D5DED2"/>
+                      </a:solidFill>
+                      <a:prstDash val="solid"/>
+                      <a:round/>
+                      <a:headEnd type="none" w="med" len="med"/>
+                      <a:tailEnd type="none" w="med" len="med"/>
+                    </a:lnL>
+                    <a:lnR w="9525" cap="flat" cmpd="sng" algn="ctr">
+                      <a:solidFill>
+                        <a:srgbClr val="D5DED2"/>
+                      </a:solidFill>
+                      <a:prstDash val="solid"/>
+                      <a:round/>
+                      <a:headEnd type="none" w="med" len="med"/>
+                      <a:tailEnd type="none" w="med" len="med"/>
+                    </a:lnR>
+                    <a:lnT w="9525" cap="flat" cmpd="sng" algn="ctr">
+                      <a:solidFill>
+                        <a:srgbClr val="D5DED2"/>
+                      </a:solidFill>
+                      <a:prstDash val="solid"/>
+                      <a:round/>
+                      <a:headEnd type="none" w="med" len="med"/>
+                      <a:tailEnd type="none" w="med" len="med"/>
+                    </a:lnT>
+                    <a:lnB w="9525" cap="flat" cmpd="sng" algn="ctr">
+                      <a:solidFill>
+                        <a:srgbClr val="D5DED2"/>
+                      </a:solidFill>
+                      <a:prstDash val="solid"/>
+                      <a:round/>
+                      <a:headEnd type="none" w="med" len="med"/>
+                      <a:tailEnd type="none" w="med" len="med"/>
+                    </a:lnB>
+                    <a:solidFill>
+                      <a:srgbClr val="2F4A3A"/>
+                    </a:solidFill>
+                  </a:tcPr>
+                </a:tc>
+                <a:tc>
+                  <a:txBody>
+                    <a:bodyPr/>
+                    <a:lstStyle/>
+                    <a:p>
+                      <a:pPr indent="0" marL="0">
+                        <a:buNone/>
+                      </a:pPr>
+                      <a:r>
+                        <a:rPr lang="en-US" sz="1200" b="1" dirty="0">
                           <a:solidFill>
                             <a:schemeClr val="bg1"/>
                           </a:solidFill>
                         </a:rPr>
                         <a:t>上午</a:t>
                       </a:r>
-                      <a:endParaRPr lang="en-US" sz="1300" dirty="0"/>
+                      <a:endParaRPr lang="en-US" sz="1200" dirty="0"/>
                     </a:p>
                   </a:txBody>
                   <a:tcPr marL="73152" marR="73152" marT="27432" marB="27432" anchor="ctr">
@@ -4889,14 +6517,14 @@
                         <a:buNone/>
                       </a:pPr>
                       <a:r>
-                        <a:rPr lang="en-US" sz="1300" dirty="0">
+                        <a:rPr lang="en-US" sz="1200" dirty="0">
                           <a:solidFill>
                             <a:schemeClr val="tx1"/>
                           </a:solidFill>
                         </a:rPr>
                         <a:t>D1（週一）</a:t>
                       </a:r>
-                      <a:endParaRPr lang="en-US" sz="1300" dirty="0"/>
+                      <a:endParaRPr lang="en-US" sz="1200" dirty="0"/>
                     </a:p>
                   </a:txBody>
                   <a:tcPr marL="73152" marR="73152" marT="27432" marB="27432" anchor="ctr">
@@ -4950,14 +6578,14 @@
                         <a:buNone/>
                       </a:pPr>
                       <a:r>
-                        <a:rPr lang="en-US" sz="1300" dirty="0">
+                        <a:rPr lang="en-US" sz="1200" dirty="0">
                           <a:solidFill>
                             <a:schemeClr val="tx1"/>
                           </a:solidFill>
                         </a:rPr>
                         <a:t>入住與評估</a:t>
                       </a:r>
-                      <a:endParaRPr lang="en-US" sz="1300" dirty="0"/>
+                      <a:endParaRPr lang="en-US" sz="1200" dirty="0"/>
                     </a:p>
                   </a:txBody>
                   <a:tcPr marL="73152" marR="73152" marT="27432" marB="27432" anchor="ctr">
@@ -5011,14 +6639,14 @@
                         <a:buNone/>
                       </a:pPr>
                       <a:r>
-                        <a:rPr lang="en-US" sz="1300" dirty="0">
+                        <a:rPr lang="en-US" sz="1200" dirty="0">
                           <a:solidFill>
                             <a:schemeClr val="tx1"/>
                           </a:solidFill>
                         </a:rPr>
                         <a:t>—</a:t>
                       </a:r>
-                      <a:endParaRPr lang="en-US" sz="1300" dirty="0"/>
+                      <a:endParaRPr lang="en-US" sz="1200" dirty="0"/>
                     </a:p>
                   </a:txBody>
                   <a:tcPr marL="73152" marR="73152" marT="27432" marB="27432" anchor="ctr">
@@ -5072,14 +6700,75 @@
                         <a:buNone/>
                       </a:pPr>
                       <a:r>
-                        <a:rPr lang="en-US" sz="1300" dirty="0">
+                        <a:rPr lang="en-US" sz="1200" dirty="0">
+                          <a:solidFill>
+                            <a:schemeClr val="tx1"/>
+                          </a:solidFill>
+                        </a:rPr>
+                        <a:t>常食</a:t>
+                      </a:r>
+                      <a:endParaRPr lang="en-US" sz="1200" dirty="0"/>
+                    </a:p>
+                  </a:txBody>
+                  <a:tcPr marL="73152" marR="73152" marT="27432" marB="27432" anchor="ctr">
+                    <a:lnL w="9525" cap="flat" cmpd="sng" algn="ctr">
+                      <a:solidFill>
+                        <a:srgbClr val="D5DED2"/>
+                      </a:solidFill>
+                      <a:prstDash val="solid"/>
+                      <a:round/>
+                      <a:headEnd type="none" w="med" len="med"/>
+                      <a:tailEnd type="none" w="med" len="med"/>
+                    </a:lnL>
+                    <a:lnR w="9525" cap="flat" cmpd="sng" algn="ctr">
+                      <a:solidFill>
+                        <a:srgbClr val="D5DED2"/>
+                      </a:solidFill>
+                      <a:prstDash val="solid"/>
+                      <a:round/>
+                      <a:headEnd type="none" w="med" len="med"/>
+                      <a:tailEnd type="none" w="med" len="med"/>
+                    </a:lnR>
+                    <a:lnT w="9525" cap="flat" cmpd="sng" algn="ctr">
+                      <a:solidFill>
+                        <a:srgbClr val="D5DED2"/>
+                      </a:solidFill>
+                      <a:prstDash val="solid"/>
+                      <a:round/>
+                      <a:headEnd type="none" w="med" len="med"/>
+                      <a:tailEnd type="none" w="med" len="med"/>
+                    </a:lnT>
+                    <a:lnB w="9525" cap="flat" cmpd="sng" algn="ctr">
+                      <a:solidFill>
+                        <a:srgbClr val="D5DED2"/>
+                      </a:solidFill>
+                      <a:prstDash val="solid"/>
+                      <a:round/>
+                      <a:headEnd type="none" w="med" len="med"/>
+                      <a:tailEnd type="none" w="med" len="med"/>
+                    </a:lnB>
+                    <a:solidFill>
+                      <a:srgbClr val="FFFFFF"/>
+                    </a:solidFill>
+                  </a:tcPr>
+                </a:tc>
+                <a:tc>
+                  <a:txBody>
+                    <a:bodyPr/>
+                    <a:lstStyle/>
+                    <a:p>
+                      <a:pPr indent="0" marL="0">
+                        <a:buNone/>
+                      </a:pPr>
+                      <a:r>
+                        <a:rPr lang="en-US" sz="1200" dirty="0">
                           <a:solidFill>
                             <a:schemeClr val="tx1"/>
                           </a:solidFill>
                         </a:rPr>
                         <a:t>11:00 報到、入住前測</a:t>
                       </a:r>
-                      <a:endParaRPr lang="en-US" sz="1300" dirty="0"/>
+                      <a:endParaRPr lang="en-US" sz="1200" dirty="0"/>
                     </a:p>
                   </a:txBody>
                   <a:tcPr marL="73152" marR="73152" marT="27432" marB="27432" anchor="ctr">
@@ -5135,14 +6824,14 @@
                         <a:buNone/>
                       </a:pPr>
                       <a:r>
-                        <a:rPr lang="en-US" sz="1300" dirty="0">
+                        <a:rPr lang="en-US" sz="1200" dirty="0">
                           <a:solidFill>
                             <a:schemeClr val="tx1"/>
                           </a:solidFill>
                         </a:rPr>
                         <a:t>D2（週二）</a:t>
                       </a:r>
-                      <a:endParaRPr lang="en-US" sz="1300" dirty="0"/>
+                      <a:endParaRPr lang="en-US" sz="1200" dirty="0"/>
                     </a:p>
                   </a:txBody>
                   <a:tcPr marL="73152" marR="73152" marT="27432" marB="27432" anchor="ctr">
@@ -5196,14 +6885,14 @@
                         <a:buNone/>
                       </a:pPr>
                       <a:r>
-                        <a:rPr lang="en-US" sz="1300" dirty="0">
+                        <a:rPr lang="en-US" sz="1200" dirty="0">
                           <a:solidFill>
                             <a:schemeClr val="tx1"/>
                           </a:solidFill>
                         </a:rPr>
                         <a:t>放下</a:t>
                       </a:r>
-                      <a:endParaRPr lang="en-US" sz="1300" dirty="0"/>
+                      <a:endParaRPr lang="en-US" sz="1200" dirty="0"/>
                     </a:p>
                   </a:txBody>
                   <a:tcPr marL="73152" marR="73152" marT="27432" marB="27432" anchor="ctr">
@@ -5257,14 +6946,14 @@
                         <a:buNone/>
                       </a:pPr>
                       <a:r>
-                        <a:rPr lang="en-US" sz="1300" dirty="0">
+                        <a:rPr lang="en-US" sz="1200" dirty="0">
                           <a:solidFill>
                             <a:schemeClr val="tx1"/>
                           </a:solidFill>
                         </a:rPr>
                         <a:t>太極拳</a:t>
                       </a:r>
-                      <a:endParaRPr lang="en-US" sz="1300" dirty="0"/>
+                      <a:endParaRPr lang="en-US" sz="1200" dirty="0"/>
                     </a:p>
                   </a:txBody>
                   <a:tcPr marL="73152" marR="73152" marT="27432" marB="27432" anchor="ctr">
@@ -5318,14 +7007,75 @@
                         <a:buNone/>
                       </a:pPr>
                       <a:r>
-                        <a:rPr lang="en-US" sz="1300" dirty="0">
+                        <a:rPr lang="en-US" sz="1200" dirty="0">
                           <a:solidFill>
                             <a:schemeClr val="tx1"/>
                           </a:solidFill>
                         </a:rPr>
-                        <a:t>海邊／森林步道</a:t>
+                        <a:t>減食</a:t>
                       </a:r>
-                      <a:endParaRPr lang="en-US" sz="1300" dirty="0"/>
+                      <a:endParaRPr lang="en-US" sz="1200" dirty="0"/>
+                    </a:p>
+                  </a:txBody>
+                  <a:tcPr marL="73152" marR="73152" marT="27432" marB="27432" anchor="ctr">
+                    <a:lnL w="9525" cap="flat" cmpd="sng" algn="ctr">
+                      <a:solidFill>
+                        <a:srgbClr val="D5DED2"/>
+                      </a:solidFill>
+                      <a:prstDash val="solid"/>
+                      <a:round/>
+                      <a:headEnd type="none" w="med" len="med"/>
+                      <a:tailEnd type="none" w="med" len="med"/>
+                    </a:lnL>
+                    <a:lnR w="9525" cap="flat" cmpd="sng" algn="ctr">
+                      <a:solidFill>
+                        <a:srgbClr val="D5DED2"/>
+                      </a:solidFill>
+                      <a:prstDash val="solid"/>
+                      <a:round/>
+                      <a:headEnd type="none" w="med" len="med"/>
+                      <a:tailEnd type="none" w="med" len="med"/>
+                    </a:lnR>
+                    <a:lnT w="9525" cap="flat" cmpd="sng" algn="ctr">
+                      <a:solidFill>
+                        <a:srgbClr val="D5DED2"/>
+                      </a:solidFill>
+                      <a:prstDash val="solid"/>
+                      <a:round/>
+                      <a:headEnd type="none" w="med" len="med"/>
+                      <a:tailEnd type="none" w="med" len="med"/>
+                    </a:lnT>
+                    <a:lnB w="9525" cap="flat" cmpd="sng" algn="ctr">
+                      <a:solidFill>
+                        <a:srgbClr val="D5DED2"/>
+                      </a:solidFill>
+                      <a:prstDash val="solid"/>
+                      <a:round/>
+                      <a:headEnd type="none" w="med" len="med"/>
+                      <a:tailEnd type="none" w="med" len="med"/>
+                    </a:lnB>
+                    <a:solidFill>
+                      <a:srgbClr val="EEF3EC"/>
+                    </a:solidFill>
+                  </a:tcPr>
+                </a:tc>
+                <a:tc>
+                  <a:txBody>
+                    <a:bodyPr/>
+                    <a:lstStyle/>
+                    <a:p>
+                      <a:pPr indent="0" marL="0">
+                        <a:buNone/>
+                      </a:pPr>
+                      <a:r>
+                        <a:rPr lang="en-US" sz="1200" dirty="0">
+                          <a:solidFill>
+                            <a:schemeClr val="tx1"/>
+                          </a:solidFill>
+                        </a:rPr>
+                        <a:t>山・海・湖步道</a:t>
+                      </a:r>
+                      <a:endParaRPr lang="en-US" sz="1200" dirty="0"/>
                     </a:p>
                   </a:txBody>
                   <a:tcPr marL="73152" marR="73152" marT="27432" marB="27432" anchor="ctr">
@@ -5381,14 +7131,14 @@
                         <a:buNone/>
                       </a:pPr>
                       <a:r>
-                        <a:rPr lang="en-US" sz="1300" dirty="0">
+                        <a:rPr lang="en-US" sz="1200" dirty="0">
                           <a:solidFill>
                             <a:schemeClr val="tx1"/>
                           </a:solidFill>
                         </a:rPr>
                         <a:t>D3（週三）</a:t>
                       </a:r>
-                      <a:endParaRPr lang="en-US" sz="1300" dirty="0"/>
+                      <a:endParaRPr lang="en-US" sz="1200" dirty="0"/>
                     </a:p>
                   </a:txBody>
                   <a:tcPr marL="73152" marR="73152" marT="27432" marB="27432" anchor="ctr">
@@ -5442,14 +7192,14 @@
                         <a:buNone/>
                       </a:pPr>
                       <a:r>
-                        <a:rPr lang="en-US" sz="1300" dirty="0">
+                        <a:rPr lang="en-US" sz="1200" dirty="0">
                           <a:solidFill>
                             <a:schemeClr val="tx1"/>
                           </a:solidFill>
                         </a:rPr>
                         <a:t>身體調理</a:t>
                       </a:r>
-                      <a:endParaRPr lang="en-US" sz="1300" dirty="0"/>
+                      <a:endParaRPr lang="en-US" sz="1200" dirty="0"/>
                     </a:p>
                   </a:txBody>
                   <a:tcPr marL="73152" marR="73152" marT="27432" marB="27432" anchor="ctr">
@@ -5503,14 +7253,14 @@
                         <a:buNone/>
                       </a:pPr>
                       <a:r>
-                        <a:rPr lang="en-US" sz="1300" dirty="0">
+                        <a:rPr lang="en-US" sz="1200" dirty="0">
                           <a:solidFill>
                             <a:schemeClr val="tx1"/>
                           </a:solidFill>
                         </a:rPr>
                         <a:t>八段錦</a:t>
                       </a:r>
-                      <a:endParaRPr lang="en-US" sz="1300" dirty="0"/>
+                      <a:endParaRPr lang="en-US" sz="1200" dirty="0"/>
                     </a:p>
                   </a:txBody>
                   <a:tcPr marL="73152" marR="73152" marT="27432" marB="27432" anchor="ctr">
@@ -5564,14 +7314,75 @@
                         <a:buNone/>
                       </a:pPr>
                       <a:r>
-                        <a:rPr lang="en-US" sz="1300" dirty="0">
+                        <a:rPr lang="en-US" sz="1200" dirty="0">
+                          <a:solidFill>
+                            <a:schemeClr val="tx1"/>
+                          </a:solidFill>
+                        </a:rPr>
+                        <a:t>辟穀</a:t>
+                      </a:r>
+                      <a:endParaRPr lang="en-US" sz="1200" dirty="0"/>
+                    </a:p>
+                  </a:txBody>
+                  <a:tcPr marL="73152" marR="73152" marT="27432" marB="27432" anchor="ctr">
+                    <a:lnL w="9525" cap="flat" cmpd="sng" algn="ctr">
+                      <a:solidFill>
+                        <a:srgbClr val="D5DED2"/>
+                      </a:solidFill>
+                      <a:prstDash val="solid"/>
+                      <a:round/>
+                      <a:headEnd type="none" w="med" len="med"/>
+                      <a:tailEnd type="none" w="med" len="med"/>
+                    </a:lnL>
+                    <a:lnR w="9525" cap="flat" cmpd="sng" algn="ctr">
+                      <a:solidFill>
+                        <a:srgbClr val="D5DED2"/>
+                      </a:solidFill>
+                      <a:prstDash val="solid"/>
+                      <a:round/>
+                      <a:headEnd type="none" w="med" len="med"/>
+                      <a:tailEnd type="none" w="med" len="med"/>
+                    </a:lnR>
+                    <a:lnT w="9525" cap="flat" cmpd="sng" algn="ctr">
+                      <a:solidFill>
+                        <a:srgbClr val="D5DED2"/>
+                      </a:solidFill>
+                      <a:prstDash val="solid"/>
+                      <a:round/>
+                      <a:headEnd type="none" w="med" len="med"/>
+                      <a:tailEnd type="none" w="med" len="med"/>
+                    </a:lnT>
+                    <a:lnB w="9525" cap="flat" cmpd="sng" algn="ctr">
+                      <a:solidFill>
+                        <a:srgbClr val="D5DED2"/>
+                      </a:solidFill>
+                      <a:prstDash val="solid"/>
+                      <a:round/>
+                      <a:headEnd type="none" w="med" len="med"/>
+                      <a:tailEnd type="none" w="med" len="med"/>
+                    </a:lnB>
+                    <a:solidFill>
+                      <a:srgbClr val="FFFFFF"/>
+                    </a:solidFill>
+                  </a:tcPr>
+                </a:tc>
+                <a:tc>
+                  <a:txBody>
+                    <a:bodyPr/>
+                    <a:lstStyle/>
+                    <a:p>
+                      <a:pPr indent="0" marL="0">
+                        <a:buNone/>
+                      </a:pPr>
+                      <a:r>
+                        <a:rPr lang="en-US" sz="1200" dirty="0">
                           <a:solidFill>
                             <a:schemeClr val="tx1"/>
                           </a:solidFill>
                         </a:rPr>
                         <a:t>藥膳講座、康復評估</a:t>
                       </a:r>
-                      <a:endParaRPr lang="en-US" sz="1300" dirty="0"/>
+                      <a:endParaRPr lang="en-US" sz="1200" dirty="0"/>
                     </a:p>
                   </a:txBody>
                   <a:tcPr marL="73152" marR="73152" marT="27432" marB="27432" anchor="ctr">
@@ -5627,14 +7438,14 @@
                         <a:buNone/>
                       </a:pPr>
                       <a:r>
-                        <a:rPr lang="en-US" sz="1300" dirty="0">
+                        <a:rPr lang="en-US" sz="1200" dirty="0">
                           <a:solidFill>
                             <a:schemeClr val="tx1"/>
                           </a:solidFill>
                         </a:rPr>
                         <a:t>D4（週四）</a:t>
                       </a:r>
-                      <a:endParaRPr lang="en-US" sz="1300" dirty="0"/>
+                      <a:endParaRPr lang="en-US" sz="1200" dirty="0"/>
                     </a:p>
                   </a:txBody>
                   <a:tcPr marL="73152" marR="73152" marT="27432" marB="27432" anchor="ctr">
@@ -5688,14 +7499,14 @@
                         <a:buNone/>
                       </a:pPr>
                       <a:r>
-                        <a:rPr lang="en-US" sz="1300" dirty="0">
+                        <a:rPr lang="en-US" sz="1200" dirty="0">
                           <a:solidFill>
                             <a:schemeClr val="tx1"/>
                           </a:solidFill>
                         </a:rPr>
                         <a:t>心靈與整合</a:t>
                       </a:r>
-                      <a:endParaRPr lang="en-US" sz="1300" dirty="0"/>
+                      <a:endParaRPr lang="en-US" sz="1200" dirty="0"/>
                     </a:p>
                   </a:txBody>
                   <a:tcPr marL="73152" marR="73152" marT="27432" marB="27432" anchor="ctr">
@@ -5749,14 +7560,14 @@
                         <a:buNone/>
                       </a:pPr>
                       <a:r>
-                        <a:rPr lang="en-US" sz="1300" dirty="0">
+                        <a:rPr lang="en-US" sz="1200" dirty="0">
                           <a:solidFill>
                             <a:schemeClr val="tx1"/>
                           </a:solidFill>
                         </a:rPr>
                         <a:t>正念冥想</a:t>
                       </a:r>
-                      <a:endParaRPr lang="en-US" sz="1300" dirty="0"/>
+                      <a:endParaRPr lang="en-US" sz="1200" dirty="0"/>
                     </a:p>
                   </a:txBody>
                   <a:tcPr marL="73152" marR="73152" marT="27432" marB="27432" anchor="ctr">
@@ -5810,14 +7621,75 @@
                         <a:buNone/>
                       </a:pPr>
                       <a:r>
-                        <a:rPr lang="en-US" sz="1300" dirty="0">
+                        <a:rPr lang="en-US" sz="1200" dirty="0">
+                          <a:solidFill>
+                            <a:schemeClr val="tx1"/>
+                          </a:solidFill>
+                        </a:rPr>
+                        <a:t>辟穀</a:t>
+                      </a:r>
+                      <a:endParaRPr lang="en-US" sz="1200" dirty="0"/>
+                    </a:p>
+                  </a:txBody>
+                  <a:tcPr marL="73152" marR="73152" marT="27432" marB="27432" anchor="ctr">
+                    <a:lnL w="9525" cap="flat" cmpd="sng" algn="ctr">
+                      <a:solidFill>
+                        <a:srgbClr val="D5DED2"/>
+                      </a:solidFill>
+                      <a:prstDash val="solid"/>
+                      <a:round/>
+                      <a:headEnd type="none" w="med" len="med"/>
+                      <a:tailEnd type="none" w="med" len="med"/>
+                    </a:lnL>
+                    <a:lnR w="9525" cap="flat" cmpd="sng" algn="ctr">
+                      <a:solidFill>
+                        <a:srgbClr val="D5DED2"/>
+                      </a:solidFill>
+                      <a:prstDash val="solid"/>
+                      <a:round/>
+                      <a:headEnd type="none" w="med" len="med"/>
+                      <a:tailEnd type="none" w="med" len="med"/>
+                    </a:lnR>
+                    <a:lnT w="9525" cap="flat" cmpd="sng" algn="ctr">
+                      <a:solidFill>
+                        <a:srgbClr val="D5DED2"/>
+                      </a:solidFill>
+                      <a:prstDash val="solid"/>
+                      <a:round/>
+                      <a:headEnd type="none" w="med" len="med"/>
+                      <a:tailEnd type="none" w="med" len="med"/>
+                    </a:lnT>
+                    <a:lnB w="9525" cap="flat" cmpd="sng" algn="ctr">
+                      <a:solidFill>
+                        <a:srgbClr val="D5DED2"/>
+                      </a:solidFill>
+                      <a:prstDash val="solid"/>
+                      <a:round/>
+                      <a:headEnd type="none" w="med" len="med"/>
+                      <a:tailEnd type="none" w="med" len="med"/>
+                    </a:lnB>
+                    <a:solidFill>
+                      <a:srgbClr val="EEF3EC"/>
+                    </a:solidFill>
+                  </a:tcPr>
+                </a:tc>
+                <a:tc>
+                  <a:txBody>
+                    <a:bodyPr/>
+                    <a:lstStyle/>
+                    <a:p>
+                      <a:pPr indent="0" marL="0">
+                        <a:buNone/>
+                      </a:pPr>
+                      <a:r>
+                        <a:rPr lang="en-US" sz="1200" dirty="0">
                           <a:solidFill>
                             <a:schemeClr val="tx1"/>
                           </a:solidFill>
                         </a:rPr>
                         <a:t>自然療癒長程</a:t>
                       </a:r>
-                      <a:endParaRPr lang="en-US" sz="1300" dirty="0"/>
+                      <a:endParaRPr lang="en-US" sz="1200" dirty="0"/>
                     </a:p>
                   </a:txBody>
                   <a:tcPr marL="73152" marR="73152" marT="27432" marB="27432" anchor="ctr">
@@ -5873,14 +7745,14 @@
                         <a:buNone/>
                       </a:pPr>
                       <a:r>
-                        <a:rPr lang="en-US" sz="1300" dirty="0">
+                        <a:rPr lang="en-US" sz="1200" dirty="0">
                           <a:solidFill>
                             <a:schemeClr val="tx1"/>
                           </a:solidFill>
                         </a:rPr>
                         <a:t>D5（週五）</a:t>
                       </a:r>
-                      <a:endParaRPr lang="en-US" sz="1300" dirty="0"/>
+                      <a:endParaRPr lang="en-US" sz="1200" dirty="0"/>
                     </a:p>
                   </a:txBody>
                   <a:tcPr marL="73152" marR="73152" marT="27432" marB="27432" anchor="ctr">
@@ -5934,14 +7806,14 @@
                         <a:buNone/>
                       </a:pPr>
                       <a:r>
-                        <a:rPr lang="en-US" sz="1300" dirty="0">
+                        <a:rPr lang="en-US" sz="1200" dirty="0">
                           <a:solidFill>
                             <a:schemeClr val="tx1"/>
                           </a:solidFill>
                         </a:rPr>
                         <a:t>返家</a:t>
                       </a:r>
-                      <a:endParaRPr lang="en-US" sz="1300" dirty="0"/>
+                      <a:endParaRPr lang="en-US" sz="1200" dirty="0"/>
                     </a:p>
                   </a:txBody>
                   <a:tcPr marL="73152" marR="73152" marT="27432" marB="27432" anchor="ctr">
@@ -5995,14 +7867,14 @@
                         <a:buNone/>
                       </a:pPr>
                       <a:r>
-                        <a:rPr lang="en-US" sz="1300" dirty="0">
+                        <a:rPr lang="en-US" sz="1200" dirty="0">
                           <a:solidFill>
                             <a:schemeClr val="tx1"/>
                           </a:solidFill>
                         </a:rPr>
                         <a:t>太極拳</a:t>
                       </a:r>
-                      <a:endParaRPr lang="en-US" sz="1300" dirty="0"/>
+                      <a:endParaRPr lang="en-US" sz="1200" dirty="0"/>
                     </a:p>
                   </a:txBody>
                   <a:tcPr marL="73152" marR="73152" marT="27432" marB="27432" anchor="ctr">
@@ -6056,14 +7928,75 @@
                         <a:buNone/>
                       </a:pPr>
                       <a:r>
-                        <a:rPr lang="en-US" sz="1300" dirty="0">
+                        <a:rPr lang="en-US" sz="1200" dirty="0">
+                          <a:solidFill>
+                            <a:schemeClr val="tx1"/>
+                          </a:solidFill>
+                        </a:rPr>
+                        <a:t>復食</a:t>
+                      </a:r>
+                      <a:endParaRPr lang="en-US" sz="1200" dirty="0"/>
+                    </a:p>
+                  </a:txBody>
+                  <a:tcPr marL="73152" marR="73152" marT="27432" marB="27432" anchor="ctr">
+                    <a:lnL w="9525" cap="flat" cmpd="sng" algn="ctr">
+                      <a:solidFill>
+                        <a:srgbClr val="D5DED2"/>
+                      </a:solidFill>
+                      <a:prstDash val="solid"/>
+                      <a:round/>
+                      <a:headEnd type="none" w="med" len="med"/>
+                      <a:tailEnd type="none" w="med" len="med"/>
+                    </a:lnL>
+                    <a:lnR w="9525" cap="flat" cmpd="sng" algn="ctr">
+                      <a:solidFill>
+                        <a:srgbClr val="D5DED2"/>
+                      </a:solidFill>
+                      <a:prstDash val="solid"/>
+                      <a:round/>
+                      <a:headEnd type="none" w="med" len="med"/>
+                      <a:tailEnd type="none" w="med" len="med"/>
+                    </a:lnR>
+                    <a:lnT w="9525" cap="flat" cmpd="sng" algn="ctr">
+                      <a:solidFill>
+                        <a:srgbClr val="D5DED2"/>
+                      </a:solidFill>
+                      <a:prstDash val="solid"/>
+                      <a:round/>
+                      <a:headEnd type="none" w="med" len="med"/>
+                      <a:tailEnd type="none" w="med" len="med"/>
+                    </a:lnT>
+                    <a:lnB w="9525" cap="flat" cmpd="sng" algn="ctr">
+                      <a:solidFill>
+                        <a:srgbClr val="D5DED2"/>
+                      </a:solidFill>
+                      <a:prstDash val="solid"/>
+                      <a:round/>
+                      <a:headEnd type="none" w="med" len="med"/>
+                      <a:tailEnd type="none" w="med" len="med"/>
+                    </a:lnB>
+                    <a:solidFill>
+                      <a:srgbClr val="FFFFFF"/>
+                    </a:solidFill>
+                  </a:tcPr>
+                </a:tc>
+                <a:tc>
+                  <a:txBody>
+                    <a:bodyPr/>
+                    <a:lstStyle/>
+                    <a:p>
+                      <a:pPr indent="0" marL="0">
+                        <a:buNone/>
+                      </a:pPr>
+                      <a:r>
+                        <a:rPr lang="en-US" sz="1200" dirty="0">
                           <a:solidFill>
                             <a:schemeClr val="tx1"/>
                           </a:solidFill>
                         </a:rPr>
                         <a:t>健康後測、五日報告</a:t>
                       </a:r>
-                      <a:endParaRPr lang="en-US" sz="1300" dirty="0"/>
+                      <a:endParaRPr lang="en-US" sz="1200" dirty="0"/>
                     </a:p>
                   </a:txBody>
                   <a:tcPr marL="73152" marR="73152" marT="27432" marB="27432" anchor="ctr">
@@ -6212,7 +8145,7 @@
                   <a:schemeClr val="tx1"/>
                 </a:solidFill>
               </a:rPr>
-              <a:t>晨操、三餐藥膳與睡前療癒；中間時段輪換模組</a:t>
+              <a:t>晨操、藥膳或辟穀飲品、睡前療癒；中間時段輪換模組</a:t>
             </a:r>
             <a:endParaRPr lang="en-US" sz="1300" dirty="0"/>
           </a:p>
@@ -6362,7 +8295,7 @@
             <a:pPr algn="r"/>
             <a:fld id="{F7021451-1387-4CA6-816F-3879F97B5CBC}" type="slidenum">
               <a:rPr b="0" lang="en-US"/>
-              <a:t>12</a:t>
+              <a:t>13</a:t>
             </a:fld>
             <a:endParaRPr lang="en-US"/>
           </a:p>
@@ -6376,9 +8309,9 @@
 </p:sld>
 </file>
 
-<file path=ppt/slides/slide13.xml><?xml version="1.0" encoding="utf-8"?>
+<file path=ppt/slides/slide14.xml><?xml version="1.0" encoding="utf-8"?>
 <p:sld xmlns:a="http://schemas.openxmlformats.org/drawingml/2006/main" xmlns:r="http://schemas.openxmlformats.org/officeDocument/2006/relationships" xmlns:p="http://schemas.openxmlformats.org/presentationml/2006/main">
-  <p:cSld name="Slide 13">
+  <p:cSld name="Slide 14">
     <p:spTree>
       <p:nvGrpSpPr>
         <p:cNvPr id="1" name=""/>
@@ -11478,7 +13411,7 @@
                             <a:schemeClr val="tx1"/>
                           </a:solidFill>
                         </a:rPr>
-                        <a:t>山居療癒／海居療癒</a:t>
+                        <a:t>十療・三境辟穀</a:t>
                       </a:r>
                       <a:endParaRPr lang="en-US" sz="1200" dirty="0"/>
                     </a:p>
@@ -11539,7 +13472,7 @@
                             <a:schemeClr val="tx1"/>
                           </a:solidFill>
                         </a:rPr>
-                        <a:t>依酒店地景切換</a:t>
+                        <a:t>山海湖地景＋辟穀</a:t>
                       </a:r>
                       <a:endParaRPr lang="en-US" sz="1200" dirty="0"/>
                     </a:p>
@@ -11600,7 +13533,7 @@
                             <a:schemeClr val="tx1"/>
                           </a:solidFill>
                         </a:rPr>
-                        <a:t>多酒店複製</a:t>
+                        <a:t>依地景多酒店複製</a:t>
                       </a:r>
                       <a:endParaRPr lang="en-US" sz="1200" dirty="0"/>
                     </a:p>
@@ -13159,7 +15092,7 @@
                   <a:schemeClr val="tx1"/>
                 </a:solidFill>
               </a:rPr>
-              <a:t>藥膳三餐、午後藥飲；三高、糖尿病等九大體質菜單</a:t>
+              <a:t>藥膳、午後藥飲、辟穀；三高等九大體質菜單</a:t>
             </a:r>
             <a:endParaRPr lang="en-US" sz="1100" dirty="0"/>
           </a:p>
